--- a/presentation/동작구_그늘막_최종발표.pptx
+++ b/presentation/동작구_그늘막_최종발표.pptx
@@ -17,6 +17,8 @@
     <p:sldId id="265" r:id="rId16"/>
     <p:sldId id="266" r:id="rId17"/>
     <p:sldId id="267" r:id="rId18"/>
+    <p:sldId id="268" r:id="rId19"/>
+    <p:sldId id="269" r:id="rId20"/>
   </p:sldIdLst>
   <p:sldSz cx="12191695" cy="6858000" type="screen4x3"/>
   <p:notesSz cx="6858000" cy="9144000"/>
@@ -3369,6 +3371,1264 @@
 </file>
 
 <file path=ppt/slides/slide10.xml><?xml version="1.0" encoding="utf-8"?>
+<p:sld xmlns:a="http://schemas.openxmlformats.org/drawingml/2006/main" xmlns:p="http://schemas.openxmlformats.org/presentationml/2006/main" xmlns:r="http://schemas.openxmlformats.org/officeDocument/2006/relationships">
+  <p:cSld>
+    <p:spTree>
+      <p:nvGrpSpPr>
+        <p:cNvPr id="1" name=""/>
+        <p:cNvGrpSpPr/>
+        <p:nvPr/>
+      </p:nvGrpSpPr>
+      <p:grpSpPr/>
+      <p:sp>
+        <p:nvSpPr>
+          <p:cNvPr id="2" name="Rectangle 1"/>
+          <p:cNvSpPr/>
+          <p:nvPr/>
+        </p:nvSpPr>
+        <p:spPr>
+          <a:xfrm>
+            <a:off x="457200" y="457200"/>
+            <a:ext cx="109728" cy="731520"/>
+          </a:xfrm>
+          <a:prstGeom prst="rect">
+            <a:avLst/>
+          </a:prstGeom>
+          <a:solidFill>
+            <a:srgbClr val="1E88E5"/>
+          </a:solidFill>
+          <a:ln>
+            <a:noFill/>
+          </a:ln>
+        </p:spPr>
+        <p:style>
+          <a:lnRef idx="1">
+            <a:schemeClr val="accent1"/>
+          </a:lnRef>
+          <a:fillRef idx="3">
+            <a:schemeClr val="accent1"/>
+          </a:fillRef>
+          <a:effectRef idx="2">
+            <a:schemeClr val="accent1"/>
+          </a:effectRef>
+          <a:fontRef idx="minor">
+            <a:schemeClr val="lt1"/>
+          </a:fontRef>
+        </p:style>
+        <p:txBody>
+          <a:bodyPr rtlCol="0" anchor="ctr"/>
+          <a:lstStyle/>
+          <a:p>
+            <a:pPr algn="ctr"/>
+          </a:p>
+        </p:txBody>
+      </p:sp>
+      <p:sp>
+        <p:nvSpPr>
+          <p:cNvPr id="3" name="TextBox 2"/>
+          <p:cNvSpPr txBox="1"/>
+          <p:nvPr/>
+        </p:nvSpPr>
+        <p:spPr>
+          <a:xfrm>
+            <a:off x="685800" y="411480"/>
+            <a:ext cx="10972800" cy="548640"/>
+          </a:xfrm>
+          <a:prstGeom prst="rect">
+            <a:avLst/>
+          </a:prstGeom>
+          <a:noFill/>
+        </p:spPr>
+        <p:txBody>
+          <a:bodyPr wrap="square">
+            <a:spAutoFit/>
+          </a:bodyPr>
+          <a:lstStyle/>
+          <a:p>
+            <a:pPr algn="l"/>
+            <a:r>
+              <a:rPr sz="3000" b="1">
+                <a:solidFill>
+                  <a:srgbClr val="212121"/>
+                </a:solidFill>
+                <a:latin typeface="맑은 고딕"/>
+              </a:rPr>
+              <a:t>시나리오 민감도 분석 (5개 프리셋)</a:t>
+            </a:r>
+          </a:p>
+        </p:txBody>
+      </p:sp>
+      <p:sp>
+        <p:nvSpPr>
+          <p:cNvPr id="4" name="TextBox 3"/>
+          <p:cNvSpPr txBox="1"/>
+          <p:nvPr/>
+        </p:nvSpPr>
+        <p:spPr>
+          <a:xfrm>
+            <a:off x="685800" y="914400"/>
+            <a:ext cx="10972800" cy="365760"/>
+          </a:xfrm>
+          <a:prstGeom prst="rect">
+            <a:avLst/>
+          </a:prstGeom>
+          <a:noFill/>
+        </p:spPr>
+        <p:txBody>
+          <a:bodyPr wrap="square">
+            <a:spAutoFit/>
+          </a:bodyPr>
+          <a:lstStyle/>
+          <a:p>
+            <a:pPr algn="l"/>
+            <a:r>
+              <a:rPr sz="1400" b="0">
+                <a:solidFill>
+                  <a:srgbClr val="555555"/>
+                </a:solidFill>
+                <a:latin typeface="맑은 고딕"/>
+              </a:rPr>
+              <a:t>정책 관점별 가중치 × 동일 피처셋 → TOP 10 변화</a:t>
+            </a:r>
+          </a:p>
+        </p:txBody>
+      </p:sp>
+      <p:graphicFrame>
+        <p:nvGraphicFramePr>
+          <p:cNvPr id="5" name="Table 4"/>
+          <p:cNvGraphicFramePr>
+            <a:graphicFrameLocks noGrp="1"/>
+          </p:cNvGraphicFramePr>
+          <p:nvPr/>
+        </p:nvGraphicFramePr>
+        <p:xfrm>
+          <a:off x="685800" y="1737360"/>
+          <a:ext cx="10972800" cy="2743200"/>
+        </p:xfrm>
+        <a:graphic>
+          <a:graphicData uri="http://schemas.openxmlformats.org/drawingml/2006/table">
+            <a:tbl>
+              <a:tblPr firstRow="1" bandRow="1">
+                <a:tableStyleId>{5C22544A-7EE6-4342-B048-85BDC9FD1C3A}</a:tableStyleId>
+              </a:tblPr>
+              <a:tblGrid>
+                <a:gridCol w="3200400"/>
+                <a:gridCol w="3200400"/>
+                <a:gridCol w="1828800"/>
+                <a:gridCol w="2743200"/>
+              </a:tblGrid>
+              <a:tr h="457200">
+                <a:tc>
+                  <a:txBody>
+                    <a:bodyPr/>
+                    <a:lstStyle/>
+                    <a:p>
+                      <a:pPr algn="ctr"/>
+                      <a:r>
+                        <a:rPr sz="1400" b="1">
+                          <a:solidFill>
+                            <a:srgbClr val="FFFFFF"/>
+                          </a:solidFill>
+                          <a:latin typeface="맑은 고딕"/>
+                        </a:rPr>
+                        <a:t>시나리오</a:t>
+                      </a:r>
+                    </a:p>
+                  </a:txBody>
+                  <a:tcPr>
+                    <a:solidFill>
+                      <a:srgbClr val="1E88E5"/>
+                    </a:solidFill>
+                  </a:tcPr>
+                </a:tc>
+                <a:tc>
+                  <a:txBody>
+                    <a:bodyPr/>
+                    <a:lstStyle/>
+                    <a:p>
+                      <a:pPr algn="ctr"/>
+                      <a:r>
+                        <a:rPr sz="1400" b="1">
+                          <a:solidFill>
+                            <a:srgbClr val="FFFFFF"/>
+                          </a:solidFill>
+                          <a:latin typeface="맑은 고딕"/>
+                        </a:rPr>
+                        <a:t>강조</a:t>
+                      </a:r>
+                    </a:p>
+                  </a:txBody>
+                  <a:tcPr>
+                    <a:solidFill>
+                      <a:srgbClr val="1E88E5"/>
+                    </a:solidFill>
+                  </a:tcPr>
+                </a:tc>
+                <a:tc>
+                  <a:txBody>
+                    <a:bodyPr/>
+                    <a:lstStyle/>
+                    <a:p>
+                      <a:pPr algn="ctr"/>
+                      <a:r>
+                        <a:rPr sz="1400" b="1">
+                          <a:solidFill>
+                            <a:srgbClr val="FFFFFF"/>
+                          </a:solidFill>
+                          <a:latin typeface="맑은 고딕"/>
+                        </a:rPr>
+                        <a:t>최고 Score</a:t>
+                      </a:r>
+                    </a:p>
+                  </a:txBody>
+                  <a:tcPr>
+                    <a:solidFill>
+                      <a:srgbClr val="1E88E5"/>
+                    </a:solidFill>
+                  </a:tcPr>
+                </a:tc>
+                <a:tc>
+                  <a:txBody>
+                    <a:bodyPr/>
+                    <a:lstStyle/>
+                    <a:p>
+                      <a:pPr algn="ctr"/>
+                      <a:r>
+                        <a:rPr sz="1400" b="1">
+                          <a:solidFill>
+                            <a:srgbClr val="FFFFFF"/>
+                          </a:solidFill>
+                          <a:latin typeface="맑은 고딕"/>
+                        </a:rPr>
+                        <a:t>유니크</a:t>
+                      </a:r>
+                    </a:p>
+                  </a:txBody>
+                  <a:tcPr>
+                    <a:solidFill>
+                      <a:srgbClr val="1E88E5"/>
+                    </a:solidFill>
+                  </a:tcPr>
+                </a:tc>
+              </a:tr>
+              <a:tr h="457200">
+                <a:tc>
+                  <a:txBody>
+                    <a:bodyPr/>
+                    <a:lstStyle/>
+                    <a:p>
+                      <a:pPr algn="ctr"/>
+                      <a:r>
+                        <a:rPr sz="1300" b="0">
+                          <a:solidFill>
+                            <a:srgbClr val="212121"/>
+                          </a:solidFill>
+                          <a:latin typeface="맑은 고딕"/>
+                        </a:rPr>
+                        <a:t>기본</a:t>
+                      </a:r>
+                    </a:p>
+                  </a:txBody>
+                  <a:tcPr/>
+                </a:tc>
+                <a:tc>
+                  <a:txBody>
+                    <a:bodyPr/>
+                    <a:lstStyle/>
+                    <a:p>
+                      <a:pPr algn="ctr"/>
+                      <a:r>
+                        <a:rPr sz="1300" b="0">
+                          <a:solidFill>
+                            <a:srgbClr val="212121"/>
+                          </a:solidFill>
+                          <a:latin typeface="맑은 고딕"/>
+                        </a:rPr>
+                        <a:t>균형 (25/25/20)</a:t>
+                      </a:r>
+                    </a:p>
+                  </a:txBody>
+                  <a:tcPr/>
+                </a:tc>
+                <a:tc>
+                  <a:txBody>
+                    <a:bodyPr/>
+                    <a:lstStyle/>
+                    <a:p>
+                      <a:pPr algn="ctr"/>
+                      <a:r>
+                        <a:rPr sz="1300" b="0">
+                          <a:solidFill>
+                            <a:srgbClr val="212121"/>
+                          </a:solidFill>
+                          <a:latin typeface="맑은 고딕"/>
+                        </a:rPr>
+                        <a:t>0.533</a:t>
+                      </a:r>
+                    </a:p>
+                  </a:txBody>
+                  <a:tcPr/>
+                </a:tc>
+                <a:tc>
+                  <a:txBody>
+                    <a:bodyPr/>
+                    <a:lstStyle/>
+                    <a:p>
+                      <a:pPr algn="ctr"/>
+                      <a:r>
+                        <a:rPr sz="1300" b="0">
+                          <a:solidFill>
+                            <a:srgbClr val="212121"/>
+                          </a:solidFill>
+                          <a:latin typeface="맑은 고딕"/>
+                        </a:rPr>
+                        <a:t>0곳</a:t>
+                      </a:r>
+                    </a:p>
+                  </a:txBody>
+                  <a:tcPr/>
+                </a:tc>
+              </a:tr>
+              <a:tr h="457200">
+                <a:tc>
+                  <a:txBody>
+                    <a:bodyPr/>
+                    <a:lstStyle/>
+                    <a:p>
+                      <a:pPr algn="ctr"/>
+                      <a:r>
+                        <a:rPr sz="1300" b="1">
+                          <a:solidFill>
+                            <a:srgbClr val="212121"/>
+                          </a:solidFill>
+                          <a:latin typeface="맑은 고딕"/>
+                        </a:rPr>
+                        <a:t>고령자 중시</a:t>
+                      </a:r>
+                    </a:p>
+                  </a:txBody>
+                  <a:tcPr/>
+                </a:tc>
+                <a:tc>
+                  <a:txBody>
+                    <a:bodyPr/>
+                    <a:lstStyle/>
+                    <a:p>
+                      <a:pPr algn="ctr"/>
+                      <a:r>
+                        <a:rPr sz="1300" b="1">
+                          <a:solidFill>
+                            <a:srgbClr val="212121"/>
+                          </a:solidFill>
+                          <a:latin typeface="맑은 고딕"/>
+                        </a:rPr>
+                        <a:t>vuln 0.40</a:t>
+                      </a:r>
+                    </a:p>
+                  </a:txBody>
+                  <a:tcPr/>
+                </a:tc>
+                <a:tc>
+                  <a:txBody>
+                    <a:bodyPr/>
+                    <a:lstStyle/>
+                    <a:p>
+                      <a:pPr algn="ctr"/>
+                      <a:r>
+                        <a:rPr sz="1300" b="1">
+                          <a:solidFill>
+                            <a:srgbClr val="212121"/>
+                          </a:solidFill>
+                          <a:latin typeface="맑은 고딕"/>
+                        </a:rPr>
+                        <a:t>0.585</a:t>
+                      </a:r>
+                    </a:p>
+                  </a:txBody>
+                  <a:tcPr/>
+                </a:tc>
+                <a:tc>
+                  <a:txBody>
+                    <a:bodyPr/>
+                    <a:lstStyle/>
+                    <a:p>
+                      <a:pPr algn="ctr"/>
+                      <a:r>
+                        <a:rPr sz="1300" b="1">
+                          <a:solidFill>
+                            <a:srgbClr val="212121"/>
+                          </a:solidFill>
+                          <a:latin typeface="맑은 고딕"/>
+                        </a:rPr>
+                        <a:t>3곳 독점</a:t>
+                      </a:r>
+                    </a:p>
+                  </a:txBody>
+                  <a:tcPr/>
+                </a:tc>
+              </a:tr>
+              <a:tr h="457200">
+                <a:tc>
+                  <a:txBody>
+                    <a:bodyPr/>
+                    <a:lstStyle/>
+                    <a:p>
+                      <a:pPr algn="ctr"/>
+                      <a:r>
+                        <a:rPr sz="1300" b="0">
+                          <a:solidFill>
+                            <a:srgbClr val="212121"/>
+                          </a:solidFill>
+                          <a:latin typeface="맑은 고딕"/>
+                        </a:rPr>
+                        <a:t>폭염 중시</a:t>
+                      </a:r>
+                    </a:p>
+                  </a:txBody>
+                  <a:tcPr/>
+                </a:tc>
+                <a:tc>
+                  <a:txBody>
+                    <a:bodyPr/>
+                    <a:lstStyle/>
+                    <a:p>
+                      <a:pPr algn="ctr"/>
+                      <a:r>
+                        <a:rPr sz="1300" b="0">
+                          <a:solidFill>
+                            <a:srgbClr val="212121"/>
+                          </a:solidFill>
+                          <a:latin typeface="맑은 고딕"/>
+                        </a:rPr>
+                        <a:t>lst 0.40</a:t>
+                      </a:r>
+                    </a:p>
+                  </a:txBody>
+                  <a:tcPr/>
+                </a:tc>
+                <a:tc>
+                  <a:txBody>
+                    <a:bodyPr/>
+                    <a:lstStyle/>
+                    <a:p>
+                      <a:pPr algn="ctr"/>
+                      <a:r>
+                        <a:rPr sz="1300" b="0">
+                          <a:solidFill>
+                            <a:srgbClr val="212121"/>
+                          </a:solidFill>
+                          <a:latin typeface="맑은 고딕"/>
+                        </a:rPr>
+                        <a:t>0.577</a:t>
+                      </a:r>
+                    </a:p>
+                  </a:txBody>
+                  <a:tcPr/>
+                </a:tc>
+                <a:tc>
+                  <a:txBody>
+                    <a:bodyPr/>
+                    <a:lstStyle/>
+                    <a:p>
+                      <a:pPr algn="ctr"/>
+                      <a:r>
+                        <a:rPr sz="1300" b="0">
+                          <a:solidFill>
+                            <a:srgbClr val="212121"/>
+                          </a:solidFill>
+                          <a:latin typeface="맑은 고딕"/>
+                        </a:rPr>
+                        <a:t>0곳</a:t>
+                      </a:r>
+                    </a:p>
+                  </a:txBody>
+                  <a:tcPr/>
+                </a:tc>
+              </a:tr>
+              <a:tr h="457200">
+                <a:tc>
+                  <a:txBody>
+                    <a:bodyPr/>
+                    <a:lstStyle/>
+                    <a:p>
+                      <a:pPr algn="ctr"/>
+                      <a:r>
+                        <a:rPr sz="1300" b="1">
+                          <a:solidFill>
+                            <a:srgbClr val="212121"/>
+                          </a:solidFill>
+                          <a:latin typeface="맑은 고딕"/>
+                        </a:rPr>
+                        <a:t>유동인구 중시</a:t>
+                      </a:r>
+                    </a:p>
+                  </a:txBody>
+                  <a:tcPr/>
+                </a:tc>
+                <a:tc>
+                  <a:txBody>
+                    <a:bodyPr/>
+                    <a:lstStyle/>
+                    <a:p>
+                      <a:pPr algn="ctr"/>
+                      <a:r>
+                        <a:rPr sz="1300" b="1">
+                          <a:solidFill>
+                            <a:srgbClr val="212121"/>
+                          </a:solidFill>
+                          <a:latin typeface="맑은 고딕"/>
+                        </a:rPr>
+                        <a:t>pop 0.40</a:t>
+                      </a:r>
+                    </a:p>
+                  </a:txBody>
+                  <a:tcPr/>
+                </a:tc>
+                <a:tc>
+                  <a:txBody>
+                    <a:bodyPr/>
+                    <a:lstStyle/>
+                    <a:p>
+                      <a:pPr algn="ctr"/>
+                      <a:r>
+                        <a:rPr sz="1300" b="1">
+                          <a:solidFill>
+                            <a:srgbClr val="212121"/>
+                          </a:solidFill>
+                          <a:latin typeface="맑은 고딕"/>
+                        </a:rPr>
+                        <a:t>0.610</a:t>
+                      </a:r>
+                    </a:p>
+                  </a:txBody>
+                  <a:tcPr/>
+                </a:tc>
+                <a:tc>
+                  <a:txBody>
+                    <a:bodyPr/>
+                    <a:lstStyle/>
+                    <a:p>
+                      <a:pPr algn="ctr"/>
+                      <a:r>
+                        <a:rPr sz="1300" b="1">
+                          <a:solidFill>
+                            <a:srgbClr val="212121"/>
+                          </a:solidFill>
+                          <a:latin typeface="맑은 고딕"/>
+                        </a:rPr>
+                        <a:t>4곳 독점</a:t>
+                      </a:r>
+                    </a:p>
+                  </a:txBody>
+                  <a:tcPr/>
+                </a:tc>
+              </a:tr>
+              <a:tr h="457200">
+                <a:tc>
+                  <a:txBody>
+                    <a:bodyPr/>
+                    <a:lstStyle/>
+                    <a:p>
+                      <a:pPr algn="ctr"/>
+                      <a:r>
+                        <a:rPr sz="1300" b="1">
+                          <a:solidFill>
+                            <a:srgbClr val="212121"/>
+                          </a:solidFill>
+                          <a:latin typeface="맑은 고딕"/>
+                        </a:rPr>
+                        <a:t>보행환경 중시 (NEW)</a:t>
+                      </a:r>
+                    </a:p>
+                  </a:txBody>
+                  <a:tcPr/>
+                </a:tc>
+                <a:tc>
+                  <a:txBody>
+                    <a:bodyPr/>
+                    <a:lstStyle/>
+                    <a:p>
+                      <a:pPr algn="ctr"/>
+                      <a:r>
+                        <a:rPr sz="1300" b="1">
+                          <a:solidFill>
+                            <a:srgbClr val="212121"/>
+                          </a:solidFill>
+                          <a:latin typeface="맑은 고딕"/>
+                        </a:rPr>
+                        <a:t>streetview_deficit 0.40</a:t>
+                      </a:r>
+                    </a:p>
+                  </a:txBody>
+                  <a:tcPr/>
+                </a:tc>
+                <a:tc>
+                  <a:txBody>
+                    <a:bodyPr/>
+                    <a:lstStyle/>
+                    <a:p>
+                      <a:pPr algn="ctr"/>
+                      <a:r>
+                        <a:rPr sz="1300" b="1">
+                          <a:solidFill>
+                            <a:srgbClr val="212121"/>
+                          </a:solidFill>
+                          <a:latin typeface="맑은 고딕"/>
+                        </a:rPr>
+                        <a:t>0.586</a:t>
+                      </a:r>
+                    </a:p>
+                  </a:txBody>
+                  <a:tcPr/>
+                </a:tc>
+                <a:tc>
+                  <a:txBody>
+                    <a:bodyPr/>
+                    <a:lstStyle/>
+                    <a:p>
+                      <a:pPr algn="ctr"/>
+                      <a:r>
+                        <a:rPr sz="1300" b="1">
+                          <a:solidFill>
+                            <a:srgbClr val="212121"/>
+                          </a:solidFill>
+                          <a:latin typeface="맑은 고딕"/>
+                        </a:rPr>
+                        <a:t>0곳</a:t>
+                      </a:r>
+                    </a:p>
+                  </a:txBody>
+                  <a:tcPr/>
+                </a:tc>
+              </a:tr>
+            </a:tbl>
+          </a:graphicData>
+        </a:graphic>
+      </p:graphicFrame>
+      <p:sp>
+        <p:nvSpPr>
+          <p:cNvPr id="6" name="TextBox 5"/>
+          <p:cNvSpPr txBox="1"/>
+          <p:nvPr/>
+        </p:nvSpPr>
+        <p:spPr>
+          <a:xfrm>
+            <a:off x="685800" y="4754880"/>
+            <a:ext cx="10972800" cy="457200"/>
+          </a:xfrm>
+          <a:prstGeom prst="rect">
+            <a:avLst/>
+          </a:prstGeom>
+          <a:noFill/>
+        </p:spPr>
+        <p:txBody>
+          <a:bodyPr wrap="square">
+            <a:spAutoFit/>
+          </a:bodyPr>
+          <a:lstStyle/>
+          <a:p>
+            <a:pPr algn="l"/>
+            <a:r>
+              <a:rPr sz="1400" b="1">
+                <a:solidFill>
+                  <a:srgbClr val="E53935"/>
+                </a:solidFill>
+                <a:latin typeface="맑은 고딕"/>
+              </a:rPr>
+              <a:t>💡 CV-B 통합으로 "보행환경 중시" 시나리오 신규 추가 → 정책 검증 차원이 한 단계 늘어남</a:t>
+            </a:r>
+          </a:p>
+        </p:txBody>
+      </p:sp>
+      <p:sp>
+        <p:nvSpPr>
+          <p:cNvPr id="7" name="TextBox 6"/>
+          <p:cNvSpPr txBox="1"/>
+          <p:nvPr/>
+        </p:nvSpPr>
+        <p:spPr>
+          <a:xfrm>
+            <a:off x="685800" y="5303520"/>
+            <a:ext cx="10972800" cy="457200"/>
+          </a:xfrm>
+          <a:prstGeom prst="rect">
+            <a:avLst/>
+          </a:prstGeom>
+          <a:noFill/>
+        </p:spPr>
+        <p:txBody>
+          <a:bodyPr wrap="square">
+            <a:spAutoFit/>
+          </a:bodyPr>
+          <a:lstStyle/>
+          <a:p>
+            <a:pPr algn="l"/>
+            <a:r>
+              <a:rPr sz="1400" b="0">
+                <a:solidFill>
+                  <a:srgbClr val="555555"/>
+                </a:solidFill>
+                <a:latin typeface="맑은 고딕"/>
+              </a:rPr>
+              <a:t>🎯 5가지 관점 모두에서 공통 추천되는 입지가 존재 (다음 슬라이드)</a:t>
+            </a:r>
+          </a:p>
+        </p:txBody>
+      </p:sp>
+      <p:sp>
+        <p:nvSpPr>
+          <p:cNvPr id="8" name="TextBox 7"/>
+          <p:cNvSpPr txBox="1"/>
+          <p:nvPr/>
+        </p:nvSpPr>
+        <p:spPr>
+          <a:xfrm>
+            <a:off x="457200" y="6400800"/>
+            <a:ext cx="9144000" cy="365760"/>
+          </a:xfrm>
+          <a:prstGeom prst="rect">
+            <a:avLst/>
+          </a:prstGeom>
+          <a:noFill/>
+        </p:spPr>
+        <p:txBody>
+          <a:bodyPr wrap="square">
+            <a:spAutoFit/>
+          </a:bodyPr>
+          <a:lstStyle/>
+          <a:p>
+            <a:pPr algn="l"/>
+            <a:r>
+              <a:rPr sz="1000" b="0">
+                <a:solidFill>
+                  <a:srgbClr val="555555"/>
+                </a:solidFill>
+                <a:latin typeface="맑은 고딕"/>
+              </a:rPr>
+              <a:t>동작구 여름 그늘막 최적 입지 추천 시스템 · 한영재 · 2025961227</a:t>
+            </a:r>
+          </a:p>
+        </p:txBody>
+      </p:sp>
+      <p:sp>
+        <p:nvSpPr>
+          <p:cNvPr id="9" name="TextBox 8"/>
+          <p:cNvSpPr txBox="1"/>
+          <p:nvPr/>
+        </p:nvSpPr>
+        <p:spPr>
+          <a:xfrm>
+            <a:off x="11247120" y="6400800"/>
+            <a:ext cx="914400" cy="365760"/>
+          </a:xfrm>
+          <a:prstGeom prst="rect">
+            <a:avLst/>
+          </a:prstGeom>
+          <a:noFill/>
+        </p:spPr>
+        <p:txBody>
+          <a:bodyPr wrap="square">
+            <a:spAutoFit/>
+          </a:bodyPr>
+          <a:lstStyle/>
+          <a:p>
+            <a:pPr algn="r"/>
+            <a:r>
+              <a:rPr sz="1000" b="0">
+                <a:solidFill>
+                  <a:srgbClr val="555555"/>
+                </a:solidFill>
+                <a:latin typeface="맑은 고딕"/>
+              </a:rPr>
+              <a:t>10 / 14</a:t>
+            </a:r>
+          </a:p>
+        </p:txBody>
+      </p:sp>
+    </p:spTree>
+  </p:cSld>
+  <p:clrMapOvr>
+    <a:masterClrMapping/>
+  </p:clrMapOvr>
+</p:sld>
+</file>
+
+<file path=ppt/slides/slide11.xml><?xml version="1.0" encoding="utf-8"?>
+<p:sld xmlns:a="http://schemas.openxmlformats.org/drawingml/2006/main" xmlns:p="http://schemas.openxmlformats.org/presentationml/2006/main" xmlns:r="http://schemas.openxmlformats.org/officeDocument/2006/relationships">
+  <p:cSld>
+    <p:spTree>
+      <p:nvGrpSpPr>
+        <p:cNvPr id="1" name=""/>
+        <p:cNvGrpSpPr/>
+        <p:nvPr/>
+      </p:nvGrpSpPr>
+      <p:grpSpPr/>
+      <p:sp>
+        <p:nvSpPr>
+          <p:cNvPr id="2" name="Rectangle 1"/>
+          <p:cNvSpPr/>
+          <p:nvPr/>
+        </p:nvSpPr>
+        <p:spPr>
+          <a:xfrm>
+            <a:off x="457200" y="457200"/>
+            <a:ext cx="109728" cy="731520"/>
+          </a:xfrm>
+          <a:prstGeom prst="rect">
+            <a:avLst/>
+          </a:prstGeom>
+          <a:solidFill>
+            <a:srgbClr val="1E88E5"/>
+          </a:solidFill>
+          <a:ln>
+            <a:noFill/>
+          </a:ln>
+        </p:spPr>
+        <p:style>
+          <a:lnRef idx="1">
+            <a:schemeClr val="accent1"/>
+          </a:lnRef>
+          <a:fillRef idx="3">
+            <a:schemeClr val="accent1"/>
+          </a:fillRef>
+          <a:effectRef idx="2">
+            <a:schemeClr val="accent1"/>
+          </a:effectRef>
+          <a:fontRef idx="minor">
+            <a:schemeClr val="lt1"/>
+          </a:fontRef>
+        </p:style>
+        <p:txBody>
+          <a:bodyPr rtlCol="0" anchor="ctr"/>
+          <a:lstStyle/>
+          <a:p>
+            <a:pPr algn="ctr"/>
+          </a:p>
+        </p:txBody>
+      </p:sp>
+      <p:sp>
+        <p:nvSpPr>
+          <p:cNvPr id="3" name="TextBox 2"/>
+          <p:cNvSpPr txBox="1"/>
+          <p:nvPr/>
+        </p:nvSpPr>
+        <p:spPr>
+          <a:xfrm>
+            <a:off x="685800" y="411480"/>
+            <a:ext cx="10972800" cy="548640"/>
+          </a:xfrm>
+          <a:prstGeom prst="rect">
+            <a:avLst/>
+          </a:prstGeom>
+          <a:noFill/>
+        </p:spPr>
+        <p:txBody>
+          <a:bodyPr wrap="square">
+            <a:spAutoFit/>
+          </a:bodyPr>
+          <a:lstStyle/>
+          <a:p>
+            <a:pPr algn="l"/>
+            <a:r>
+              <a:rPr sz="3000" b="1">
+                <a:solidFill>
+                  <a:srgbClr val="212121"/>
+                </a:solidFill>
+                <a:latin typeface="맑은 고딕"/>
+              </a:rPr>
+              <a:t>강건 입지 · Robust Location</a:t>
+            </a:r>
+          </a:p>
+        </p:txBody>
+      </p:sp>
+      <p:sp>
+        <p:nvSpPr>
+          <p:cNvPr id="4" name="TextBox 3"/>
+          <p:cNvSpPr txBox="1"/>
+          <p:nvPr/>
+        </p:nvSpPr>
+        <p:spPr>
+          <a:xfrm>
+            <a:off x="685800" y="914400"/>
+            <a:ext cx="10972800" cy="365760"/>
+          </a:xfrm>
+          <a:prstGeom prst="rect">
+            <a:avLst/>
+          </a:prstGeom>
+          <a:noFill/>
+        </p:spPr>
+        <p:txBody>
+          <a:bodyPr wrap="square">
+            <a:spAutoFit/>
+          </a:bodyPr>
+          <a:lstStyle/>
+          <a:p>
+            <a:pPr algn="l"/>
+            <a:r>
+              <a:rPr sz="1400" b="0">
+                <a:solidFill>
+                  <a:srgbClr val="555555"/>
+                </a:solidFill>
+                <a:latin typeface="맑은 고딕"/>
+              </a:rPr>
+              <a:t>5개 시나리오 공통 추천 = 어떤 정책 관점에서도 필수</a:t>
+            </a:r>
+          </a:p>
+        </p:txBody>
+      </p:sp>
+      <p:sp>
+        <p:nvSpPr>
+          <p:cNvPr id="5" name="Rounded Rectangle 4"/>
+          <p:cNvSpPr/>
+          <p:nvPr/>
+        </p:nvSpPr>
+        <p:spPr>
+          <a:xfrm>
+            <a:off x="1828800" y="1828800"/>
+            <a:ext cx="4114800" cy="3200400"/>
+          </a:xfrm>
+          <a:prstGeom prst="roundRect">
+            <a:avLst/>
+          </a:prstGeom>
+          <a:solidFill>
+            <a:srgbClr val="FAFAFA"/>
+          </a:solidFill>
+          <a:ln w="38100">
+            <a:solidFill>
+              <a:srgbClr val="E53935"/>
+            </a:solidFill>
+          </a:ln>
+        </p:spPr>
+        <p:style>
+          <a:lnRef idx="1">
+            <a:schemeClr val="accent1"/>
+          </a:lnRef>
+          <a:fillRef idx="3">
+            <a:schemeClr val="accent1"/>
+          </a:fillRef>
+          <a:effectRef idx="2">
+            <a:schemeClr val="accent1"/>
+          </a:effectRef>
+          <a:fontRef idx="minor">
+            <a:schemeClr val="lt1"/>
+          </a:fontRef>
+        </p:style>
+        <p:txBody>
+          <a:bodyPr rtlCol="0" anchor="ctr" wrap="square" lIns="182880" tIns="274320"/>
+          <a:lstStyle/>
+          <a:p>
+            <a:pPr algn="ctr"/>
+            <a:r>
+              <a:rPr sz="1800" b="1">
+                <a:solidFill>
+                  <a:srgbClr val="E53935"/>
+                </a:solidFill>
+                <a:latin typeface="맑은 고딕"/>
+              </a:rPr>
+              <a:t>#1</a:t>
+            </a:r>
+          </a:p>
+          <a:p>
+            <a:pPr algn="ctr">
+              <a:spcBef>
+                <a:spcPts val="1000"/>
+              </a:spcBef>
+            </a:pPr>
+            <a:r>
+              <a:rPr sz="3200" b="1">
+                <a:solidFill>
+                  <a:srgbClr val="212121"/>
+                </a:solidFill>
+                <a:latin typeface="맑은 고딕"/>
+              </a:rPr>
+              <a:t>동작대로</a:t>
+            </a:r>
+          </a:p>
+          <a:p>
+            <a:pPr algn="ctr">
+              <a:spcBef>
+                <a:spcPts val="800"/>
+              </a:spcBef>
+            </a:pPr>
+            <a:r>
+              <a:rPr sz="1800" b="0">
+                <a:solidFill>
+                  <a:srgbClr val="555555"/>
+                </a:solidFill>
+                <a:latin typeface="맑은 고딕"/>
+              </a:rPr>
+              <a:t>사당-이수 축</a:t>
+            </a:r>
+          </a:p>
+          <a:p>
+            <a:pPr algn="ctr">
+              <a:spcBef>
+                <a:spcPts val="1500"/>
+              </a:spcBef>
+            </a:pPr>
+            <a:r>
+              <a:rPr sz="1300" b="0">
+                <a:solidFill>
+                  <a:srgbClr val="555555"/>
+                </a:solidFill>
+                <a:latin typeface="맑은 고딕"/>
+              </a:rPr>
+              <a:t>37.4907, 126.9647</a:t>
+            </a:r>
+          </a:p>
+        </p:txBody>
+      </p:sp>
+      <p:sp>
+        <p:nvSpPr>
+          <p:cNvPr id="6" name="Rounded Rectangle 5"/>
+          <p:cNvSpPr/>
+          <p:nvPr/>
+        </p:nvSpPr>
+        <p:spPr>
+          <a:xfrm>
+            <a:off x="6309360" y="1828800"/>
+            <a:ext cx="4114800" cy="3200400"/>
+          </a:xfrm>
+          <a:prstGeom prst="roundRect">
+            <a:avLst/>
+          </a:prstGeom>
+          <a:solidFill>
+            <a:srgbClr val="FAFAFA"/>
+          </a:solidFill>
+          <a:ln w="38100">
+            <a:solidFill>
+              <a:srgbClr val="E53935"/>
+            </a:solidFill>
+          </a:ln>
+        </p:spPr>
+        <p:style>
+          <a:lnRef idx="1">
+            <a:schemeClr val="accent1"/>
+          </a:lnRef>
+          <a:fillRef idx="3">
+            <a:schemeClr val="accent1"/>
+          </a:fillRef>
+          <a:effectRef idx="2">
+            <a:schemeClr val="accent1"/>
+          </a:effectRef>
+          <a:fontRef idx="minor">
+            <a:schemeClr val="lt1"/>
+          </a:fontRef>
+        </p:style>
+        <p:txBody>
+          <a:bodyPr rtlCol="0" anchor="ctr" wrap="square" lIns="182880" tIns="274320"/>
+          <a:lstStyle/>
+          <a:p>
+            <a:pPr algn="ctr"/>
+            <a:r>
+              <a:rPr sz="1800" b="1">
+                <a:solidFill>
+                  <a:srgbClr val="E53935"/>
+                </a:solidFill>
+                <a:latin typeface="맑은 고딕"/>
+              </a:rPr>
+              <a:t>#2</a:t>
+            </a:r>
+          </a:p>
+          <a:p>
+            <a:pPr algn="ctr">
+              <a:spcBef>
+                <a:spcPts val="1000"/>
+              </a:spcBef>
+            </a:pPr>
+            <a:r>
+              <a:rPr sz="3200" b="1">
+                <a:solidFill>
+                  <a:srgbClr val="212121"/>
+                </a:solidFill>
+                <a:latin typeface="맑은 고딕"/>
+              </a:rPr>
+              <a:t>동작대로</a:t>
+            </a:r>
+          </a:p>
+          <a:p>
+            <a:pPr algn="ctr">
+              <a:spcBef>
+                <a:spcPts val="800"/>
+              </a:spcBef>
+            </a:pPr>
+            <a:r>
+              <a:rPr sz="1800" b="0">
+                <a:solidFill>
+                  <a:srgbClr val="555555"/>
+                </a:solidFill>
+                <a:latin typeface="맑은 고딕"/>
+              </a:rPr>
+              <a:t>사당역 인근</a:t>
+            </a:r>
+          </a:p>
+          <a:p>
+            <a:pPr algn="ctr">
+              <a:spcBef>
+                <a:spcPts val="1500"/>
+              </a:spcBef>
+            </a:pPr>
+            <a:r>
+              <a:rPr sz="1300" b="0">
+                <a:solidFill>
+                  <a:srgbClr val="555555"/>
+                </a:solidFill>
+                <a:latin typeface="맑은 고딕"/>
+              </a:rPr>
+              <a:t>37.4898, 126.9670</a:t>
+            </a:r>
+          </a:p>
+        </p:txBody>
+      </p:sp>
+      <p:sp>
+        <p:nvSpPr>
+          <p:cNvPr id="7" name="TextBox 6"/>
+          <p:cNvSpPr txBox="1"/>
+          <p:nvPr/>
+        </p:nvSpPr>
+        <p:spPr>
+          <a:xfrm>
+            <a:off x="685800" y="5303520"/>
+            <a:ext cx="10972800" cy="457200"/>
+          </a:xfrm>
+          <a:prstGeom prst="rect">
+            <a:avLst/>
+          </a:prstGeom>
+          <a:noFill/>
+        </p:spPr>
+        <p:txBody>
+          <a:bodyPr wrap="square">
+            <a:spAutoFit/>
+          </a:bodyPr>
+          <a:lstStyle/>
+          <a:p>
+            <a:pPr algn="ctr"/>
+            <a:r>
+              <a:rPr sz="1600" b="1">
+                <a:solidFill>
+                  <a:srgbClr val="1E88E5"/>
+                </a:solidFill>
+                <a:latin typeface="맑은 고딕"/>
+              </a:rPr>
+              <a:t>정책적 함의: 예산 제약 시 이 2곳이 최우선 설치 대상</a:t>
+            </a:r>
+          </a:p>
+        </p:txBody>
+      </p:sp>
+      <p:sp>
+        <p:nvSpPr>
+          <p:cNvPr id="8" name="TextBox 7"/>
+          <p:cNvSpPr txBox="1"/>
+          <p:nvPr/>
+        </p:nvSpPr>
+        <p:spPr>
+          <a:xfrm>
+            <a:off x="685800" y="5852160"/>
+            <a:ext cx="10972800" cy="457200"/>
+          </a:xfrm>
+          <a:prstGeom prst="rect">
+            <a:avLst/>
+          </a:prstGeom>
+          <a:noFill/>
+        </p:spPr>
+        <p:txBody>
+          <a:bodyPr wrap="square">
+            <a:spAutoFit/>
+          </a:bodyPr>
+          <a:lstStyle/>
+          <a:p>
+            <a:pPr algn="ctr"/>
+            <a:r>
+              <a:rPr sz="1300" b="0">
+                <a:solidFill>
+                  <a:srgbClr val="555555"/>
+                </a:solidFill>
+                <a:latin typeface="맑은 고딕"/>
+              </a:rPr>
+              <a:t>CV-B 보행환경 시나리오까지 통과한 입지 → 더 까다로운 검증 통과</a:t>
+            </a:r>
+          </a:p>
+        </p:txBody>
+      </p:sp>
+      <p:sp>
+        <p:nvSpPr>
+          <p:cNvPr id="9" name="TextBox 8"/>
+          <p:cNvSpPr txBox="1"/>
+          <p:nvPr/>
+        </p:nvSpPr>
+        <p:spPr>
+          <a:xfrm>
+            <a:off x="457200" y="6400800"/>
+            <a:ext cx="9144000" cy="365760"/>
+          </a:xfrm>
+          <a:prstGeom prst="rect">
+            <a:avLst/>
+          </a:prstGeom>
+          <a:noFill/>
+        </p:spPr>
+        <p:txBody>
+          <a:bodyPr wrap="square">
+            <a:spAutoFit/>
+          </a:bodyPr>
+          <a:lstStyle/>
+          <a:p>
+            <a:pPr algn="l"/>
+            <a:r>
+              <a:rPr sz="1000" b="0">
+                <a:solidFill>
+                  <a:srgbClr val="555555"/>
+                </a:solidFill>
+                <a:latin typeface="맑은 고딕"/>
+              </a:rPr>
+              <a:t>동작구 여름 그늘막 최적 입지 추천 시스템 · 한영재 · 2025961227</a:t>
+            </a:r>
+          </a:p>
+        </p:txBody>
+      </p:sp>
+      <p:sp>
+        <p:nvSpPr>
+          <p:cNvPr id="10" name="TextBox 9"/>
+          <p:cNvSpPr txBox="1"/>
+          <p:nvPr/>
+        </p:nvSpPr>
+        <p:spPr>
+          <a:xfrm>
+            <a:off x="11247120" y="6400800"/>
+            <a:ext cx="914400" cy="365760"/>
+          </a:xfrm>
+          <a:prstGeom prst="rect">
+            <a:avLst/>
+          </a:prstGeom>
+          <a:noFill/>
+        </p:spPr>
+        <p:txBody>
+          <a:bodyPr wrap="square">
+            <a:spAutoFit/>
+          </a:bodyPr>
+          <a:lstStyle/>
+          <a:p>
+            <a:pPr algn="r"/>
+            <a:r>
+              <a:rPr sz="1000" b="0">
+                <a:solidFill>
+                  <a:srgbClr val="555555"/>
+                </a:solidFill>
+                <a:latin typeface="맑은 고딕"/>
+              </a:rPr>
+              <a:t>11 / 14</a:t>
+            </a:r>
+          </a:p>
+        </p:txBody>
+      </p:sp>
+    </p:spTree>
+  </p:cSld>
+  <p:clrMapOvr>
+    <a:masterClrMapping/>
+  </p:clrMapOvr>
+</p:sld>
+</file>
+
+<file path=ppt/slides/slide12.xml><?xml version="1.0" encoding="utf-8"?>
 <p:sld xmlns:a="http://schemas.openxmlformats.org/drawingml/2006/main" xmlns:p="http://schemas.openxmlformats.org/presentationml/2006/main" xmlns:r="http://schemas.openxmlformats.org/officeDocument/2006/relationships">
   <p:cSld>
     <p:spTree>
@@ -4029,7 +5289,7 @@
                 </a:solidFill>
                 <a:latin typeface="맑은 고딕"/>
               </a:rPr>
-              <a:t>10 / 12</a:t>
+              <a:t>12 / 14</a:t>
             </a:r>
           </a:p>
         </p:txBody>
@@ -4042,7 +5302,7 @@
 </p:sld>
 </file>
 
-<file path=ppt/slides/slide11.xml><?xml version="1.0" encoding="utf-8"?>
+<file path=ppt/slides/slide13.xml><?xml version="1.0" encoding="utf-8"?>
 <p:sld xmlns:a="http://schemas.openxmlformats.org/drawingml/2006/main" xmlns:p="http://schemas.openxmlformats.org/presentationml/2006/main" xmlns:r="http://schemas.openxmlformats.org/officeDocument/2006/relationships">
   <p:cSld>
     <p:spTree>
@@ -4389,7 +5649,7 @@
                 </a:solidFill>
                 <a:latin typeface="맑은 고딕"/>
               </a:rPr>
-              <a:t>11 / 12</a:t>
+              <a:t>13 / 14</a:t>
             </a:r>
           </a:p>
         </p:txBody>
@@ -4402,7 +5662,7 @@
 </p:sld>
 </file>
 
-<file path=ppt/slides/slide12.xml><?xml version="1.0" encoding="utf-8"?>
+<file path=ppt/slides/slide14.xml><?xml version="1.0" encoding="utf-8"?>
 <p:sld xmlns:a="http://schemas.openxmlformats.org/drawingml/2006/main" xmlns:p="http://schemas.openxmlformats.org/presentationml/2006/main" xmlns:r="http://schemas.openxmlformats.org/officeDocument/2006/relationships">
   <p:cSld>
     <p:spTree>
@@ -4775,29 +6035,41 @@
           <a:p>
             <a:pPr algn="ctr"/>
             <a:r>
-              <a:rPr sz="2000" b="1">
+              <a:rPr sz="1800" b="1">
                 <a:solidFill>
                   <a:srgbClr val="FFEE58"/>
                 </a:solidFill>
                 <a:latin typeface="맑은 고딕"/>
               </a:rPr>
-              <a:t>데이터의 논리로, 어떤 정책 관점을 취하든 그늘막이 반드시 필요한 3곳을 찾아냈다.</a:t>
+              <a:t>항공사진과 거리뷰까지 컴퓨터 비전으로 읽어내,</a:t>
+            </a:r>
+          </a:p>
+          <a:p>
+            <a:pPr algn="ctr"/>
+            <a:r>
+              <a:rPr sz="1800" b="1">
+                <a:solidFill>
+                  <a:srgbClr val="FFEE58"/>
+                </a:solidFill>
+                <a:latin typeface="맑은 고딕"/>
+              </a:rPr>
+              <a:t>5가지 정책 관점 모두에서 살아남는 강건 입지 2곳을 찾아냈다.</a:t>
             </a:r>
           </a:p>
           <a:p>
             <a:pPr algn="ctr">
               <a:spcBef>
-                <a:spcPts val="600"/>
+                <a:spcPts val="800"/>
               </a:spcBef>
             </a:pPr>
             <a:r>
-              <a:rPr sz="1400" b="0">
+              <a:rPr sz="1200" b="0">
                 <a:solidFill>
                   <a:srgbClr val="CCCCCC"/>
                 </a:solidFill>
                 <a:latin typeface="맑은 고딕"/>
               </a:rPr>
-              <a:t>— 자연그늘 페널티까지 반영해 식별력을 한 단계 더 엄격하게.</a:t>
+              <a:t>— SAM(항공) + SegFormer(거리뷰) + MCDA 가중합 + 시나리오 민감도</a:t>
             </a:r>
           </a:p>
         </p:txBody>
@@ -4867,7 +6139,7 @@
                 </a:solidFill>
                 <a:latin typeface="맑은 고딕"/>
               </a:rPr>
-              <a:t>12 / 12</a:t>
+              <a:t>14 / 14</a:t>
             </a:r>
           </a:p>
         </p:txBody>
@@ -5241,7 +6513,7 @@
                 </a:solidFill>
                 <a:latin typeface="맑은 고딕"/>
               </a:rPr>
-              <a:t>2 / 12</a:t>
+              <a:t>2 / 14</a:t>
             </a:r>
           </a:p>
         </p:txBody>
@@ -6030,7 +7302,7 @@
                 </a:solidFill>
                 <a:latin typeface="맑은 고딕"/>
               </a:rPr>
-              <a:t>3 / 12</a:t>
+              <a:t>3 / 14</a:t>
             </a:r>
           </a:p>
         </p:txBody>
@@ -6641,7 +7913,7 @@
                 </a:solidFill>
                 <a:latin typeface="맑은 고딕"/>
               </a:rPr>
-              <a:t>4 / 12</a:t>
+              <a:t>4 / 14</a:t>
             </a:r>
           </a:p>
         </p:txBody>
@@ -6786,7 +8058,7 @@
         <p:spPr>
           <a:xfrm>
             <a:off x="685800" y="1737360"/>
-            <a:ext cx="10972800" cy="1188720"/>
+            <a:ext cx="10972800" cy="1463040"/>
           </a:xfrm>
           <a:prstGeom prst="roundRect">
             <a:avLst/>
@@ -6818,13 +8090,25 @@
           <a:p>
             <a:pPr algn="ctr"/>
             <a:r>
-              <a:rPr sz="2200" b="1">
+              <a:rPr sz="2000" b="1">
                 <a:solidFill>
                   <a:srgbClr val="FFEE58"/>
                 </a:solidFill>
                 <a:latin typeface="맑은 고딕"/>
               </a:rPr>
-              <a:t>Score = 0.30·popdens + 0.30·lst + 0.20·vuln − 0.15·shade − 0.05·natural</a:t>
+              <a:t>Score = 0.25·popdens + 0.25·lst + 0.20·vuln</a:t>
+            </a:r>
+          </a:p>
+          <a:p>
+            <a:pPr algn="ctr"/>
+            <a:r>
+              <a:rPr sz="2000" b="1">
+                <a:solidFill>
+                  <a:srgbClr val="FFEE58"/>
+                </a:solidFill>
+                <a:latin typeface="맑은 고딕"/>
+              </a:rPr>
+              <a:t>− 0.15·shade − 0.05·natural + 0.15·streetview_deficit</a:t>
             </a:r>
           </a:p>
         </p:txBody>
@@ -6837,7 +8121,7 @@
         </p:nvSpPr>
         <p:spPr>
           <a:xfrm>
-            <a:off x="685800" y="3108960"/>
+            <a:off x="685800" y="3383280"/>
             <a:ext cx="10972800" cy="2103120"/>
           </a:xfrm>
           <a:prstGeom prst="rect">
@@ -6857,13 +8141,13 @@
               </a:spcAft>
             </a:pPr>
             <a:r>
-              <a:rPr sz="1600" b="0">
+              <a:rPr sz="1500" b="0">
                 <a:solidFill>
                   <a:srgbClr val="212121"/>
                 </a:solidFill>
                 <a:latin typeface="맑은 고딕"/>
               </a:rPr>
-              <a:t>• popdens (+0.30) — 시간대 가중 유동인구 (9~18시, 오후 1~3시 1.0 피크)</a:t>
+              <a:t>• popdens (+0.25) — 시간대 가중 유동인구 (오후 1~3시 1.0 피크)</a:t>
             </a:r>
           </a:p>
           <a:p>
@@ -6873,13 +8157,13 @@
               </a:spcAft>
             </a:pPr>
             <a:r>
-              <a:rPr sz="1600" b="0">
+              <a:rPr sz="1500" b="0">
                 <a:solidFill>
                   <a:srgbClr val="212121"/>
                 </a:solidFill>
                 <a:latin typeface="맑은 고딕"/>
               </a:rPr>
-              <a:t>• lst (+0.30) — 지표면 온도, 오후 피크 시간대 가중 평균</a:t>
+              <a:t>• lst (+0.25) — 지표면 온도, 오후 피크 가중 평균</a:t>
             </a:r>
           </a:p>
           <a:p>
@@ -6889,7 +8173,7 @@
               </a:spcAft>
             </a:pPr>
             <a:r>
-              <a:rPr sz="1600" b="0">
+              <a:rPr sz="1500" b="0">
                 <a:solidFill>
                   <a:srgbClr val="212121"/>
                 </a:solidFill>
@@ -6905,13 +8189,13 @@
               </a:spcAft>
             </a:pPr>
             <a:r>
-              <a:rPr sz="1600" b="0">
+              <a:rPr sz="1500" b="0">
                 <a:solidFill>
                   <a:srgbClr val="212121"/>
                 </a:solidFill>
                 <a:latin typeface="맑은 고딕"/>
               </a:rPr>
-              <a:t>• shade (−0.15) — 기존 그늘막 반경 150m 내 커버리지 (이미 된 곳은 감점)</a:t>
+              <a:t>• shade (−0.15) — 기존 그늘막 반경 150m 내 커버리지</a:t>
             </a:r>
           </a:p>
           <a:p>
@@ -6921,13 +8205,29 @@
               </a:spcAft>
             </a:pPr>
             <a:r>
-              <a:rPr sz="1600" b="0">
+              <a:rPr sz="1500" b="0">
                 <a:solidFill>
                   <a:srgbClr val="212121"/>
                 </a:solidFill>
                 <a:latin typeface="맑은 고딕"/>
               </a:rPr>
-              <a:t>• natural (−0.05) — 건물 그림자 커버 비율 (자연 그늘 페널티, 신규 활성화)</a:t>
+              <a:t>• natural (−0.05) — CV-A SAM 추출 건물 그림자 시뮬레이션</a:t>
+            </a:r>
+          </a:p>
+          <a:p>
+            <a:pPr>
+              <a:spcAft>
+                <a:spcPts val="600"/>
+              </a:spcAft>
+            </a:pPr>
+            <a:r>
+              <a:rPr sz="1500" b="0">
+                <a:solidFill>
+                  <a:srgbClr val="212121"/>
+                </a:solidFill>
+                <a:latin typeface="맑은 고딕"/>
+              </a:rPr>
+              <a:t>• streetview_deficit (+0.15) — CV-B SegFormer 거리뷰 그늘 결핍 (NEW)</a:t>
             </a:r>
           </a:p>
         </p:txBody>
@@ -7032,7 +8332,7 @@
                 </a:solidFill>
                 <a:latin typeface="맑은 고딕"/>
               </a:rPr>
-              <a:t>5 / 12</a:t>
+              <a:t>5 / 14</a:t>
             </a:r>
           </a:p>
         </p:txBody>
@@ -7543,7 +8843,7 @@
                 </a:solidFill>
                 <a:latin typeface="맑은 고딕"/>
               </a:rPr>
-              <a:t>6 / 12</a:t>
+              <a:t>6 / 14</a:t>
             </a:r>
           </a:p>
         </p:txBody>
@@ -7639,7 +8939,7 @@
                 </a:solidFill>
                 <a:latin typeface="맑은 고딕"/>
               </a:rPr>
-              <a:t>자연 그늘 시뮬레이션 (신규)</a:t>
+              <a:t>자연 그늘 시뮬레이션</a:t>
             </a:r>
           </a:p>
         </p:txBody>
@@ -7777,23 +9077,7 @@
                 </a:solidFill>
                 <a:latin typeface="맑은 고딕"/>
               </a:rPr>
-              <a:t>• 효과 검증: 강건 입지 4 → 3곳, 상도로 TOP5 0.395 → 0.382</a:t>
-            </a:r>
-          </a:p>
-          <a:p>
-            <a:pPr>
-              <a:spcAft>
-                <a:spcPts val="600"/>
-              </a:spcAft>
-            </a:pPr>
-            <a:r>
-              <a:rPr sz="1500" b="0">
-                <a:solidFill>
-                  <a:srgbClr val="212121"/>
-                </a:solidFill>
-                <a:latin typeface="맑은 고딕"/>
-              </a:rPr>
-              <a:t>• 실데이터(buildings.geojson) 확보 시 자동 교체 구조</a:t>
+              <a:t>• 건물 입력은 다음 슬라이드의 CV-A로 자동 교체됨</a:t>
             </a:r>
           </a:p>
         </p:txBody>
@@ -7918,7 +9202,7 @@
                 </a:solidFill>
                 <a:latin typeface="맑은 고딕"/>
               </a:rPr>
-              <a:t>7 / 12</a:t>
+              <a:t>7 / 14</a:t>
             </a:r>
           </a:p>
         </p:txBody>
@@ -8014,7 +9298,7 @@
                 </a:solidFill>
                 <a:latin typeface="맑은 고딕"/>
               </a:rPr>
-              <a:t>시나리오 민감도 분석</a:t>
+              <a:t>CV-A · 위성 항공사진 + Mobile-SAM</a:t>
             </a:r>
           </a:p>
         </p:txBody>
@@ -8049,455 +9333,21 @@
                 </a:solidFill>
                 <a:latin typeface="맑은 고딕"/>
               </a:rPr>
-              <a:t>정책 관점별 가중치 프리셋 × 동일 피처셋 → TOP 10 변화</a:t>
-            </a:r>
-          </a:p>
-        </p:txBody>
-      </p:sp>
-      <p:graphicFrame>
-        <p:nvGraphicFramePr>
-          <p:cNvPr id="5" name="Table 4"/>
-          <p:cNvGraphicFramePr>
-            <a:graphicFrameLocks noGrp="1"/>
-          </p:cNvGraphicFramePr>
-          <p:nvPr/>
-        </p:nvGraphicFramePr>
-        <p:xfrm>
-          <a:off x="685800" y="1737360"/>
-          <a:ext cx="10972800" cy="2560320"/>
-        </p:xfrm>
-        <a:graphic>
-          <a:graphicData uri="http://schemas.openxmlformats.org/drawingml/2006/table">
-            <a:tbl>
-              <a:tblPr firstRow="1" bandRow="1">
-                <a:tableStyleId>{5C22544A-7EE6-4342-B048-85BDC9FD1C3A}</a:tableStyleId>
-              </a:tblPr>
-              <a:tblGrid>
-                <a:gridCol w="2743200"/>
-                <a:gridCol w="3200400"/>
-                <a:gridCol w="2286000"/>
-                <a:gridCol w="2743200"/>
-              </a:tblGrid>
-              <a:tr h="512064">
-                <a:tc>
-                  <a:txBody>
-                    <a:bodyPr/>
-                    <a:lstStyle/>
-                    <a:p>
-                      <a:pPr algn="ctr"/>
-                      <a:r>
-                        <a:rPr sz="1400" b="1">
-                          <a:solidFill>
-                            <a:srgbClr val="FFFFFF"/>
-                          </a:solidFill>
-                          <a:latin typeface="맑은 고딕"/>
-                        </a:rPr>
-                        <a:t>시나리오</a:t>
-                      </a:r>
-                    </a:p>
-                  </a:txBody>
-                  <a:tcPr>
-                    <a:solidFill>
-                      <a:srgbClr val="1E88E5"/>
-                    </a:solidFill>
-                  </a:tcPr>
-                </a:tc>
-                <a:tc>
-                  <a:txBody>
-                    <a:bodyPr/>
-                    <a:lstStyle/>
-                    <a:p>
-                      <a:pPr algn="ctr"/>
-                      <a:r>
-                        <a:rPr sz="1400" b="1">
-                          <a:solidFill>
-                            <a:srgbClr val="FFFFFF"/>
-                          </a:solidFill>
-                          <a:latin typeface="맑은 고딕"/>
-                        </a:rPr>
-                        <a:t>강조</a:t>
-                      </a:r>
-                    </a:p>
-                  </a:txBody>
-                  <a:tcPr>
-                    <a:solidFill>
-                      <a:srgbClr val="1E88E5"/>
-                    </a:solidFill>
-                  </a:tcPr>
-                </a:tc>
-                <a:tc>
-                  <a:txBody>
-                    <a:bodyPr/>
-                    <a:lstStyle/>
-                    <a:p>
-                      <a:pPr algn="ctr"/>
-                      <a:r>
-                        <a:rPr sz="1400" b="1">
-                          <a:solidFill>
-                            <a:srgbClr val="FFFFFF"/>
-                          </a:solidFill>
-                          <a:latin typeface="맑은 고딕"/>
-                        </a:rPr>
-                        <a:t>최고 Score</a:t>
-                      </a:r>
-                    </a:p>
-                  </a:txBody>
-                  <a:tcPr>
-                    <a:solidFill>
-                      <a:srgbClr val="1E88E5"/>
-                    </a:solidFill>
-                  </a:tcPr>
-                </a:tc>
-                <a:tc>
-                  <a:txBody>
-                    <a:bodyPr/>
-                    <a:lstStyle/>
-                    <a:p>
-                      <a:pPr algn="ctr"/>
-                      <a:r>
-                        <a:rPr sz="1400" b="1">
-                          <a:solidFill>
-                            <a:srgbClr val="FFFFFF"/>
-                          </a:solidFill>
-                          <a:latin typeface="맑은 고딕"/>
-                        </a:rPr>
-                        <a:t>유니크</a:t>
-                      </a:r>
-                    </a:p>
-                  </a:txBody>
-                  <a:tcPr>
-                    <a:solidFill>
-                      <a:srgbClr val="1E88E5"/>
-                    </a:solidFill>
-                  </a:tcPr>
-                </a:tc>
-              </a:tr>
-              <a:tr h="512064">
-                <a:tc>
-                  <a:txBody>
-                    <a:bodyPr/>
-                    <a:lstStyle/>
-                    <a:p>
-                      <a:pPr algn="ctr"/>
-                      <a:r>
-                        <a:rPr sz="1400" b="0">
-                          <a:solidFill>
-                            <a:srgbClr val="212121"/>
-                          </a:solidFill>
-                          <a:latin typeface="맑은 고딕"/>
-                        </a:rPr>
-                        <a:t>기본</a:t>
-                      </a:r>
-                    </a:p>
-                  </a:txBody>
-                  <a:tcPr/>
-                </a:tc>
-                <a:tc>
-                  <a:txBody>
-                    <a:bodyPr/>
-                    <a:lstStyle/>
-                    <a:p>
-                      <a:pPr algn="ctr"/>
-                      <a:r>
-                        <a:rPr sz="1400" b="0">
-                          <a:solidFill>
-                            <a:srgbClr val="212121"/>
-                          </a:solidFill>
-                          <a:latin typeface="맑은 고딕"/>
-                        </a:rPr>
-                        <a:t>균형 (30/30/20)</a:t>
-                      </a:r>
-                    </a:p>
-                  </a:txBody>
-                  <a:tcPr/>
-                </a:tc>
-                <a:tc>
-                  <a:txBody>
-                    <a:bodyPr/>
-                    <a:lstStyle/>
-                    <a:p>
-                      <a:pPr algn="ctr"/>
-                      <a:r>
-                        <a:rPr sz="1400" b="0">
-                          <a:solidFill>
-                            <a:srgbClr val="212121"/>
-                          </a:solidFill>
-                          <a:latin typeface="맑은 고딕"/>
-                        </a:rPr>
-                        <a:t>0.574</a:t>
-                      </a:r>
-                    </a:p>
-                  </a:txBody>
-                  <a:tcPr/>
-                </a:tc>
-                <a:tc>
-                  <a:txBody>
-                    <a:bodyPr/>
-                    <a:lstStyle/>
-                    <a:p>
-                      <a:pPr algn="ctr"/>
-                      <a:r>
-                        <a:rPr sz="1400" b="0">
-                          <a:solidFill>
-                            <a:srgbClr val="212121"/>
-                          </a:solidFill>
-                          <a:latin typeface="맑은 고딕"/>
-                        </a:rPr>
-                        <a:t>0곳</a:t>
-                      </a:r>
-                    </a:p>
-                  </a:txBody>
-                  <a:tcPr/>
-                </a:tc>
-              </a:tr>
-              <a:tr h="512064">
-                <a:tc>
-                  <a:txBody>
-                    <a:bodyPr/>
-                    <a:lstStyle/>
-                    <a:p>
-                      <a:pPr algn="ctr"/>
-                      <a:r>
-                        <a:rPr sz="1400" b="1">
-                          <a:solidFill>
-                            <a:srgbClr val="212121"/>
-                          </a:solidFill>
-                          <a:latin typeface="맑은 고딕"/>
-                        </a:rPr>
-                        <a:t>고령자 중시</a:t>
-                      </a:r>
-                    </a:p>
-                  </a:txBody>
-                  <a:tcPr/>
-                </a:tc>
-                <a:tc>
-                  <a:txBody>
-                    <a:bodyPr/>
-                    <a:lstStyle/>
-                    <a:p>
-                      <a:pPr algn="ctr"/>
-                      <a:r>
-                        <a:rPr sz="1400" b="1">
-                          <a:solidFill>
-                            <a:srgbClr val="212121"/>
-                          </a:solidFill>
-                          <a:latin typeface="맑은 고딕"/>
-                        </a:rPr>
-                        <a:t>vuln 0.45</a:t>
-                      </a:r>
-                    </a:p>
-                  </a:txBody>
-                  <a:tcPr/>
-                </a:tc>
-                <a:tc>
-                  <a:txBody>
-                    <a:bodyPr/>
-                    <a:lstStyle/>
-                    <a:p>
-                      <a:pPr algn="ctr"/>
-                      <a:r>
-                        <a:rPr sz="1400" b="1">
-                          <a:solidFill>
-                            <a:srgbClr val="212121"/>
-                          </a:solidFill>
-                          <a:latin typeface="맑은 고딕"/>
-                        </a:rPr>
-                        <a:t>0.567</a:t>
-                      </a:r>
-                    </a:p>
-                  </a:txBody>
-                  <a:tcPr/>
-                </a:tc>
-                <a:tc>
-                  <a:txBody>
-                    <a:bodyPr/>
-                    <a:lstStyle/>
-                    <a:p>
-                      <a:pPr algn="ctr"/>
-                      <a:r>
-                        <a:rPr sz="1400" b="1">
-                          <a:solidFill>
-                            <a:srgbClr val="212121"/>
-                          </a:solidFill>
-                          <a:latin typeface="맑은 고딕"/>
-                        </a:rPr>
-                        <a:t>4곳 독점</a:t>
-                      </a:r>
-                    </a:p>
-                  </a:txBody>
-                  <a:tcPr/>
-                </a:tc>
-              </a:tr>
-              <a:tr h="512064">
-                <a:tc>
-                  <a:txBody>
-                    <a:bodyPr/>
-                    <a:lstStyle/>
-                    <a:p>
-                      <a:pPr algn="ctr"/>
-                      <a:r>
-                        <a:rPr sz="1400" b="0">
-                          <a:solidFill>
-                            <a:srgbClr val="212121"/>
-                          </a:solidFill>
-                          <a:latin typeface="맑은 고딕"/>
-                        </a:rPr>
-                        <a:t>폭염 중시</a:t>
-                      </a:r>
-                    </a:p>
-                  </a:txBody>
-                  <a:tcPr/>
-                </a:tc>
-                <a:tc>
-                  <a:txBody>
-                    <a:bodyPr/>
-                    <a:lstStyle/>
-                    <a:p>
-                      <a:pPr algn="ctr"/>
-                      <a:r>
-                        <a:rPr sz="1400" b="0">
-                          <a:solidFill>
-                            <a:srgbClr val="212121"/>
-                          </a:solidFill>
-                          <a:latin typeface="맑은 고딕"/>
-                        </a:rPr>
-                        <a:t>lst 0.45</a:t>
-                      </a:r>
-                    </a:p>
-                  </a:txBody>
-                  <a:tcPr/>
-                </a:tc>
-                <a:tc>
-                  <a:txBody>
-                    <a:bodyPr/>
-                    <a:lstStyle/>
-                    <a:p>
-                      <a:pPr algn="ctr"/>
-                      <a:r>
-                        <a:rPr sz="1400" b="0">
-                          <a:solidFill>
-                            <a:srgbClr val="212121"/>
-                          </a:solidFill>
-                          <a:latin typeface="맑은 고딕"/>
-                        </a:rPr>
-                        <a:t>0.617</a:t>
-                      </a:r>
-                    </a:p>
-                  </a:txBody>
-                  <a:tcPr/>
-                </a:tc>
-                <a:tc>
-                  <a:txBody>
-                    <a:bodyPr/>
-                    <a:lstStyle/>
-                    <a:p>
-                      <a:pPr algn="ctr"/>
-                      <a:r>
-                        <a:rPr sz="1400" b="0">
-                          <a:solidFill>
-                            <a:srgbClr val="212121"/>
-                          </a:solidFill>
-                          <a:latin typeface="맑은 고딕"/>
-                        </a:rPr>
-                        <a:t>0곳</a:t>
-                      </a:r>
-                    </a:p>
-                  </a:txBody>
-                  <a:tcPr/>
-                </a:tc>
-              </a:tr>
-              <a:tr h="512064">
-                <a:tc>
-                  <a:txBody>
-                    <a:bodyPr/>
-                    <a:lstStyle/>
-                    <a:p>
-                      <a:pPr algn="ctr"/>
-                      <a:r>
-                        <a:rPr sz="1400" b="1">
-                          <a:solidFill>
-                            <a:srgbClr val="212121"/>
-                          </a:solidFill>
-                          <a:latin typeface="맑은 고딕"/>
-                        </a:rPr>
-                        <a:t>유동인구 중시</a:t>
-                      </a:r>
-                    </a:p>
-                  </a:txBody>
-                  <a:tcPr/>
-                </a:tc>
-                <a:tc>
-                  <a:txBody>
-                    <a:bodyPr/>
-                    <a:lstStyle/>
-                    <a:p>
-                      <a:pPr algn="ctr"/>
-                      <a:r>
-                        <a:rPr sz="1400" b="1">
-                          <a:solidFill>
-                            <a:srgbClr val="212121"/>
-                          </a:solidFill>
-                          <a:latin typeface="맑은 고딕"/>
-                        </a:rPr>
-                        <a:t>pop 0.45</a:t>
-                      </a:r>
-                    </a:p>
-                  </a:txBody>
-                  <a:tcPr/>
-                </a:tc>
-                <a:tc>
-                  <a:txBody>
-                    <a:bodyPr/>
-                    <a:lstStyle/>
-                    <a:p>
-                      <a:pPr algn="ctr"/>
-                      <a:r>
-                        <a:rPr sz="1400" b="1">
-                          <a:solidFill>
-                            <a:srgbClr val="212121"/>
-                          </a:solidFill>
-                          <a:latin typeface="맑은 고딕"/>
-                        </a:rPr>
-                        <a:t>0.633</a:t>
-                      </a:r>
-                    </a:p>
-                  </a:txBody>
-                  <a:tcPr/>
-                </a:tc>
-                <a:tc>
-                  <a:txBody>
-                    <a:bodyPr/>
-                    <a:lstStyle/>
-                    <a:p>
-                      <a:pPr algn="ctr"/>
-                      <a:r>
-                        <a:rPr sz="1400" b="1">
-                          <a:solidFill>
-                            <a:srgbClr val="212121"/>
-                          </a:solidFill>
-                          <a:latin typeface="맑은 고딕"/>
-                        </a:rPr>
-                        <a:t>3곳 독점</a:t>
-                      </a:r>
-                    </a:p>
-                  </a:txBody>
-                  <a:tcPr/>
-                </a:tc>
-              </a:tr>
-            </a:tbl>
-          </a:graphicData>
-        </a:graphic>
-      </p:graphicFrame>
-      <p:sp>
-        <p:nvSpPr>
-          <p:cNvPr id="6" name="TextBox 5"/>
+              <a:t>딥러닝 zero-shot segmentation으로 동작구 건물 자동 추출</a:t>
+            </a:r>
+          </a:p>
+        </p:txBody>
+      </p:sp>
+      <p:sp>
+        <p:nvSpPr>
+          <p:cNvPr id="5" name="TextBox 4"/>
           <p:cNvSpPr txBox="1"/>
           <p:nvPr/>
         </p:nvSpPr>
         <p:spPr>
           <a:xfrm>
-            <a:off x="685800" y="4572000"/>
-            <a:ext cx="10972800" cy="457200"/>
+            <a:off x="685800" y="1737360"/>
+            <a:ext cx="5943600" cy="4114800"/>
           </a:xfrm>
           <a:prstGeom prst="rect">
             <a:avLst/>
@@ -8510,15 +9360,265 @@
           </a:bodyPr>
           <a:lstStyle/>
           <a:p>
-            <a:pPr algn="l"/>
+            <a:pPr>
+              <a:spcAft>
+                <a:spcPts val="600"/>
+              </a:spcAft>
+            </a:pPr>
+            <a:r>
+              <a:rPr sz="1400" b="0">
+                <a:solidFill>
+                  <a:srgbClr val="212121"/>
+                </a:solidFill>
+                <a:latin typeface="맑은 고딕"/>
+              </a:rPr>
+              <a:t>• V-World WMTS z=15 항공사진 → 동작구 BBOX 48 타일 합성</a:t>
+            </a:r>
+          </a:p>
+          <a:p>
+            <a:pPr>
+              <a:spcAft>
+                <a:spcPts val="600"/>
+              </a:spcAft>
+            </a:pPr>
+            <a:r>
+              <a:rPr sz="1400" b="0">
+                <a:solidFill>
+                  <a:srgbClr val="212121"/>
+                </a:solidFill>
+                <a:latin typeface="맑은 고딕"/>
+              </a:rPr>
+              <a:t>• Mobile-SAM (Meta, 2023) — 40MB 경량 SAM, CPU 추론 가능</a:t>
+            </a:r>
+          </a:p>
+          <a:p>
+            <a:pPr>
+              <a:spcAft>
+                <a:spcPts val="600"/>
+              </a:spcAft>
+            </a:pPr>
+            <a:r>
+              <a:rPr sz="1400" b="0">
+                <a:solidFill>
+                  <a:srgbClr val="212121"/>
+                </a:solidFill>
+                <a:latin typeface="맑은 고딕"/>
+              </a:rPr>
+              <a:t>• 필터: 면적 200~30k px², 종횡비 0.2~5, 평균 밝기 80~220</a:t>
+            </a:r>
+          </a:p>
+          <a:p>
+            <a:pPr>
+              <a:spcAft>
+                <a:spcPts val="600"/>
+              </a:spcAft>
+            </a:pPr>
+            <a:r>
+              <a:rPr sz="1400" b="0">
+                <a:solidFill>
+                  <a:srgbClr val="212121"/>
+                </a:solidFill>
+                <a:latin typeface="맑은 고딕"/>
+              </a:rPr>
+              <a:t>• 결과: 더미 19동 → 실측 30동 자동 추출</a:t>
+            </a:r>
+          </a:p>
+          <a:p>
+            <a:pPr>
+              <a:spcAft>
+                <a:spcPts val="600"/>
+              </a:spcAft>
+            </a:pPr>
+            <a:r>
+              <a:rPr sz="1400" b="0">
+                <a:solidFill>
+                  <a:srgbClr val="212121"/>
+                </a:solidFill>
+                <a:latin typeface="맑은 고딕"/>
+              </a:rPr>
+              <a:t>• 픽셀 → EPSG:3857 → WGS84 polygon 변환 → buildings.geojson</a:t>
+            </a:r>
+          </a:p>
+          <a:p>
+            <a:pPr>
+              <a:spcAft>
+                <a:spcPts val="600"/>
+              </a:spcAft>
+            </a:pPr>
+            <a:r>
+              <a:rPr sz="1400" b="0">
+                <a:solidFill>
+                  <a:srgbClr val="212121"/>
+                </a:solidFill>
+                <a:latin typeface="맑은 고딕"/>
+              </a:rPr>
+              <a:t>• 파이프라인 첫 실행 시 자동 1회, 이후 캐시 사용</a:t>
+            </a:r>
+          </a:p>
+        </p:txBody>
+      </p:sp>
+      <p:sp>
+        <p:nvSpPr>
+          <p:cNvPr id="6" name="Rounded Rectangle 5"/>
+          <p:cNvSpPr/>
+          <p:nvPr/>
+        </p:nvSpPr>
+        <p:spPr>
+          <a:xfrm>
+            <a:off x="6858000" y="1737360"/>
+            <a:ext cx="4846320" cy="4114800"/>
+          </a:xfrm>
+          <a:prstGeom prst="roundRect">
+            <a:avLst/>
+          </a:prstGeom>
+          <a:solidFill>
+            <a:srgbClr val="F5F8FD"/>
+          </a:solidFill>
+          <a:ln w="19050">
+            <a:solidFill>
+              <a:srgbClr val="1E88E5"/>
+            </a:solidFill>
+          </a:ln>
+        </p:spPr>
+        <p:style>
+          <a:lnRef idx="1">
+            <a:schemeClr val="accent1"/>
+          </a:lnRef>
+          <a:fillRef idx="3">
+            <a:schemeClr val="accent1"/>
+          </a:fillRef>
+          <a:effectRef idx="2">
+            <a:schemeClr val="accent1"/>
+          </a:effectRef>
+          <a:fontRef idx="minor">
+            <a:schemeClr val="lt1"/>
+          </a:fontRef>
+        </p:style>
+        <p:txBody>
+          <a:bodyPr rtlCol="0" anchor="ctr" wrap="square" lIns="274320" tIns="274320"/>
+          <a:lstStyle/>
+          <a:p>
+            <a:pPr algn="ctr"/>
             <a:r>
               <a:rPr sz="1400" b="1">
                 <a:solidFill>
-                  <a:srgbClr val="E53935"/>
-                </a:solidFill>
-                <a:latin typeface="맑은 고딕"/>
-              </a:rPr>
-              <a:t>💡 자연그늘 활성화로 고령자 시나리오 최고 Score 0.580 → 0.567 (페널티 의도대로 작동)</a:t>
+                  <a:srgbClr val="1E88E5"/>
+                </a:solidFill>
+                <a:latin typeface="맑은 고딕"/>
+              </a:rPr>
+              <a:t>📁 output/cv_buildings_overlay.png</a:t>
+            </a:r>
+          </a:p>
+          <a:p>
+            <a:pPr>
+              <a:spcBef>
+                <a:spcPts val="200"/>
+              </a:spcBef>
+            </a:pPr>
+            <a:r>
+              <a:rPr sz="1200" b="0">
+                <a:solidFill>
+                  <a:srgbClr val="212121"/>
+                </a:solidFill>
+                <a:latin typeface="맑은 고딕"/>
+              </a:rPr>
+              <a:t/>
+            </a:r>
+          </a:p>
+          <a:p>
+            <a:pPr>
+              <a:spcBef>
+                <a:spcPts val="200"/>
+              </a:spcBef>
+            </a:pPr>
+            <a:r>
+              <a:rPr sz="1200" b="0">
+                <a:solidFill>
+                  <a:srgbClr val="212121"/>
+                </a:solidFill>
+                <a:latin typeface="맑은 고딕"/>
+              </a:rPr>
+              <a:t>위성 이미지 (2048×1536)</a:t>
+            </a:r>
+          </a:p>
+          <a:p>
+            <a:pPr>
+              <a:spcBef>
+                <a:spcPts val="200"/>
+              </a:spcBef>
+            </a:pPr>
+            <a:r>
+              <a:rPr sz="1200" b="0">
+                <a:solidFill>
+                  <a:srgbClr val="212121"/>
+                </a:solidFill>
+                <a:latin typeface="맑은 고딕"/>
+              </a:rPr>
+              <a:t>+ SAM 마스크 노란색 오버레이</a:t>
+            </a:r>
+          </a:p>
+          <a:p>
+            <a:pPr>
+              <a:spcBef>
+                <a:spcPts val="200"/>
+              </a:spcBef>
+            </a:pPr>
+            <a:r>
+              <a:rPr sz="1200" b="0">
+                <a:solidFill>
+                  <a:srgbClr val="212121"/>
+                </a:solidFill>
+                <a:latin typeface="맑은 고딕"/>
+              </a:rPr>
+              <a:t>+ 추출 polygon 녹색 외곽선</a:t>
+            </a:r>
+          </a:p>
+          <a:p>
+            <a:pPr>
+              <a:spcBef>
+                <a:spcPts val="200"/>
+              </a:spcBef>
+            </a:pPr>
+            <a:r>
+              <a:rPr sz="1200" b="0">
+                <a:solidFill>
+                  <a:srgbClr val="212121"/>
+                </a:solidFill>
+                <a:latin typeface="맑은 고딕"/>
+              </a:rPr>
+              <a:t/>
+            </a:r>
+          </a:p>
+          <a:p>
+            <a:pPr>
+              <a:spcBef>
+                <a:spcPts val="200"/>
+              </a:spcBef>
+            </a:pPr>
+            <a:r>
+              <a:rPr sz="1200" b="0">
+                <a:solidFill>
+                  <a:srgbClr val="212121"/>
+                </a:solidFill>
+                <a:latin typeface="맑은 고딕"/>
+              </a:rPr>
+              <a:t>30동 분포: 노량진·사당·이수·</a:t>
+            </a:r>
+          </a:p>
+          <a:p>
+            <a:pPr>
+              <a:spcBef>
+                <a:spcPts val="200"/>
+              </a:spcBef>
+            </a:pPr>
+            <a:r>
+              <a:rPr sz="1200" b="0">
+                <a:solidFill>
+                  <a:srgbClr val="212121"/>
+                </a:solidFill>
+                <a:latin typeface="맑은 고딕"/>
+              </a:rPr>
+              <a:t>상도로·장승배기·흑석동</a:t>
             </a:r>
           </a:p>
         </p:txBody>
@@ -8531,8 +9631,8 @@
         </p:nvSpPr>
         <p:spPr>
           <a:xfrm>
-            <a:off x="685800" y="5120640"/>
-            <a:ext cx="10972800" cy="457200"/>
+            <a:off x="457200" y="6400800"/>
+            <a:ext cx="9144000" cy="365760"/>
           </a:xfrm>
           <a:prstGeom prst="rect">
             <a:avLst/>
@@ -8547,13 +9647,13 @@
           <a:p>
             <a:pPr algn="l"/>
             <a:r>
-              <a:rPr sz="1400" b="0">
+              <a:rPr sz="1000" b="0">
                 <a:solidFill>
                   <a:srgbClr val="555555"/>
                 </a:solidFill>
                 <a:latin typeface="맑은 고딕"/>
               </a:rPr>
-              <a:t>🎯 "정책이 다르면 답도 다르다" — 그러나 어떤 관점에서도 공통으로 추천되는 입지가 존재한다 (다음 슬라이드)</a:t>
+              <a:t>동작구 여름 그늘막 최적 입지 추천 시스템 · 한영재 · 2025961227</a:t>
             </a:r>
           </a:p>
         </p:txBody>
@@ -8566,8 +9666,8 @@
         </p:nvSpPr>
         <p:spPr>
           <a:xfrm>
-            <a:off x="457200" y="6400800"/>
-            <a:ext cx="9144000" cy="365760"/>
+            <a:off x="11247120" y="6400800"/>
+            <a:ext cx="914400" cy="365760"/>
           </a:xfrm>
           <a:prstGeom prst="rect">
             <a:avLst/>
@@ -8580,7 +9680,7 @@
           </a:bodyPr>
           <a:lstStyle/>
           <a:p>
-            <a:pPr algn="l"/>
+            <a:pPr algn="r"/>
             <a:r>
               <a:rPr sz="1000" b="0">
                 <a:solidFill>
@@ -8588,42 +9688,7 @@
                 </a:solidFill>
                 <a:latin typeface="맑은 고딕"/>
               </a:rPr>
-              <a:t>동작구 여름 그늘막 최적 입지 추천 시스템 · 한영재 · 2025961227</a:t>
-            </a:r>
-          </a:p>
-        </p:txBody>
-      </p:sp>
-      <p:sp>
-        <p:nvSpPr>
-          <p:cNvPr id="9" name="TextBox 8"/>
-          <p:cNvSpPr txBox="1"/>
-          <p:nvPr/>
-        </p:nvSpPr>
-        <p:spPr>
-          <a:xfrm>
-            <a:off x="11247120" y="6400800"/>
-            <a:ext cx="914400" cy="365760"/>
-          </a:xfrm>
-          <a:prstGeom prst="rect">
-            <a:avLst/>
-          </a:prstGeom>
-          <a:noFill/>
-        </p:spPr>
-        <p:txBody>
-          <a:bodyPr wrap="square">
-            <a:spAutoFit/>
-          </a:bodyPr>
-          <a:lstStyle/>
-          <a:p>
-            <a:pPr algn="r"/>
-            <a:r>
-              <a:rPr sz="1000" b="0">
-                <a:solidFill>
-                  <a:srgbClr val="555555"/>
-                </a:solidFill>
-                <a:latin typeface="맑은 고딕"/>
-              </a:rPr>
-              <a:t>8 / 12</a:t>
+              <a:t>8 / 14</a:t>
             </a:r>
           </a:p>
         </p:txBody>
@@ -8719,7 +9784,7 @@
                 </a:solidFill>
                 <a:latin typeface="맑은 고딕"/>
               </a:rPr>
-              <a:t>강건 입지 · Robust Location</a:t>
+              <a:t>CV-B · 거리뷰 + SegFormer (CityScapes)</a:t>
             </a:r>
           </a:p>
         </p:txBody>
@@ -8754,32 +9819,133 @@
                 </a:solidFill>
                 <a:latin typeface="맑은 고딕"/>
               </a:rPr>
-              <a:t>4개 시나리오 공통 추천 = 어떤 정책 관점에서도 필수</a:t>
-            </a:r>
-          </a:p>
-        </p:txBody>
-      </p:sp>
-      <p:sp>
-        <p:nvSpPr>
-          <p:cNvPr id="5" name="Rounded Rectangle 4"/>
+              <a:t>지면 시점에서 본 보행 환경을 19-class 의미 분할</a:t>
+            </a:r>
+          </a:p>
+        </p:txBody>
+      </p:sp>
+      <p:sp>
+        <p:nvSpPr>
+          <p:cNvPr id="5" name="TextBox 4"/>
+          <p:cNvSpPr txBox="1"/>
+          <p:nvPr/>
+        </p:nvSpPr>
+        <p:spPr>
+          <a:xfrm>
+            <a:off x="685800" y="1737360"/>
+            <a:ext cx="5943600" cy="4114800"/>
+          </a:xfrm>
+          <a:prstGeom prst="rect">
+            <a:avLst/>
+          </a:prstGeom>
+          <a:noFill/>
+        </p:spPr>
+        <p:txBody>
+          <a:bodyPr wrap="square">
+            <a:spAutoFit/>
+          </a:bodyPr>
+          <a:lstStyle/>
+          <a:p>
+            <a:pPr>
+              <a:spcAft>
+                <a:spcPts val="600"/>
+              </a:spcAft>
+            </a:pPr>
+            <a:r>
+              <a:rPr sz="1400" b="0">
+                <a:solidFill>
+                  <a:srgbClr val="212121"/>
+                </a:solidFill>
+                <a:latin typeface="맑은 고딕"/>
+              </a:rPr>
+              <a:t>• Mapillary 거리뷰 — 동작구 BBOX 4×4 분할 검색 → 1,249장 발견</a:t>
+            </a:r>
+          </a:p>
+          <a:p>
+            <a:pPr>
+              <a:spcAft>
+                <a:spcPts val="600"/>
+              </a:spcAft>
+            </a:pPr>
+            <a:r>
+              <a:rPr sz="1400" b="0">
+                <a:solidFill>
+                  <a:srgbClr val="212121"/>
+                </a:solidFill>
+                <a:latin typeface="맑은 고딕"/>
+              </a:rPr>
+              <a:t>• 후보 19개 격자에 nearest 매핑 → 격자당 ≤3장 다운로드</a:t>
+            </a:r>
+          </a:p>
+          <a:p>
+            <a:pPr>
+              <a:spcAft>
+                <a:spcPts val="600"/>
+              </a:spcAft>
+            </a:pPr>
+            <a:r>
+              <a:rPr sz="1400" b="0">
+                <a:solidFill>
+                  <a:srgbClr val="212121"/>
+                </a:solidFill>
+                <a:latin typeface="맑은 고딕"/>
+              </a:rPr>
+              <a:t>• HuggingFace SegFormer-b0 (CityScapes 19 classes pretrained)</a:t>
+            </a:r>
+          </a:p>
+          <a:p>
+            <a:pPr>
+              <a:spcAft>
+                <a:spcPts val="600"/>
+              </a:spcAft>
+            </a:pPr>
+            <a:r>
+              <a:rPr sz="1400" b="0">
+                <a:solidFill>
+                  <a:srgbClr val="212121"/>
+                </a:solidFill>
+                <a:latin typeface="맑은 고딕"/>
+              </a:rPr>
+              <a:t>• 주요 클래스: building · vegetation · road · sidewalk · sky</a:t>
+            </a:r>
+          </a:p>
+          <a:p>
+            <a:pPr>
+              <a:spcAft>
+                <a:spcPts val="600"/>
+              </a:spcAft>
+            </a:pPr>
+            <a:r>
+              <a:rPr sz="1400" b="0">
+                <a:solidFill>
+                  <a:srgbClr val="212121"/>
+                </a:solidFill>
+                <a:latin typeface="맑은 고딕"/>
+              </a:rPr>
+              <a:t>• Treepedia(MIT)·Place Pulse 류 선행연구의 그늘막 응용</a:t>
+            </a:r>
+          </a:p>
+        </p:txBody>
+      </p:sp>
+      <p:sp>
+        <p:nvSpPr>
+          <p:cNvPr id="6" name="Rounded Rectangle 5"/>
           <p:cNvSpPr/>
           <p:nvPr/>
         </p:nvSpPr>
         <p:spPr>
           <a:xfrm>
-            <a:off x="685800" y="1828800"/>
-            <a:ext cx="3611880" cy="2743200"/>
+            <a:off x="6858000" y="1737360"/>
+            <a:ext cx="4846320" cy="1828800"/>
           </a:xfrm>
           <a:prstGeom prst="roundRect">
             <a:avLst/>
           </a:prstGeom>
           <a:solidFill>
-            <a:srgbClr val="FAFAFA"/>
+            <a:srgbClr val="212121"/>
           </a:solidFill>
-          <a:ln w="31750">
-            <a:solidFill>
-              <a:srgbClr val="8E24AA"/>
-            </a:solidFill>
+          <a:ln>
+            <a:noFill/>
           </a:ln>
         </p:spPr>
         <p:style>
@@ -8802,85 +9968,73 @@
           <a:p>
             <a:pPr algn="ctr"/>
             <a:r>
-              <a:rPr sz="1600" b="1">
-                <a:solidFill>
-                  <a:srgbClr val="8E24AA"/>
-                </a:solidFill>
-                <a:latin typeface="맑은 고딕"/>
-              </a:rPr>
-              <a:t>#1</a:t>
-            </a:r>
-          </a:p>
-          <a:p>
-            <a:pPr algn="ctr">
-              <a:spcBef>
-                <a:spcPts val="600"/>
-              </a:spcBef>
-            </a:pPr>
-            <a:r>
-              <a:rPr sz="2800" b="1">
-                <a:solidFill>
-                  <a:srgbClr val="212121"/>
-                </a:solidFill>
-                <a:latin typeface="맑은 고딕"/>
-              </a:rPr>
-              <a:t>상도로</a:t>
-            </a:r>
-          </a:p>
-          <a:p>
-            <a:pPr algn="ctr">
-              <a:spcBef>
-                <a:spcPts val="400"/>
-              </a:spcBef>
-            </a:pPr>
-            <a:r>
-              <a:rPr sz="1600" b="0">
-                <a:solidFill>
-                  <a:srgbClr val="555555"/>
-                </a:solidFill>
-                <a:latin typeface="맑은 고딕"/>
-              </a:rPr>
-              <a:t>상도3동 주거밀집</a:t>
-            </a:r>
-          </a:p>
-          <a:p>
-            <a:pPr algn="ctr">
-              <a:spcBef>
-                <a:spcPts val="1000"/>
-              </a:spcBef>
-            </a:pPr>
+              <a:rPr sz="1400" b="1">
+                <a:solidFill>
+                  <a:srgbClr val="FFEE58"/>
+                </a:solidFill>
+                <a:latin typeface="맑은 고딕"/>
+              </a:rPr>
+              <a:t>그늘 결핍 지수</a:t>
+            </a:r>
+          </a:p>
+          <a:p>
+            <a:pPr algn="ctr"/>
             <a:r>
               <a:rPr sz="1200" b="0">
                 <a:solidFill>
-                  <a:srgbClr val="555555"/>
-                </a:solidFill>
-                <a:latin typeface="맑은 고딕"/>
-              </a:rPr>
-              <a:t>37.4977, 126.9341</a:t>
-            </a:r>
-          </a:p>
-        </p:txBody>
-      </p:sp>
-      <p:sp>
-        <p:nvSpPr>
-          <p:cNvPr id="6" name="Rounded Rectangle 5"/>
+                  <a:srgbClr val="CCCCCC"/>
+                </a:solidFill>
+                <a:latin typeface="맑은 고딕"/>
+              </a:rPr>
+              <a:t>deficit =</a:t>
+            </a:r>
+          </a:p>
+          <a:p>
+            <a:pPr algn="ctr"/>
+            <a:r>
+              <a:rPr sz="1400" b="1">
+                <a:solidFill>
+                  <a:srgbClr val="FFFFFF"/>
+                </a:solidFill>
+                <a:latin typeface="맑은 고딕"/>
+              </a:rPr>
+              <a:t>(road + sidewalk)</a:t>
+            </a:r>
+          </a:p>
+          <a:p>
+            <a:pPr algn="ctr"/>
+            <a:r>
+              <a:rPr sz="1400" b="1">
+                <a:solidFill>
+                  <a:srgbClr val="FFFFFF"/>
+                </a:solidFill>
+                <a:latin typeface="맑은 고딕"/>
+              </a:rPr>
+              <a:t>× (1 − building − vegetation)</a:t>
+            </a:r>
+          </a:p>
+        </p:txBody>
+      </p:sp>
+      <p:sp>
+        <p:nvSpPr>
+          <p:cNvPr id="7" name="Rounded Rectangle 6"/>
           <p:cNvSpPr/>
           <p:nvPr/>
         </p:nvSpPr>
         <p:spPr>
           <a:xfrm>
-            <a:off x="4434840" y="1828800"/>
-            <a:ext cx="3611880" cy="2743200"/>
+            <a:off x="6858000" y="3749039"/>
+            <a:ext cx="4846320" cy="2103120"/>
           </a:xfrm>
           <a:prstGeom prst="roundRect">
             <a:avLst/>
           </a:prstGeom>
           <a:solidFill>
-            <a:srgbClr val="FAFAFA"/>
+            <a:srgbClr val="FFF4E5"/>
           </a:solidFill>
-          <a:ln w="31750">
+          <a:ln w="19050">
             <a:solidFill>
-              <a:srgbClr val="8E24AA"/>
+              <a:srgbClr val="FB8C00"/>
             </a:solidFill>
           </a:ln>
         </p:spPr>
@@ -8899,168 +10053,66 @@
           </a:fontRef>
         </p:style>
         <p:txBody>
-          <a:bodyPr rtlCol="0" anchor="ctr" wrap="square" lIns="182880" tIns="182880"/>
+          <a:bodyPr rtlCol="0" anchor="ctr" wrap="square" lIns="228600" tIns="182880"/>
           <a:lstStyle/>
           <a:p>
             <a:pPr algn="ctr"/>
             <a:r>
-              <a:rPr sz="1600" b="1">
-                <a:solidFill>
-                  <a:srgbClr val="8E24AA"/>
-                </a:solidFill>
-                <a:latin typeface="맑은 고딕"/>
-              </a:rPr>
-              <a:t>#2</a:t>
-            </a:r>
-          </a:p>
-          <a:p>
-            <a:pPr algn="ctr">
-              <a:spcBef>
-                <a:spcPts val="600"/>
-              </a:spcBef>
-            </a:pPr>
-            <a:r>
-              <a:rPr sz="2800" b="1">
-                <a:solidFill>
-                  <a:srgbClr val="212121"/>
-                </a:solidFill>
-                <a:latin typeface="맑은 고딕"/>
-              </a:rPr>
-              <a:t>상도로</a:t>
-            </a:r>
-          </a:p>
-          <a:p>
-            <a:pPr algn="ctr">
+              <a:rPr sz="1400" b="1">
+                <a:solidFill>
+                  <a:srgbClr val="FB8C00"/>
+                </a:solidFill>
+                <a:latin typeface="맑은 고딕"/>
+              </a:rPr>
+              <a:t>📊 결과</a:t>
+            </a:r>
+          </a:p>
+          <a:p>
+            <a:pPr>
               <a:spcBef>
                 <a:spcPts val="400"/>
               </a:spcBef>
             </a:pPr>
             <a:r>
-              <a:rPr sz="1600" b="0">
-                <a:solidFill>
-                  <a:srgbClr val="555555"/>
-                </a:solidFill>
-                <a:latin typeface="맑은 고딕"/>
-              </a:rPr>
-              <a:t>상도3동 주거밀집</a:t>
-            </a:r>
-          </a:p>
-          <a:p>
-            <a:pPr algn="ctr">
-              <a:spcBef>
-                <a:spcPts val="1000"/>
-              </a:spcBef>
-            </a:pPr>
-            <a:r>
-              <a:rPr sz="1200" b="0">
-                <a:solidFill>
-                  <a:srgbClr val="555555"/>
-                </a:solidFill>
-                <a:latin typeface="맑은 고딕"/>
-              </a:rPr>
-              <a:t>37.4986, 126.9353</a:t>
-            </a:r>
-          </a:p>
-        </p:txBody>
-      </p:sp>
-      <p:sp>
-        <p:nvSpPr>
-          <p:cNvPr id="7" name="Rounded Rectangle 6"/>
-          <p:cNvSpPr/>
-          <p:nvPr/>
-        </p:nvSpPr>
-        <p:spPr>
-          <a:xfrm>
-            <a:off x="8183880" y="1828800"/>
-            <a:ext cx="3611880" cy="2743200"/>
-          </a:xfrm>
-          <a:prstGeom prst="roundRect">
-            <a:avLst/>
-          </a:prstGeom>
-          <a:solidFill>
-            <a:srgbClr val="FAFAFA"/>
-          </a:solidFill>
-          <a:ln w="31750">
-            <a:solidFill>
-              <a:srgbClr val="E53935"/>
-            </a:solidFill>
-          </a:ln>
-        </p:spPr>
-        <p:style>
-          <a:lnRef idx="1">
-            <a:schemeClr val="accent1"/>
-          </a:lnRef>
-          <a:fillRef idx="3">
-            <a:schemeClr val="accent1"/>
-          </a:fillRef>
-          <a:effectRef idx="2">
-            <a:schemeClr val="accent1"/>
-          </a:effectRef>
-          <a:fontRef idx="minor">
-            <a:schemeClr val="lt1"/>
-          </a:fontRef>
-        </p:style>
-        <p:txBody>
-          <a:bodyPr rtlCol="0" anchor="ctr" wrap="square" lIns="182880" tIns="182880"/>
-          <a:lstStyle/>
-          <a:p>
-            <a:pPr algn="ctr"/>
-            <a:r>
-              <a:rPr sz="1600" b="1">
-                <a:solidFill>
-                  <a:srgbClr val="E53935"/>
-                </a:solidFill>
-                <a:latin typeface="맑은 고딕"/>
-              </a:rPr>
-              <a:t>#3</a:t>
-            </a:r>
-          </a:p>
-          <a:p>
-            <a:pPr algn="ctr">
-              <a:spcBef>
-                <a:spcPts val="600"/>
-              </a:spcBef>
-            </a:pPr>
-            <a:r>
-              <a:rPr sz="2800" b="1">
+              <a:rPr sz="1300" b="0">
                 <a:solidFill>
                   <a:srgbClr val="212121"/>
                 </a:solidFill>
                 <a:latin typeface="맑은 고딕"/>
               </a:rPr>
-              <a:t>동작대로</a:t>
-            </a:r>
-          </a:p>
-          <a:p>
-            <a:pPr algn="ctr">
+              <a:t>• TOP10 평균 deficit: 0.127</a:t>
+            </a:r>
+          </a:p>
+          <a:p>
+            <a:pPr>
               <a:spcBef>
                 <a:spcPts val="400"/>
               </a:spcBef>
             </a:pPr>
             <a:r>
-              <a:rPr sz="1600" b="0">
-                <a:solidFill>
-                  <a:srgbClr val="555555"/>
-                </a:solidFill>
-                <a:latin typeface="맑은 고딕"/>
-              </a:rPr>
-              <a:t>사당-이수 축</a:t>
-            </a:r>
-          </a:p>
-          <a:p>
-            <a:pPr algn="ctr">
+              <a:rPr sz="1300" b="0">
+                <a:solidFill>
+                  <a:srgbClr val="212121"/>
+                </a:solidFill>
+                <a:latin typeface="맑은 고딕"/>
+              </a:rPr>
+              <a:t>• Score 식 6번째 피처 통합</a:t>
+            </a:r>
+          </a:p>
+          <a:p>
+            <a:pPr>
               <a:spcBef>
-                <a:spcPts val="1000"/>
+                <a:spcPts val="400"/>
               </a:spcBef>
             </a:pPr>
             <a:r>
-              <a:rPr sz="1200" b="0">
-                <a:solidFill>
-                  <a:srgbClr val="555555"/>
-                </a:solidFill>
-                <a:latin typeface="맑은 고딕"/>
-              </a:rPr>
-              <a:t>37.4907, 126.9647</a:t>
+              <a:rPr sz="1300" b="0">
+                <a:solidFill>
+                  <a:srgbClr val="212121"/>
+                </a:solidFill>
+                <a:latin typeface="맑은 고딕"/>
+              </a:rPr>
+              <a:t>• 신규 시나리오 추가: 보행환경_중시</a:t>
             </a:r>
           </a:p>
         </p:txBody>
@@ -9073,8 +10125,8 @@
         </p:nvSpPr>
         <p:spPr>
           <a:xfrm>
-            <a:off x="685800" y="4937760"/>
-            <a:ext cx="10972800" cy="457200"/>
+            <a:off x="457200" y="6400800"/>
+            <a:ext cx="9144000" cy="365760"/>
           </a:xfrm>
           <a:prstGeom prst="rect">
             <a:avLst/>
@@ -9089,13 +10141,13 @@
           <a:p>
             <a:pPr algn="l"/>
             <a:r>
-              <a:rPr sz="1600" b="1">
-                <a:solidFill>
-                  <a:srgbClr val="1E88E5"/>
-                </a:solidFill>
-                <a:latin typeface="맑은 고딕"/>
-              </a:rPr>
-              <a:t>정책적 함의: 예산 제약 시 이 3곳이 최우선 설치 대상</a:t>
+              <a:rPr sz="1000" b="0">
+                <a:solidFill>
+                  <a:srgbClr val="555555"/>
+                </a:solidFill>
+                <a:latin typeface="맑은 고딕"/>
+              </a:rPr>
+              <a:t>동작구 여름 그늘막 최적 입지 추천 시스템 · 한영재 · 2025961227</a:t>
             </a:r>
           </a:p>
         </p:txBody>
@@ -9108,8 +10160,8 @@
         </p:nvSpPr>
         <p:spPr>
           <a:xfrm>
-            <a:off x="685800" y="5486400"/>
-            <a:ext cx="10972800" cy="457200"/>
+            <a:off x="11247120" y="6400800"/>
+            <a:ext cx="914400" cy="365760"/>
           </a:xfrm>
           <a:prstGeom prst="rect">
             <a:avLst/>
@@ -9122,85 +10174,15 @@
           </a:bodyPr>
           <a:lstStyle/>
           <a:p>
-            <a:pPr algn="l"/>
-            <a:r>
-              <a:rPr sz="1300" b="0">
+            <a:pPr algn="r"/>
+            <a:r>
+              <a:rPr sz="1000" b="0">
                 <a:solidFill>
                   <a:srgbClr val="555555"/>
                 </a:solidFill>
                 <a:latin typeface="맑은 고딕"/>
               </a:rPr>
-              <a:t>자연그늘 활성화로 4 → 3곳 — 식별력이 더 엄격해졌음</a:t>
-            </a:r>
-          </a:p>
-        </p:txBody>
-      </p:sp>
-      <p:sp>
-        <p:nvSpPr>
-          <p:cNvPr id="10" name="TextBox 9"/>
-          <p:cNvSpPr txBox="1"/>
-          <p:nvPr/>
-        </p:nvSpPr>
-        <p:spPr>
-          <a:xfrm>
-            <a:off x="457200" y="6400800"/>
-            <a:ext cx="9144000" cy="365760"/>
-          </a:xfrm>
-          <a:prstGeom prst="rect">
-            <a:avLst/>
-          </a:prstGeom>
-          <a:noFill/>
-        </p:spPr>
-        <p:txBody>
-          <a:bodyPr wrap="square">
-            <a:spAutoFit/>
-          </a:bodyPr>
-          <a:lstStyle/>
-          <a:p>
-            <a:pPr algn="l"/>
-            <a:r>
-              <a:rPr sz="1000" b="0">
-                <a:solidFill>
-                  <a:srgbClr val="555555"/>
-                </a:solidFill>
-                <a:latin typeface="맑은 고딕"/>
-              </a:rPr>
-              <a:t>동작구 여름 그늘막 최적 입지 추천 시스템 · 한영재 · 2025961227</a:t>
-            </a:r>
-          </a:p>
-        </p:txBody>
-      </p:sp>
-      <p:sp>
-        <p:nvSpPr>
-          <p:cNvPr id="11" name="TextBox 10"/>
-          <p:cNvSpPr txBox="1"/>
-          <p:nvPr/>
-        </p:nvSpPr>
-        <p:spPr>
-          <a:xfrm>
-            <a:off x="11247120" y="6400800"/>
-            <a:ext cx="914400" cy="365760"/>
-          </a:xfrm>
-          <a:prstGeom prst="rect">
-            <a:avLst/>
-          </a:prstGeom>
-          <a:noFill/>
-        </p:spPr>
-        <p:txBody>
-          <a:bodyPr wrap="square">
-            <a:spAutoFit/>
-          </a:bodyPr>
-          <a:lstStyle/>
-          <a:p>
-            <a:pPr algn="r"/>
-            <a:r>
-              <a:rPr sz="1000" b="0">
-                <a:solidFill>
-                  <a:srgbClr val="555555"/>
-                </a:solidFill>
-                <a:latin typeface="맑은 고딕"/>
-              </a:rPr>
-              <a:t>9 / 12</a:t>
+              <a:t>9 / 14</a:t>
             </a:r>
           </a:p>
         </p:txBody>

--- a/presentation/동작구_그늘막_최종발표.pptx
+++ b/presentation/동작구_그늘막_최종발표.pptx
@@ -3663,7 +3663,85 @@
                           </a:solidFill>
                           <a:latin typeface="맑은 고딕"/>
                         </a:rPr>
-                        <a:t>0.533</a:t>
+                        <a:t>0.620</a:t>
+                      </a:r>
+                    </a:p>
+                  </a:txBody>
+                  <a:tcPr/>
+                </a:tc>
+                <a:tc>
+                  <a:txBody>
+                    <a:bodyPr/>
+                    <a:lstStyle/>
+                    <a:p>
+                      <a:pPr algn="ctr"/>
+                      <a:r>
+                        <a:rPr sz="1300" b="0">
+                          <a:solidFill>
+                            <a:srgbClr val="212121"/>
+                          </a:solidFill>
+                          <a:latin typeface="맑은 고딕"/>
+                        </a:rPr>
+                        <a:t>0곳</a:t>
+                      </a:r>
+                    </a:p>
+                  </a:txBody>
+                  <a:tcPr/>
+                </a:tc>
+              </a:tr>
+              <a:tr h="457200">
+                <a:tc>
+                  <a:txBody>
+                    <a:bodyPr/>
+                    <a:lstStyle/>
+                    <a:p>
+                      <a:pPr algn="ctr"/>
+                      <a:r>
+                        <a:rPr sz="1300" b="0">
+                          <a:solidFill>
+                            <a:srgbClr val="212121"/>
+                          </a:solidFill>
+                          <a:latin typeface="맑은 고딕"/>
+                        </a:rPr>
+                        <a:t>고령자 중시</a:t>
+                      </a:r>
+                    </a:p>
+                  </a:txBody>
+                  <a:tcPr/>
+                </a:tc>
+                <a:tc>
+                  <a:txBody>
+                    <a:bodyPr/>
+                    <a:lstStyle/>
+                    <a:p>
+                      <a:pPr algn="ctr"/>
+                      <a:r>
+                        <a:rPr sz="1300" b="0">
+                          <a:solidFill>
+                            <a:srgbClr val="212121"/>
+                          </a:solidFill>
+                          <a:latin typeface="맑은 고딕"/>
+                        </a:rPr>
+                        <a:t>vuln 0.40</a:t>
+                      </a:r>
+                    </a:p>
+                  </a:txBody>
+                  <a:tcPr/>
+                </a:tc>
+                <a:tc>
+                  <a:txBody>
+                    <a:bodyPr/>
+                    <a:lstStyle/>
+                    <a:p>
+                      <a:pPr algn="ctr"/>
+                      <a:r>
+                        <a:rPr sz="1300" b="0">
+                          <a:solidFill>
+                            <a:srgbClr val="212121"/>
+                          </a:solidFill>
+                          <a:latin typeface="맑은 고딕"/>
+                        </a:rPr>
+                        <a:t>0.585</a:t>
                       </a:r>
                     </a:p>
                   </a:txBody>
@@ -3703,7 +3781,7 @@
                           </a:solidFill>
                           <a:latin typeface="맑은 고딕"/>
                         </a:rPr>
-                        <a:t>고령자 중시</a:t>
+                        <a:t>폭염 중시</a:t>
                       </a:r>
                     </a:p>
                   </a:txBody>
@@ -3722,7 +3800,7 @@
                           </a:solidFill>
                           <a:latin typeface="맑은 고딕"/>
                         </a:rPr>
-                        <a:t>vuln 0.40</a:t>
+                        <a:t>lst 0.40</a:t>
                       </a:r>
                     </a:p>
                   </a:txBody>
@@ -3741,7 +3819,7 @@
                           </a:solidFill>
                           <a:latin typeface="맑은 고딕"/>
                         </a:rPr>
-                        <a:t>0.585</a:t>
+                        <a:t>0.664</a:t>
                       </a:r>
                     </a:p>
                   </a:txBody>
@@ -3760,85 +3838,7 @@
                           </a:solidFill>
                           <a:latin typeface="맑은 고딕"/>
                         </a:rPr>
-                        <a:t>3곳 독점</a:t>
-                      </a:r>
-                    </a:p>
-                  </a:txBody>
-                  <a:tcPr/>
-                </a:tc>
-              </a:tr>
-              <a:tr h="457200">
-                <a:tc>
-                  <a:txBody>
-                    <a:bodyPr/>
-                    <a:lstStyle/>
-                    <a:p>
-                      <a:pPr algn="ctr"/>
-                      <a:r>
-                        <a:rPr sz="1300" b="0">
-                          <a:solidFill>
-                            <a:srgbClr val="212121"/>
-                          </a:solidFill>
-                          <a:latin typeface="맑은 고딕"/>
-                        </a:rPr>
-                        <a:t>폭염 중시</a:t>
-                      </a:r>
-                    </a:p>
-                  </a:txBody>
-                  <a:tcPr/>
-                </a:tc>
-                <a:tc>
-                  <a:txBody>
-                    <a:bodyPr/>
-                    <a:lstStyle/>
-                    <a:p>
-                      <a:pPr algn="ctr"/>
-                      <a:r>
-                        <a:rPr sz="1300" b="0">
-                          <a:solidFill>
-                            <a:srgbClr val="212121"/>
-                          </a:solidFill>
-                          <a:latin typeface="맑은 고딕"/>
-                        </a:rPr>
-                        <a:t>lst 0.40</a:t>
-                      </a:r>
-                    </a:p>
-                  </a:txBody>
-                  <a:tcPr/>
-                </a:tc>
-                <a:tc>
-                  <a:txBody>
-                    <a:bodyPr/>
-                    <a:lstStyle/>
-                    <a:p>
-                      <a:pPr algn="ctr"/>
-                      <a:r>
-                        <a:rPr sz="1300" b="0">
-                          <a:solidFill>
-                            <a:srgbClr val="212121"/>
-                          </a:solidFill>
-                          <a:latin typeface="맑은 고딕"/>
-                        </a:rPr>
-                        <a:t>0.577</a:t>
-                      </a:r>
-                    </a:p>
-                  </a:txBody>
-                  <a:tcPr/>
-                </a:tc>
-                <a:tc>
-                  <a:txBody>
-                    <a:bodyPr/>
-                    <a:lstStyle/>
-                    <a:p>
-                      <a:pPr algn="ctr"/>
-                      <a:r>
-                        <a:rPr sz="1300" b="0">
-                          <a:solidFill>
-                            <a:srgbClr val="212121"/>
-                          </a:solidFill>
-                          <a:latin typeface="맑은 고딕"/>
-                        </a:rPr>
-                        <a:t>0곳</a:t>
+                        <a:t>1곳 독점</a:t>
                       </a:r>
                     </a:p>
                   </a:txBody>
@@ -3897,7 +3897,7 @@
                           </a:solidFill>
                           <a:latin typeface="맑은 고딕"/>
                         </a:rPr>
-                        <a:t>0.610</a:t>
+                        <a:t>0.726</a:t>
                       </a:r>
                     </a:p>
                   </a:txBody>
@@ -3916,7 +3916,7 @@
                           </a:solidFill>
                           <a:latin typeface="맑은 고딕"/>
                         </a:rPr>
-                        <a:t>4곳 독점</a:t>
+                        <a:t>3곳 독점</a:t>
                       </a:r>
                     </a:p>
                   </a:txBody>
@@ -3975,7 +3975,7 @@
                           </a:solidFill>
                           <a:latin typeface="맑은 고딕"/>
                         </a:rPr>
-                        <a:t>0.586</a:t>
+                        <a:t>0.665</a:t>
                       </a:r>
                     </a:p>
                   </a:txBody>
@@ -4284,8 +4284,8 @@
         </p:nvSpPr>
         <p:spPr>
           <a:xfrm>
-            <a:off x="1828800" y="1828800"/>
-            <a:ext cx="4114800" cy="3200400"/>
+            <a:off x="685800" y="1828800"/>
+            <a:ext cx="3611880" cy="2926080"/>
           </a:xfrm>
           <a:prstGeom prst="roundRect">
             <a:avLst/>
@@ -4293,7 +4293,7 @@
           <a:solidFill>
             <a:srgbClr val="FAFAFA"/>
           </a:solidFill>
-          <a:ln w="38100">
+          <a:ln w="31750">
             <a:solidFill>
               <a:srgbClr val="E53935"/>
             </a:solidFill>
@@ -4319,29 +4319,13 @@
           <a:p>
             <a:pPr algn="ctr"/>
             <a:r>
-              <a:rPr sz="1800" b="1">
+              <a:rPr sz="1600" b="1">
                 <a:solidFill>
                   <a:srgbClr val="E53935"/>
                 </a:solidFill>
                 <a:latin typeface="맑은 고딕"/>
               </a:rPr>
               <a:t>#1</a:t>
-            </a:r>
-          </a:p>
-          <a:p>
-            <a:pPr algn="ctr">
-              <a:spcBef>
-                <a:spcPts val="1000"/>
-              </a:spcBef>
-            </a:pPr>
-            <a:r>
-              <a:rPr sz="3200" b="1">
-                <a:solidFill>
-                  <a:srgbClr val="212121"/>
-                </a:solidFill>
-                <a:latin typeface="맑은 고딕"/>
-              </a:rPr>
-              <a:t>동작대로</a:t>
             </a:r>
           </a:p>
           <a:p>
@@ -4351,23 +4335,39 @@
               </a:spcBef>
             </a:pPr>
             <a:r>
-              <a:rPr sz="1800" b="0">
-                <a:solidFill>
-                  <a:srgbClr val="555555"/>
-                </a:solidFill>
-                <a:latin typeface="맑은 고딕"/>
-              </a:rPr>
-              <a:t>사당-이수 축</a:t>
+              <a:rPr sz="2800" b="1">
+                <a:solidFill>
+                  <a:srgbClr val="212121"/>
+                </a:solidFill>
+                <a:latin typeface="맑은 고딕"/>
+              </a:rPr>
+              <a:t>동작대로</a:t>
             </a:r>
           </a:p>
           <a:p>
             <a:pPr algn="ctr">
               <a:spcBef>
-                <a:spcPts val="1500"/>
+                <a:spcPts val="600"/>
               </a:spcBef>
             </a:pPr>
             <a:r>
-              <a:rPr sz="1300" b="0">
+              <a:rPr sz="1600" b="0">
+                <a:solidFill>
+                  <a:srgbClr val="555555"/>
+                </a:solidFill>
+                <a:latin typeface="맑은 고딕"/>
+              </a:rPr>
+              <a:t>사당-이수 축</a:t>
+            </a:r>
+          </a:p>
+          <a:p>
+            <a:pPr algn="ctr">
+              <a:spcBef>
+                <a:spcPts val="1200"/>
+              </a:spcBef>
+            </a:pPr>
+            <a:r>
+              <a:rPr sz="1200" b="0">
                 <a:solidFill>
                   <a:srgbClr val="555555"/>
                 </a:solidFill>
@@ -4386,8 +4386,8 @@
         </p:nvSpPr>
         <p:spPr>
           <a:xfrm>
-            <a:off x="6309360" y="1828800"/>
-            <a:ext cx="4114800" cy="3200400"/>
+            <a:off x="4434840" y="1828800"/>
+            <a:ext cx="3611880" cy="2926080"/>
           </a:xfrm>
           <a:prstGeom prst="roundRect">
             <a:avLst/>
@@ -4395,7 +4395,7 @@
           <a:solidFill>
             <a:srgbClr val="FAFAFA"/>
           </a:solidFill>
-          <a:ln w="38100">
+          <a:ln w="31750">
             <a:solidFill>
               <a:srgbClr val="E53935"/>
             </a:solidFill>
@@ -4421,29 +4421,13 @@
           <a:p>
             <a:pPr algn="ctr"/>
             <a:r>
-              <a:rPr sz="1800" b="1">
+              <a:rPr sz="1600" b="1">
                 <a:solidFill>
                   <a:srgbClr val="E53935"/>
                 </a:solidFill>
                 <a:latin typeface="맑은 고딕"/>
               </a:rPr>
               <a:t>#2</a:t>
-            </a:r>
-          </a:p>
-          <a:p>
-            <a:pPr algn="ctr">
-              <a:spcBef>
-                <a:spcPts val="1000"/>
-              </a:spcBef>
-            </a:pPr>
-            <a:r>
-              <a:rPr sz="3200" b="1">
-                <a:solidFill>
-                  <a:srgbClr val="212121"/>
-                </a:solidFill>
-                <a:latin typeface="맑은 고딕"/>
-              </a:rPr>
-              <a:t>동작대로</a:t>
             </a:r>
           </a:p>
           <a:p>
@@ -4453,28 +4437,44 @@
               </a:spcBef>
             </a:pPr>
             <a:r>
-              <a:rPr sz="1800" b="0">
-                <a:solidFill>
-                  <a:srgbClr val="555555"/>
-                </a:solidFill>
-                <a:latin typeface="맑은 고딕"/>
-              </a:rPr>
-              <a:t>사당역 인근</a:t>
+              <a:rPr sz="2800" b="1">
+                <a:solidFill>
+                  <a:srgbClr val="212121"/>
+                </a:solidFill>
+                <a:latin typeface="맑은 고딕"/>
+              </a:rPr>
+              <a:t>동작대로</a:t>
             </a:r>
           </a:p>
           <a:p>
             <a:pPr algn="ctr">
               <a:spcBef>
-                <a:spcPts val="1500"/>
+                <a:spcPts val="600"/>
               </a:spcBef>
             </a:pPr>
             <a:r>
-              <a:rPr sz="1300" b="0">
+              <a:rPr sz="1600" b="0">
                 <a:solidFill>
                   <a:srgbClr val="555555"/>
                 </a:solidFill>
                 <a:latin typeface="맑은 고딕"/>
               </a:rPr>
+              <a:t>사당역 인근</a:t>
+            </a:r>
+          </a:p>
+          <a:p>
+            <a:pPr algn="ctr">
+              <a:spcBef>
+                <a:spcPts val="1200"/>
+              </a:spcBef>
+            </a:pPr>
+            <a:r>
+              <a:rPr sz="1200" b="0">
+                <a:solidFill>
+                  <a:srgbClr val="555555"/>
+                </a:solidFill>
+                <a:latin typeface="맑은 고딕"/>
+              </a:rPr>
               <a:t>37.4898, 126.9670</a:t>
             </a:r>
           </a:p>
@@ -4482,13 +4482,115 @@
       </p:sp>
       <p:sp>
         <p:nvSpPr>
-          <p:cNvPr id="7" name="TextBox 6"/>
+          <p:cNvPr id="7" name="Rounded Rectangle 6"/>
+          <p:cNvSpPr/>
+          <p:nvPr/>
+        </p:nvSpPr>
+        <p:spPr>
+          <a:xfrm>
+            <a:off x="8183880" y="1828800"/>
+            <a:ext cx="3611880" cy="2926080"/>
+          </a:xfrm>
+          <a:prstGeom prst="roundRect">
+            <a:avLst/>
+          </a:prstGeom>
+          <a:solidFill>
+            <a:srgbClr val="FAFAFA"/>
+          </a:solidFill>
+          <a:ln w="31750">
+            <a:solidFill>
+              <a:srgbClr val="8E24AA"/>
+            </a:solidFill>
+          </a:ln>
+        </p:spPr>
+        <p:style>
+          <a:lnRef idx="1">
+            <a:schemeClr val="accent1"/>
+          </a:lnRef>
+          <a:fillRef idx="3">
+            <a:schemeClr val="accent1"/>
+          </a:fillRef>
+          <a:effectRef idx="2">
+            <a:schemeClr val="accent1"/>
+          </a:effectRef>
+          <a:fontRef idx="minor">
+            <a:schemeClr val="lt1"/>
+          </a:fontRef>
+        </p:style>
+        <p:txBody>
+          <a:bodyPr rtlCol="0" anchor="ctr" wrap="square" lIns="182880" tIns="274320"/>
+          <a:lstStyle/>
+          <a:p>
+            <a:pPr algn="ctr"/>
+            <a:r>
+              <a:rPr sz="1600" b="1">
+                <a:solidFill>
+                  <a:srgbClr val="8E24AA"/>
+                </a:solidFill>
+                <a:latin typeface="맑은 고딕"/>
+              </a:rPr>
+              <a:t>#3</a:t>
+            </a:r>
+          </a:p>
+          <a:p>
+            <a:pPr algn="ctr">
+              <a:spcBef>
+                <a:spcPts val="800"/>
+              </a:spcBef>
+            </a:pPr>
+            <a:r>
+              <a:rPr sz="2800" b="1">
+                <a:solidFill>
+                  <a:srgbClr val="212121"/>
+                </a:solidFill>
+                <a:latin typeface="맑은 고딕"/>
+              </a:rPr>
+              <a:t>흑석동</a:t>
+            </a:r>
+          </a:p>
+          <a:p>
+            <a:pPr algn="ctr">
+              <a:spcBef>
+                <a:spcPts val="600"/>
+              </a:spcBef>
+            </a:pPr>
+            <a:r>
+              <a:rPr sz="1600" b="0">
+                <a:solidFill>
+                  <a:srgbClr val="555555"/>
+                </a:solidFill>
+                <a:latin typeface="맑은 고딕"/>
+              </a:rPr>
+              <a:t>한강변 주거밀집</a:t>
+            </a:r>
+          </a:p>
+          <a:p>
+            <a:pPr algn="ctr">
+              <a:spcBef>
+                <a:spcPts val="1200"/>
+              </a:spcBef>
+            </a:pPr>
+            <a:r>
+              <a:rPr sz="1200" b="0">
+                <a:solidFill>
+                  <a:srgbClr val="555555"/>
+                </a:solidFill>
+                <a:latin typeface="맑은 고딕"/>
+              </a:rPr>
+              <a:t>37.5068, 126.9567</a:t>
+            </a:r>
+          </a:p>
+        </p:txBody>
+      </p:sp>
+      <p:sp>
+        <p:nvSpPr>
+          <p:cNvPr id="8" name="TextBox 7"/>
           <p:cNvSpPr txBox="1"/>
           <p:nvPr/>
         </p:nvSpPr>
         <p:spPr>
           <a:xfrm>
-            <a:off x="685800" y="5303520"/>
+            <a:off x="685800" y="5029200"/>
             <a:ext cx="10972800" cy="457200"/>
           </a:xfrm>
           <a:prstGeom prst="rect">
@@ -4510,20 +4612,20 @@
                 </a:solidFill>
                 <a:latin typeface="맑은 고딕"/>
               </a:rPr>
-              <a:t>정책적 함의: 예산 제약 시 이 2곳이 최우선 설치 대상</a:t>
-            </a:r>
-          </a:p>
-        </p:txBody>
-      </p:sp>
-      <p:sp>
-        <p:nvSpPr>
-          <p:cNvPr id="8" name="TextBox 7"/>
+              <a:t>정책적 함의: 예산 제약 시 이 3곳이 최우선 설치 대상</a:t>
+            </a:r>
+          </a:p>
+        </p:txBody>
+      </p:sp>
+      <p:sp>
+        <p:nvSpPr>
+          <p:cNvPr id="9" name="TextBox 8"/>
           <p:cNvSpPr txBox="1"/>
           <p:nvPr/>
         </p:nvSpPr>
         <p:spPr>
           <a:xfrm>
-            <a:off x="685800" y="5852160"/>
+            <a:off x="685800" y="5577840"/>
             <a:ext cx="10972800" cy="457200"/>
           </a:xfrm>
           <a:prstGeom prst="rect">
@@ -4545,14 +4647,14 @@
                 </a:solidFill>
                 <a:latin typeface="맑은 고딕"/>
               </a:rPr>
-              <a:t>CV-B 보행환경 시나리오까지 통과한 입지 → 더 까다로운 검증 통과</a:t>
-            </a:r>
-          </a:p>
-        </p:txBody>
-      </p:sp>
-      <p:sp>
-        <p:nvSpPr>
-          <p:cNvPr id="9" name="TextBox 8"/>
+              <a:t>CV-B 보행환경 시나리오까지 통과 → 환승 축 2곳 + 흑석동 주거 1곳</a:t>
+            </a:r>
+          </a:p>
+        </p:txBody>
+      </p:sp>
+      <p:sp>
+        <p:nvSpPr>
+          <p:cNvPr id="10" name="TextBox 9"/>
           <p:cNvSpPr txBox="1"/>
           <p:nvPr/>
         </p:nvSpPr>
@@ -4587,7 +4689,7 @@
       </p:sp>
       <p:sp>
         <p:nvSpPr>
-          <p:cNvPr id="10" name="TextBox 9"/>
+          <p:cNvPr id="11" name="TextBox 10"/>
           <p:cNvSpPr txBox="1"/>
           <p:nvPr/>
         </p:nvSpPr>
@@ -6053,7 +6155,7 @@
                 </a:solidFill>
                 <a:latin typeface="맑은 고딕"/>
               </a:rPr>
-              <a:t>5가지 정책 관점 모두에서 살아남는 강건 입지 2곳을 찾아냈다.</a:t>
+              <a:t>5가지 정책 관점 모두에서 살아남는 강건 입지 3곳을 찾아냈다.</a:t>
             </a:r>
           </a:p>
           <a:p>
@@ -9858,7 +9960,7 @@
                 </a:solidFill>
                 <a:latin typeface="맑은 고딕"/>
               </a:rPr>
-              <a:t>• Mapillary 거리뷰 — 동작구 BBOX 4×4 분할 검색 → 1,249장 발견</a:t>
+              <a:t>• Mapillary 거리뷰 — 동작구 BBOX 4×4 분할 검색 → 1,302장 발견</a:t>
             </a:r>
           </a:p>
           <a:p>
@@ -10080,7 +10182,7 @@
                 </a:solidFill>
                 <a:latin typeface="맑은 고딕"/>
               </a:rPr>
-              <a:t>• TOP10 평균 deficit: 0.127</a:t>
+              <a:t>• TOP10 평균 deficit: 0.190</a:t>
             </a:r>
           </a:p>
           <a:p>
@@ -10112,7 +10214,7 @@
                 </a:solidFill>
                 <a:latin typeface="맑은 고딕"/>
               </a:rPr>
-              <a:t>• 신규 시나리오 추가: 보행환경_중시</a:t>
+              <a:t>• 강건 입지 +1: 흑석동 (CV-B 부각)</a:t>
             </a:r>
           </a:p>
         </p:txBody>

--- a/presentation/동작구_그늘막_최종발표.pptx
+++ b/presentation/동작구_그늘막_최종발표.pptx
@@ -3517,7 +3517,7 @@
                 <a:gridCol w="1828800"/>
                 <a:gridCol w="2743200"/>
               </a:tblGrid>
-              <a:tr h="457200">
+              <a:tr h="391885">
                 <a:tc>
                   <a:txBody>
                     <a:bodyPr/>
@@ -3611,7 +3611,7 @@
                   </a:tcPr>
                 </a:tc>
               </a:tr>
-              <a:tr h="457200">
+              <a:tr h="391885">
                 <a:tc>
                   <a:txBody>
                     <a:bodyPr/>
@@ -3644,7 +3644,7 @@
                           </a:solidFill>
                           <a:latin typeface="맑은 고딕"/>
                         </a:rPr>
-                        <a:t>균형 (25/25/20)</a:t>
+                        <a:t>균형 (22/22/18)</a:t>
                       </a:r>
                     </a:p>
                   </a:txBody>
@@ -3663,7 +3663,7 @@
                           </a:solidFill>
                           <a:latin typeface="맑은 고딕"/>
                         </a:rPr>
-                        <a:t>0.620</a:t>
+                        <a:t>0.551</a:t>
                       </a:r>
                     </a:p>
                   </a:txBody>
@@ -3689,7 +3689,7 @@
                   <a:tcPr/>
                 </a:tc>
               </a:tr>
-              <a:tr h="457200">
+              <a:tr h="391885">
                 <a:tc>
                   <a:txBody>
                     <a:bodyPr/>
@@ -3722,7 +3722,7 @@
                           </a:solidFill>
                           <a:latin typeface="맑은 고딕"/>
                         </a:rPr>
-                        <a:t>vuln 0.40</a:t>
+                        <a:t>vuln 0.38</a:t>
                       </a:r>
                     </a:p>
                   </a:txBody>
@@ -3741,7 +3741,7 @@
                           </a:solidFill>
                           <a:latin typeface="맑은 고딕"/>
                         </a:rPr>
-                        <a:t>0.585</a:t>
+                        <a:t>0.518</a:t>
                       </a:r>
                     </a:p>
                   </a:txBody>
@@ -3767,7 +3767,7 @@
                   <a:tcPr/>
                 </a:tc>
               </a:tr>
-              <a:tr h="457200">
+              <a:tr h="391885">
                 <a:tc>
                   <a:txBody>
                     <a:bodyPr/>
@@ -3800,7 +3800,7 @@
                           </a:solidFill>
                           <a:latin typeface="맑은 고딕"/>
                         </a:rPr>
-                        <a:t>lst 0.40</a:t>
+                        <a:t>lst 0.38</a:t>
                       </a:r>
                     </a:p>
                   </a:txBody>
@@ -3819,7 +3819,7 @@
                           </a:solidFill>
                           <a:latin typeface="맑은 고딕"/>
                         </a:rPr>
-                        <a:t>0.664</a:t>
+                        <a:t>0.607</a:t>
                       </a:r>
                     </a:p>
                   </a:txBody>
@@ -3845,7 +3845,7 @@
                   <a:tcPr/>
                 </a:tc>
               </a:tr>
-              <a:tr h="457200">
+              <a:tr h="391885">
                 <a:tc>
                   <a:txBody>
                     <a:bodyPr/>
@@ -3878,7 +3878,7 @@
                           </a:solidFill>
                           <a:latin typeface="맑은 고딕"/>
                         </a:rPr>
-                        <a:t>pop 0.40</a:t>
+                        <a:t>pop 0.38</a:t>
                       </a:r>
                     </a:p>
                   </a:txBody>
@@ -3897,7 +3897,7 @@
                           </a:solidFill>
                           <a:latin typeface="맑은 고딕"/>
                         </a:rPr>
-                        <a:t>0.726</a:t>
+                        <a:t>0.648</a:t>
                       </a:r>
                     </a:p>
                   </a:txBody>
@@ -3923,7 +3923,7 @@
                   <a:tcPr/>
                 </a:tc>
               </a:tr>
-              <a:tr h="457200">
+              <a:tr h="391885">
                 <a:tc>
                   <a:txBody>
                     <a:bodyPr/>
@@ -3937,7 +3937,7 @@
                           </a:solidFill>
                           <a:latin typeface="맑은 고딕"/>
                         </a:rPr>
-                        <a:t>보행환경 중시 (NEW)</a:t>
+                        <a:t>보행환경 중시</a:t>
                       </a:r>
                     </a:p>
                   </a:txBody>
@@ -3956,7 +3956,7 @@
                           </a:solidFill>
                           <a:latin typeface="맑은 고딕"/>
                         </a:rPr>
-                        <a:t>streetview_deficit 0.40</a:t>
+                        <a:t>streetview_deficit 0.35</a:t>
                       </a:r>
                     </a:p>
                   </a:txBody>
@@ -3975,7 +3975,7 @@
                           </a:solidFill>
                           <a:latin typeface="맑은 고딕"/>
                         </a:rPr>
-                        <a:t>0.665</a:t>
+                        <a:t>0.589</a:t>
                       </a:r>
                     </a:p>
                   </a:txBody>
@@ -4001,6 +4001,84 @@
                   <a:tcPr/>
                 </a:tc>
               </a:tr>
+              <a:tr h="391890">
+                <a:tc>
+                  <a:txBody>
+                    <a:bodyPr/>
+                    <a:lstStyle/>
+                    <a:p>
+                      <a:pPr algn="ctr"/>
+                      <a:r>
+                        <a:rPr sz="1300" b="0">
+                          <a:solidFill>
+                            <a:srgbClr val="212121"/>
+                          </a:solidFill>
+                          <a:latin typeface="맑은 고딕"/>
+                        </a:rPr>
+                        <a:t>교차로 중시 (NEW)</a:t>
+                      </a:r>
+                    </a:p>
+                  </a:txBody>
+                  <a:tcPr/>
+                </a:tc>
+                <a:tc>
+                  <a:txBody>
+                    <a:bodyPr/>
+                    <a:lstStyle/>
+                    <a:p>
+                      <a:pPr algn="ctr"/>
+                      <a:r>
+                        <a:rPr sz="1300" b="0">
+                          <a:solidFill>
+                            <a:srgbClr val="212121"/>
+                          </a:solidFill>
+                          <a:latin typeface="맑은 고딕"/>
+                        </a:rPr>
+                        <a:t>intersection_density 0.30</a:t>
+                      </a:r>
+                    </a:p>
+                  </a:txBody>
+                  <a:tcPr/>
+                </a:tc>
+                <a:tc>
+                  <a:txBody>
+                    <a:bodyPr/>
+                    <a:lstStyle/>
+                    <a:p>
+                      <a:pPr algn="ctr"/>
+                      <a:r>
+                        <a:rPr sz="1300" b="0">
+                          <a:solidFill>
+                            <a:srgbClr val="212121"/>
+                          </a:solidFill>
+                          <a:latin typeface="맑은 고딕"/>
+                        </a:rPr>
+                        <a:t>0.462</a:t>
+                      </a:r>
+                    </a:p>
+                  </a:txBody>
+                  <a:tcPr/>
+                </a:tc>
+                <a:tc>
+                  <a:txBody>
+                    <a:bodyPr/>
+                    <a:lstStyle/>
+                    <a:p>
+                      <a:pPr algn="ctr"/>
+                      <a:r>
+                        <a:rPr sz="1300" b="0">
+                          <a:solidFill>
+                            <a:srgbClr val="212121"/>
+                          </a:solidFill>
+                          <a:latin typeface="맑은 고딕"/>
+                        </a:rPr>
+                        <a:t>0곳</a:t>
+                      </a:r>
+                    </a:p>
+                  </a:txBody>
+                  <a:tcPr/>
+                </a:tc>
+              </a:tr>
             </a:tbl>
           </a:graphicData>
         </a:graphic>
@@ -4284,8 +4362,8 @@
         </p:nvSpPr>
         <p:spPr>
           <a:xfrm>
-            <a:off x="685800" y="1828800"/>
-            <a:ext cx="3611880" cy="2926080"/>
+            <a:off x="2286000" y="1828800"/>
+            <a:ext cx="3657600" cy="2926080"/>
           </a:xfrm>
           <a:prstGeom prst="roundRect">
             <a:avLst/>
@@ -4386,8 +4464,8 @@
         </p:nvSpPr>
         <p:spPr>
           <a:xfrm>
-            <a:off x="4434840" y="1828800"/>
-            <a:ext cx="3611880" cy="2926080"/>
+            <a:off x="6309360" y="1828800"/>
+            <a:ext cx="3657600" cy="2926080"/>
           </a:xfrm>
           <a:prstGeom prst="roundRect">
             <a:avLst/>
@@ -4482,109 +4560,7 @@
       </p:sp>
       <p:sp>
         <p:nvSpPr>
-          <p:cNvPr id="7" name="Rounded Rectangle 6"/>
-          <p:cNvSpPr/>
-          <p:nvPr/>
-        </p:nvSpPr>
-        <p:spPr>
-          <a:xfrm>
-            <a:off x="8183880" y="1828800"/>
-            <a:ext cx="3611880" cy="2926080"/>
-          </a:xfrm>
-          <a:prstGeom prst="roundRect">
-            <a:avLst/>
-          </a:prstGeom>
-          <a:solidFill>
-            <a:srgbClr val="FAFAFA"/>
-          </a:solidFill>
-          <a:ln w="31750">
-            <a:solidFill>
-              <a:srgbClr val="8E24AA"/>
-            </a:solidFill>
-          </a:ln>
-        </p:spPr>
-        <p:style>
-          <a:lnRef idx="1">
-            <a:schemeClr val="accent1"/>
-          </a:lnRef>
-          <a:fillRef idx="3">
-            <a:schemeClr val="accent1"/>
-          </a:fillRef>
-          <a:effectRef idx="2">
-            <a:schemeClr val="accent1"/>
-          </a:effectRef>
-          <a:fontRef idx="minor">
-            <a:schemeClr val="lt1"/>
-          </a:fontRef>
-        </p:style>
-        <p:txBody>
-          <a:bodyPr rtlCol="0" anchor="ctr" wrap="square" lIns="182880" tIns="274320"/>
-          <a:lstStyle/>
-          <a:p>
-            <a:pPr algn="ctr"/>
-            <a:r>
-              <a:rPr sz="1600" b="1">
-                <a:solidFill>
-                  <a:srgbClr val="8E24AA"/>
-                </a:solidFill>
-                <a:latin typeface="맑은 고딕"/>
-              </a:rPr>
-              <a:t>#3</a:t>
-            </a:r>
-          </a:p>
-          <a:p>
-            <a:pPr algn="ctr">
-              <a:spcBef>
-                <a:spcPts val="800"/>
-              </a:spcBef>
-            </a:pPr>
-            <a:r>
-              <a:rPr sz="2800" b="1">
-                <a:solidFill>
-                  <a:srgbClr val="212121"/>
-                </a:solidFill>
-                <a:latin typeface="맑은 고딕"/>
-              </a:rPr>
-              <a:t>흑석동</a:t>
-            </a:r>
-          </a:p>
-          <a:p>
-            <a:pPr algn="ctr">
-              <a:spcBef>
-                <a:spcPts val="600"/>
-              </a:spcBef>
-            </a:pPr>
-            <a:r>
-              <a:rPr sz="1600" b="0">
-                <a:solidFill>
-                  <a:srgbClr val="555555"/>
-                </a:solidFill>
-                <a:latin typeface="맑은 고딕"/>
-              </a:rPr>
-              <a:t>한강변 주거밀집</a:t>
-            </a:r>
-          </a:p>
-          <a:p>
-            <a:pPr algn="ctr">
-              <a:spcBef>
-                <a:spcPts val="1200"/>
-              </a:spcBef>
-            </a:pPr>
-            <a:r>
-              <a:rPr sz="1200" b="0">
-                <a:solidFill>
-                  <a:srgbClr val="555555"/>
-                </a:solidFill>
-                <a:latin typeface="맑은 고딕"/>
-              </a:rPr>
-              <a:t>37.5068, 126.9567</a:t>
-            </a:r>
-          </a:p>
-        </p:txBody>
-      </p:sp>
-      <p:sp>
-        <p:nvSpPr>
-          <p:cNvPr id="8" name="TextBox 7"/>
+          <p:cNvPr id="7" name="TextBox 6"/>
           <p:cNvSpPr txBox="1"/>
           <p:nvPr/>
         </p:nvSpPr>
@@ -4612,14 +4588,14 @@
                 </a:solidFill>
                 <a:latin typeface="맑은 고딕"/>
               </a:rPr>
-              <a:t>정책적 함의: 예산 제약 시 이 3곳이 최우선 설치 대상</a:t>
-            </a:r>
-          </a:p>
-        </p:txBody>
-      </p:sp>
-      <p:sp>
-        <p:nvSpPr>
-          <p:cNvPr id="9" name="TextBox 8"/>
+              <a:t>정책적 함의: 예산 제약 시 이 2곳이 최우선 설치 대상</a:t>
+            </a:r>
+          </a:p>
+        </p:txBody>
+      </p:sp>
+      <p:sp>
+        <p:nvSpPr>
+          <p:cNvPr id="8" name="TextBox 7"/>
           <p:cNvSpPr txBox="1"/>
           <p:nvPr/>
         </p:nvSpPr>
@@ -4647,14 +4623,14 @@
                 </a:solidFill>
                 <a:latin typeface="맑은 고딕"/>
               </a:rPr>
-              <a:t>CV-B 보행환경 시나리오까지 통과 → 환승 축 2곳 + 흑석동 주거 1곳</a:t>
-            </a:r>
-          </a:p>
-        </p:txBody>
-      </p:sp>
-      <p:sp>
-        <p:nvSpPr>
-          <p:cNvPr id="10" name="TextBox 9"/>
+              <a:t>6 시나리오(+ 교차로_중시) 모두 통과 → 검증 차원 한 단계 더 엄격</a:t>
+            </a:r>
+          </a:p>
+        </p:txBody>
+      </p:sp>
+      <p:sp>
+        <p:nvSpPr>
+          <p:cNvPr id="9" name="TextBox 8"/>
           <p:cNvSpPr txBox="1"/>
           <p:nvPr/>
         </p:nvSpPr>
@@ -4689,7 +4665,7 @@
       </p:sp>
       <p:sp>
         <p:nvSpPr>
-          <p:cNvPr id="11" name="TextBox 10"/>
+          <p:cNvPr id="10" name="TextBox 9"/>
           <p:cNvSpPr txBox="1"/>
           <p:nvPr/>
         </p:nvSpPr>
@@ -6155,7 +6131,7 @@
                 </a:solidFill>
                 <a:latin typeface="맑은 고딕"/>
               </a:rPr>
-              <a:t>5가지 정책 관점 모두에서 살아남는 강건 입지 3곳을 찾아냈다.</a:t>
+              <a:t>6가지 정책 관점 모두에서 살아남는 강건 입지 2곳을 찾아냈다.</a:t>
             </a:r>
           </a:p>
           <a:p>
@@ -6165,13 +6141,13 @@
               </a:spcBef>
             </a:pPr>
             <a:r>
-              <a:rPr sz="1200" b="0">
+              <a:rPr sz="1100" b="0">
                 <a:solidFill>
                   <a:srgbClr val="CCCCCC"/>
                 </a:solidFill>
                 <a:latin typeface="맑은 고딕"/>
               </a:rPr>
-              <a:t>— SAM(항공) + SegFormer(거리뷰) + MCDA 가중합 + 시나리오 민감도</a:t>
+              <a:t>— SAM(항공) + SegFormer(거리뷰) + Deep Umbra(DSM) + OSMnx(교차로) + MCDA</a:t>
             </a:r>
           </a:p>
         </p:txBody>
@@ -8192,25 +8168,25 @@
           <a:p>
             <a:pPr algn="ctr"/>
             <a:r>
-              <a:rPr sz="2000" b="1">
+              <a:rPr sz="1800" b="1">
                 <a:solidFill>
                   <a:srgbClr val="FFEE58"/>
                 </a:solidFill>
                 <a:latin typeface="맑은 고딕"/>
               </a:rPr>
-              <a:t>Score = 0.25·popdens + 0.25·lst + 0.20·vuln</a:t>
+              <a:t>Score = 0.22·popdens + 0.22·lst + 0.18·vuln</a:t>
             </a:r>
           </a:p>
           <a:p>
             <a:pPr algn="ctr"/>
             <a:r>
-              <a:rPr sz="2000" b="1">
+              <a:rPr sz="1600" b="1">
                 <a:solidFill>
                   <a:srgbClr val="FFEE58"/>
                 </a:solidFill>
                 <a:latin typeface="맑은 고딕"/>
               </a:rPr>
-              <a:t>− 0.15·shade − 0.05·natural + 0.15·streetview_deficit</a:t>
+              <a:t>− 0.15·shade − 0.05·natural + 0.13·streetview_deficit + 0.10·intersection_density</a:t>
             </a:r>
           </a:p>
         </p:txBody>
@@ -8243,13 +8219,13 @@
               </a:spcAft>
             </a:pPr>
             <a:r>
-              <a:rPr sz="1500" b="0">
+              <a:rPr sz="1300" b="0">
                 <a:solidFill>
                   <a:srgbClr val="212121"/>
                 </a:solidFill>
                 <a:latin typeface="맑은 고딕"/>
               </a:rPr>
-              <a:t>• popdens (+0.25) — 시간대 가중 유동인구 (오후 1~3시 1.0 피크)</a:t>
+              <a:t>• popdens (+0.22) — 시간대 가중 유동인구</a:t>
             </a:r>
           </a:p>
           <a:p>
@@ -8259,13 +8235,13 @@
               </a:spcAft>
             </a:pPr>
             <a:r>
-              <a:rPr sz="1500" b="0">
+              <a:rPr sz="1300" b="0">
                 <a:solidFill>
                   <a:srgbClr val="212121"/>
                 </a:solidFill>
                 <a:latin typeface="맑은 고딕"/>
               </a:rPr>
-              <a:t>• lst (+0.25) — 지표면 온도, 오후 피크 가중 평균</a:t>
+              <a:t>• lst (+0.22) — 지표면 온도, 오후 피크 가중</a:t>
             </a:r>
           </a:p>
           <a:p>
@@ -8275,13 +8251,13 @@
               </a:spcAft>
             </a:pPr>
             <a:r>
-              <a:rPr sz="1500" b="0">
+              <a:rPr sz="1300" b="0">
                 <a:solidFill>
                   <a:srgbClr val="212121"/>
                 </a:solidFill>
                 <a:latin typeface="맑은 고딕"/>
               </a:rPr>
-              <a:t>• vuln (+0.20) — 고령자·어린이 비율 (취약계층)</a:t>
+              <a:t>• vuln (+0.18) — 고령자·어린이 비율</a:t>
             </a:r>
           </a:p>
           <a:p>
@@ -8291,13 +8267,13 @@
               </a:spcAft>
             </a:pPr>
             <a:r>
-              <a:rPr sz="1500" b="0">
+              <a:rPr sz="1300" b="0">
                 <a:solidFill>
                   <a:srgbClr val="212121"/>
                 </a:solidFill>
                 <a:latin typeface="맑은 고딕"/>
               </a:rPr>
-              <a:t>• shade (−0.15) — 기존 그늘막 반경 150m 내 커버리지</a:t>
+              <a:t>• shade (−0.15) — 기존 그늘막 커버리지</a:t>
             </a:r>
           </a:p>
           <a:p>
@@ -8307,13 +8283,13 @@
               </a:spcAft>
             </a:pPr>
             <a:r>
-              <a:rPr sz="1500" b="0">
+              <a:rPr sz="1300" b="0">
                 <a:solidFill>
                   <a:srgbClr val="212121"/>
                 </a:solidFill>
                 <a:latin typeface="맑은 고딕"/>
               </a:rPr>
-              <a:t>• natural (−0.05) — CV-A SAM 추출 건물 그림자 시뮬레이션</a:t>
+              <a:t>• natural (−0.05) — CV-A SAM 건물 + NGII 3,775동 + 흑석동 DSM 누적 (Deep Umbra)</a:t>
             </a:r>
           </a:p>
           <a:p>
@@ -8323,13 +8299,29 @@
               </a:spcAft>
             </a:pPr>
             <a:r>
-              <a:rPr sz="1500" b="0">
+              <a:rPr sz="1300" b="0">
                 <a:solidFill>
                   <a:srgbClr val="212121"/>
                 </a:solidFill>
                 <a:latin typeface="맑은 고딕"/>
               </a:rPr>
-              <a:t>• streetview_deficit (+0.15) — CV-B SegFormer 거리뷰 그늘 결핍 (NEW)</a:t>
+              <a:t>• streetview_deficit (+0.13) — CV-B SegFormer 거리뷰 그늘 결핍</a:t>
+            </a:r>
+          </a:p>
+          <a:p>
+            <a:pPr>
+              <a:spcAft>
+                <a:spcPts val="600"/>
+              </a:spcAft>
+            </a:pPr>
+            <a:r>
+              <a:rPr sz="1300" b="0">
+                <a:solidFill>
+                  <a:srgbClr val="212121"/>
+                </a:solidFill>
+                <a:latin typeface="맑은 고딕"/>
+              </a:rPr>
+              <a:t>• intersection_density (+0.10) — OSMnx walkable highway 교차로 밀도 (NEW)</a:t>
             </a:r>
           </a:p>
         </p:txBody>

--- a/presentation/동작구_그늘막_최종발표.pptx
+++ b/presentation/동작구_그늘막_최종발표.pptx
@@ -19,6 +19,7 @@
     <p:sldId id="267" r:id="rId18"/>
     <p:sldId id="268" r:id="rId19"/>
     <p:sldId id="269" r:id="rId20"/>
+    <p:sldId id="270" r:id="rId21"/>
   </p:sldIdLst>
   <p:sldSz cx="12191695" cy="6858000" type="screen4x3"/>
   <p:notesSz cx="6858000" cy="9144000"/>
@@ -3152,7 +3153,7 @@
         </p:nvSpPr>
         <p:spPr>
           <a:xfrm>
-            <a:off x="914400" y="1828800"/>
+            <a:off x="914400" y="1645920"/>
             <a:ext cx="10332720" cy="914400"/>
           </a:xfrm>
           <a:prstGeom prst="rect">
@@ -3168,7 +3169,7 @@
           <a:p>
             <a:pPr algn="l"/>
             <a:r>
-              <a:rPr sz="4000" b="1">
+              <a:rPr sz="3800" b="1">
                 <a:solidFill>
                   <a:srgbClr val="FFFFFF"/>
                 </a:solidFill>
@@ -3187,7 +3188,7 @@
         </p:nvSpPr>
         <p:spPr>
           <a:xfrm>
-            <a:off x="914400" y="2834640"/>
+            <a:off x="914400" y="2651760"/>
             <a:ext cx="10332720" cy="548640"/>
           </a:xfrm>
           <a:prstGeom prst="rect">
@@ -3203,13 +3204,13 @@
           <a:p>
             <a:pPr algn="l"/>
             <a:r>
-              <a:rPr sz="1800" b="0">
+              <a:rPr sz="1700" b="0">
                 <a:solidFill>
                   <a:srgbClr val="BBBBBB"/>
                 </a:solidFill>
                 <a:latin typeface="맑은 고딕"/>
               </a:rPr>
-              <a:t>채권 트레이더의 다변수 최적화 방법론을 도시 공간 데이터에 이식</a:t>
+              <a:t>MCDA × 컴퓨터비전(SAM·SegFormer) × DSM(Deep Umbra) × OSMnx</a:t>
             </a:r>
           </a:p>
         </p:txBody>
@@ -3222,7 +3223,7 @@
         </p:nvSpPr>
         <p:spPr>
           <a:xfrm>
-            <a:off x="914400" y="3840480"/>
+            <a:off x="914400" y="3657600"/>
             <a:ext cx="1828800" cy="50800"/>
           </a:xfrm>
           <a:prstGeom prst="rect">
@@ -3265,7 +3266,7 @@
         </p:nvSpPr>
         <p:spPr>
           <a:xfrm>
-            <a:off x="914400" y="4114800"/>
+            <a:off x="914400" y="3931920"/>
             <a:ext cx="10058400" cy="365760"/>
           </a:xfrm>
           <a:prstGeom prst="rect">
@@ -3300,7 +3301,7 @@
         </p:nvSpPr>
         <p:spPr>
           <a:xfrm>
-            <a:off x="914400" y="4572000"/>
+            <a:off x="914400" y="4389120"/>
             <a:ext cx="10058400" cy="365760"/>
           </a:xfrm>
           <a:prstGeom prst="rect">
@@ -3335,7 +3336,7 @@
         </p:nvSpPr>
         <p:spPr>
           <a:xfrm>
-            <a:off x="914400" y="5029200"/>
+            <a:off x="914400" y="4937760"/>
             <a:ext cx="10058400" cy="365760"/>
           </a:xfrm>
           <a:prstGeom prst="rect">
@@ -3353,11 +3354,46 @@
             <a:r>
               <a:rPr sz="1200" b="0">
                 <a:solidFill>
+                  <a:srgbClr val="88AEE5"/>
+                </a:solidFill>
+                <a:latin typeface="맑은 고딕"/>
+              </a:rPr>
+              <a:t>Repo: github.com/thgtot92/project_1</a:t>
+            </a:r>
+          </a:p>
+        </p:txBody>
+      </p:sp>
+      <p:sp>
+        <p:nvSpPr>
+          <p:cNvPr id="9" name="TextBox 8"/>
+          <p:cNvSpPr txBox="1"/>
+          <p:nvPr/>
+        </p:nvSpPr>
+        <p:spPr>
+          <a:xfrm>
+            <a:off x="914400" y="5394960"/>
+            <a:ext cx="10058400" cy="365760"/>
+          </a:xfrm>
+          <a:prstGeom prst="rect">
+            <a:avLst/>
+          </a:prstGeom>
+          <a:noFill/>
+        </p:spPr>
+        <p:txBody>
+          <a:bodyPr wrap="square">
+            <a:spAutoFit/>
+          </a:bodyPr>
+          <a:lstStyle/>
+          <a:p>
+            <a:pPr algn="l"/>
+            <a:r>
+              <a:rPr sz="1200" b="0">
+                <a:solidFill>
                   <a:srgbClr val="888888"/>
                 </a:solidFill>
                 <a:latin typeface="맑은 고딕"/>
               </a:rPr>
-              <a:t>2026년 4월</a:t>
+              <a:t>2026년 5월</a:t>
             </a:r>
           </a:p>
         </p:txBody>
@@ -3447,13 +3483,13 @@
           <a:p>
             <a:pPr algn="l"/>
             <a:r>
-              <a:rPr sz="3000" b="1">
+              <a:rPr sz="2800" b="1">
                 <a:solidFill>
                   <a:srgbClr val="212121"/>
                 </a:solidFill>
                 <a:latin typeface="맑은 고딕"/>
               </a:rPr>
-              <a:t>시나리오 민감도 분석 (5개 프리셋)</a:t>
+              <a:t>OSMnx · 교차로 + 횡단보도</a:t>
             </a:r>
           </a:p>
         </p:txBody>
@@ -3482,617 +3518,27 @@
           <a:p>
             <a:pPr algn="l"/>
             <a:r>
-              <a:rPr sz="1400" b="0">
+              <a:rPr sz="1300" b="0">
                 <a:solidFill>
                   <a:srgbClr val="555555"/>
                 </a:solidFill>
                 <a:latin typeface="맑은 고딕"/>
               </a:rPr>
-              <a:t>정책 관점별 가중치 × 동일 피처셋 → TOP 10 변화</a:t>
-            </a:r>
-          </a:p>
-        </p:txBody>
-      </p:sp>
-      <p:graphicFrame>
-        <p:nvGraphicFramePr>
-          <p:cNvPr id="5" name="Table 4"/>
-          <p:cNvGraphicFramePr>
-            <a:graphicFrameLocks noGrp="1"/>
-          </p:cNvGraphicFramePr>
-          <p:nvPr/>
-        </p:nvGraphicFramePr>
-        <p:xfrm>
-          <a:off x="685800" y="1737360"/>
-          <a:ext cx="10972800" cy="2743200"/>
-        </p:xfrm>
-        <a:graphic>
-          <a:graphicData uri="http://schemas.openxmlformats.org/drawingml/2006/table">
-            <a:tbl>
-              <a:tblPr firstRow="1" bandRow="1">
-                <a:tableStyleId>{5C22544A-7EE6-4342-B048-85BDC9FD1C3A}</a:tableStyleId>
-              </a:tblPr>
-              <a:tblGrid>
-                <a:gridCol w="3200400"/>
-                <a:gridCol w="3200400"/>
-                <a:gridCol w="1828800"/>
-                <a:gridCol w="2743200"/>
-              </a:tblGrid>
-              <a:tr h="391885">
-                <a:tc>
-                  <a:txBody>
-                    <a:bodyPr/>
-                    <a:lstStyle/>
-                    <a:p>
-                      <a:pPr algn="ctr"/>
-                      <a:r>
-                        <a:rPr sz="1400" b="1">
-                          <a:solidFill>
-                            <a:srgbClr val="FFFFFF"/>
-                          </a:solidFill>
-                          <a:latin typeface="맑은 고딕"/>
-                        </a:rPr>
-                        <a:t>시나리오</a:t>
-                      </a:r>
-                    </a:p>
-                  </a:txBody>
-                  <a:tcPr>
-                    <a:solidFill>
-                      <a:srgbClr val="1E88E5"/>
-                    </a:solidFill>
-                  </a:tcPr>
-                </a:tc>
-                <a:tc>
-                  <a:txBody>
-                    <a:bodyPr/>
-                    <a:lstStyle/>
-                    <a:p>
-                      <a:pPr algn="ctr"/>
-                      <a:r>
-                        <a:rPr sz="1400" b="1">
-                          <a:solidFill>
-                            <a:srgbClr val="FFFFFF"/>
-                          </a:solidFill>
-                          <a:latin typeface="맑은 고딕"/>
-                        </a:rPr>
-                        <a:t>강조</a:t>
-                      </a:r>
-                    </a:p>
-                  </a:txBody>
-                  <a:tcPr>
-                    <a:solidFill>
-                      <a:srgbClr val="1E88E5"/>
-                    </a:solidFill>
-                  </a:tcPr>
-                </a:tc>
-                <a:tc>
-                  <a:txBody>
-                    <a:bodyPr/>
-                    <a:lstStyle/>
-                    <a:p>
-                      <a:pPr algn="ctr"/>
-                      <a:r>
-                        <a:rPr sz="1400" b="1">
-                          <a:solidFill>
-                            <a:srgbClr val="FFFFFF"/>
-                          </a:solidFill>
-                          <a:latin typeface="맑은 고딕"/>
-                        </a:rPr>
-                        <a:t>최고 Score</a:t>
-                      </a:r>
-                    </a:p>
-                  </a:txBody>
-                  <a:tcPr>
-                    <a:solidFill>
-                      <a:srgbClr val="1E88E5"/>
-                    </a:solidFill>
-                  </a:tcPr>
-                </a:tc>
-                <a:tc>
-                  <a:txBody>
-                    <a:bodyPr/>
-                    <a:lstStyle/>
-                    <a:p>
-                      <a:pPr algn="ctr"/>
-                      <a:r>
-                        <a:rPr sz="1400" b="1">
-                          <a:solidFill>
-                            <a:srgbClr val="FFFFFF"/>
-                          </a:solidFill>
-                          <a:latin typeface="맑은 고딕"/>
-                        </a:rPr>
-                        <a:t>유니크</a:t>
-                      </a:r>
-                    </a:p>
-                  </a:txBody>
-                  <a:tcPr>
-                    <a:solidFill>
-                      <a:srgbClr val="1E88E5"/>
-                    </a:solidFill>
-                  </a:tcPr>
-                </a:tc>
-              </a:tr>
-              <a:tr h="391885">
-                <a:tc>
-                  <a:txBody>
-                    <a:bodyPr/>
-                    <a:lstStyle/>
-                    <a:p>
-                      <a:pPr algn="ctr"/>
-                      <a:r>
-                        <a:rPr sz="1300" b="0">
-                          <a:solidFill>
-                            <a:srgbClr val="212121"/>
-                          </a:solidFill>
-                          <a:latin typeface="맑은 고딕"/>
-                        </a:rPr>
-                        <a:t>기본</a:t>
-                      </a:r>
-                    </a:p>
-                  </a:txBody>
-                  <a:tcPr/>
-                </a:tc>
-                <a:tc>
-                  <a:txBody>
-                    <a:bodyPr/>
-                    <a:lstStyle/>
-                    <a:p>
-                      <a:pPr algn="ctr"/>
-                      <a:r>
-                        <a:rPr sz="1300" b="0">
-                          <a:solidFill>
-                            <a:srgbClr val="212121"/>
-                          </a:solidFill>
-                          <a:latin typeface="맑은 고딕"/>
-                        </a:rPr>
-                        <a:t>균형 (22/22/18)</a:t>
-                      </a:r>
-                    </a:p>
-                  </a:txBody>
-                  <a:tcPr/>
-                </a:tc>
-                <a:tc>
-                  <a:txBody>
-                    <a:bodyPr/>
-                    <a:lstStyle/>
-                    <a:p>
-                      <a:pPr algn="ctr"/>
-                      <a:r>
-                        <a:rPr sz="1300" b="0">
-                          <a:solidFill>
-                            <a:srgbClr val="212121"/>
-                          </a:solidFill>
-                          <a:latin typeface="맑은 고딕"/>
-                        </a:rPr>
-                        <a:t>0.551</a:t>
-                      </a:r>
-                    </a:p>
-                  </a:txBody>
-                  <a:tcPr/>
-                </a:tc>
-                <a:tc>
-                  <a:txBody>
-                    <a:bodyPr/>
-                    <a:lstStyle/>
-                    <a:p>
-                      <a:pPr algn="ctr"/>
-                      <a:r>
-                        <a:rPr sz="1300" b="0">
-                          <a:solidFill>
-                            <a:srgbClr val="212121"/>
-                          </a:solidFill>
-                          <a:latin typeface="맑은 고딕"/>
-                        </a:rPr>
-                        <a:t>0곳</a:t>
-                      </a:r>
-                    </a:p>
-                  </a:txBody>
-                  <a:tcPr/>
-                </a:tc>
-              </a:tr>
-              <a:tr h="391885">
-                <a:tc>
-                  <a:txBody>
-                    <a:bodyPr/>
-                    <a:lstStyle/>
-                    <a:p>
-                      <a:pPr algn="ctr"/>
-                      <a:r>
-                        <a:rPr sz="1300" b="0">
-                          <a:solidFill>
-                            <a:srgbClr val="212121"/>
-                          </a:solidFill>
-                          <a:latin typeface="맑은 고딕"/>
-                        </a:rPr>
-                        <a:t>고령자 중시</a:t>
-                      </a:r>
-                    </a:p>
-                  </a:txBody>
-                  <a:tcPr/>
-                </a:tc>
-                <a:tc>
-                  <a:txBody>
-                    <a:bodyPr/>
-                    <a:lstStyle/>
-                    <a:p>
-                      <a:pPr algn="ctr"/>
-                      <a:r>
-                        <a:rPr sz="1300" b="0">
-                          <a:solidFill>
-                            <a:srgbClr val="212121"/>
-                          </a:solidFill>
-                          <a:latin typeface="맑은 고딕"/>
-                        </a:rPr>
-                        <a:t>vuln 0.38</a:t>
-                      </a:r>
-                    </a:p>
-                  </a:txBody>
-                  <a:tcPr/>
-                </a:tc>
-                <a:tc>
-                  <a:txBody>
-                    <a:bodyPr/>
-                    <a:lstStyle/>
-                    <a:p>
-                      <a:pPr algn="ctr"/>
-                      <a:r>
-                        <a:rPr sz="1300" b="0">
-                          <a:solidFill>
-                            <a:srgbClr val="212121"/>
-                          </a:solidFill>
-                          <a:latin typeface="맑은 고딕"/>
-                        </a:rPr>
-                        <a:t>0.518</a:t>
-                      </a:r>
-                    </a:p>
-                  </a:txBody>
-                  <a:tcPr/>
-                </a:tc>
-                <a:tc>
-                  <a:txBody>
-                    <a:bodyPr/>
-                    <a:lstStyle/>
-                    <a:p>
-                      <a:pPr algn="ctr"/>
-                      <a:r>
-                        <a:rPr sz="1300" b="0">
-                          <a:solidFill>
-                            <a:srgbClr val="212121"/>
-                          </a:solidFill>
-                          <a:latin typeface="맑은 고딕"/>
-                        </a:rPr>
-                        <a:t>0곳</a:t>
-                      </a:r>
-                    </a:p>
-                  </a:txBody>
-                  <a:tcPr/>
-                </a:tc>
-              </a:tr>
-              <a:tr h="391885">
-                <a:tc>
-                  <a:txBody>
-                    <a:bodyPr/>
-                    <a:lstStyle/>
-                    <a:p>
-                      <a:pPr algn="ctr"/>
-                      <a:r>
-                        <a:rPr sz="1300" b="1">
-                          <a:solidFill>
-                            <a:srgbClr val="212121"/>
-                          </a:solidFill>
-                          <a:latin typeface="맑은 고딕"/>
-                        </a:rPr>
-                        <a:t>폭염 중시</a:t>
-                      </a:r>
-                    </a:p>
-                  </a:txBody>
-                  <a:tcPr/>
-                </a:tc>
-                <a:tc>
-                  <a:txBody>
-                    <a:bodyPr/>
-                    <a:lstStyle/>
-                    <a:p>
-                      <a:pPr algn="ctr"/>
-                      <a:r>
-                        <a:rPr sz="1300" b="1">
-                          <a:solidFill>
-                            <a:srgbClr val="212121"/>
-                          </a:solidFill>
-                          <a:latin typeface="맑은 고딕"/>
-                        </a:rPr>
-                        <a:t>lst 0.38</a:t>
-                      </a:r>
-                    </a:p>
-                  </a:txBody>
-                  <a:tcPr/>
-                </a:tc>
-                <a:tc>
-                  <a:txBody>
-                    <a:bodyPr/>
-                    <a:lstStyle/>
-                    <a:p>
-                      <a:pPr algn="ctr"/>
-                      <a:r>
-                        <a:rPr sz="1300" b="1">
-                          <a:solidFill>
-                            <a:srgbClr val="212121"/>
-                          </a:solidFill>
-                          <a:latin typeface="맑은 고딕"/>
-                        </a:rPr>
-                        <a:t>0.607</a:t>
-                      </a:r>
-                    </a:p>
-                  </a:txBody>
-                  <a:tcPr/>
-                </a:tc>
-                <a:tc>
-                  <a:txBody>
-                    <a:bodyPr/>
-                    <a:lstStyle/>
-                    <a:p>
-                      <a:pPr algn="ctr"/>
-                      <a:r>
-                        <a:rPr sz="1300" b="1">
-                          <a:solidFill>
-                            <a:srgbClr val="212121"/>
-                          </a:solidFill>
-                          <a:latin typeface="맑은 고딕"/>
-                        </a:rPr>
-                        <a:t>1곳 독점</a:t>
-                      </a:r>
-                    </a:p>
-                  </a:txBody>
-                  <a:tcPr/>
-                </a:tc>
-              </a:tr>
-              <a:tr h="391885">
-                <a:tc>
-                  <a:txBody>
-                    <a:bodyPr/>
-                    <a:lstStyle/>
-                    <a:p>
-                      <a:pPr algn="ctr"/>
-                      <a:r>
-                        <a:rPr sz="1300" b="1">
-                          <a:solidFill>
-                            <a:srgbClr val="212121"/>
-                          </a:solidFill>
-                          <a:latin typeface="맑은 고딕"/>
-                        </a:rPr>
-                        <a:t>유동인구 중시</a:t>
-                      </a:r>
-                    </a:p>
-                  </a:txBody>
-                  <a:tcPr/>
-                </a:tc>
-                <a:tc>
-                  <a:txBody>
-                    <a:bodyPr/>
-                    <a:lstStyle/>
-                    <a:p>
-                      <a:pPr algn="ctr"/>
-                      <a:r>
-                        <a:rPr sz="1300" b="1">
-                          <a:solidFill>
-                            <a:srgbClr val="212121"/>
-                          </a:solidFill>
-                          <a:latin typeface="맑은 고딕"/>
-                        </a:rPr>
-                        <a:t>pop 0.38</a:t>
-                      </a:r>
-                    </a:p>
-                  </a:txBody>
-                  <a:tcPr/>
-                </a:tc>
-                <a:tc>
-                  <a:txBody>
-                    <a:bodyPr/>
-                    <a:lstStyle/>
-                    <a:p>
-                      <a:pPr algn="ctr"/>
-                      <a:r>
-                        <a:rPr sz="1300" b="1">
-                          <a:solidFill>
-                            <a:srgbClr val="212121"/>
-                          </a:solidFill>
-                          <a:latin typeface="맑은 고딕"/>
-                        </a:rPr>
-                        <a:t>0.648</a:t>
-                      </a:r>
-                    </a:p>
-                  </a:txBody>
-                  <a:tcPr/>
-                </a:tc>
-                <a:tc>
-                  <a:txBody>
-                    <a:bodyPr/>
-                    <a:lstStyle/>
-                    <a:p>
-                      <a:pPr algn="ctr"/>
-                      <a:r>
-                        <a:rPr sz="1300" b="1">
-                          <a:solidFill>
-                            <a:srgbClr val="212121"/>
-                          </a:solidFill>
-                          <a:latin typeface="맑은 고딕"/>
-                        </a:rPr>
-                        <a:t>3곳 독점</a:t>
-                      </a:r>
-                    </a:p>
-                  </a:txBody>
-                  <a:tcPr/>
-                </a:tc>
-              </a:tr>
-              <a:tr h="391885">
-                <a:tc>
-                  <a:txBody>
-                    <a:bodyPr/>
-                    <a:lstStyle/>
-                    <a:p>
-                      <a:pPr algn="ctr"/>
-                      <a:r>
-                        <a:rPr sz="1300" b="1">
-                          <a:solidFill>
-                            <a:srgbClr val="212121"/>
-                          </a:solidFill>
-                          <a:latin typeface="맑은 고딕"/>
-                        </a:rPr>
-                        <a:t>보행환경 중시</a:t>
-                      </a:r>
-                    </a:p>
-                  </a:txBody>
-                  <a:tcPr/>
-                </a:tc>
-                <a:tc>
-                  <a:txBody>
-                    <a:bodyPr/>
-                    <a:lstStyle/>
-                    <a:p>
-                      <a:pPr algn="ctr"/>
-                      <a:r>
-                        <a:rPr sz="1300" b="1">
-                          <a:solidFill>
-                            <a:srgbClr val="212121"/>
-                          </a:solidFill>
-                          <a:latin typeface="맑은 고딕"/>
-                        </a:rPr>
-                        <a:t>streetview_deficit 0.35</a:t>
-                      </a:r>
-                    </a:p>
-                  </a:txBody>
-                  <a:tcPr/>
-                </a:tc>
-                <a:tc>
-                  <a:txBody>
-                    <a:bodyPr/>
-                    <a:lstStyle/>
-                    <a:p>
-                      <a:pPr algn="ctr"/>
-                      <a:r>
-                        <a:rPr sz="1300" b="1">
-                          <a:solidFill>
-                            <a:srgbClr val="212121"/>
-                          </a:solidFill>
-                          <a:latin typeface="맑은 고딕"/>
-                        </a:rPr>
-                        <a:t>0.589</a:t>
-                      </a:r>
-                    </a:p>
-                  </a:txBody>
-                  <a:tcPr/>
-                </a:tc>
-                <a:tc>
-                  <a:txBody>
-                    <a:bodyPr/>
-                    <a:lstStyle/>
-                    <a:p>
-                      <a:pPr algn="ctr"/>
-                      <a:r>
-                        <a:rPr sz="1300" b="1">
-                          <a:solidFill>
-                            <a:srgbClr val="212121"/>
-                          </a:solidFill>
-                          <a:latin typeface="맑은 고딕"/>
-                        </a:rPr>
-                        <a:t>0곳</a:t>
-                      </a:r>
-                    </a:p>
-                  </a:txBody>
-                  <a:tcPr/>
-                </a:tc>
-              </a:tr>
-              <a:tr h="391890">
-                <a:tc>
-                  <a:txBody>
-                    <a:bodyPr/>
-                    <a:lstStyle/>
-                    <a:p>
-                      <a:pPr algn="ctr"/>
-                      <a:r>
-                        <a:rPr sz="1300" b="0">
-                          <a:solidFill>
-                            <a:srgbClr val="212121"/>
-                          </a:solidFill>
-                          <a:latin typeface="맑은 고딕"/>
-                        </a:rPr>
-                        <a:t>교차로 중시 (NEW)</a:t>
-                      </a:r>
-                    </a:p>
-                  </a:txBody>
-                  <a:tcPr/>
-                </a:tc>
-                <a:tc>
-                  <a:txBody>
-                    <a:bodyPr/>
-                    <a:lstStyle/>
-                    <a:p>
-                      <a:pPr algn="ctr"/>
-                      <a:r>
-                        <a:rPr sz="1300" b="0">
-                          <a:solidFill>
-                            <a:srgbClr val="212121"/>
-                          </a:solidFill>
-                          <a:latin typeface="맑은 고딕"/>
-                        </a:rPr>
-                        <a:t>intersection_density 0.30</a:t>
-                      </a:r>
-                    </a:p>
-                  </a:txBody>
-                  <a:tcPr/>
-                </a:tc>
-                <a:tc>
-                  <a:txBody>
-                    <a:bodyPr/>
-                    <a:lstStyle/>
-                    <a:p>
-                      <a:pPr algn="ctr"/>
-                      <a:r>
-                        <a:rPr sz="1300" b="0">
-                          <a:solidFill>
-                            <a:srgbClr val="212121"/>
-                          </a:solidFill>
-                          <a:latin typeface="맑은 고딕"/>
-                        </a:rPr>
-                        <a:t>0.462</a:t>
-                      </a:r>
-                    </a:p>
-                  </a:txBody>
-                  <a:tcPr/>
-                </a:tc>
-                <a:tc>
-                  <a:txBody>
-                    <a:bodyPr/>
-                    <a:lstStyle/>
-                    <a:p>
-                      <a:pPr algn="ctr"/>
-                      <a:r>
-                        <a:rPr sz="1300" b="0">
-                          <a:solidFill>
-                            <a:srgbClr val="212121"/>
-                          </a:solidFill>
-                          <a:latin typeface="맑은 고딕"/>
-                        </a:rPr>
-                        <a:t>0곳</a:t>
-                      </a:r>
-                    </a:p>
-                  </a:txBody>
-                  <a:tcPr/>
-                </a:tc>
-              </a:tr>
-            </a:tbl>
-          </a:graphicData>
-        </a:graphic>
-      </p:graphicFrame>
-      <p:sp>
-        <p:nvSpPr>
-          <p:cNvPr id="6" name="TextBox 5"/>
+              <a:t>보행자가 모이는 결집 지점을 보행로 옆 추천 가중치로</a:t>
+            </a:r>
+          </a:p>
+        </p:txBody>
+      </p:sp>
+      <p:sp>
+        <p:nvSpPr>
+          <p:cNvPr id="5" name="TextBox 4"/>
           <p:cNvSpPr txBox="1"/>
           <p:nvPr/>
         </p:nvSpPr>
         <p:spPr>
           <a:xfrm>
-            <a:off x="685800" y="4754880"/>
-            <a:ext cx="10972800" cy="457200"/>
+            <a:off x="685800" y="1645920"/>
+            <a:ext cx="6400800" cy="4114800"/>
           </a:xfrm>
           <a:prstGeom prst="rect">
             <a:avLst/>
@@ -4105,15 +3551,329 @@
           </a:bodyPr>
           <a:lstStyle/>
           <a:p>
-            <a:pPr algn="l"/>
-            <a:r>
-              <a:rPr sz="1400" b="1">
-                <a:solidFill>
-                  <a:srgbClr val="E53935"/>
-                </a:solidFill>
-                <a:latin typeface="맑은 고딕"/>
-              </a:rPr>
-              <a:t>💡 CV-B 통합으로 "보행환경 중시" 시나리오 신규 추가 → 정책 검증 차원이 한 단계 늘어남</a:t>
+            <a:pPr>
+              <a:spcAft>
+                <a:spcPts val="500"/>
+              </a:spcAft>
+            </a:pPr>
+            <a:r>
+              <a:rPr sz="1300" b="0">
+                <a:solidFill>
+                  <a:srgbClr val="212121"/>
+                </a:solidFill>
+                <a:latin typeface="맑은 고딕"/>
+              </a:rPr>
+              <a:t>• OSMnx — OpenStreetMap Overpass API Python 래퍼</a:t>
+            </a:r>
+          </a:p>
+          <a:p>
+            <a:pPr>
+              <a:spcAft>
+                <a:spcPts val="500"/>
+              </a:spcAft>
+            </a:pPr>
+            <a:r>
+              <a:rPr sz="1300" b="0">
+                <a:solidFill>
+                  <a:srgbClr val="212121"/>
+                </a:solidFill>
+                <a:latin typeface="맑은 고딕"/>
+              </a:rPr>
+              <a:t>• walkable highway 필터: primary~footway·pedestrian 13종</a:t>
+            </a:r>
+          </a:p>
+          <a:p>
+            <a:pPr>
+              <a:spcAft>
+                <a:spcPts val="500"/>
+              </a:spcAft>
+            </a:pPr>
+            <a:r>
+              <a:rPr sz="1300" b="0">
+                <a:solidFill>
+                  <a:srgbClr val="212121"/>
+                </a:solidFill>
+                <a:latin typeface="맑은 고딕"/>
+              </a:rPr>
+              <a:t>• 교차로 노드: street_count ≥ 3 (T자·X자)</a:t>
+            </a:r>
+          </a:p>
+          <a:p>
+            <a:pPr>
+              <a:spcAft>
+                <a:spcPts val="500"/>
+              </a:spcAft>
+            </a:pPr>
+            <a:r>
+              <a:rPr sz="1300" b="0">
+                <a:solidFill>
+                  <a:srgbClr val="212121"/>
+                </a:solidFill>
+                <a:latin typeface="맑은 고딕"/>
+              </a:rPr>
+              <a:t>• 횡단보도: 한국 OSM은 footway=crossing 패턴 우세</a:t>
+            </a:r>
+          </a:p>
+          <a:p>
+            <a:pPr>
+              <a:spcAft>
+                <a:spcPts val="500"/>
+              </a:spcAft>
+            </a:pPr>
+            <a:r>
+              <a:rPr sz="1300" b="0">
+                <a:solidFill>
+                  <a:srgbClr val="212121"/>
+                </a:solidFill>
+                <a:latin typeface="맑은 고딕"/>
+              </a:rPr>
+              <a:t>•   → highway·footway·crossing 3종 태그 통합 검색</a:t>
+            </a:r>
+          </a:p>
+          <a:p>
+            <a:pPr>
+              <a:spcAft>
+                <a:spcPts val="500"/>
+              </a:spcAft>
+            </a:pPr>
+            <a:r>
+              <a:rPr sz="1300" b="0">
+                <a:solidFill>
+                  <a:srgbClr val="212121"/>
+                </a:solidFill>
+                <a:latin typeface="맑은 고딕"/>
+              </a:rPr>
+              <a:t>• 결집지점 union → 격자별 반경 80m 내 개수 + 50m 근접 필터</a:t>
+            </a:r>
+          </a:p>
+          <a:p>
+            <a:pPr>
+              <a:spcAft>
+                <a:spcPts val="500"/>
+              </a:spcAft>
+            </a:pPr>
+            <a:r>
+              <a:rPr sz="1300" b="0">
+                <a:solidFill>
+                  <a:srgbClr val="212121"/>
+                </a:solidFill>
+                <a:latin typeface="맑은 고딕"/>
+              </a:rPr>
+              <a:t>• 결과: 동작구 격자 평균 2.02개 결집지점, 노량진 TOP10 진입</a:t>
+            </a:r>
+          </a:p>
+        </p:txBody>
+      </p:sp>
+      <p:sp>
+        <p:nvSpPr>
+          <p:cNvPr id="6" name="Rounded Rectangle 5"/>
+          <p:cNvSpPr/>
+          <p:nvPr/>
+        </p:nvSpPr>
+        <p:spPr>
+          <a:xfrm>
+            <a:off x="7315200" y="1645920"/>
+            <a:ext cx="4389120" cy="4114800"/>
+          </a:xfrm>
+          <a:prstGeom prst="roundRect">
+            <a:avLst/>
+          </a:prstGeom>
+          <a:solidFill>
+            <a:srgbClr val="E0F7FA"/>
+          </a:solidFill>
+          <a:ln w="19050">
+            <a:solidFill>
+              <a:srgbClr val="00ACC1"/>
+            </a:solidFill>
+          </a:ln>
+        </p:spPr>
+        <p:style>
+          <a:lnRef idx="1">
+            <a:schemeClr val="accent1"/>
+          </a:lnRef>
+          <a:fillRef idx="3">
+            <a:schemeClr val="accent1"/>
+          </a:fillRef>
+          <a:effectRef idx="2">
+            <a:schemeClr val="accent1"/>
+          </a:effectRef>
+          <a:fontRef idx="minor">
+            <a:schemeClr val="lt1"/>
+          </a:fontRef>
+        </p:style>
+        <p:txBody>
+          <a:bodyPr rtlCol="0" anchor="ctr" wrap="square" lIns="228600" tIns="228600"/>
+          <a:lstStyle/>
+          <a:p>
+            <a:pPr algn="ctr"/>
+            <a:r>
+              <a:rPr sz="1300" b="1">
+                <a:solidFill>
+                  <a:srgbClr val="00ACC1"/>
+                </a:solidFill>
+                <a:latin typeface="맑은 고딕"/>
+              </a:rPr>
+              <a:t>📍 동작구 통계</a:t>
+            </a:r>
+          </a:p>
+          <a:p>
+            <a:pPr>
+              <a:spcBef>
+                <a:spcPts val="100"/>
+              </a:spcBef>
+            </a:pPr>
+            <a:r>
+              <a:rPr sz="1100" b="0">
+                <a:solidFill>
+                  <a:srgbClr val="212121"/>
+                </a:solidFill>
+                <a:latin typeface="맑은 고딕"/>
+              </a:rPr>
+              <a:t/>
+            </a:r>
+          </a:p>
+          <a:p>
+            <a:pPr>
+              <a:spcBef>
+                <a:spcPts val="100"/>
+              </a:spcBef>
+            </a:pPr>
+            <a:r>
+              <a:rPr sz="1100" b="0">
+                <a:solidFill>
+                  <a:srgbClr val="212121"/>
+                </a:solidFill>
+                <a:latin typeface="맑은 고딕"/>
+              </a:rPr>
+              <a:t>walkable edges: 수천 개</a:t>
+            </a:r>
+          </a:p>
+          <a:p>
+            <a:pPr>
+              <a:spcBef>
+                <a:spcPts val="100"/>
+              </a:spcBef>
+            </a:pPr>
+            <a:r>
+              <a:rPr sz="1100" b="0">
+                <a:solidFill>
+                  <a:srgbClr val="212121"/>
+                </a:solidFill>
+                <a:latin typeface="맑은 고딕"/>
+              </a:rPr>
+              <a:t>교차로 노드: 약 1,400 (full 그래프)</a:t>
+            </a:r>
+          </a:p>
+          <a:p>
+            <a:pPr>
+              <a:spcBef>
+                <a:spcPts val="100"/>
+              </a:spcBef>
+            </a:pPr>
+            <a:r>
+              <a:rPr sz="1100" b="0">
+                <a:solidFill>
+                  <a:srgbClr val="212121"/>
+                </a:solidFill>
+                <a:latin typeface="맑은 고딕"/>
+              </a:rPr>
+              <a:t>횡단보도: 306개 (3종 태그)</a:t>
+            </a:r>
+          </a:p>
+          <a:p>
+            <a:pPr>
+              <a:spcBef>
+                <a:spcPts val="100"/>
+              </a:spcBef>
+            </a:pPr>
+            <a:r>
+              <a:rPr sz="1100" b="0">
+                <a:solidFill>
+                  <a:srgbClr val="212121"/>
+                </a:solidFill>
+                <a:latin typeface="맑은 고딕"/>
+              </a:rPr>
+              <a:t>  · highway=crossing: 179</a:t>
+            </a:r>
+          </a:p>
+          <a:p>
+            <a:pPr>
+              <a:spcBef>
+                <a:spcPts val="100"/>
+              </a:spcBef>
+            </a:pPr>
+            <a:r>
+              <a:rPr sz="1100" b="0">
+                <a:solidFill>
+                  <a:srgbClr val="212121"/>
+                </a:solidFill>
+                <a:latin typeface="맑은 고딕"/>
+              </a:rPr>
+              <a:t>  · footway=crossing: 126</a:t>
+            </a:r>
+          </a:p>
+          <a:p>
+            <a:pPr>
+              <a:spcBef>
+                <a:spcPts val="100"/>
+              </a:spcBef>
+            </a:pPr>
+            <a:r>
+              <a:rPr sz="1100" b="0">
+                <a:solidFill>
+                  <a:srgbClr val="212121"/>
+                </a:solidFill>
+                <a:latin typeface="맑은 고딕"/>
+              </a:rPr>
+              <a:t>  · 중복 제거</a:t>
+            </a:r>
+          </a:p>
+          <a:p>
+            <a:pPr>
+              <a:spcBef>
+                <a:spcPts val="100"/>
+              </a:spcBef>
+            </a:pPr>
+            <a:r>
+              <a:rPr sz="1100" b="0">
+                <a:solidFill>
+                  <a:srgbClr val="212121"/>
+                </a:solidFill>
+                <a:latin typeface="맑은 고딕"/>
+              </a:rPr>
+              <a:t/>
+            </a:r>
+          </a:p>
+          <a:p>
+            <a:pPr>
+              <a:spcBef>
+                <a:spcPts val="100"/>
+              </a:spcBef>
+            </a:pPr>
+            <a:r>
+              <a:rPr sz="1100" b="0">
+                <a:solidFill>
+                  <a:srgbClr val="212121"/>
+                </a:solidFill>
+                <a:latin typeface="맑은 고딕"/>
+              </a:rPr>
+              <a:t>흑석동 안:</a:t>
+            </a:r>
+          </a:p>
+          <a:p>
+            <a:pPr>
+              <a:spcBef>
+                <a:spcPts val="100"/>
+              </a:spcBef>
+            </a:pPr>
+            <a:r>
+              <a:rPr sz="1100" b="0">
+                <a:solidFill>
+                  <a:srgbClr val="212121"/>
+                </a:solidFill>
+                <a:latin typeface="맑은 고딕"/>
+              </a:rPr>
+              <a:t>  · 교차로 63 · 횡단보도 4</a:t>
             </a:r>
           </a:p>
         </p:txBody>
@@ -4126,8 +3886,8 @@
         </p:nvSpPr>
         <p:spPr>
           <a:xfrm>
-            <a:off x="685800" y="5303520"/>
-            <a:ext cx="10972800" cy="457200"/>
+            <a:off x="457200" y="6400800"/>
+            <a:ext cx="9144000" cy="365760"/>
           </a:xfrm>
           <a:prstGeom prst="rect">
             <a:avLst/>
@@ -4142,13 +3902,13 @@
           <a:p>
             <a:pPr algn="l"/>
             <a:r>
-              <a:rPr sz="1400" b="0">
+              <a:rPr sz="1000" b="0">
                 <a:solidFill>
                   <a:srgbClr val="555555"/>
                 </a:solidFill>
                 <a:latin typeface="맑은 고딕"/>
               </a:rPr>
-              <a:t>🎯 5가지 관점 모두에서 공통 추천되는 입지가 존재 (다음 슬라이드)</a:t>
+              <a:t>동작구 여름 그늘막 최적 입지 추천 시스템 · 한영재 · 2025961227</a:t>
             </a:r>
           </a:p>
         </p:txBody>
@@ -4161,8 +3921,8 @@
         </p:nvSpPr>
         <p:spPr>
           <a:xfrm>
-            <a:off x="457200" y="6400800"/>
-            <a:ext cx="9144000" cy="365760"/>
+            <a:off x="11247120" y="6400800"/>
+            <a:ext cx="914400" cy="365760"/>
           </a:xfrm>
           <a:prstGeom prst="rect">
             <a:avLst/>
@@ -4175,7 +3935,7 @@
           </a:bodyPr>
           <a:lstStyle/>
           <a:p>
-            <a:pPr algn="l"/>
+            <a:pPr algn="r"/>
             <a:r>
               <a:rPr sz="1000" b="0">
                 <a:solidFill>
@@ -4183,42 +3943,7 @@
                 </a:solidFill>
                 <a:latin typeface="맑은 고딕"/>
               </a:rPr>
-              <a:t>동작구 여름 그늘막 최적 입지 추천 시스템 · 한영재 · 2025961227</a:t>
-            </a:r>
-          </a:p>
-        </p:txBody>
-      </p:sp>
-      <p:sp>
-        <p:nvSpPr>
-          <p:cNvPr id="9" name="TextBox 8"/>
-          <p:cNvSpPr txBox="1"/>
-          <p:nvPr/>
-        </p:nvSpPr>
-        <p:spPr>
-          <a:xfrm>
-            <a:off x="11247120" y="6400800"/>
-            <a:ext cx="914400" cy="365760"/>
-          </a:xfrm>
-          <a:prstGeom prst="rect">
-            <a:avLst/>
-          </a:prstGeom>
-          <a:noFill/>
-        </p:spPr>
-        <p:txBody>
-          <a:bodyPr wrap="square">
-            <a:spAutoFit/>
-          </a:bodyPr>
-          <a:lstStyle/>
-          <a:p>
-            <a:pPr algn="r"/>
-            <a:r>
-              <a:rPr sz="1000" b="0">
-                <a:solidFill>
-                  <a:srgbClr val="555555"/>
-                </a:solidFill>
-                <a:latin typeface="맑은 고딕"/>
-              </a:rPr>
-              <a:t>10 / 14</a:t>
+              <a:t>10 / 15</a:t>
             </a:r>
           </a:p>
         </p:txBody>
@@ -4308,13 +4033,13 @@
           <a:p>
             <a:pPr algn="l"/>
             <a:r>
-              <a:rPr sz="3000" b="1">
+              <a:rPr sz="2800" b="1">
                 <a:solidFill>
                   <a:srgbClr val="212121"/>
                 </a:solidFill>
                 <a:latin typeface="맑은 고딕"/>
               </a:rPr>
-              <a:t>강건 입지 · Robust Location</a:t>
+              <a:t>시나리오 민감도 6개 + 강건 입지</a:t>
             </a:r>
           </a:p>
         </p:txBody>
@@ -4343,27 +4068,617 @@
           <a:p>
             <a:pPr algn="l"/>
             <a:r>
-              <a:rPr sz="1400" b="0">
+              <a:rPr sz="1300" b="0">
                 <a:solidFill>
                   <a:srgbClr val="555555"/>
                 </a:solidFill>
                 <a:latin typeface="맑은 고딕"/>
               </a:rPr>
-              <a:t>5개 시나리오 공통 추천 = 어떤 정책 관점에서도 필수</a:t>
-            </a:r>
-          </a:p>
-        </p:txBody>
-      </p:sp>
-      <p:sp>
-        <p:nvSpPr>
-          <p:cNvPr id="5" name="Rounded Rectangle 4"/>
+              <a:t>정책 관점별 가중치 × 동일 피처셋 → TOP10 변화 추적</a:t>
+            </a:r>
+          </a:p>
+        </p:txBody>
+      </p:sp>
+      <p:graphicFrame>
+        <p:nvGraphicFramePr>
+          <p:cNvPr id="5" name="Table 4"/>
+          <p:cNvGraphicFramePr>
+            <a:graphicFrameLocks noGrp="1"/>
+          </p:cNvGraphicFramePr>
+          <p:nvPr/>
+        </p:nvGraphicFramePr>
+        <p:xfrm>
+          <a:off x="685800" y="1645920"/>
+          <a:ext cx="9692640" cy="2286000"/>
+        </p:xfrm>
+        <a:graphic>
+          <a:graphicData uri="http://schemas.openxmlformats.org/drawingml/2006/table">
+            <a:tbl>
+              <a:tblPr firstRow="1" bandRow="1">
+                <a:tableStyleId>{5C22544A-7EE6-4342-B048-85BDC9FD1C3A}</a:tableStyleId>
+              </a:tblPr>
+              <a:tblGrid>
+                <a:gridCol w="3017520"/>
+                <a:gridCol w="3017520"/>
+                <a:gridCol w="1828800"/>
+                <a:gridCol w="1828800"/>
+              </a:tblGrid>
+              <a:tr h="326571">
+                <a:tc>
+                  <a:txBody>
+                    <a:bodyPr/>
+                    <a:lstStyle/>
+                    <a:p>
+                      <a:pPr algn="ctr"/>
+                      <a:r>
+                        <a:rPr sz="1300" b="1">
+                          <a:solidFill>
+                            <a:srgbClr val="FFFFFF"/>
+                          </a:solidFill>
+                          <a:latin typeface="맑은 고딕"/>
+                        </a:rPr>
+                        <a:t>시나리오</a:t>
+                      </a:r>
+                    </a:p>
+                  </a:txBody>
+                  <a:tcPr>
+                    <a:solidFill>
+                      <a:srgbClr val="1E88E5"/>
+                    </a:solidFill>
+                  </a:tcPr>
+                </a:tc>
+                <a:tc>
+                  <a:txBody>
+                    <a:bodyPr/>
+                    <a:lstStyle/>
+                    <a:p>
+                      <a:pPr algn="ctr"/>
+                      <a:r>
+                        <a:rPr sz="1300" b="1">
+                          <a:solidFill>
+                            <a:srgbClr val="FFFFFF"/>
+                          </a:solidFill>
+                          <a:latin typeface="맑은 고딕"/>
+                        </a:rPr>
+                        <a:t>강조 가중치</a:t>
+                      </a:r>
+                    </a:p>
+                  </a:txBody>
+                  <a:tcPr>
+                    <a:solidFill>
+                      <a:srgbClr val="1E88E5"/>
+                    </a:solidFill>
+                  </a:tcPr>
+                </a:tc>
+                <a:tc>
+                  <a:txBody>
+                    <a:bodyPr/>
+                    <a:lstStyle/>
+                    <a:p>
+                      <a:pPr algn="ctr"/>
+                      <a:r>
+                        <a:rPr sz="1300" b="1">
+                          <a:solidFill>
+                            <a:srgbClr val="FFFFFF"/>
+                          </a:solidFill>
+                          <a:latin typeface="맑은 고딕"/>
+                        </a:rPr>
+                        <a:t>최고 Score</a:t>
+                      </a:r>
+                    </a:p>
+                  </a:txBody>
+                  <a:tcPr>
+                    <a:solidFill>
+                      <a:srgbClr val="1E88E5"/>
+                    </a:solidFill>
+                  </a:tcPr>
+                </a:tc>
+                <a:tc>
+                  <a:txBody>
+                    <a:bodyPr/>
+                    <a:lstStyle/>
+                    <a:p>
+                      <a:pPr algn="ctr"/>
+                      <a:r>
+                        <a:rPr sz="1300" b="1">
+                          <a:solidFill>
+                            <a:srgbClr val="FFFFFF"/>
+                          </a:solidFill>
+                          <a:latin typeface="맑은 고딕"/>
+                        </a:rPr>
+                        <a:t>유니크</a:t>
+                      </a:r>
+                    </a:p>
+                  </a:txBody>
+                  <a:tcPr>
+                    <a:solidFill>
+                      <a:srgbClr val="1E88E5"/>
+                    </a:solidFill>
+                  </a:tcPr>
+                </a:tc>
+              </a:tr>
+              <a:tr h="326571">
+                <a:tc>
+                  <a:txBody>
+                    <a:bodyPr/>
+                    <a:lstStyle/>
+                    <a:p>
+                      <a:pPr algn="ctr"/>
+                      <a:r>
+                        <a:rPr sz="1200" b="0">
+                          <a:solidFill>
+                            <a:srgbClr val="212121"/>
+                          </a:solidFill>
+                          <a:latin typeface="맑은 고딕"/>
+                        </a:rPr>
+                        <a:t>기본</a:t>
+                      </a:r>
+                    </a:p>
+                  </a:txBody>
+                  <a:tcPr/>
+                </a:tc>
+                <a:tc>
+                  <a:txBody>
+                    <a:bodyPr/>
+                    <a:lstStyle/>
+                    <a:p>
+                      <a:pPr algn="ctr"/>
+                      <a:r>
+                        <a:rPr sz="1200" b="0">
+                          <a:solidFill>
+                            <a:srgbClr val="212121"/>
+                          </a:solidFill>
+                          <a:latin typeface="맑은 고딕"/>
+                        </a:rPr>
+                        <a:t>균형 (18/18/18)</a:t>
+                      </a:r>
+                    </a:p>
+                  </a:txBody>
+                  <a:tcPr/>
+                </a:tc>
+                <a:tc>
+                  <a:txBody>
+                    <a:bodyPr/>
+                    <a:lstStyle/>
+                    <a:p>
+                      <a:pPr algn="ctr"/>
+                      <a:r>
+                        <a:rPr sz="1200" b="0">
+                          <a:solidFill>
+                            <a:srgbClr val="212121"/>
+                          </a:solidFill>
+                          <a:latin typeface="맑은 고딕"/>
+                        </a:rPr>
+                        <a:t>0.551</a:t>
+                      </a:r>
+                    </a:p>
+                  </a:txBody>
+                  <a:tcPr/>
+                </a:tc>
+                <a:tc>
+                  <a:txBody>
+                    <a:bodyPr/>
+                    <a:lstStyle/>
+                    <a:p>
+                      <a:pPr algn="ctr"/>
+                      <a:r>
+                        <a:rPr sz="1200" b="0">
+                          <a:solidFill>
+                            <a:srgbClr val="212121"/>
+                          </a:solidFill>
+                          <a:latin typeface="맑은 고딕"/>
+                        </a:rPr>
+                        <a:t>0곳</a:t>
+                      </a:r>
+                    </a:p>
+                  </a:txBody>
+                  <a:tcPr/>
+                </a:tc>
+              </a:tr>
+              <a:tr h="326571">
+                <a:tc>
+                  <a:txBody>
+                    <a:bodyPr/>
+                    <a:lstStyle/>
+                    <a:p>
+                      <a:pPr algn="ctr"/>
+                      <a:r>
+                        <a:rPr sz="1200" b="0">
+                          <a:solidFill>
+                            <a:srgbClr val="212121"/>
+                          </a:solidFill>
+                          <a:latin typeface="맑은 고딕"/>
+                        </a:rPr>
+                        <a:t>고령자 중시</a:t>
+                      </a:r>
+                    </a:p>
+                  </a:txBody>
+                  <a:tcPr/>
+                </a:tc>
+                <a:tc>
+                  <a:txBody>
+                    <a:bodyPr/>
+                    <a:lstStyle/>
+                    <a:p>
+                      <a:pPr algn="ctr"/>
+                      <a:r>
+                        <a:rPr sz="1200" b="0">
+                          <a:solidFill>
+                            <a:srgbClr val="212121"/>
+                          </a:solidFill>
+                          <a:latin typeface="맑은 고딕"/>
+                        </a:rPr>
+                        <a:t>vuln 0.38</a:t>
+                      </a:r>
+                    </a:p>
+                  </a:txBody>
+                  <a:tcPr/>
+                </a:tc>
+                <a:tc>
+                  <a:txBody>
+                    <a:bodyPr/>
+                    <a:lstStyle/>
+                    <a:p>
+                      <a:pPr algn="ctr"/>
+                      <a:r>
+                        <a:rPr sz="1200" b="0">
+                          <a:solidFill>
+                            <a:srgbClr val="212121"/>
+                          </a:solidFill>
+                          <a:latin typeface="맑은 고딕"/>
+                        </a:rPr>
+                        <a:t>0.518</a:t>
+                      </a:r>
+                    </a:p>
+                  </a:txBody>
+                  <a:tcPr/>
+                </a:tc>
+                <a:tc>
+                  <a:txBody>
+                    <a:bodyPr/>
+                    <a:lstStyle/>
+                    <a:p>
+                      <a:pPr algn="ctr"/>
+                      <a:r>
+                        <a:rPr sz="1200" b="0">
+                          <a:solidFill>
+                            <a:srgbClr val="212121"/>
+                          </a:solidFill>
+                          <a:latin typeface="맑은 고딕"/>
+                        </a:rPr>
+                        <a:t>0곳</a:t>
+                      </a:r>
+                    </a:p>
+                  </a:txBody>
+                  <a:tcPr/>
+                </a:tc>
+              </a:tr>
+              <a:tr h="326571">
+                <a:tc>
+                  <a:txBody>
+                    <a:bodyPr/>
+                    <a:lstStyle/>
+                    <a:p>
+                      <a:pPr algn="ctr"/>
+                      <a:r>
+                        <a:rPr sz="1200" b="1">
+                          <a:solidFill>
+                            <a:srgbClr val="212121"/>
+                          </a:solidFill>
+                          <a:latin typeface="맑은 고딕"/>
+                        </a:rPr>
+                        <a:t>폭염 중시</a:t>
+                      </a:r>
+                    </a:p>
+                  </a:txBody>
+                  <a:tcPr/>
+                </a:tc>
+                <a:tc>
+                  <a:txBody>
+                    <a:bodyPr/>
+                    <a:lstStyle/>
+                    <a:p>
+                      <a:pPr algn="ctr"/>
+                      <a:r>
+                        <a:rPr sz="1200" b="1">
+                          <a:solidFill>
+                            <a:srgbClr val="212121"/>
+                          </a:solidFill>
+                          <a:latin typeface="맑은 고딕"/>
+                        </a:rPr>
+                        <a:t>lst 0.38</a:t>
+                      </a:r>
+                    </a:p>
+                  </a:txBody>
+                  <a:tcPr/>
+                </a:tc>
+                <a:tc>
+                  <a:txBody>
+                    <a:bodyPr/>
+                    <a:lstStyle/>
+                    <a:p>
+                      <a:pPr algn="ctr"/>
+                      <a:r>
+                        <a:rPr sz="1200" b="1">
+                          <a:solidFill>
+                            <a:srgbClr val="212121"/>
+                          </a:solidFill>
+                          <a:latin typeface="맑은 고딕"/>
+                        </a:rPr>
+                        <a:t>0.607</a:t>
+                      </a:r>
+                    </a:p>
+                  </a:txBody>
+                  <a:tcPr/>
+                </a:tc>
+                <a:tc>
+                  <a:txBody>
+                    <a:bodyPr/>
+                    <a:lstStyle/>
+                    <a:p>
+                      <a:pPr algn="ctr"/>
+                      <a:r>
+                        <a:rPr sz="1200" b="1">
+                          <a:solidFill>
+                            <a:srgbClr val="212121"/>
+                          </a:solidFill>
+                          <a:latin typeface="맑은 고딕"/>
+                        </a:rPr>
+                        <a:t>1곳</a:t>
+                      </a:r>
+                    </a:p>
+                  </a:txBody>
+                  <a:tcPr/>
+                </a:tc>
+              </a:tr>
+              <a:tr h="326571">
+                <a:tc>
+                  <a:txBody>
+                    <a:bodyPr/>
+                    <a:lstStyle/>
+                    <a:p>
+                      <a:pPr algn="ctr"/>
+                      <a:r>
+                        <a:rPr sz="1200" b="1">
+                          <a:solidFill>
+                            <a:srgbClr val="212121"/>
+                          </a:solidFill>
+                          <a:latin typeface="맑은 고딕"/>
+                        </a:rPr>
+                        <a:t>유동인구 중시</a:t>
+                      </a:r>
+                    </a:p>
+                  </a:txBody>
+                  <a:tcPr/>
+                </a:tc>
+                <a:tc>
+                  <a:txBody>
+                    <a:bodyPr/>
+                    <a:lstStyle/>
+                    <a:p>
+                      <a:pPr algn="ctr"/>
+                      <a:r>
+                        <a:rPr sz="1200" b="1">
+                          <a:solidFill>
+                            <a:srgbClr val="212121"/>
+                          </a:solidFill>
+                          <a:latin typeface="맑은 고딕"/>
+                        </a:rPr>
+                        <a:t>pop 0.38</a:t>
+                      </a:r>
+                    </a:p>
+                  </a:txBody>
+                  <a:tcPr/>
+                </a:tc>
+                <a:tc>
+                  <a:txBody>
+                    <a:bodyPr/>
+                    <a:lstStyle/>
+                    <a:p>
+                      <a:pPr algn="ctr"/>
+                      <a:r>
+                        <a:rPr sz="1200" b="1">
+                          <a:solidFill>
+                            <a:srgbClr val="212121"/>
+                          </a:solidFill>
+                          <a:latin typeface="맑은 고딕"/>
+                        </a:rPr>
+                        <a:t>0.648</a:t>
+                      </a:r>
+                    </a:p>
+                  </a:txBody>
+                  <a:tcPr/>
+                </a:tc>
+                <a:tc>
+                  <a:txBody>
+                    <a:bodyPr/>
+                    <a:lstStyle/>
+                    <a:p>
+                      <a:pPr algn="ctr"/>
+                      <a:r>
+                        <a:rPr sz="1200" b="1">
+                          <a:solidFill>
+                            <a:srgbClr val="212121"/>
+                          </a:solidFill>
+                          <a:latin typeface="맑은 고딕"/>
+                        </a:rPr>
+                        <a:t>3곳</a:t>
+                      </a:r>
+                    </a:p>
+                  </a:txBody>
+                  <a:tcPr/>
+                </a:tc>
+              </a:tr>
+              <a:tr h="326571">
+                <a:tc>
+                  <a:txBody>
+                    <a:bodyPr/>
+                    <a:lstStyle/>
+                    <a:p>
+                      <a:pPr algn="ctr"/>
+                      <a:r>
+                        <a:rPr sz="1200" b="1">
+                          <a:solidFill>
+                            <a:srgbClr val="212121"/>
+                          </a:solidFill>
+                          <a:latin typeface="맑은 고딕"/>
+                        </a:rPr>
+                        <a:t>보행환경 중시</a:t>
+                      </a:r>
+                    </a:p>
+                  </a:txBody>
+                  <a:tcPr/>
+                </a:tc>
+                <a:tc>
+                  <a:txBody>
+                    <a:bodyPr/>
+                    <a:lstStyle/>
+                    <a:p>
+                      <a:pPr algn="ctr"/>
+                      <a:r>
+                        <a:rPr sz="1200" b="1">
+                          <a:solidFill>
+                            <a:srgbClr val="212121"/>
+                          </a:solidFill>
+                          <a:latin typeface="맑은 고딕"/>
+                        </a:rPr>
+                        <a:t>streetview 0.32</a:t>
+                      </a:r>
+                    </a:p>
+                  </a:txBody>
+                  <a:tcPr/>
+                </a:tc>
+                <a:tc>
+                  <a:txBody>
+                    <a:bodyPr/>
+                    <a:lstStyle/>
+                    <a:p>
+                      <a:pPr algn="ctr"/>
+                      <a:r>
+                        <a:rPr sz="1200" b="1">
+                          <a:solidFill>
+                            <a:srgbClr val="212121"/>
+                          </a:solidFill>
+                          <a:latin typeface="맑은 고딕"/>
+                        </a:rPr>
+                        <a:t>0.589</a:t>
+                      </a:r>
+                    </a:p>
+                  </a:txBody>
+                  <a:tcPr/>
+                </a:tc>
+                <a:tc>
+                  <a:txBody>
+                    <a:bodyPr/>
+                    <a:lstStyle/>
+                    <a:p>
+                      <a:pPr algn="ctr"/>
+                      <a:r>
+                        <a:rPr sz="1200" b="1">
+                          <a:solidFill>
+                            <a:srgbClr val="212121"/>
+                          </a:solidFill>
+                          <a:latin typeface="맑은 고딕"/>
+                        </a:rPr>
+                        <a:t>0곳</a:t>
+                      </a:r>
+                    </a:p>
+                  </a:txBody>
+                  <a:tcPr/>
+                </a:tc>
+              </a:tr>
+              <a:tr h="326574">
+                <a:tc>
+                  <a:txBody>
+                    <a:bodyPr/>
+                    <a:lstStyle/>
+                    <a:p>
+                      <a:pPr algn="ctr"/>
+                      <a:r>
+                        <a:rPr sz="1200" b="1">
+                          <a:solidFill>
+                            <a:srgbClr val="212121"/>
+                          </a:solidFill>
+                          <a:latin typeface="맑은 고딕"/>
+                        </a:rPr>
+                        <a:t>교차로 중시 (NEW)</a:t>
+                      </a:r>
+                    </a:p>
+                  </a:txBody>
+                  <a:tcPr/>
+                </a:tc>
+                <a:tc>
+                  <a:txBody>
+                    <a:bodyPr/>
+                    <a:lstStyle/>
+                    <a:p>
+                      <a:pPr algn="ctr"/>
+                      <a:r>
+                        <a:rPr sz="1200" b="1">
+                          <a:solidFill>
+                            <a:srgbClr val="212121"/>
+                          </a:solidFill>
+                          <a:latin typeface="맑은 고딕"/>
+                        </a:rPr>
+                        <a:t>intersection 0.40</a:t>
+                      </a:r>
+                    </a:p>
+                  </a:txBody>
+                  <a:tcPr/>
+                </a:tc>
+                <a:tc>
+                  <a:txBody>
+                    <a:bodyPr/>
+                    <a:lstStyle/>
+                    <a:p>
+                      <a:pPr algn="ctr"/>
+                      <a:r>
+                        <a:rPr sz="1200" b="1">
+                          <a:solidFill>
+                            <a:srgbClr val="212121"/>
+                          </a:solidFill>
+                          <a:latin typeface="맑은 고딕"/>
+                        </a:rPr>
+                        <a:t>0.474</a:t>
+                      </a:r>
+                    </a:p>
+                  </a:txBody>
+                  <a:tcPr/>
+                </a:tc>
+                <a:tc>
+                  <a:txBody>
+                    <a:bodyPr/>
+                    <a:lstStyle/>
+                    <a:p>
+                      <a:pPr algn="ctr"/>
+                      <a:r>
+                        <a:rPr sz="1200" b="1">
+                          <a:solidFill>
+                            <a:srgbClr val="212121"/>
+                          </a:solidFill>
+                          <a:latin typeface="맑은 고딕"/>
+                        </a:rPr>
+                        <a:t>0곳</a:t>
+                      </a:r>
+                    </a:p>
+                  </a:txBody>
+                  <a:tcPr/>
+                </a:tc>
+              </a:tr>
+            </a:tbl>
+          </a:graphicData>
+        </a:graphic>
+      </p:graphicFrame>
+      <p:sp>
+        <p:nvSpPr>
+          <p:cNvPr id="6" name="Rounded Rectangle 5"/>
           <p:cNvSpPr/>
           <p:nvPr/>
         </p:nvSpPr>
         <p:spPr>
           <a:xfrm>
-            <a:off x="2286000" y="1828800"/>
-            <a:ext cx="3657600" cy="2926080"/>
+            <a:off x="685800" y="4206240"/>
+            <a:ext cx="10972800" cy="1828800"/>
           </a:xfrm>
           <a:prstGeom prst="roundRect">
             <a:avLst/>
@@ -4392,18 +4707,18 @@
           </a:fontRef>
         </p:style>
         <p:txBody>
-          <a:bodyPr rtlCol="0" anchor="ctr" wrap="square" lIns="182880" tIns="274320"/>
+          <a:bodyPr rtlCol="0" anchor="ctr" wrap="square" lIns="274320" tIns="182880"/>
           <a:lstStyle/>
           <a:p>
             <a:pPr algn="ctr"/>
             <a:r>
-              <a:rPr sz="1600" b="1">
+              <a:rPr sz="1500" b="1">
                 <a:solidFill>
                   <a:srgbClr val="E53935"/>
                 </a:solidFill>
                 <a:latin typeface="맑은 고딕"/>
               </a:rPr>
-              <a:t>#1</a:t>
+              <a:t>⭐ 강건 입지 — 6개 시나리오 모두 공통 추천</a:t>
             </a:r>
           </a:p>
           <a:p>
@@ -4413,13 +4728,13 @@
               </a:spcBef>
             </a:pPr>
             <a:r>
-              <a:rPr sz="2800" b="1">
+              <a:rPr sz="1700" b="1">
                 <a:solidFill>
                   <a:srgbClr val="212121"/>
                 </a:solidFill>
                 <a:latin typeface="맑은 고딕"/>
               </a:rPr>
-              <a:t>동작대로</a:t>
+              <a:t>동작대로 사당-이수 축 #1 (37.4907, 126.9647) · #2 (37.4898, 126.9670)</a:t>
             </a:r>
           </a:p>
           <a:p>
@@ -4429,131 +4744,13 @@
               </a:spcBef>
             </a:pPr>
             <a:r>
-              <a:rPr sz="1600" b="0">
+              <a:rPr sz="1200" b="0">
                 <a:solidFill>
                   <a:srgbClr val="555555"/>
                 </a:solidFill>
                 <a:latin typeface="맑은 고딕"/>
               </a:rPr>
-              <a:t>사당-이수 축</a:t>
-            </a:r>
-          </a:p>
-          <a:p>
-            <a:pPr algn="ctr">
-              <a:spcBef>
-                <a:spcPts val="1200"/>
-              </a:spcBef>
-            </a:pPr>
-            <a:r>
-              <a:rPr sz="1200" b="0">
-                <a:solidFill>
-                  <a:srgbClr val="555555"/>
-                </a:solidFill>
-                <a:latin typeface="맑은 고딕"/>
-              </a:rPr>
-              <a:t>37.4907, 126.9647</a:t>
-            </a:r>
-          </a:p>
-        </p:txBody>
-      </p:sp>
-      <p:sp>
-        <p:nvSpPr>
-          <p:cNvPr id="6" name="Rounded Rectangle 5"/>
-          <p:cNvSpPr/>
-          <p:nvPr/>
-        </p:nvSpPr>
-        <p:spPr>
-          <a:xfrm>
-            <a:off x="6309360" y="1828800"/>
-            <a:ext cx="3657600" cy="2926080"/>
-          </a:xfrm>
-          <a:prstGeom prst="roundRect">
-            <a:avLst/>
-          </a:prstGeom>
-          <a:solidFill>
-            <a:srgbClr val="FAFAFA"/>
-          </a:solidFill>
-          <a:ln w="31750">
-            <a:solidFill>
-              <a:srgbClr val="E53935"/>
-            </a:solidFill>
-          </a:ln>
-        </p:spPr>
-        <p:style>
-          <a:lnRef idx="1">
-            <a:schemeClr val="accent1"/>
-          </a:lnRef>
-          <a:fillRef idx="3">
-            <a:schemeClr val="accent1"/>
-          </a:fillRef>
-          <a:effectRef idx="2">
-            <a:schemeClr val="accent1"/>
-          </a:effectRef>
-          <a:fontRef idx="minor">
-            <a:schemeClr val="lt1"/>
-          </a:fontRef>
-        </p:style>
-        <p:txBody>
-          <a:bodyPr rtlCol="0" anchor="ctr" wrap="square" lIns="182880" tIns="274320"/>
-          <a:lstStyle/>
-          <a:p>
-            <a:pPr algn="ctr"/>
-            <a:r>
-              <a:rPr sz="1600" b="1">
-                <a:solidFill>
-                  <a:srgbClr val="E53935"/>
-                </a:solidFill>
-                <a:latin typeface="맑은 고딕"/>
-              </a:rPr>
-              <a:t>#2</a:t>
-            </a:r>
-          </a:p>
-          <a:p>
-            <a:pPr algn="ctr">
-              <a:spcBef>
-                <a:spcPts val="800"/>
-              </a:spcBef>
-            </a:pPr>
-            <a:r>
-              <a:rPr sz="2800" b="1">
-                <a:solidFill>
-                  <a:srgbClr val="212121"/>
-                </a:solidFill>
-                <a:latin typeface="맑은 고딕"/>
-              </a:rPr>
-              <a:t>동작대로</a:t>
-            </a:r>
-          </a:p>
-          <a:p>
-            <a:pPr algn="ctr">
-              <a:spcBef>
-                <a:spcPts val="600"/>
-              </a:spcBef>
-            </a:pPr>
-            <a:r>
-              <a:rPr sz="1600" b="0">
-                <a:solidFill>
-                  <a:srgbClr val="555555"/>
-                </a:solidFill>
-                <a:latin typeface="맑은 고딕"/>
-              </a:rPr>
-              <a:t>사당역 인근</a:t>
-            </a:r>
-          </a:p>
-          <a:p>
-            <a:pPr algn="ctr">
-              <a:spcBef>
-                <a:spcPts val="1200"/>
-              </a:spcBef>
-            </a:pPr>
-            <a:r>
-              <a:rPr sz="1200" b="0">
-                <a:solidFill>
-                  <a:srgbClr val="555555"/>
-                </a:solidFill>
-                <a:latin typeface="맑은 고딕"/>
-              </a:rPr>
-              <a:t>37.4898, 126.9670</a:t>
+              <a:t>→ 예산 제약 시 최우선 설치 대상 (정책 관점 불변)</a:t>
             </a:r>
           </a:p>
         </p:txBody>
@@ -4566,8 +4763,8 @@
         </p:nvSpPr>
         <p:spPr>
           <a:xfrm>
-            <a:off x="685800" y="5029200"/>
-            <a:ext cx="10972800" cy="457200"/>
+            <a:off x="457200" y="6400800"/>
+            <a:ext cx="9144000" cy="365760"/>
           </a:xfrm>
           <a:prstGeom prst="rect">
             <a:avLst/>
@@ -4580,15 +4777,15 @@
           </a:bodyPr>
           <a:lstStyle/>
           <a:p>
-            <a:pPr algn="ctr"/>
-            <a:r>
-              <a:rPr sz="1600" b="1">
-                <a:solidFill>
-                  <a:srgbClr val="1E88E5"/>
-                </a:solidFill>
-                <a:latin typeface="맑은 고딕"/>
-              </a:rPr>
-              <a:t>정책적 함의: 예산 제약 시 이 2곳이 최우선 설치 대상</a:t>
+            <a:pPr algn="l"/>
+            <a:r>
+              <a:rPr sz="1000" b="0">
+                <a:solidFill>
+                  <a:srgbClr val="555555"/>
+                </a:solidFill>
+                <a:latin typeface="맑은 고딕"/>
+              </a:rPr>
+              <a:t>동작구 여름 그늘막 최적 입지 추천 시스템 · 한영재 · 2025961227</a:t>
             </a:r>
           </a:p>
         </p:txBody>
@@ -4601,8 +4798,8 @@
         </p:nvSpPr>
         <p:spPr>
           <a:xfrm>
-            <a:off x="685800" y="5577840"/>
-            <a:ext cx="10972800" cy="457200"/>
+            <a:off x="11247120" y="6400800"/>
+            <a:ext cx="914400" cy="365760"/>
           </a:xfrm>
           <a:prstGeom prst="rect">
             <a:avLst/>
@@ -4615,85 +4812,15 @@
           </a:bodyPr>
           <a:lstStyle/>
           <a:p>
-            <a:pPr algn="ctr"/>
-            <a:r>
-              <a:rPr sz="1300" b="0">
+            <a:pPr algn="r"/>
+            <a:r>
+              <a:rPr sz="1000" b="0">
                 <a:solidFill>
                   <a:srgbClr val="555555"/>
                 </a:solidFill>
                 <a:latin typeface="맑은 고딕"/>
               </a:rPr>
-              <a:t>6 시나리오(+ 교차로_중시) 모두 통과 → 검증 차원 한 단계 더 엄격</a:t>
-            </a:r>
-          </a:p>
-        </p:txBody>
-      </p:sp>
-      <p:sp>
-        <p:nvSpPr>
-          <p:cNvPr id="9" name="TextBox 8"/>
-          <p:cNvSpPr txBox="1"/>
-          <p:nvPr/>
-        </p:nvSpPr>
-        <p:spPr>
-          <a:xfrm>
-            <a:off x="457200" y="6400800"/>
-            <a:ext cx="9144000" cy="365760"/>
-          </a:xfrm>
-          <a:prstGeom prst="rect">
-            <a:avLst/>
-          </a:prstGeom>
-          <a:noFill/>
-        </p:spPr>
-        <p:txBody>
-          <a:bodyPr wrap="square">
-            <a:spAutoFit/>
-          </a:bodyPr>
-          <a:lstStyle/>
-          <a:p>
-            <a:pPr algn="l"/>
-            <a:r>
-              <a:rPr sz="1000" b="0">
-                <a:solidFill>
-                  <a:srgbClr val="555555"/>
-                </a:solidFill>
-                <a:latin typeface="맑은 고딕"/>
-              </a:rPr>
-              <a:t>동작구 여름 그늘막 최적 입지 추천 시스템 · 한영재 · 2025961227</a:t>
-            </a:r>
-          </a:p>
-        </p:txBody>
-      </p:sp>
-      <p:sp>
-        <p:nvSpPr>
-          <p:cNvPr id="10" name="TextBox 9"/>
-          <p:cNvSpPr txBox="1"/>
-          <p:nvPr/>
-        </p:nvSpPr>
-        <p:spPr>
-          <a:xfrm>
-            <a:off x="11247120" y="6400800"/>
-            <a:ext cx="914400" cy="365760"/>
-          </a:xfrm>
-          <a:prstGeom prst="rect">
-            <a:avLst/>
-          </a:prstGeom>
-          <a:noFill/>
-        </p:spPr>
-        <p:txBody>
-          <a:bodyPr wrap="square">
-            <a:spAutoFit/>
-          </a:bodyPr>
-          <a:lstStyle/>
-          <a:p>
-            <a:pPr algn="r"/>
-            <a:r>
-              <a:rPr sz="1000" b="0">
-                <a:solidFill>
-                  <a:srgbClr val="555555"/>
-                </a:solidFill>
-                <a:latin typeface="맑은 고딕"/>
-              </a:rPr>
-              <a:t>11 / 14</a:t>
+              <a:t>11 / 15</a:t>
             </a:r>
           </a:p>
         </p:txBody>
@@ -4783,13 +4910,13 @@
           <a:p>
             <a:pPr algn="l"/>
             <a:r>
-              <a:rPr sz="3000" b="1">
+              <a:rPr sz="2800" b="1">
                 <a:solidFill>
                   <a:srgbClr val="212121"/>
                 </a:solidFill>
                 <a:latin typeface="맑은 고딕"/>
               </a:rPr>
-              <a:t>1차 발표자료 3대 집중구역 검증</a:t>
+              <a:t>1차 발표 3대 집중구역 정량 검증</a:t>
             </a:r>
           </a:p>
         </p:txBody>
@@ -4818,7 +4945,7 @@
           <a:p>
             <a:pPr algn="l"/>
             <a:r>
-              <a:rPr sz="1400" b="0">
+              <a:rPr sz="1300" b="0">
                 <a:solidFill>
                   <a:srgbClr val="555555"/>
                 </a:solidFill>
@@ -4838,8 +4965,8 @@
           <p:nvPr/>
         </p:nvGraphicFramePr>
         <p:xfrm>
-          <a:off x="365760" y="1828800"/>
-          <a:ext cx="11430000" cy="3017520"/>
+          <a:off x="365760" y="1645920"/>
+          <a:ext cx="11430000" cy="2286000"/>
         </p:xfrm>
         <a:graphic>
           <a:graphicData uri="http://schemas.openxmlformats.org/drawingml/2006/table">
@@ -4848,13 +4975,13 @@
                 <a:tableStyleId>{5C22544A-7EE6-4342-B048-85BDC9FD1C3A}</a:tableStyleId>
               </a:tblPr>
               <a:tblGrid>
-                <a:gridCol w="2743200"/>
-                <a:gridCol w="914400"/>
-                <a:gridCol w="2286000"/>
-                <a:gridCol w="1371600"/>
-                <a:gridCol w="4114800"/>
+                <a:gridCol w="2560320"/>
+                <a:gridCol w="822960"/>
+                <a:gridCol w="2468880"/>
+                <a:gridCol w="1280160"/>
+                <a:gridCol w="4297680"/>
               </a:tblGrid>
-              <a:tr h="754380">
+              <a:tr h="571500">
                 <a:tc>
                   <a:txBody>
                     <a:bodyPr/>
@@ -4960,7 +5087,7 @@
                           </a:solidFill>
                           <a:latin typeface="맑은 고딕"/>
                         </a:rPr>
-                        <a:t>해설</a:t>
+                        <a:t>해석</a:t>
                       </a:r>
                     </a:p>
                   </a:txBody>
@@ -4971,15 +5098,15 @@
                   </a:tcPr>
                 </a:tc>
               </a:tr>
-              <a:tr h="754380">
-                <a:tc>
-                  <a:txBody>
-                    <a:bodyPr/>
-                    <a:lstStyle/>
-                    <a:p>
-                      <a:pPr algn="ctr"/>
-                      <a:r>
-                        <a:rPr sz="1300" b="0">
+              <a:tr h="571500">
+                <a:tc>
+                  <a:txBody>
+                    <a:bodyPr/>
+                    <a:lstStyle/>
+                    <a:p>
+                      <a:pPr algn="ctr"/>
+                      <a:r>
+                        <a:rPr sz="1200" b="0">
                           <a:solidFill>
                             <a:srgbClr val="212121"/>
                           </a:solidFill>
@@ -4998,9 +5125,203 @@
                     <a:p>
                       <a:pPr algn="ctr"/>
                       <a:r>
-                        <a:rPr sz="1300" b="1">
-                          <a:solidFill>
-                            <a:srgbClr val="FB8C00"/>
+                        <a:rPr sz="1200" b="0">
+                          <a:solidFill>
+                            <a:srgbClr val="212121"/>
+                          </a:solidFill>
+                          <a:latin typeface="맑은 고딕"/>
+                        </a:rPr>
+                        <a:t>✓</a:t>
+                      </a:r>
+                    </a:p>
+                  </a:txBody>
+                  <a:tcPr/>
+                </a:tc>
+                <a:tc>
+                  <a:txBody>
+                    <a:bodyPr/>
+                    <a:lstStyle/>
+                    <a:p>
+                      <a:pPr algn="ctr"/>
+                      <a:r>
+                        <a:rPr sz="1200" b="0">
+                          <a:solidFill>
+                            <a:srgbClr val="212121"/>
+                          </a:solidFill>
+                          <a:latin typeface="맑은 고딕"/>
+                        </a:rPr>
+                        <a:t>2곳 (TOP6, TOP9)</a:t>
+                      </a:r>
+                    </a:p>
+                  </a:txBody>
+                  <a:tcPr/>
+                </a:tc>
+                <a:tc>
+                  <a:txBody>
+                    <a:bodyPr/>
+                    <a:lstStyle/>
+                    <a:p>
+                      <a:pPr algn="ctr"/>
+                      <a:r>
+                        <a:rPr sz="1200" b="0">
+                          <a:solidFill>
+                            <a:srgbClr val="212121"/>
+                          </a:solidFill>
+                          <a:latin typeface="맑은 고딕"/>
+                        </a:rPr>
+                        <a:t>159m</a:t>
+                      </a:r>
+                    </a:p>
+                  </a:txBody>
+                  <a:tcPr/>
+                </a:tc>
+                <a:tc>
+                  <a:txBody>
+                    <a:bodyPr/>
+                    <a:lstStyle/>
+                    <a:p>
+                      <a:pPr algn="ctr"/>
+                      <a:r>
+                        <a:rPr sz="1200" b="0">
+                          <a:solidFill>
+                            <a:srgbClr val="212121"/>
+                          </a:solidFill>
+                          <a:latin typeface="맑은 고딕"/>
+                        </a:rPr>
+                        <a:t>횡단보도 통합으로 신규 진입</a:t>
+                      </a:r>
+                    </a:p>
+                  </a:txBody>
+                  <a:tcPr/>
+                </a:tc>
+              </a:tr>
+              <a:tr h="571500">
+                <a:tc>
+                  <a:txBody>
+                    <a:bodyPr/>
+                    <a:lstStyle/>
+                    <a:p>
+                      <a:pPr algn="ctr"/>
+                      <a:r>
+                        <a:rPr sz="1200" b="0">
+                          <a:solidFill>
+                            <a:srgbClr val="212121"/>
+                          </a:solidFill>
+                          <a:latin typeface="맑은 고딕"/>
+                        </a:rPr>
+                        <a:t>사당역-이수역 축</a:t>
+                      </a:r>
+                    </a:p>
+                  </a:txBody>
+                  <a:tcPr/>
+                </a:tc>
+                <a:tc>
+                  <a:txBody>
+                    <a:bodyPr/>
+                    <a:lstStyle/>
+                    <a:p>
+                      <a:pPr algn="ctr"/>
+                      <a:r>
+                        <a:rPr sz="1200" b="0">
+                          <a:solidFill>
+                            <a:srgbClr val="212121"/>
+                          </a:solidFill>
+                          <a:latin typeface="맑은 고딕"/>
+                        </a:rPr>
+                        <a:t>✓</a:t>
+                      </a:r>
+                    </a:p>
+                  </a:txBody>
+                  <a:tcPr/>
+                </a:tc>
+                <a:tc>
+                  <a:txBody>
+                    <a:bodyPr/>
+                    <a:lstStyle/>
+                    <a:p>
+                      <a:pPr algn="ctr"/>
+                      <a:r>
+                        <a:rPr sz="1200" b="0">
+                          <a:solidFill>
+                            <a:srgbClr val="212121"/>
+                          </a:solidFill>
+                          <a:latin typeface="맑은 고딕"/>
+                        </a:rPr>
+                        <a:t>4곳 (TOP1·2·4·5)</a:t>
+                      </a:r>
+                    </a:p>
+                  </a:txBody>
+                  <a:tcPr/>
+                </a:tc>
+                <a:tc>
+                  <a:txBody>
+                    <a:bodyPr/>
+                    <a:lstStyle/>
+                    <a:p>
+                      <a:pPr algn="ctr"/>
+                      <a:r>
+                        <a:rPr sz="1200" b="0">
+                          <a:solidFill>
+                            <a:srgbClr val="212121"/>
+                          </a:solidFill>
+                          <a:latin typeface="맑은 고딕"/>
+                        </a:rPr>
+                        <a:t>253m</a:t>
+                      </a:r>
+                    </a:p>
+                  </a:txBody>
+                  <a:tcPr/>
+                </a:tc>
+                <a:tc>
+                  <a:txBody>
+                    <a:bodyPr/>
+                    <a:lstStyle/>
+                    <a:p>
+                      <a:pPr algn="ctr"/>
+                      <a:r>
+                        <a:rPr sz="1200" b="0">
+                          <a:solidFill>
+                            <a:srgbClr val="212121"/>
+                          </a:solidFill>
+                          <a:latin typeface="맑은 고딕"/>
+                        </a:rPr>
+                        <a:t>환승 대기 + 오후 열스트레스 최상위</a:t>
+                      </a:r>
+                    </a:p>
+                  </a:txBody>
+                  <a:tcPr/>
+                </a:tc>
+              </a:tr>
+              <a:tr h="571500">
+                <a:tc>
+                  <a:txBody>
+                    <a:bodyPr/>
+                    <a:lstStyle/>
+                    <a:p>
+                      <a:pPr algn="ctr"/>
+                      <a:r>
+                        <a:rPr sz="1200" b="0">
+                          <a:solidFill>
+                            <a:srgbClr val="212121"/>
+                          </a:solidFill>
+                          <a:latin typeface="맑은 고딕"/>
+                        </a:rPr>
+                        <a:t>상도로 주거축</a:t>
+                      </a:r>
+                    </a:p>
+                  </a:txBody>
+                  <a:tcPr/>
+                </a:tc>
+                <a:tc>
+                  <a:txBody>
+                    <a:bodyPr/>
+                    <a:lstStyle/>
+                    <a:p>
+                      <a:pPr algn="ctr"/>
+                      <a:r>
+                        <a:rPr sz="1200" b="0">
+                          <a:solidFill>
+                            <a:srgbClr val="212121"/>
                           </a:solidFill>
                           <a:latin typeface="맑은 고딕"/>
                         </a:rPr>
@@ -5017,7 +5338,7 @@
                     <a:p>
                       <a:pPr algn="ctr"/>
                       <a:r>
-                        <a:rPr sz="1300" b="0">
+                        <a:rPr sz="1200" b="0">
                           <a:solidFill>
                             <a:srgbClr val="212121"/>
                           </a:solidFill>
@@ -5036,13 +5357,13 @@
                     <a:p>
                       <a:pPr algn="ctr"/>
                       <a:r>
-                        <a:rPr sz="1300" b="0">
+                        <a:rPr sz="1200" b="0">
                           <a:solidFill>
                             <a:srgbClr val="212121"/>
                           </a:solidFill>
                           <a:latin typeface="맑은 고딕"/>
                         </a:rPr>
-                        <a:t>1,355m</a:t>
+                        <a:t>1,516m</a:t>
                       </a:r>
                     </a:p>
                   </a:txBody>
@@ -5055,207 +5376,13 @@
                     <a:p>
                       <a:pPr algn="ctr"/>
                       <a:r>
-                        <a:rPr sz="1300" b="0">
+                        <a:rPr sz="1200" b="0">
                           <a:solidFill>
                             <a:srgbClr val="212121"/>
                           </a:solidFill>
                           <a:latin typeface="맑은 고딕"/>
                         </a:rPr>
-                        <a:t>기존 그늘막 선배치 → 페널티 작동 (의도대로)</a:t>
-                      </a:r>
-                    </a:p>
-                  </a:txBody>
-                  <a:tcPr/>
-                </a:tc>
-              </a:tr>
-              <a:tr h="754380">
-                <a:tc>
-                  <a:txBody>
-                    <a:bodyPr/>
-                    <a:lstStyle/>
-                    <a:p>
-                      <a:pPr algn="ctr"/>
-                      <a:r>
-                        <a:rPr sz="1300" b="0">
-                          <a:solidFill>
-                            <a:srgbClr val="212121"/>
-                          </a:solidFill>
-                          <a:latin typeface="맑은 고딕"/>
-                        </a:rPr>
-                        <a:t>사당역-이수역 축</a:t>
-                      </a:r>
-                    </a:p>
-                  </a:txBody>
-                  <a:tcPr/>
-                </a:tc>
-                <a:tc>
-                  <a:txBody>
-                    <a:bodyPr/>
-                    <a:lstStyle/>
-                    <a:p>
-                      <a:pPr algn="ctr"/>
-                      <a:r>
-                        <a:rPr sz="1300" b="1">
-                          <a:solidFill>
-                            <a:srgbClr val="1E88E5"/>
-                          </a:solidFill>
-                          <a:latin typeface="맑은 고딕"/>
-                        </a:rPr>
-                        <a:t>✓</a:t>
-                      </a:r>
-                    </a:p>
-                  </a:txBody>
-                  <a:tcPr/>
-                </a:tc>
-                <a:tc>
-                  <a:txBody>
-                    <a:bodyPr/>
-                    <a:lstStyle/>
-                    <a:p>
-                      <a:pPr algn="ctr"/>
-                      <a:r>
-                        <a:rPr sz="1300" b="0">
-                          <a:solidFill>
-                            <a:srgbClr val="212121"/>
-                          </a:solidFill>
-                          <a:latin typeface="맑은 고딕"/>
-                        </a:rPr>
-                        <a:t>2곳 (TOP1·TOP2)</a:t>
-                      </a:r>
-                    </a:p>
-                  </a:txBody>
-                  <a:tcPr/>
-                </a:tc>
-                <a:tc>
-                  <a:txBody>
-                    <a:bodyPr/>
-                    <a:lstStyle/>
-                    <a:p>
-                      <a:pPr algn="ctr"/>
-                      <a:r>
-                        <a:rPr sz="1300" b="0">
-                          <a:solidFill>
-                            <a:srgbClr val="212121"/>
-                          </a:solidFill>
-                          <a:latin typeface="맑은 고딕"/>
-                        </a:rPr>
-                        <a:t>167m</a:t>
-                      </a:r>
-                    </a:p>
-                  </a:txBody>
-                  <a:tcPr/>
-                </a:tc>
-                <a:tc>
-                  <a:txBody>
-                    <a:bodyPr/>
-                    <a:lstStyle/>
-                    <a:p>
-                      <a:pPr algn="ctr"/>
-                      <a:r>
-                        <a:rPr sz="1300" b="0">
-                          <a:solidFill>
-                            <a:srgbClr val="212121"/>
-                          </a:solidFill>
-                          <a:latin typeface="맑은 고딕"/>
-                        </a:rPr>
-                        <a:t>환승 대기 + 오후 열스트레스 최상위</a:t>
-                      </a:r>
-                    </a:p>
-                  </a:txBody>
-                  <a:tcPr/>
-                </a:tc>
-              </a:tr>
-              <a:tr h="754380">
-                <a:tc>
-                  <a:txBody>
-                    <a:bodyPr/>
-                    <a:lstStyle/>
-                    <a:p>
-                      <a:pPr algn="ctr"/>
-                      <a:r>
-                        <a:rPr sz="1300" b="0">
-                          <a:solidFill>
-                            <a:srgbClr val="212121"/>
-                          </a:solidFill>
-                          <a:latin typeface="맑은 고딕"/>
-                        </a:rPr>
-                        <a:t>상도로 주거축</a:t>
-                      </a:r>
-                    </a:p>
-                  </a:txBody>
-                  <a:tcPr/>
-                </a:tc>
-                <a:tc>
-                  <a:txBody>
-                    <a:bodyPr/>
-                    <a:lstStyle/>
-                    <a:p>
-                      <a:pPr algn="ctr"/>
-                      <a:r>
-                        <a:rPr sz="1300" b="1">
-                          <a:solidFill>
-                            <a:srgbClr val="1E88E5"/>
-                          </a:solidFill>
-                          <a:latin typeface="맑은 고딕"/>
-                        </a:rPr>
-                        <a:t>✓</a:t>
-                      </a:r>
-                    </a:p>
-                  </a:txBody>
-                  <a:tcPr/>
-                </a:tc>
-                <a:tc>
-                  <a:txBody>
-                    <a:bodyPr/>
-                    <a:lstStyle/>
-                    <a:p>
-                      <a:pPr algn="ctr"/>
-                      <a:r>
-                        <a:rPr sz="1300" b="0">
-                          <a:solidFill>
-                            <a:srgbClr val="212121"/>
-                          </a:solidFill>
-                          <a:latin typeface="맑은 고딕"/>
-                        </a:rPr>
-                        <a:t>3곳 (TOP5~7)</a:t>
-                      </a:r>
-                    </a:p>
-                  </a:txBody>
-                  <a:tcPr/>
-                </a:tc>
-                <a:tc>
-                  <a:txBody>
-                    <a:bodyPr/>
-                    <a:lstStyle/>
-                    <a:p>
-                      <a:pPr algn="ctr"/>
-                      <a:r>
-                        <a:rPr sz="1300" b="0">
-                          <a:solidFill>
-                            <a:srgbClr val="212121"/>
-                          </a:solidFill>
-                          <a:latin typeface="맑은 고딕"/>
-                        </a:rPr>
-                        <a:t>66m</a:t>
-                      </a:r>
-                    </a:p>
-                  </a:txBody>
-                  <a:tcPr/>
-                </a:tc>
-                <a:tc>
-                  <a:txBody>
-                    <a:bodyPr/>
-                    <a:lstStyle/>
-                    <a:p>
-                      <a:pPr algn="ctr"/>
-                      <a:r>
-                        <a:rPr sz="1300" b="0">
-                          <a:solidFill>
-                            <a:srgbClr val="212121"/>
-                          </a:solidFill>
-                          <a:latin typeface="맑은 고딕"/>
-                        </a:rPr>
-                        <a:t>고령자 비율 + 자연그늘 부족 이중 반영</a:t>
+                        <a:t>보행로 5m 강화 후 후보 줄어듦</a:t>
                       </a:r>
                     </a:p>
                   </a:txBody>
@@ -5274,8 +5401,8 @@
         </p:nvSpPr>
         <p:spPr>
           <a:xfrm>
-            <a:off x="685800" y="5212080"/>
-            <a:ext cx="10972800" cy="822960"/>
+            <a:off x="685800" y="4389120"/>
+            <a:ext cx="10972800" cy="1828800"/>
           </a:xfrm>
           <a:prstGeom prst="rect">
             <a:avLst/>
@@ -5292,12 +5419,13 @@
             <a:r>
               <a:rPr sz="1300" b="0">
                 <a:solidFill>
-                  <a:srgbClr val="555555"/>
-                </a:solidFill>
-                <a:latin typeface="맑은 고딕"/>
-              </a:rPr>
-              <a:t>💡 노량진 '0곳'은 실패가 아님: 더미 데이터에서 기존 그늘막을 노량진 보행로에 우선 배치한 결과,
-'기존 그늘막 반경 150m 외' 제약으로 자연스럽게 후순위로 밀린 것. 이미 커버된 곳은 제외하는 알고리즘이 의도대로 작동한 사례.</a:t>
+                  <a:srgbClr val="212121"/>
+                </a:solidFill>
+                <a:latin typeface="맑은 고딕"/>
+              </a:rPr>
+              <a:t>💡 노량진역-수산시장이 처음으로 TOP10 진입 — OSMnx 횡단보도(footway=crossing) 다중 태그 검색의 직접적 효과.
+사당-이수 환승 축은 모든 변화에도 흔들리지 않는 강건 입지 #1·#2 차지.
+상도로는 1차 발표 때 ✓였으나 보행로 필터 5m 강화로 컷 — 정책적 재검토 필요.</a:t>
             </a:r>
           </a:p>
         </p:txBody>
@@ -5367,7 +5495,7 @@
                 </a:solidFill>
                 <a:latin typeface="맑은 고딕"/>
               </a:rPr>
-              <a:t>12 / 14</a:t>
+              <a:t>12 / 15</a:t>
             </a:r>
           </a:p>
         </p:txBody>
@@ -5457,13 +5585,13 @@
           <a:p>
             <a:pPr algn="l"/>
             <a:r>
-              <a:rPr sz="3000" b="1">
+              <a:rPr sz="2800" b="1">
                 <a:solidFill>
                   <a:srgbClr val="212121"/>
                 </a:solidFill>
                 <a:latin typeface="맑은 고딕"/>
               </a:rPr>
-              <a:t>인터랙티브 대시보드</a:t>
+              <a:t>흑석동 — 실측 그늘막 18개 vs 신규 추천 TOP 10</a:t>
             </a:r>
           </a:p>
         </p:txBody>
@@ -5492,141 +5620,939 @@
           <a:p>
             <a:pPr algn="l"/>
             <a:r>
-              <a:rPr sz="1400" b="0">
+              <a:rPr sz="1300" b="0">
                 <a:solidFill>
                   <a:srgbClr val="555555"/>
                 </a:solidFill>
                 <a:latin typeface="맑은 고딕"/>
               </a:rPr>
-              <a:t>가중치 슬라이더 → TOP 10 실시간 재계산 (Streamlit)</a:t>
-            </a:r>
-          </a:p>
-        </p:txBody>
-      </p:sp>
-      <p:sp>
-        <p:nvSpPr>
-          <p:cNvPr id="5" name="TextBox 4"/>
-          <p:cNvSpPr txBox="1"/>
+              <a:t>사용자 제공 실데이터로 사각지대·보강 후보 정량 비교</a:t>
+            </a:r>
+          </a:p>
+        </p:txBody>
+      </p:sp>
+      <p:graphicFrame>
+        <p:nvGraphicFramePr>
+          <p:cNvPr id="5" name="Table 4"/>
+          <p:cNvGraphicFramePr>
+            <a:graphicFrameLocks noGrp="1"/>
+          </p:cNvGraphicFramePr>
           <p:nvPr/>
-        </p:nvSpPr>
-        <p:spPr>
-          <a:xfrm>
-            <a:off x="685800" y="1737360"/>
-            <a:ext cx="5943600" cy="4114800"/>
-          </a:xfrm>
-          <a:prstGeom prst="rect">
-            <a:avLst/>
-          </a:prstGeom>
-          <a:noFill/>
-        </p:spPr>
-        <p:txBody>
-          <a:bodyPr wrap="square">
-            <a:spAutoFit/>
-          </a:bodyPr>
-          <a:lstStyle/>
-          <a:p>
-            <a:pPr>
-              <a:spcAft>
-                <a:spcPts val="600"/>
-              </a:spcAft>
-            </a:pPr>
-            <a:r>
-              <a:rPr sz="1500" b="0">
-                <a:solidFill>
-                  <a:srgbClr val="212121"/>
-                </a:solidFill>
-                <a:latin typeface="맑은 고딕"/>
-              </a:rPr>
-              <a:t>• `streamlit run app.py` 로 기동 → http://localhost:8501</a:t>
-            </a:r>
-          </a:p>
-          <a:p>
-            <a:pPr>
-              <a:spcAft>
-                <a:spcPts val="600"/>
-              </a:spcAft>
-            </a:pPr>
-            <a:r>
-              <a:rPr sz="1500" b="0">
-                <a:solidFill>
-                  <a:srgbClr val="212121"/>
-                </a:solidFill>
-                <a:latin typeface="맑은 고딕"/>
-              </a:rPr>
-              <a:t>• 사이드바: 시나리오 프리셋 드롭다운 + 5개 가중치 슬라이더</a:t>
-            </a:r>
-          </a:p>
-          <a:p>
-            <a:pPr>
-              <a:spcAft>
-                <a:spcPts val="600"/>
-              </a:spcAft>
-            </a:pPr>
-            <a:r>
-              <a:rPr sz="1500" b="0">
-                <a:solidFill>
-                  <a:srgbClr val="212121"/>
-                </a:solidFill>
-                <a:latin typeface="맑은 고딕"/>
-              </a:rPr>
-              <a:t>• 본문: Folium 지도 임베드 + TOP 10 표 + 통계</a:t>
-            </a:r>
-          </a:p>
-          <a:p>
-            <a:pPr>
-              <a:spcAft>
-                <a:spcPts val="600"/>
-              </a:spcAft>
-            </a:pPr>
-            <a:r>
-              <a:rPr sz="1500" b="0">
-                <a:solidFill>
-                  <a:srgbClr val="212121"/>
-                </a:solidFill>
-                <a:latin typeface="맑은 고딕"/>
-              </a:rPr>
-              <a:t>• 캐싱: @st.cache_resource 로 격자·피처는 1회 계산,
-  슬라이더 조작은 가중합 재계산만 (밀리초 반응)</a:t>
-            </a:r>
-          </a:p>
-          <a:p>
-            <a:pPr>
-              <a:spcAft>
-                <a:spcPts val="600"/>
-              </a:spcAft>
-            </a:pPr>
-            <a:r>
-              <a:rPr sz="1500" b="0">
-                <a:solidFill>
-                  <a:srgbClr val="212121"/>
-                </a:solidFill>
-                <a:latin typeface="맑은 고딕"/>
-              </a:rPr>
-              <a:t>• 발표 현장에서 "만약 vuln을 더 높이면?" 질문에 즉답 가능</a:t>
-            </a:r>
-          </a:p>
-        </p:txBody>
-      </p:sp>
-      <p:sp>
-        <p:nvSpPr>
-          <p:cNvPr id="6" name="Rectangle 5"/>
+        </p:nvGraphicFramePr>
+        <p:xfrm>
+          <a:off x="365760" y="1554480"/>
+          <a:ext cx="5669280" cy="4114800"/>
+        </p:xfrm>
+        <a:graphic>
+          <a:graphicData uri="http://schemas.openxmlformats.org/drawingml/2006/table">
+            <a:tbl>
+              <a:tblPr firstRow="1" bandRow="1">
+                <a:tableStyleId>{5C22544A-7EE6-4342-B048-85BDC9FD1C3A}</a:tableStyleId>
+              </a:tblPr>
+              <a:tblGrid>
+                <a:gridCol w="822960"/>
+                <a:gridCol w="1188720"/>
+                <a:gridCol w="1371600"/>
+                <a:gridCol w="2286000"/>
+              </a:tblGrid>
+              <a:tr h="374072">
+                <a:tc>
+                  <a:txBody>
+                    <a:bodyPr/>
+                    <a:lstStyle/>
+                    <a:p>
+                      <a:pPr algn="ctr"/>
+                      <a:r>
+                        <a:rPr sz="1200" b="1">
+                          <a:solidFill>
+                            <a:srgbClr val="FFFFFF"/>
+                          </a:solidFill>
+                          <a:latin typeface="맑은 고딕"/>
+                        </a:rPr>
+                        <a:t>Rank</a:t>
+                      </a:r>
+                    </a:p>
+                  </a:txBody>
+                  <a:tcPr>
+                    <a:solidFill>
+                      <a:srgbClr val="1E88E5"/>
+                    </a:solidFill>
+                  </a:tcPr>
+                </a:tc>
+                <a:tc>
+                  <a:txBody>
+                    <a:bodyPr/>
+                    <a:lstStyle/>
+                    <a:p>
+                      <a:pPr algn="ctr"/>
+                      <a:r>
+                        <a:rPr sz="1200" b="1">
+                          <a:solidFill>
+                            <a:srgbClr val="FFFFFF"/>
+                          </a:solidFill>
+                          <a:latin typeface="맑은 고딕"/>
+                        </a:rPr>
+                        <a:t>score</a:t>
+                      </a:r>
+                    </a:p>
+                  </a:txBody>
+                  <a:tcPr>
+                    <a:solidFill>
+                      <a:srgbClr val="1E88E5"/>
+                    </a:solidFill>
+                  </a:tcPr>
+                </a:tc>
+                <a:tc>
+                  <a:txBody>
+                    <a:bodyPr/>
+                    <a:lstStyle/>
+                    <a:p>
+                      <a:pPr algn="ctr"/>
+                      <a:r>
+                        <a:rPr sz="1200" b="1">
+                          <a:solidFill>
+                            <a:srgbClr val="FFFFFF"/>
+                          </a:solidFill>
+                          <a:latin typeface="맑은 고딕"/>
+                        </a:rPr>
+                        <a:t>기존그늘막</a:t>
+                      </a:r>
+                    </a:p>
+                  </a:txBody>
+                  <a:tcPr>
+                    <a:solidFill>
+                      <a:srgbClr val="1E88E5"/>
+                    </a:solidFill>
+                  </a:tcPr>
+                </a:tc>
+                <a:tc>
+                  <a:txBody>
+                    <a:bodyPr/>
+                    <a:lstStyle/>
+                    <a:p>
+                      <a:pPr algn="ctr"/>
+                      <a:r>
+                        <a:rPr sz="1200" b="1">
+                          <a:solidFill>
+                            <a:srgbClr val="FFFFFF"/>
+                          </a:solidFill>
+                          <a:latin typeface="맑은 고딕"/>
+                        </a:rPr>
+                        <a:t>분류</a:t>
+                      </a:r>
+                    </a:p>
+                  </a:txBody>
+                  <a:tcPr>
+                    <a:solidFill>
+                      <a:srgbClr val="1E88E5"/>
+                    </a:solidFill>
+                  </a:tcPr>
+                </a:tc>
+              </a:tr>
+              <a:tr h="374072">
+                <a:tc>
+                  <a:txBody>
+                    <a:bodyPr/>
+                    <a:lstStyle/>
+                    <a:p>
+                      <a:pPr algn="ctr"/>
+                      <a:r>
+                        <a:rPr sz="1100" b="0">
+                          <a:solidFill>
+                            <a:srgbClr val="212121"/>
+                          </a:solidFill>
+                          <a:latin typeface="맑은 고딕"/>
+                        </a:rPr>
+                        <a:t>TOP1</a:t>
+                      </a:r>
+                    </a:p>
+                  </a:txBody>
+                  <a:tcPr/>
+                </a:tc>
+                <a:tc>
+                  <a:txBody>
+                    <a:bodyPr/>
+                    <a:lstStyle/>
+                    <a:p>
+                      <a:pPr algn="ctr"/>
+                      <a:r>
+                        <a:rPr sz="1100" b="0">
+                          <a:solidFill>
+                            <a:srgbClr val="212121"/>
+                          </a:solidFill>
+                          <a:latin typeface="맑은 고딕"/>
+                        </a:rPr>
+                        <a:t>+0.276</a:t>
+                      </a:r>
+                    </a:p>
+                  </a:txBody>
+                  <a:tcPr/>
+                </a:tc>
+                <a:tc>
+                  <a:txBody>
+                    <a:bodyPr/>
+                    <a:lstStyle/>
+                    <a:p>
+                      <a:pPr algn="ctr"/>
+                      <a:r>
+                        <a:rPr sz="1100" b="0">
+                          <a:solidFill>
+                            <a:srgbClr val="212121"/>
+                          </a:solidFill>
+                          <a:latin typeface="맑은 고딕"/>
+                        </a:rPr>
+                        <a:t>45.7m</a:t>
+                      </a:r>
+                    </a:p>
+                  </a:txBody>
+                  <a:tcPr/>
+                </a:tc>
+                <a:tc>
+                  <a:txBody>
+                    <a:bodyPr/>
+                    <a:lstStyle/>
+                    <a:p>
+                      <a:pPr algn="ctr"/>
+                      <a:r>
+                        <a:rPr sz="1100" b="0">
+                          <a:solidFill>
+                            <a:srgbClr val="212121"/>
+                          </a:solidFill>
+                          <a:latin typeface="맑은 고딕"/>
+                        </a:rPr>
+                        <a:t>● 보강</a:t>
+                      </a:r>
+                    </a:p>
+                  </a:txBody>
+                  <a:tcPr/>
+                </a:tc>
+              </a:tr>
+              <a:tr h="374072">
+                <a:tc>
+                  <a:txBody>
+                    <a:bodyPr/>
+                    <a:lstStyle/>
+                    <a:p>
+                      <a:pPr algn="ctr"/>
+                      <a:r>
+                        <a:rPr sz="1100" b="0">
+                          <a:solidFill>
+                            <a:srgbClr val="212121"/>
+                          </a:solidFill>
+                          <a:latin typeface="맑은 고딕"/>
+                        </a:rPr>
+                        <a:t>TOP2</a:t>
+                      </a:r>
+                    </a:p>
+                  </a:txBody>
+                  <a:tcPr/>
+                </a:tc>
+                <a:tc>
+                  <a:txBody>
+                    <a:bodyPr/>
+                    <a:lstStyle/>
+                    <a:p>
+                      <a:pPr algn="ctr"/>
+                      <a:r>
+                        <a:rPr sz="1100" b="0">
+                          <a:solidFill>
+                            <a:srgbClr val="212121"/>
+                          </a:solidFill>
+                          <a:latin typeface="맑은 고딕"/>
+                        </a:rPr>
+                        <a:t>+0.231</a:t>
+                      </a:r>
+                    </a:p>
+                  </a:txBody>
+                  <a:tcPr/>
+                </a:tc>
+                <a:tc>
+                  <a:txBody>
+                    <a:bodyPr/>
+                    <a:lstStyle/>
+                    <a:p>
+                      <a:pPr algn="ctr"/>
+                      <a:r>
+                        <a:rPr sz="1100" b="0">
+                          <a:solidFill>
+                            <a:srgbClr val="212121"/>
+                          </a:solidFill>
+                          <a:latin typeface="맑은 고딕"/>
+                        </a:rPr>
+                        <a:t>44.4m</a:t>
+                      </a:r>
+                    </a:p>
+                  </a:txBody>
+                  <a:tcPr/>
+                </a:tc>
+                <a:tc>
+                  <a:txBody>
+                    <a:bodyPr/>
+                    <a:lstStyle/>
+                    <a:p>
+                      <a:pPr algn="ctr"/>
+                      <a:r>
+                        <a:rPr sz="1100" b="0">
+                          <a:solidFill>
+                            <a:srgbClr val="212121"/>
+                          </a:solidFill>
+                          <a:latin typeface="맑은 고딕"/>
+                        </a:rPr>
+                        <a:t>● 보강</a:t>
+                      </a:r>
+                    </a:p>
+                  </a:txBody>
+                  <a:tcPr/>
+                </a:tc>
+              </a:tr>
+              <a:tr h="374072">
+                <a:tc>
+                  <a:txBody>
+                    <a:bodyPr/>
+                    <a:lstStyle/>
+                    <a:p>
+                      <a:pPr algn="ctr"/>
+                      <a:r>
+                        <a:rPr sz="1100" b="0">
+                          <a:solidFill>
+                            <a:srgbClr val="212121"/>
+                          </a:solidFill>
+                          <a:latin typeface="맑은 고딕"/>
+                        </a:rPr>
+                        <a:t>TOP3</a:t>
+                      </a:r>
+                    </a:p>
+                  </a:txBody>
+                  <a:tcPr/>
+                </a:tc>
+                <a:tc>
+                  <a:txBody>
+                    <a:bodyPr/>
+                    <a:lstStyle/>
+                    <a:p>
+                      <a:pPr algn="ctr"/>
+                      <a:r>
+                        <a:rPr sz="1100" b="0">
+                          <a:solidFill>
+                            <a:srgbClr val="212121"/>
+                          </a:solidFill>
+                          <a:latin typeface="맑은 고딕"/>
+                        </a:rPr>
+                        <a:t>+0.134</a:t>
+                      </a:r>
+                    </a:p>
+                  </a:txBody>
+                  <a:tcPr/>
+                </a:tc>
+                <a:tc>
+                  <a:txBody>
+                    <a:bodyPr/>
+                    <a:lstStyle/>
+                    <a:p>
+                      <a:pPr algn="ctr"/>
+                      <a:r>
+                        <a:rPr sz="1100" b="0">
+                          <a:solidFill>
+                            <a:srgbClr val="212121"/>
+                          </a:solidFill>
+                          <a:latin typeface="맑은 고딕"/>
+                        </a:rPr>
+                        <a:t>322.9m</a:t>
+                      </a:r>
+                    </a:p>
+                  </a:txBody>
+                  <a:tcPr/>
+                </a:tc>
+                <a:tc>
+                  <a:txBody>
+                    <a:bodyPr/>
+                    <a:lstStyle/>
+                    <a:p>
+                      <a:pPr algn="ctr"/>
+                      <a:r>
+                        <a:rPr sz="1100" b="0">
+                          <a:solidFill>
+                            <a:srgbClr val="212121"/>
+                          </a:solidFill>
+                          <a:latin typeface="맑은 고딕"/>
+                        </a:rPr>
+                        <a:t>⭐ 사각지대</a:t>
+                      </a:r>
+                    </a:p>
+                  </a:txBody>
+                  <a:tcPr/>
+                </a:tc>
+              </a:tr>
+              <a:tr h="374072">
+                <a:tc>
+                  <a:txBody>
+                    <a:bodyPr/>
+                    <a:lstStyle/>
+                    <a:p>
+                      <a:pPr algn="ctr"/>
+                      <a:r>
+                        <a:rPr sz="1100" b="0">
+                          <a:solidFill>
+                            <a:srgbClr val="212121"/>
+                          </a:solidFill>
+                          <a:latin typeface="맑은 고딕"/>
+                        </a:rPr>
+                        <a:t>TOP4</a:t>
+                      </a:r>
+                    </a:p>
+                  </a:txBody>
+                  <a:tcPr/>
+                </a:tc>
+                <a:tc>
+                  <a:txBody>
+                    <a:bodyPr/>
+                    <a:lstStyle/>
+                    <a:p>
+                      <a:pPr algn="ctr"/>
+                      <a:r>
+                        <a:rPr sz="1100" b="0">
+                          <a:solidFill>
+                            <a:srgbClr val="212121"/>
+                          </a:solidFill>
+                          <a:latin typeface="맑은 고딕"/>
+                        </a:rPr>
+                        <a:t>+0.107</a:t>
+                      </a:r>
+                    </a:p>
+                  </a:txBody>
+                  <a:tcPr/>
+                </a:tc>
+                <a:tc>
+                  <a:txBody>
+                    <a:bodyPr/>
+                    <a:lstStyle/>
+                    <a:p>
+                      <a:pPr algn="ctr"/>
+                      <a:r>
+                        <a:rPr sz="1100" b="0">
+                          <a:solidFill>
+                            <a:srgbClr val="212121"/>
+                          </a:solidFill>
+                          <a:latin typeface="맑은 고딕"/>
+                        </a:rPr>
+                        <a:t>359.6m</a:t>
+                      </a:r>
+                    </a:p>
+                  </a:txBody>
+                  <a:tcPr/>
+                </a:tc>
+                <a:tc>
+                  <a:txBody>
+                    <a:bodyPr/>
+                    <a:lstStyle/>
+                    <a:p>
+                      <a:pPr algn="ctr"/>
+                      <a:r>
+                        <a:rPr sz="1100" b="0">
+                          <a:solidFill>
+                            <a:srgbClr val="212121"/>
+                          </a:solidFill>
+                          <a:latin typeface="맑은 고딕"/>
+                        </a:rPr>
+                        <a:t>⭐ 사각지대 (최대)</a:t>
+                      </a:r>
+                    </a:p>
+                  </a:txBody>
+                  <a:tcPr/>
+                </a:tc>
+              </a:tr>
+              <a:tr h="374072">
+                <a:tc>
+                  <a:txBody>
+                    <a:bodyPr/>
+                    <a:lstStyle/>
+                    <a:p>
+                      <a:pPr algn="ctr"/>
+                      <a:r>
+                        <a:rPr sz="1100" b="0">
+                          <a:solidFill>
+                            <a:srgbClr val="212121"/>
+                          </a:solidFill>
+                          <a:latin typeface="맑은 고딕"/>
+                        </a:rPr>
+                        <a:t>TOP5</a:t>
+                      </a:r>
+                    </a:p>
+                  </a:txBody>
+                  <a:tcPr/>
+                </a:tc>
+                <a:tc>
+                  <a:txBody>
+                    <a:bodyPr/>
+                    <a:lstStyle/>
+                    <a:p>
+                      <a:pPr algn="ctr"/>
+                      <a:r>
+                        <a:rPr sz="1100" b="0">
+                          <a:solidFill>
+                            <a:srgbClr val="212121"/>
+                          </a:solidFill>
+                          <a:latin typeface="맑은 고딕"/>
+                        </a:rPr>
+                        <a:t>+0.100</a:t>
+                      </a:r>
+                    </a:p>
+                  </a:txBody>
+                  <a:tcPr/>
+                </a:tc>
+                <a:tc>
+                  <a:txBody>
+                    <a:bodyPr/>
+                    <a:lstStyle/>
+                    <a:p>
+                      <a:pPr algn="ctr"/>
+                      <a:r>
+                        <a:rPr sz="1100" b="0">
+                          <a:solidFill>
+                            <a:srgbClr val="212121"/>
+                          </a:solidFill>
+                          <a:latin typeface="맑은 고딕"/>
+                        </a:rPr>
+                        <a:t>234.8m</a:t>
+                      </a:r>
+                    </a:p>
+                  </a:txBody>
+                  <a:tcPr/>
+                </a:tc>
+                <a:tc>
+                  <a:txBody>
+                    <a:bodyPr/>
+                    <a:lstStyle/>
+                    <a:p>
+                      <a:pPr algn="ctr"/>
+                      <a:r>
+                        <a:rPr sz="1100" b="0">
+                          <a:solidFill>
+                            <a:srgbClr val="212121"/>
+                          </a:solidFill>
+                          <a:latin typeface="맑은 고딕"/>
+                        </a:rPr>
+                        <a:t>⭐ 사각지대</a:t>
+                      </a:r>
+                    </a:p>
+                  </a:txBody>
+                  <a:tcPr/>
+                </a:tc>
+              </a:tr>
+              <a:tr h="374072">
+                <a:tc>
+                  <a:txBody>
+                    <a:bodyPr/>
+                    <a:lstStyle/>
+                    <a:p>
+                      <a:pPr algn="ctr"/>
+                      <a:r>
+                        <a:rPr sz="1100" b="0">
+                          <a:solidFill>
+                            <a:srgbClr val="212121"/>
+                          </a:solidFill>
+                          <a:latin typeface="맑은 고딕"/>
+                        </a:rPr>
+                        <a:t>TOP6</a:t>
+                      </a:r>
+                    </a:p>
+                  </a:txBody>
+                  <a:tcPr/>
+                </a:tc>
+                <a:tc>
+                  <a:txBody>
+                    <a:bodyPr/>
+                    <a:lstStyle/>
+                    <a:p>
+                      <a:pPr algn="ctr"/>
+                      <a:r>
+                        <a:rPr sz="1100" b="0">
+                          <a:solidFill>
+                            <a:srgbClr val="212121"/>
+                          </a:solidFill>
+                          <a:latin typeface="맑은 고딕"/>
+                        </a:rPr>
+                        <a:t>+0.072</a:t>
+                      </a:r>
+                    </a:p>
+                  </a:txBody>
+                  <a:tcPr/>
+                </a:tc>
+                <a:tc>
+                  <a:txBody>
+                    <a:bodyPr/>
+                    <a:lstStyle/>
+                    <a:p>
+                      <a:pPr algn="ctr"/>
+                      <a:r>
+                        <a:rPr sz="1100" b="0">
+                          <a:solidFill>
+                            <a:srgbClr val="212121"/>
+                          </a:solidFill>
+                          <a:latin typeface="맑은 고딕"/>
+                        </a:rPr>
+                        <a:t>98.5m</a:t>
+                      </a:r>
+                    </a:p>
+                  </a:txBody>
+                  <a:tcPr/>
+                </a:tc>
+                <a:tc>
+                  <a:txBody>
+                    <a:bodyPr/>
+                    <a:lstStyle/>
+                    <a:p>
+                      <a:pPr algn="ctr"/>
+                      <a:r>
+                        <a:rPr sz="1100" b="0">
+                          <a:solidFill>
+                            <a:srgbClr val="212121"/>
+                          </a:solidFill>
+                          <a:latin typeface="맑은 고딕"/>
+                        </a:rPr>
+                        <a:t>○ 중간</a:t>
+                      </a:r>
+                    </a:p>
+                  </a:txBody>
+                  <a:tcPr/>
+                </a:tc>
+              </a:tr>
+              <a:tr h="374072">
+                <a:tc>
+                  <a:txBody>
+                    <a:bodyPr/>
+                    <a:lstStyle/>
+                    <a:p>
+                      <a:pPr algn="ctr"/>
+                      <a:r>
+                        <a:rPr sz="1100" b="0">
+                          <a:solidFill>
+                            <a:srgbClr val="212121"/>
+                          </a:solidFill>
+                          <a:latin typeface="맑은 고딕"/>
+                        </a:rPr>
+                        <a:t>TOP7</a:t>
+                      </a:r>
+                    </a:p>
+                  </a:txBody>
+                  <a:tcPr/>
+                </a:tc>
+                <a:tc>
+                  <a:txBody>
+                    <a:bodyPr/>
+                    <a:lstStyle/>
+                    <a:p>
+                      <a:pPr algn="ctr"/>
+                      <a:r>
+                        <a:rPr sz="1100" b="0">
+                          <a:solidFill>
+                            <a:srgbClr val="212121"/>
+                          </a:solidFill>
+                          <a:latin typeface="맑은 고딕"/>
+                        </a:rPr>
+                        <a:t>+0.068</a:t>
+                      </a:r>
+                    </a:p>
+                  </a:txBody>
+                  <a:tcPr/>
+                </a:tc>
+                <a:tc>
+                  <a:txBody>
+                    <a:bodyPr/>
+                    <a:lstStyle/>
+                    <a:p>
+                      <a:pPr algn="ctr"/>
+                      <a:r>
+                        <a:rPr sz="1100" b="0">
+                          <a:solidFill>
+                            <a:srgbClr val="212121"/>
+                          </a:solidFill>
+                          <a:latin typeface="맑은 고딕"/>
+                        </a:rPr>
+                        <a:t>51.0m</a:t>
+                      </a:r>
+                    </a:p>
+                  </a:txBody>
+                  <a:tcPr/>
+                </a:tc>
+                <a:tc>
+                  <a:txBody>
+                    <a:bodyPr/>
+                    <a:lstStyle/>
+                    <a:p>
+                      <a:pPr algn="ctr"/>
+                      <a:r>
+                        <a:rPr sz="1100" b="0">
+                          <a:solidFill>
+                            <a:srgbClr val="212121"/>
+                          </a:solidFill>
+                          <a:latin typeface="맑은 고딕"/>
+                        </a:rPr>
+                        <a:t>● 보강</a:t>
+                      </a:r>
+                    </a:p>
+                  </a:txBody>
+                  <a:tcPr/>
+                </a:tc>
+              </a:tr>
+              <a:tr h="374072">
+                <a:tc>
+                  <a:txBody>
+                    <a:bodyPr/>
+                    <a:lstStyle/>
+                    <a:p>
+                      <a:pPr algn="ctr"/>
+                      <a:r>
+                        <a:rPr sz="1100" b="0">
+                          <a:solidFill>
+                            <a:srgbClr val="212121"/>
+                          </a:solidFill>
+                          <a:latin typeface="맑은 고딕"/>
+                        </a:rPr>
+                        <a:t>TOP8</a:t>
+                      </a:r>
+                    </a:p>
+                  </a:txBody>
+                  <a:tcPr/>
+                </a:tc>
+                <a:tc>
+                  <a:txBody>
+                    <a:bodyPr/>
+                    <a:lstStyle/>
+                    <a:p>
+                      <a:pPr algn="ctr"/>
+                      <a:r>
+                        <a:rPr sz="1100" b="0">
+                          <a:solidFill>
+                            <a:srgbClr val="212121"/>
+                          </a:solidFill>
+                          <a:latin typeface="맑은 고딕"/>
+                        </a:rPr>
+                        <a:t>+0.057</a:t>
+                      </a:r>
+                    </a:p>
+                  </a:txBody>
+                  <a:tcPr/>
+                </a:tc>
+                <a:tc>
+                  <a:txBody>
+                    <a:bodyPr/>
+                    <a:lstStyle/>
+                    <a:p>
+                      <a:pPr algn="ctr"/>
+                      <a:r>
+                        <a:rPr sz="1100" b="0">
+                          <a:solidFill>
+                            <a:srgbClr val="212121"/>
+                          </a:solidFill>
+                          <a:latin typeface="맑은 고딕"/>
+                        </a:rPr>
+                        <a:t>153.8m</a:t>
+                      </a:r>
+                    </a:p>
+                  </a:txBody>
+                  <a:tcPr/>
+                </a:tc>
+                <a:tc>
+                  <a:txBody>
+                    <a:bodyPr/>
+                    <a:lstStyle/>
+                    <a:p>
+                      <a:pPr algn="ctr"/>
+                      <a:r>
+                        <a:rPr sz="1100" b="0">
+                          <a:solidFill>
+                            <a:srgbClr val="212121"/>
+                          </a:solidFill>
+                          <a:latin typeface="맑은 고딕"/>
+                        </a:rPr>
+                        <a:t>⭐ 사각지대</a:t>
+                      </a:r>
+                    </a:p>
+                  </a:txBody>
+                  <a:tcPr/>
+                </a:tc>
+              </a:tr>
+              <a:tr h="374072">
+                <a:tc>
+                  <a:txBody>
+                    <a:bodyPr/>
+                    <a:lstStyle/>
+                    <a:p>
+                      <a:pPr algn="ctr"/>
+                      <a:r>
+                        <a:rPr sz="1100" b="0">
+                          <a:solidFill>
+                            <a:srgbClr val="212121"/>
+                          </a:solidFill>
+                          <a:latin typeface="맑은 고딕"/>
+                        </a:rPr>
+                        <a:t>TOP9</a:t>
+                      </a:r>
+                    </a:p>
+                  </a:txBody>
+                  <a:tcPr/>
+                </a:tc>
+                <a:tc>
+                  <a:txBody>
+                    <a:bodyPr/>
+                    <a:lstStyle/>
+                    <a:p>
+                      <a:pPr algn="ctr"/>
+                      <a:r>
+                        <a:rPr sz="1100" b="0">
+                          <a:solidFill>
+                            <a:srgbClr val="212121"/>
+                          </a:solidFill>
+                          <a:latin typeface="맑은 고딕"/>
+                        </a:rPr>
+                        <a:t>+0.016</a:t>
+                      </a:r>
+                    </a:p>
+                  </a:txBody>
+                  <a:tcPr/>
+                </a:tc>
+                <a:tc>
+                  <a:txBody>
+                    <a:bodyPr/>
+                    <a:lstStyle/>
+                    <a:p>
+                      <a:pPr algn="ctr"/>
+                      <a:r>
+                        <a:rPr sz="1100" b="0">
+                          <a:solidFill>
+                            <a:srgbClr val="212121"/>
+                          </a:solidFill>
+                          <a:latin typeface="맑은 고딕"/>
+                        </a:rPr>
+                        <a:t>70.0m</a:t>
+                      </a:r>
+                    </a:p>
+                  </a:txBody>
+                  <a:tcPr/>
+                </a:tc>
+                <a:tc>
+                  <a:txBody>
+                    <a:bodyPr/>
+                    <a:lstStyle/>
+                    <a:p>
+                      <a:pPr algn="ctr"/>
+                      <a:r>
+                        <a:rPr sz="1100" b="0">
+                          <a:solidFill>
+                            <a:srgbClr val="212121"/>
+                          </a:solidFill>
+                          <a:latin typeface="맑은 고딕"/>
+                        </a:rPr>
+                        <a:t>○ 중간</a:t>
+                      </a:r>
+                    </a:p>
+                  </a:txBody>
+                  <a:tcPr/>
+                </a:tc>
+              </a:tr>
+              <a:tr h="374080">
+                <a:tc>
+                  <a:txBody>
+                    <a:bodyPr/>
+                    <a:lstStyle/>
+                    <a:p>
+                      <a:pPr algn="ctr"/>
+                      <a:r>
+                        <a:rPr sz="1100" b="0">
+                          <a:solidFill>
+                            <a:srgbClr val="212121"/>
+                          </a:solidFill>
+                          <a:latin typeface="맑은 고딕"/>
+                        </a:rPr>
+                        <a:t>TOP10</a:t>
+                      </a:r>
+                    </a:p>
+                  </a:txBody>
+                  <a:tcPr/>
+                </a:tc>
+                <a:tc>
+                  <a:txBody>
+                    <a:bodyPr/>
+                    <a:lstStyle/>
+                    <a:p>
+                      <a:pPr algn="ctr"/>
+                      <a:r>
+                        <a:rPr sz="1100" b="0">
+                          <a:solidFill>
+                            <a:srgbClr val="212121"/>
+                          </a:solidFill>
+                          <a:latin typeface="맑은 고딕"/>
+                        </a:rPr>
+                        <a:t>−0.008</a:t>
+                      </a:r>
+                    </a:p>
+                  </a:txBody>
+                  <a:tcPr/>
+                </a:tc>
+                <a:tc>
+                  <a:txBody>
+                    <a:bodyPr/>
+                    <a:lstStyle/>
+                    <a:p>
+                      <a:pPr algn="ctr"/>
+                      <a:r>
+                        <a:rPr sz="1100" b="0">
+                          <a:solidFill>
+                            <a:srgbClr val="212121"/>
+                          </a:solidFill>
+                          <a:latin typeface="맑은 고딕"/>
+                        </a:rPr>
+                        <a:t>29.2m</a:t>
+                      </a:r>
+                    </a:p>
+                  </a:txBody>
+                  <a:tcPr/>
+                </a:tc>
+                <a:tc>
+                  <a:txBody>
+                    <a:bodyPr/>
+                    <a:lstStyle/>
+                    <a:p>
+                      <a:pPr algn="ctr"/>
+                      <a:r>
+                        <a:rPr sz="1100" b="0">
+                          <a:solidFill>
+                            <a:srgbClr val="212121"/>
+                          </a:solidFill>
+                          <a:latin typeface="맑은 고딕"/>
+                        </a:rPr>
+                        <a:t>● 보강</a:t>
+                      </a:r>
+                    </a:p>
+                  </a:txBody>
+                  <a:tcPr/>
+                </a:tc>
+              </a:tr>
+            </a:tbl>
+          </a:graphicData>
+        </a:graphic>
+      </p:graphicFrame>
+      <p:sp>
+        <p:nvSpPr>
+          <p:cNvPr id="6" name="Rounded Rectangle 5"/>
           <p:cNvSpPr/>
           <p:nvPr/>
         </p:nvSpPr>
         <p:spPr>
           <a:xfrm>
-            <a:off x="6858000" y="1737360"/>
-            <a:ext cx="5029200" cy="4114800"/>
-          </a:xfrm>
-          <a:prstGeom prst="rect">
+            <a:off x="6126480" y="1554480"/>
+            <a:ext cx="5669280" cy="2011680"/>
+          </a:xfrm>
+          <a:prstGeom prst="roundRect">
             <a:avLst/>
           </a:prstGeom>
           <a:solidFill>
-            <a:srgbClr val="EEEEEE"/>
+            <a:srgbClr val="FFF4E5"/>
           </a:solidFill>
-          <a:ln w="12700">
+          <a:ln w="25400">
             <a:solidFill>
-              <a:srgbClr val="555555"/>
+              <a:srgbClr val="E53935"/>
             </a:solidFill>
           </a:ln>
         </p:spPr>
@@ -5645,26 +6571,191 @@
           </a:fontRef>
         </p:style>
         <p:txBody>
-          <a:bodyPr rtlCol="0" anchor="ctr" wrap="square"/>
+          <a:bodyPr rtlCol="0" anchor="ctr" wrap="square" lIns="228600" tIns="182880"/>
           <a:lstStyle/>
           <a:p>
             <a:pPr algn="ctr"/>
             <a:r>
               <a:rPr sz="1400" b="1">
                 <a:solidFill>
-                  <a:srgbClr val="555555"/>
-                </a:solidFill>
-                <a:latin typeface="맑은 고딕"/>
-              </a:rPr>
-              <a:t>📷 app.py 대시보드
-스크린샷 배치</a:t>
-            </a:r>
-          </a:p>
-        </p:txBody>
-      </p:sp>
-      <p:sp>
-        <p:nvSpPr>
-          <p:cNvPr id="7" name="TextBox 6"/>
+                  <a:srgbClr val="E53935"/>
+                </a:solidFill>
+                <a:latin typeface="맑은 고딕"/>
+              </a:rPr>
+              <a:t>⭐ 사각지대 4곳 — 정책 어필 포인트</a:t>
+            </a:r>
+          </a:p>
+          <a:p>
+            <a:pPr>
+              <a:spcBef>
+                <a:spcPts val="300"/>
+              </a:spcBef>
+            </a:pPr>
+            <a:r>
+              <a:rPr sz="1200" b="0">
+                <a:solidFill>
+                  <a:srgbClr val="212121"/>
+                </a:solidFill>
+                <a:latin typeface="맑은 고딕"/>
+              </a:rPr>
+              <a:t>• TOP4 (37.49786, 126.96129) — 최대 359.6m</a:t>
+            </a:r>
+          </a:p>
+          <a:p>
+            <a:pPr>
+              <a:spcBef>
+                <a:spcPts val="300"/>
+              </a:spcBef>
+            </a:pPr>
+            <a:r>
+              <a:rPr sz="1200" b="0">
+                <a:solidFill>
+                  <a:srgbClr val="212121"/>
+                </a:solidFill>
+                <a:latin typeface="맑은 고딕"/>
+              </a:rPr>
+              <a:t>• TOP3 (37.49874, 126.95789) — 322.9m</a:t>
+            </a:r>
+          </a:p>
+          <a:p>
+            <a:pPr>
+              <a:spcBef>
+                <a:spcPts val="300"/>
+              </a:spcBef>
+            </a:pPr>
+            <a:r>
+              <a:rPr sz="1200" b="0">
+                <a:solidFill>
+                  <a:srgbClr val="212121"/>
+                </a:solidFill>
+                <a:latin typeface="맑은 고딕"/>
+              </a:rPr>
+              <a:t>• TOP5 (37.51138, 126.96120) — 234.8m</a:t>
+            </a:r>
+          </a:p>
+          <a:p>
+            <a:pPr>
+              <a:spcBef>
+                <a:spcPts val="300"/>
+              </a:spcBef>
+            </a:pPr>
+            <a:r>
+              <a:rPr sz="1200" b="0">
+                <a:solidFill>
+                  <a:srgbClr val="212121"/>
+                </a:solidFill>
+                <a:latin typeface="맑은 고딕"/>
+              </a:rPr>
+              <a:t>• TOP8 (37.50328, 126.96465) — 153.8m</a:t>
+            </a:r>
+          </a:p>
+        </p:txBody>
+      </p:sp>
+      <p:sp>
+        <p:nvSpPr>
+          <p:cNvPr id="7" name="Rounded Rectangle 6"/>
+          <p:cNvSpPr/>
+          <p:nvPr/>
+        </p:nvSpPr>
+        <p:spPr>
+          <a:xfrm>
+            <a:off x="6126480" y="3749039"/>
+            <a:ext cx="5669280" cy="1828800"/>
+          </a:xfrm>
+          <a:prstGeom prst="roundRect">
+            <a:avLst/>
+          </a:prstGeom>
+          <a:solidFill>
+            <a:srgbClr val="F5F8FD"/>
+          </a:solidFill>
+          <a:ln w="25400">
+            <a:solidFill>
+              <a:srgbClr val="1E88E5"/>
+            </a:solidFill>
+          </a:ln>
+        </p:spPr>
+        <p:style>
+          <a:lnRef idx="1">
+            <a:schemeClr val="accent1"/>
+          </a:lnRef>
+          <a:fillRef idx="3">
+            <a:schemeClr val="accent1"/>
+          </a:fillRef>
+          <a:effectRef idx="2">
+            <a:schemeClr val="accent1"/>
+          </a:effectRef>
+          <a:fontRef idx="minor">
+            <a:schemeClr val="lt1"/>
+          </a:fontRef>
+        </p:style>
+        <p:txBody>
+          <a:bodyPr rtlCol="0" anchor="ctr" wrap="square" lIns="228600" tIns="182880"/>
+          <a:lstStyle/>
+          <a:p>
+            <a:pPr algn="ctr"/>
+            <a:r>
+              <a:rPr sz="1400" b="1">
+                <a:solidFill>
+                  <a:srgbClr val="1E88E5"/>
+                </a:solidFill>
+                <a:latin typeface="맑은 고딕"/>
+              </a:rPr>
+              <a:t>📊 흑석동 데이터 자체</a:t>
+            </a:r>
+          </a:p>
+          <a:p>
+            <a:pPr>
+              <a:spcBef>
+                <a:spcPts val="300"/>
+              </a:spcBef>
+            </a:pPr>
+            <a:r>
+              <a:rPr sz="1200" b="0">
+                <a:solidFill>
+                  <a:srgbClr val="212121"/>
+                </a:solidFill>
+                <a:latin typeface="맑은 고딕"/>
+              </a:rPr>
+              <a:t>• 실측 그늘막 18개 (고정형 13 + 스마트형 5)</a:t>
+            </a:r>
+          </a:p>
+          <a:p>
+            <a:pPr>
+              <a:spcBef>
+                <a:spcPts val="300"/>
+              </a:spcBef>
+            </a:pPr>
+            <a:r>
+              <a:rPr sz="1200" b="0">
+                <a:solidFill>
+                  <a:srgbClr val="212121"/>
+                </a:solidFill>
+                <a:latin typeface="맑은 고딕"/>
+              </a:rPr>
+              <a:t>• NGII 건물 3,775동 + DSM 4시점 누적 그림자</a:t>
+            </a:r>
+          </a:p>
+          <a:p>
+            <a:pPr>
+              <a:spcBef>
+                <a:spcPts val="300"/>
+              </a:spcBef>
+            </a:pPr>
+            <a:r>
+              <a:rPr sz="1200" b="0">
+                <a:solidFill>
+                  <a:srgbClr val="212121"/>
+                </a:solidFill>
+                <a:latin typeface="맑은 고딕"/>
+              </a:rPr>
+              <a:t>• 그늘막이 흑석동 75% 영역 커버 — 정책: 다른 동 우선</a:t>
+            </a:r>
+          </a:p>
+        </p:txBody>
+      </p:sp>
+      <p:sp>
+        <p:nvSpPr>
+          <p:cNvPr id="8" name="TextBox 7"/>
           <p:cNvSpPr txBox="1"/>
           <p:nvPr/>
         </p:nvSpPr>
@@ -5699,7 +6790,7 @@
       </p:sp>
       <p:sp>
         <p:nvSpPr>
-          <p:cNvPr id="8" name="TextBox 7"/>
+          <p:cNvPr id="9" name="TextBox 8"/>
           <p:cNvSpPr txBox="1"/>
           <p:nvPr/>
         </p:nvSpPr>
@@ -5727,7 +6818,7 @@
                 </a:solidFill>
                 <a:latin typeface="맑은 고딕"/>
               </a:rPr>
-              <a:t>13 / 14</a:t>
+              <a:t>13 / 15</a:t>
             </a:r>
           </a:p>
         </p:txBody>
@@ -5817,13 +6908,13 @@
           <a:p>
             <a:pPr algn="l"/>
             <a:r>
-              <a:rPr sz="3000" b="1">
+              <a:rPr sz="2800" b="1">
                 <a:solidFill>
                   <a:srgbClr val="212121"/>
                 </a:solidFill>
                 <a:latin typeface="맑은 고딕"/>
               </a:rPr>
-              <a:t>한계 · 다음 단계 · 한 줄 요약</a:t>
+              <a:t>인터랙티브 대시보드 (Streamlit)</a:t>
             </a:r>
           </a:p>
         </p:txBody>
@@ -5836,8 +6927,8 @@
         </p:nvSpPr>
         <p:spPr>
           <a:xfrm>
-            <a:off x="685800" y="1554480"/>
-            <a:ext cx="5486400" cy="365760"/>
+            <a:off x="685800" y="914400"/>
+            <a:ext cx="10972800" cy="365760"/>
           </a:xfrm>
           <a:prstGeom prst="rect">
             <a:avLst/>
@@ -5852,13 +6943,13 @@
           <a:p>
             <a:pPr algn="l"/>
             <a:r>
-              <a:rPr sz="1800" b="1">
-                <a:solidFill>
-                  <a:srgbClr val="E53935"/>
-                </a:solidFill>
-                <a:latin typeface="맑은 고딕"/>
-              </a:rPr>
-              <a:t>현재 한계</a:t>
+              <a:rPr sz="1300" b="0">
+                <a:solidFill>
+                  <a:srgbClr val="555555"/>
+                </a:solidFill>
+                <a:latin typeface="맑은 고딕"/>
+              </a:rPr>
+              <a:t>가중치 슬라이더 → TOP 10 실시간 재계산</a:t>
             </a:r>
           </a:p>
         </p:txBody>
@@ -5871,8 +6962,8 @@
         </p:nvSpPr>
         <p:spPr>
           <a:xfrm>
-            <a:off x="685800" y="2011680"/>
-            <a:ext cx="5943600" cy="2560320"/>
+            <a:off x="685800" y="1645920"/>
+            <a:ext cx="5943600" cy="4114800"/>
           </a:xfrm>
           <a:prstGeom prst="rect">
             <a:avLst/>
@@ -5887,7 +6978,7 @@
           <a:p>
             <a:pPr>
               <a:spcAft>
-                <a:spcPts val="600"/>
+                <a:spcPts val="500"/>
               </a:spcAft>
             </a:pPr>
             <a:r>
@@ -5897,13 +6988,13 @@
                 </a:solidFill>
                 <a:latin typeface="맑은 고딕"/>
               </a:rPr>
-              <a:t>• 5종 데이터 모두 더미 (파이프라인 자체는 실데이터 자동 전환)</a:t>
+              <a:t>• `streamlit run app.py` → http://localhost:8501</a:t>
             </a:r>
           </a:p>
           <a:p>
             <a:pPr>
               <a:spcAft>
-                <a:spcPts val="600"/>
+                <a:spcPts val="500"/>
               </a:spcAft>
             </a:pPr>
             <a:r>
@@ -5913,13 +7004,13 @@
                 </a:solidFill>
                 <a:latin typeface="맑은 고딕"/>
               </a:rPr>
-              <a:t>• LST 래스터 직접 파싱 미연결 (Landsat ST_B10)</a:t>
+              <a:t>• 사이드바: 시나리오 프리셋 + 7개 가중치 슬라이더</a:t>
             </a:r>
           </a:p>
           <a:p>
             <a:pPr>
               <a:spcAft>
-                <a:spcPts val="600"/>
+                <a:spcPts val="500"/>
               </a:spcAft>
             </a:pPr>
             <a:r>
@@ -5929,13 +7020,13 @@
                 </a:solidFill>
                 <a:latin typeface="맑은 고딕"/>
               </a:rPr>
-              <a:t>• 건물 footprint 더미 19개 → 실 shp 확보 시 교체</a:t>
+              <a:t>• 본문: Folium 지도 임베드 + TOP 10 표 + 통계</a:t>
             </a:r>
           </a:p>
           <a:p>
             <a:pPr>
               <a:spcAft>
-                <a:spcPts val="600"/>
+                <a:spcPts val="500"/>
               </a:spcAft>
             </a:pPr>
             <a:r>
@@ -5945,152 +7036,64 @@
                 </a:solidFill>
                 <a:latin typeface="맑은 고딕"/>
               </a:rPr>
-              <a:t>• 예산 제약 미반영 (K개 최적 조합 = 배낭 문제)</a:t>
-            </a:r>
-          </a:p>
-        </p:txBody>
-      </p:sp>
-      <p:sp>
-        <p:nvSpPr>
-          <p:cNvPr id="6" name="TextBox 5"/>
-          <p:cNvSpPr txBox="1"/>
+              <a:t>• 캐싱: @st.cache_resource 로 격자·피처 1회 계산,</a:t>
+            </a:r>
+          </a:p>
+          <a:p>
+            <a:pPr>
+              <a:spcAft>
+                <a:spcPts val="500"/>
+              </a:spcAft>
+            </a:pPr>
+            <a:r>
+              <a:rPr sz="1400" b="0">
+                <a:solidFill>
+                  <a:srgbClr val="212121"/>
+                </a:solidFill>
+                <a:latin typeface="맑은 고딕"/>
+              </a:rPr>
+              <a:t>•   슬라이더 조작은 가중합 재계산만 (밀리초 반응)</a:t>
+            </a:r>
+          </a:p>
+          <a:p>
+            <a:pPr>
+              <a:spcAft>
+                <a:spcPts val="500"/>
+              </a:spcAft>
+            </a:pPr>
+            <a:r>
+              <a:rPr sz="1400" b="0">
+                <a:solidFill>
+                  <a:srgbClr val="212121"/>
+                </a:solidFill>
+                <a:latin typeface="맑은 고딕"/>
+              </a:rPr>
+              <a:t>• 발표 현장 "vuln 더 올리면?" 질문에 즉답</a:t>
+            </a:r>
+          </a:p>
+        </p:txBody>
+      </p:sp>
+      <p:sp>
+        <p:nvSpPr>
+          <p:cNvPr id="6" name="Rectangle 5"/>
+          <p:cNvSpPr/>
           <p:nvPr/>
         </p:nvSpPr>
         <p:spPr>
           <a:xfrm>
-            <a:off x="6858000" y="1554480"/>
-            <a:ext cx="5486400" cy="365760"/>
+            <a:off x="6858000" y="1645920"/>
+            <a:ext cx="4846320" cy="4114800"/>
           </a:xfrm>
           <a:prstGeom prst="rect">
             <a:avLst/>
           </a:prstGeom>
-          <a:noFill/>
-        </p:spPr>
-        <p:txBody>
-          <a:bodyPr wrap="square">
-            <a:spAutoFit/>
-          </a:bodyPr>
-          <a:lstStyle/>
-          <a:p>
-            <a:pPr algn="l"/>
-            <a:r>
-              <a:rPr sz="1800" b="1">
-                <a:solidFill>
-                  <a:srgbClr val="1E88E5"/>
-                </a:solidFill>
-                <a:latin typeface="맑은 고딕"/>
-              </a:rPr>
-              <a:t>다음 단계</a:t>
-            </a:r>
-          </a:p>
-        </p:txBody>
-      </p:sp>
-      <p:sp>
-        <p:nvSpPr>
-          <p:cNvPr id="7" name="TextBox 6"/>
-          <p:cNvSpPr txBox="1"/>
-          <p:nvPr/>
-        </p:nvSpPr>
-        <p:spPr>
-          <a:xfrm>
-            <a:off x="6858000" y="2011680"/>
-            <a:ext cx="5029200" cy="2560320"/>
-          </a:xfrm>
-          <a:prstGeom prst="rect">
-            <a:avLst/>
-          </a:prstGeom>
-          <a:noFill/>
-        </p:spPr>
-        <p:txBody>
-          <a:bodyPr wrap="square">
-            <a:spAutoFit/>
-          </a:bodyPr>
-          <a:lstStyle/>
-          <a:p>
-            <a:pPr>
-              <a:spcAft>
-                <a:spcPts val="600"/>
-              </a:spcAft>
-            </a:pPr>
-            <a:r>
-              <a:rPr sz="1400" b="0">
-                <a:solidFill>
-                  <a:srgbClr val="212121"/>
-                </a:solidFill>
-                <a:latin typeface="맑은 고딕"/>
-              </a:rPr>
-              <a:t>• 서울 열린데이터광장 API 연결 (P0)</a:t>
-            </a:r>
-          </a:p>
-          <a:p>
-            <a:pPr>
-              <a:spcAft>
-                <a:spcPts val="600"/>
-              </a:spcAft>
-            </a:pPr>
-            <a:r>
-              <a:rPr sz="1400" b="0">
-                <a:solidFill>
-                  <a:srgbClr val="212121"/>
-                </a:solidFill>
-                <a:latin typeface="맑은 고딕"/>
-              </a:rPr>
-              <a:t>• 국가공간정보포털 도로대장 shp (인도 폭)</a:t>
-            </a:r>
-          </a:p>
-          <a:p>
-            <a:pPr>
-              <a:spcAft>
-                <a:spcPts val="600"/>
-              </a:spcAft>
-            </a:pPr>
-            <a:r>
-              <a:rPr sz="1400" b="0">
-                <a:solidFill>
-                  <a:srgbClr val="212121"/>
-                </a:solidFill>
-                <a:latin typeface="맑은 고딕"/>
-              </a:rPr>
-              <a:t>• 격자 스코어 parquet 캐싱</a:t>
-            </a:r>
-          </a:p>
-          <a:p>
-            <a:pPr>
-              <a:spcAft>
-                <a:spcPts val="600"/>
-              </a:spcAft>
-            </a:pPr>
-            <a:r>
-              <a:rPr sz="1400" b="0">
-                <a:solidFill>
-                  <a:srgbClr val="212121"/>
-                </a:solidFill>
-                <a:latin typeface="맑은 고딕"/>
-              </a:rPr>
-              <a:t>• 타 자치구 확장 (BBOX 교체만으로 재사용)</a:t>
-            </a:r>
-          </a:p>
-        </p:txBody>
-      </p:sp>
-      <p:sp>
-        <p:nvSpPr>
-          <p:cNvPr id="8" name="Rounded Rectangle 7"/>
-          <p:cNvSpPr/>
-          <p:nvPr/>
-        </p:nvSpPr>
-        <p:spPr>
-          <a:xfrm>
-            <a:off x="685800" y="4937760"/>
-            <a:ext cx="10972800" cy="1280160"/>
-          </a:xfrm>
-          <a:prstGeom prst="roundRect">
-            <a:avLst/>
-          </a:prstGeom>
           <a:solidFill>
-            <a:srgbClr val="212121"/>
+            <a:srgbClr val="EEEEEE"/>
           </a:solidFill>
-          <a:ln>
-            <a:noFill/>
+          <a:ln w="12700">
+            <a:solidFill>
+              <a:srgbClr val="555555"/>
+            </a:solidFill>
           </a:ln>
         </p:spPr>
         <p:style>
@@ -6108,53 +7111,25 @@
           </a:fontRef>
         </p:style>
         <p:txBody>
-          <a:bodyPr rtlCol="0" anchor="ctr" wrap="square" lIns="274320" tIns="228600"/>
+          <a:bodyPr rtlCol="0" anchor="ctr" wrap="square"/>
           <a:lstStyle/>
           <a:p>
             <a:pPr algn="ctr"/>
             <a:r>
-              <a:rPr sz="1800" b="1">
-                <a:solidFill>
-                  <a:srgbClr val="FFEE58"/>
-                </a:solidFill>
-                <a:latin typeface="맑은 고딕"/>
-              </a:rPr>
-              <a:t>항공사진과 거리뷰까지 컴퓨터 비전으로 읽어내,</a:t>
-            </a:r>
-          </a:p>
-          <a:p>
-            <a:pPr algn="ctr"/>
-            <a:r>
-              <a:rPr sz="1800" b="1">
-                <a:solidFill>
-                  <a:srgbClr val="FFEE58"/>
-                </a:solidFill>
-                <a:latin typeface="맑은 고딕"/>
-              </a:rPr>
-              <a:t>6가지 정책 관점 모두에서 살아남는 강건 입지 2곳을 찾아냈다.</a:t>
-            </a:r>
-          </a:p>
-          <a:p>
-            <a:pPr algn="ctr">
-              <a:spcBef>
-                <a:spcPts val="800"/>
-              </a:spcBef>
-            </a:pPr>
-            <a:r>
-              <a:rPr sz="1100" b="0">
-                <a:solidFill>
-                  <a:srgbClr val="CCCCCC"/>
-                </a:solidFill>
-                <a:latin typeface="맑은 고딕"/>
-              </a:rPr>
-              <a:t>— SAM(항공) + SegFormer(거리뷰) + Deep Umbra(DSM) + OSMnx(교차로) + MCDA</a:t>
-            </a:r>
-          </a:p>
-        </p:txBody>
-      </p:sp>
-      <p:sp>
-        <p:nvSpPr>
-          <p:cNvPr id="9" name="TextBox 8"/>
+              <a:rPr sz="1300" b="1">
+                <a:solidFill>
+                  <a:srgbClr val="555555"/>
+                </a:solidFill>
+                <a:latin typeface="맑은 고딕"/>
+              </a:rPr>
+              <a:t>📷 Streamlit 대시보드 스크린샷</a:t>
+            </a:r>
+          </a:p>
+        </p:txBody>
+      </p:sp>
+      <p:sp>
+        <p:nvSpPr>
+          <p:cNvPr id="7" name="TextBox 6"/>
           <p:cNvSpPr txBox="1"/>
           <p:nvPr/>
         </p:nvSpPr>
@@ -6189,7 +7164,7 @@
       </p:sp>
       <p:sp>
         <p:nvSpPr>
-          <p:cNvPr id="10" name="TextBox 9"/>
+          <p:cNvPr id="8" name="TextBox 7"/>
           <p:cNvSpPr txBox="1"/>
           <p:nvPr/>
         </p:nvSpPr>
@@ -6217,7 +7192,501 @@
                 </a:solidFill>
                 <a:latin typeface="맑은 고딕"/>
               </a:rPr>
-              <a:t>14 / 14</a:t>
+              <a:t>14 / 15</a:t>
+            </a:r>
+          </a:p>
+        </p:txBody>
+      </p:sp>
+    </p:spTree>
+  </p:cSld>
+  <p:clrMapOvr>
+    <a:masterClrMapping/>
+  </p:clrMapOvr>
+</p:sld>
+</file>
+
+<file path=ppt/slides/slide15.xml><?xml version="1.0" encoding="utf-8"?>
+<p:sld xmlns:a="http://schemas.openxmlformats.org/drawingml/2006/main" xmlns:p="http://schemas.openxmlformats.org/presentationml/2006/main" xmlns:r="http://schemas.openxmlformats.org/officeDocument/2006/relationships">
+  <p:cSld>
+    <p:spTree>
+      <p:nvGrpSpPr>
+        <p:cNvPr id="1" name=""/>
+        <p:cNvGrpSpPr/>
+        <p:nvPr/>
+      </p:nvGrpSpPr>
+      <p:grpSpPr/>
+      <p:sp>
+        <p:nvSpPr>
+          <p:cNvPr id="2" name="Rectangle 1"/>
+          <p:cNvSpPr/>
+          <p:nvPr/>
+        </p:nvSpPr>
+        <p:spPr>
+          <a:xfrm>
+            <a:off x="457200" y="457200"/>
+            <a:ext cx="109728" cy="731520"/>
+          </a:xfrm>
+          <a:prstGeom prst="rect">
+            <a:avLst/>
+          </a:prstGeom>
+          <a:solidFill>
+            <a:srgbClr val="1E88E5"/>
+          </a:solidFill>
+          <a:ln>
+            <a:noFill/>
+          </a:ln>
+        </p:spPr>
+        <p:style>
+          <a:lnRef idx="1">
+            <a:schemeClr val="accent1"/>
+          </a:lnRef>
+          <a:fillRef idx="3">
+            <a:schemeClr val="accent1"/>
+          </a:fillRef>
+          <a:effectRef idx="2">
+            <a:schemeClr val="accent1"/>
+          </a:effectRef>
+          <a:fontRef idx="minor">
+            <a:schemeClr val="lt1"/>
+          </a:fontRef>
+        </p:style>
+        <p:txBody>
+          <a:bodyPr rtlCol="0" anchor="ctr"/>
+          <a:lstStyle/>
+          <a:p>
+            <a:pPr algn="ctr"/>
+          </a:p>
+        </p:txBody>
+      </p:sp>
+      <p:sp>
+        <p:nvSpPr>
+          <p:cNvPr id="3" name="TextBox 2"/>
+          <p:cNvSpPr txBox="1"/>
+          <p:nvPr/>
+        </p:nvSpPr>
+        <p:spPr>
+          <a:xfrm>
+            <a:off x="685800" y="411480"/>
+            <a:ext cx="10972800" cy="548640"/>
+          </a:xfrm>
+          <a:prstGeom prst="rect">
+            <a:avLst/>
+          </a:prstGeom>
+          <a:noFill/>
+        </p:spPr>
+        <p:txBody>
+          <a:bodyPr wrap="square">
+            <a:spAutoFit/>
+          </a:bodyPr>
+          <a:lstStyle/>
+          <a:p>
+            <a:pPr algn="l"/>
+            <a:r>
+              <a:rPr sz="2800" b="1">
+                <a:solidFill>
+                  <a:srgbClr val="212121"/>
+                </a:solidFill>
+                <a:latin typeface="맑은 고딕"/>
+              </a:rPr>
+              <a:t>한계 · 다음 단계 · 한 줄 요약</a:t>
+            </a:r>
+          </a:p>
+        </p:txBody>
+      </p:sp>
+      <p:sp>
+        <p:nvSpPr>
+          <p:cNvPr id="4" name="TextBox 3"/>
+          <p:cNvSpPr txBox="1"/>
+          <p:nvPr/>
+        </p:nvSpPr>
+        <p:spPr>
+          <a:xfrm>
+            <a:off x="685800" y="1554480"/>
+            <a:ext cx="5486400" cy="365760"/>
+          </a:xfrm>
+          <a:prstGeom prst="rect">
+            <a:avLst/>
+          </a:prstGeom>
+          <a:noFill/>
+        </p:spPr>
+        <p:txBody>
+          <a:bodyPr wrap="square">
+            <a:spAutoFit/>
+          </a:bodyPr>
+          <a:lstStyle/>
+          <a:p>
+            <a:pPr algn="l"/>
+            <a:r>
+              <a:rPr sz="1600" b="1">
+                <a:solidFill>
+                  <a:srgbClr val="E53935"/>
+                </a:solidFill>
+                <a:latin typeface="맑은 고딕"/>
+              </a:rPr>
+              <a:t>현재 한계</a:t>
+            </a:r>
+          </a:p>
+        </p:txBody>
+      </p:sp>
+      <p:sp>
+        <p:nvSpPr>
+          <p:cNvPr id="5" name="TextBox 4"/>
+          <p:cNvSpPr txBox="1"/>
+          <p:nvPr/>
+        </p:nvSpPr>
+        <p:spPr>
+          <a:xfrm>
+            <a:off x="685800" y="2011680"/>
+            <a:ext cx="5943600" cy="2560320"/>
+          </a:xfrm>
+          <a:prstGeom prst="rect">
+            <a:avLst/>
+          </a:prstGeom>
+          <a:noFill/>
+        </p:spPr>
+        <p:txBody>
+          <a:bodyPr wrap="square">
+            <a:spAutoFit/>
+          </a:bodyPr>
+          <a:lstStyle/>
+          <a:p>
+            <a:pPr>
+              <a:spcAft>
+                <a:spcPts val="500"/>
+              </a:spcAft>
+            </a:pPr>
+            <a:r>
+              <a:rPr sz="1300" b="0">
+                <a:solidFill>
+                  <a:srgbClr val="212121"/>
+                </a:solidFill>
+                <a:latin typeface="맑은 고딕"/>
+              </a:rPr>
+              <a:t>• 5종 기본 데이터 중 4종 더미 (파이프라인은 자동 전환)</a:t>
+            </a:r>
+          </a:p>
+          <a:p>
+            <a:pPr>
+              <a:spcAft>
+                <a:spcPts val="500"/>
+              </a:spcAft>
+            </a:pPr>
+            <a:r>
+              <a:rPr sz="1300" b="0">
+                <a:solidFill>
+                  <a:srgbClr val="212121"/>
+                </a:solidFill>
+                <a:latin typeface="맑은 고딕"/>
+              </a:rPr>
+              <a:t>• LST 래스터 직접 파싱 미연결 (Landsat ST_B10)</a:t>
+            </a:r>
+          </a:p>
+          <a:p>
+            <a:pPr>
+              <a:spcAft>
+                <a:spcPts val="500"/>
+              </a:spcAft>
+            </a:pPr>
+            <a:r>
+              <a:rPr sz="1300" b="0">
+                <a:solidFill>
+                  <a:srgbClr val="212121"/>
+                </a:solidFill>
+                <a:latin typeface="맑은 고딕"/>
+              </a:rPr>
+              <a:t>• SAM 추출 건물에 추정 높이 부여 (NGII는 실측)</a:t>
+            </a:r>
+          </a:p>
+          <a:p>
+            <a:pPr>
+              <a:spcAft>
+                <a:spcPts val="500"/>
+              </a:spcAft>
+            </a:pPr>
+            <a:r>
+              <a:rPr sz="1300" b="0">
+                <a:solidFill>
+                  <a:srgbClr val="212121"/>
+                </a:solidFill>
+                <a:latin typeface="맑은 고딕"/>
+              </a:rPr>
+              <a:t>• 예산 제약 미반영 (K개 최적 조합 = 배낭 문제)</a:t>
+            </a:r>
+          </a:p>
+        </p:txBody>
+      </p:sp>
+      <p:sp>
+        <p:nvSpPr>
+          <p:cNvPr id="6" name="TextBox 5"/>
+          <p:cNvSpPr txBox="1"/>
+          <p:nvPr/>
+        </p:nvSpPr>
+        <p:spPr>
+          <a:xfrm>
+            <a:off x="6858000" y="1554480"/>
+            <a:ext cx="5486400" cy="365760"/>
+          </a:xfrm>
+          <a:prstGeom prst="rect">
+            <a:avLst/>
+          </a:prstGeom>
+          <a:noFill/>
+        </p:spPr>
+        <p:txBody>
+          <a:bodyPr wrap="square">
+            <a:spAutoFit/>
+          </a:bodyPr>
+          <a:lstStyle/>
+          <a:p>
+            <a:pPr algn="l"/>
+            <a:r>
+              <a:rPr sz="1600" b="1">
+                <a:solidFill>
+                  <a:srgbClr val="1E88E5"/>
+                </a:solidFill>
+                <a:latin typeface="맑은 고딕"/>
+              </a:rPr>
+              <a:t>다음 단계</a:t>
+            </a:r>
+          </a:p>
+        </p:txBody>
+      </p:sp>
+      <p:sp>
+        <p:nvSpPr>
+          <p:cNvPr id="7" name="TextBox 6"/>
+          <p:cNvSpPr txBox="1"/>
+          <p:nvPr/>
+        </p:nvSpPr>
+        <p:spPr>
+          <a:xfrm>
+            <a:off x="6858000" y="2011680"/>
+            <a:ext cx="5029200" cy="2560320"/>
+          </a:xfrm>
+          <a:prstGeom prst="rect">
+            <a:avLst/>
+          </a:prstGeom>
+          <a:noFill/>
+        </p:spPr>
+        <p:txBody>
+          <a:bodyPr wrap="square">
+            <a:spAutoFit/>
+          </a:bodyPr>
+          <a:lstStyle/>
+          <a:p>
+            <a:pPr>
+              <a:spcAft>
+                <a:spcPts val="500"/>
+              </a:spcAft>
+            </a:pPr>
+            <a:r>
+              <a:rPr sz="1300" b="0">
+                <a:solidFill>
+                  <a:srgbClr val="212121"/>
+                </a:solidFill>
+                <a:latin typeface="맑은 고딕"/>
+              </a:rPr>
+              <a:t>• 서울 열린데이터광장 API 연결 (P0)</a:t>
+            </a:r>
+          </a:p>
+          <a:p>
+            <a:pPr>
+              <a:spcAft>
+                <a:spcPts val="500"/>
+              </a:spcAft>
+            </a:pPr>
+            <a:r>
+              <a:rPr sz="1300" b="0">
+                <a:solidFill>
+                  <a:srgbClr val="212121"/>
+                </a:solidFill>
+                <a:latin typeface="맑은 고딕"/>
+              </a:rPr>
+              <a:t>• 동작구 전 동 실측 그늘막 (흑석동만 18개 확보)</a:t>
+            </a:r>
+          </a:p>
+          <a:p>
+            <a:pPr>
+              <a:spcAft>
+                <a:spcPts val="500"/>
+              </a:spcAft>
+            </a:pPr>
+            <a:r>
+              <a:rPr sz="1300" b="0">
+                <a:solidFill>
+                  <a:srgbClr val="212121"/>
+                </a:solidFill>
+                <a:latin typeface="맑은 고딕"/>
+              </a:rPr>
+              <a:t>• Streamlit 슬라이더에 시각화 다양화</a:t>
+            </a:r>
+          </a:p>
+          <a:p>
+            <a:pPr>
+              <a:spcAft>
+                <a:spcPts val="500"/>
+              </a:spcAft>
+            </a:pPr>
+            <a:r>
+              <a:rPr sz="1300" b="0">
+                <a:solidFill>
+                  <a:srgbClr val="212121"/>
+                </a:solidFill>
+                <a:latin typeface="맑은 고딕"/>
+              </a:rPr>
+              <a:t>• 타 자치구 확장 (BBOX 교체로 재사용)</a:t>
+            </a:r>
+          </a:p>
+        </p:txBody>
+      </p:sp>
+      <p:sp>
+        <p:nvSpPr>
+          <p:cNvPr id="8" name="Rounded Rectangle 7"/>
+          <p:cNvSpPr/>
+          <p:nvPr/>
+        </p:nvSpPr>
+        <p:spPr>
+          <a:xfrm>
+            <a:off x="685800" y="4937760"/>
+            <a:ext cx="10972800" cy="1280160"/>
+          </a:xfrm>
+          <a:prstGeom prst="roundRect">
+            <a:avLst/>
+          </a:prstGeom>
+          <a:solidFill>
+            <a:srgbClr val="212121"/>
+          </a:solidFill>
+          <a:ln>
+            <a:noFill/>
+          </a:ln>
+        </p:spPr>
+        <p:style>
+          <a:lnRef idx="1">
+            <a:schemeClr val="accent1"/>
+          </a:lnRef>
+          <a:fillRef idx="3">
+            <a:schemeClr val="accent1"/>
+          </a:fillRef>
+          <a:effectRef idx="2">
+            <a:schemeClr val="accent1"/>
+          </a:effectRef>
+          <a:fontRef idx="minor">
+            <a:schemeClr val="lt1"/>
+          </a:fontRef>
+        </p:style>
+        <p:txBody>
+          <a:bodyPr rtlCol="0" anchor="ctr" wrap="square" lIns="274320" tIns="228600"/>
+          <a:lstStyle/>
+          <a:p>
+            <a:pPr algn="ctr"/>
+            <a:r>
+              <a:rPr sz="1700" b="1">
+                <a:solidFill>
+                  <a:srgbClr val="FFEE58"/>
+                </a:solidFill>
+                <a:latin typeface="맑은 고딕"/>
+              </a:rPr>
+              <a:t>항공사진·거리뷰·DSM·도로망·실측 그늘막을 컴퓨터비전·GIS로 통합</a:t>
+            </a:r>
+          </a:p>
+          <a:p>
+            <a:pPr algn="ctr">
+              <a:spcBef>
+                <a:spcPts val="600"/>
+              </a:spcBef>
+            </a:pPr>
+            <a:r>
+              <a:rPr sz="1400" b="1">
+                <a:solidFill>
+                  <a:srgbClr val="FFFFFF"/>
+                </a:solidFill>
+                <a:latin typeface="맑은 고딕"/>
+              </a:rPr>
+              <a:t>→ 6 시나리오 모두에서 살아남는 강건 입지 2곳 + 흑석동 사각지대 4곳 도출</a:t>
+            </a:r>
+          </a:p>
+          <a:p>
+            <a:pPr algn="ctr">
+              <a:spcBef>
+                <a:spcPts val="400"/>
+              </a:spcBef>
+            </a:pPr>
+            <a:r>
+              <a:rPr sz="1100" b="0">
+                <a:solidFill>
+                  <a:srgbClr val="CCCCCC"/>
+                </a:solidFill>
+                <a:latin typeface="맑은 고딕"/>
+              </a:rPr>
+              <a:t>SAM + SegFormer + Deep Umbra(DSM) + OSMnx + NGII + 실측 그늘막 + MCDA</a:t>
+            </a:r>
+          </a:p>
+        </p:txBody>
+      </p:sp>
+      <p:sp>
+        <p:nvSpPr>
+          <p:cNvPr id="9" name="TextBox 8"/>
+          <p:cNvSpPr txBox="1"/>
+          <p:nvPr/>
+        </p:nvSpPr>
+        <p:spPr>
+          <a:xfrm>
+            <a:off x="457200" y="6400800"/>
+            <a:ext cx="9144000" cy="365760"/>
+          </a:xfrm>
+          <a:prstGeom prst="rect">
+            <a:avLst/>
+          </a:prstGeom>
+          <a:noFill/>
+        </p:spPr>
+        <p:txBody>
+          <a:bodyPr wrap="square">
+            <a:spAutoFit/>
+          </a:bodyPr>
+          <a:lstStyle/>
+          <a:p>
+            <a:pPr algn="l"/>
+            <a:r>
+              <a:rPr sz="1000" b="0">
+                <a:solidFill>
+                  <a:srgbClr val="555555"/>
+                </a:solidFill>
+                <a:latin typeface="맑은 고딕"/>
+              </a:rPr>
+              <a:t>동작구 여름 그늘막 최적 입지 추천 시스템 · 한영재 · 2025961227</a:t>
+            </a:r>
+          </a:p>
+        </p:txBody>
+      </p:sp>
+      <p:sp>
+        <p:nvSpPr>
+          <p:cNvPr id="10" name="TextBox 9"/>
+          <p:cNvSpPr txBox="1"/>
+          <p:nvPr/>
+        </p:nvSpPr>
+        <p:spPr>
+          <a:xfrm>
+            <a:off x="11247120" y="6400800"/>
+            <a:ext cx="914400" cy="365760"/>
+          </a:xfrm>
+          <a:prstGeom prst="rect">
+            <a:avLst/>
+          </a:prstGeom>
+          <a:noFill/>
+        </p:spPr>
+        <p:txBody>
+          <a:bodyPr wrap="square">
+            <a:spAutoFit/>
+          </a:bodyPr>
+          <a:lstStyle/>
+          <a:p>
+            <a:pPr algn="r"/>
+            <a:r>
+              <a:rPr sz="1000" b="0">
+                <a:solidFill>
+                  <a:srgbClr val="555555"/>
+                </a:solidFill>
+                <a:latin typeface="맑은 고딕"/>
+              </a:rPr>
+              <a:t>15 / 15</a:t>
             </a:r>
           </a:p>
         </p:txBody>
@@ -6307,7 +7776,7 @@
           <a:p>
             <a:pPr algn="l"/>
             <a:r>
-              <a:rPr sz="3000" b="1">
+              <a:rPr sz="2800" b="1">
                 <a:solidFill>
                   <a:srgbClr val="212121"/>
                 </a:solidFill>
@@ -6342,7 +7811,7 @@
           <a:p>
             <a:pPr algn="l"/>
             <a:r>
-              <a:rPr sz="1400" b="0">
+              <a:rPr sz="1300" b="0">
                 <a:solidFill>
                   <a:srgbClr val="555555"/>
                 </a:solidFill>
@@ -6361,7 +7830,7 @@
         </p:nvSpPr>
         <p:spPr>
           <a:xfrm>
-            <a:off x="685800" y="1645920"/>
+            <a:off x="685800" y="1554480"/>
             <a:ext cx="10972800" cy="2286000"/>
           </a:xfrm>
           <a:prstGeom prst="rect">
@@ -6377,49 +7846,49 @@
           <a:p>
             <a:pPr>
               <a:spcAft>
-                <a:spcPts val="600"/>
+                <a:spcPts val="500"/>
               </a:spcAft>
             </a:pPr>
             <a:r>
-              <a:rPr sz="1800" b="0">
+              <a:rPr sz="1500" b="0">
                 <a:solidFill>
                   <a:srgbClr val="212121"/>
                 </a:solidFill>
                 <a:latin typeface="맑은 고딕"/>
               </a:rPr>
-              <a:t>• 그늘막은 유한한 예산 → 어느 격자에 설치해야 '폭염 스트레스 × 유동인구 × 취약계층' 효용이 최대인가?</a:t>
+              <a:t>• 그늘막은 유한한 예산 → 어느 격자에 '폭염스트레스 × 유동인구 × 취약계층' 효용 최대인가?</a:t>
             </a:r>
           </a:p>
           <a:p>
             <a:pPr>
               <a:spcAft>
-                <a:spcPts val="600"/>
+                <a:spcPts val="500"/>
               </a:spcAft>
             </a:pPr>
             <a:r>
-              <a:rPr sz="1800" b="0">
+              <a:rPr sz="1500" b="0">
                 <a:solidFill>
                   <a:srgbClr val="212121"/>
                 </a:solidFill>
                 <a:latin typeface="맑은 고딕"/>
               </a:rPr>
-              <a:t>• 기존 방식: 민원 기반 · 담당자 직관 → 공간적 편향, 이미 커버된 곳 중복 설치</a:t>
+              <a:t>• 기존 방식: 민원·직관 → 공간적 편향, 이미 커버된 곳 중복 설치</a:t>
             </a:r>
           </a:p>
           <a:p>
             <a:pPr>
               <a:spcAft>
-                <a:spcPts val="600"/>
+                <a:spcPts val="500"/>
               </a:spcAft>
             </a:pPr>
             <a:r>
-              <a:rPr sz="1800" b="0">
+              <a:rPr sz="1500" b="0">
                 <a:solidFill>
                   <a:srgbClr val="212121"/>
                 </a:solidFill>
                 <a:latin typeface="맑은 고딕"/>
               </a:rPr>
-              <a:t>• 제안: 다변수 가중합 + 공간 필터 + 시나리오 민감도 + 자연그늘까지 반영한 입지 추천 파이프라인</a:t>
+              <a:t>• 제안: 다변수 가중합 + 다단계 공간 필터 + 다정책 시나리오 + 4종 외부 데이터 통합</a:t>
             </a:r>
           </a:p>
         </p:txBody>
@@ -6462,12 +7931,12 @@
           </a:fontRef>
         </p:style>
         <p:txBody>
-          <a:bodyPr rtlCol="0" anchor="ctr" lIns="274320" tIns="182880" wrap="square"/>
+          <a:bodyPr rtlCol="0" anchor="ctr" wrap="square" lIns="274320" tIns="182880"/>
           <a:lstStyle/>
           <a:p>
             <a:pPr algn="l"/>
             <a:r>
-              <a:rPr sz="2000" b="1">
+              <a:rPr sz="1900" b="1">
                 <a:solidFill>
                   <a:srgbClr val="1E88E5"/>
                 </a:solidFill>
@@ -6479,11 +7948,11 @@
           <a:p>
             <a:pPr>
               <a:spcBef>
-                <a:spcPts val="400"/>
+                <a:spcPts val="300"/>
               </a:spcBef>
             </a:pPr>
             <a:r>
-              <a:rPr sz="1600" b="0">
+              <a:rPr sz="1400" b="0">
                 <a:solidFill>
                   <a:srgbClr val="212121"/>
                 </a:solidFill>
@@ -6495,33 +7964,49 @@
           <a:p>
             <a:pPr>
               <a:spcBef>
-                <a:spcPts val="400"/>
+                <a:spcPts val="300"/>
               </a:spcBef>
             </a:pPr>
             <a:r>
-              <a:rPr sz="1600" b="0">
+              <a:rPr sz="1400" b="0">
                 <a:solidFill>
                   <a:srgbClr val="212121"/>
                 </a:solidFill>
                 <a:latin typeface="맑은 고딕"/>
               </a:rPr>
-              <a:t>• 가중합 + 제약조건(보행로·기존그늘막) = 리스크 예산 내 최적 포지션</a:t>
+              <a:t>• 가중합 + 공간 제약(보행로·건물·교차로·기존그늘막) = 리스크 예산 내 최적 포지션</a:t>
             </a:r>
           </a:p>
           <a:p>
             <a:pPr>
               <a:spcBef>
-                <a:spcPts val="400"/>
+                <a:spcPts val="300"/>
               </a:spcBef>
             </a:pPr>
             <a:r>
-              <a:rPr sz="1600" b="0">
+              <a:rPr sz="1400" b="0">
                 <a:solidFill>
                   <a:srgbClr val="212121"/>
                 </a:solidFill>
                 <a:latin typeface="맑은 고딕"/>
               </a:rPr>
-              <a:t>• 시나리오 민감도 = 금리 시나리오 스트레스 테스트와 동형(同形)</a:t>
+              <a:t>• 시나리오 민감도 6종 = 금리 스트레스 테스트와 동형(同形)</a:t>
+            </a:r>
+          </a:p>
+          <a:p>
+            <a:pPr>
+              <a:spcBef>
+                <a:spcPts val="300"/>
+              </a:spcBef>
+            </a:pPr>
+            <a:r>
+              <a:rPr sz="1400" b="0">
+                <a:solidFill>
+                  <a:srgbClr val="212121"/>
+                </a:solidFill>
+                <a:latin typeface="맑은 고딕"/>
+              </a:rPr>
+              <a:t>• 컴퓨터비전·GIS는 'Score를 대체'하는 게 아니라 '입력 데이터 품질을 끌어올림'</a:t>
             </a:r>
           </a:p>
         </p:txBody>
@@ -6591,7 +8076,7 @@
                 </a:solidFill>
                 <a:latin typeface="맑은 고딕"/>
               </a:rPr>
-              <a:t>2 / 14</a:t>
+              <a:t>2 / 15</a:t>
             </a:r>
           </a:p>
         </p:txBody>
@@ -6681,7 +8166,7 @@
           <a:p>
             <a:pPr algn="l"/>
             <a:r>
-              <a:rPr sz="3000" b="1">
+              <a:rPr sz="2800" b="1">
                 <a:solidFill>
                   <a:srgbClr val="212121"/>
                 </a:solidFill>
@@ -6716,13 +8201,13 @@
           <a:p>
             <a:pPr algn="l"/>
             <a:r>
-              <a:rPr sz="1400" b="0">
+              <a:rPr sz="1300" b="0">
                 <a:solidFill>
                   <a:srgbClr val="555555"/>
                 </a:solidFill>
                 <a:latin typeface="맑은 고딕"/>
               </a:rPr>
-              <a:t>격자 생성 → 스코어 → 필터 → 시나리오 → LLM 근거</a:t>
+              <a:t>9종 데이터 → 7 피처 → 4단계 필터 → 6 시나리오 → TOP 10</a:t>
             </a:r>
           </a:p>
         </p:txBody>
@@ -6735,8 +8220,8 @@
         </p:nvSpPr>
         <p:spPr>
           <a:xfrm>
-            <a:off x="685800" y="2011680"/>
-            <a:ext cx="2697480" cy="2926080"/>
+            <a:off x="365760" y="1828800"/>
+            <a:ext cx="2194560" cy="3017520"/>
           </a:xfrm>
           <a:prstGeom prst="roundRect">
             <a:avLst/>
@@ -6765,34 +8250,18 @@
           </a:fontRef>
         </p:style>
         <p:txBody>
-          <a:bodyPr rtlCol="0" anchor="ctr" wrap="square" lIns="182880" tIns="182880"/>
+          <a:bodyPr rtlCol="0" anchor="ctr" wrap="square" lIns="137160" tIns="182880"/>
           <a:lstStyle/>
           <a:p>
             <a:pPr algn="ctr"/>
             <a:r>
-              <a:rPr sz="1200" b="1">
+              <a:rPr sz="1100" b="1">
                 <a:solidFill>
                   <a:srgbClr val="555555"/>
                 </a:solidFill>
                 <a:latin typeface="맑은 고딕"/>
               </a:rPr>
               <a:t>STEP 0</a:t>
-            </a:r>
-          </a:p>
-          <a:p>
-            <a:pPr>
-              <a:spcBef>
-                <a:spcPts val="400"/>
-              </a:spcBef>
-            </a:pPr>
-            <a:r>
-              <a:rPr sz="2200" b="1">
-                <a:solidFill>
-                  <a:srgbClr val="212121"/>
-                </a:solidFill>
-                <a:latin typeface="맑은 고딕"/>
-              </a:rPr>
-              <a:t>격자</a:t>
             </a:r>
           </a:p>
           <a:p>
@@ -6802,23 +8271,39 @@
               </a:spcBef>
             </a:pPr>
             <a:r>
-              <a:rPr sz="1300" b="0">
-                <a:solidFill>
-                  <a:srgbClr val="555555"/>
-                </a:solidFill>
-                <a:latin typeface="맑은 고딕"/>
-              </a:rPr>
-              <a:t>동작구 100m 격자</a:t>
+              <a:rPr sz="2000" b="1">
+                <a:solidFill>
+                  <a:srgbClr val="212121"/>
+                </a:solidFill>
+                <a:latin typeface="맑은 고딕"/>
+              </a:rPr>
+              <a:t>격자</a:t>
             </a:r>
           </a:p>
           <a:p>
             <a:pPr>
               <a:spcBef>
-                <a:spcPts val="300"/>
+                <a:spcPts val="200"/>
               </a:spcBef>
             </a:pPr>
             <a:r>
-              <a:rPr sz="1300" b="0">
+              <a:rPr sz="1200" b="0">
+                <a:solidFill>
+                  <a:srgbClr val="555555"/>
+                </a:solidFill>
+                <a:latin typeface="맑은 고딕"/>
+              </a:rPr>
+              <a:t>동작구 100m 격자</a:t>
+            </a:r>
+          </a:p>
+          <a:p>
+            <a:pPr>
+              <a:spcBef>
+                <a:spcPts val="200"/>
+              </a:spcBef>
+            </a:pPr>
+            <a:r>
+              <a:rPr sz="1200" b="0">
                 <a:solidFill>
                   <a:srgbClr val="555555"/>
                 </a:solidFill>
@@ -6837,8 +8322,8 @@
         </p:nvSpPr>
         <p:spPr>
           <a:xfrm>
-            <a:off x="3337560" y="3291840"/>
-            <a:ext cx="228600" cy="320040"/>
+            <a:off x="2542032" y="3154680"/>
+            <a:ext cx="164592" cy="274320"/>
           </a:xfrm>
           <a:prstGeom prst="rightArrow">
             <a:avLst/>
@@ -6880,8 +8365,8 @@
         </p:nvSpPr>
         <p:spPr>
           <a:xfrm>
-            <a:off x="3520440" y="2011680"/>
-            <a:ext cx="2697480" cy="2926080"/>
+            <a:off x="2651760" y="1828800"/>
+            <a:ext cx="2194560" cy="3017520"/>
           </a:xfrm>
           <a:prstGeom prst="roundRect">
             <a:avLst/>
@@ -6910,34 +8395,18 @@
           </a:fontRef>
         </p:style>
         <p:txBody>
-          <a:bodyPr rtlCol="0" anchor="ctr" wrap="square" lIns="182880" tIns="182880"/>
+          <a:bodyPr rtlCol="0" anchor="ctr" wrap="square" lIns="137160" tIns="182880"/>
           <a:lstStyle/>
           <a:p>
             <a:pPr algn="ctr"/>
             <a:r>
-              <a:rPr sz="1200" b="1">
+              <a:rPr sz="1100" b="1">
                 <a:solidFill>
                   <a:srgbClr val="1E88E5"/>
                 </a:solidFill>
                 <a:latin typeface="맑은 고딕"/>
               </a:rPr>
               <a:t>STEP 1</a:t>
-            </a:r>
-          </a:p>
-          <a:p>
-            <a:pPr>
-              <a:spcBef>
-                <a:spcPts val="400"/>
-              </a:spcBef>
-            </a:pPr>
-            <a:r>
-              <a:rPr sz="2200" b="1">
-                <a:solidFill>
-                  <a:srgbClr val="212121"/>
-                </a:solidFill>
-                <a:latin typeface="맑은 고딕"/>
-              </a:rPr>
-              <a:t>스코어</a:t>
             </a:r>
           </a:p>
           <a:p>
@@ -6947,29 +8416,45 @@
               </a:spcBef>
             </a:pPr>
             <a:r>
-              <a:rPr sz="1300" b="0">
-                <a:solidFill>
-                  <a:srgbClr val="555555"/>
-                </a:solidFill>
-                <a:latin typeface="맑은 고딕"/>
-              </a:rPr>
-              <a:t>pop·lst·vuln(+) −shade·natural(−)</a:t>
+              <a:rPr sz="2000" b="1">
+                <a:solidFill>
+                  <a:srgbClr val="212121"/>
+                </a:solidFill>
+                <a:latin typeface="맑은 고딕"/>
+              </a:rPr>
+              <a:t>Score</a:t>
             </a:r>
           </a:p>
           <a:p>
             <a:pPr>
               <a:spcBef>
-                <a:spcPts val="300"/>
+                <a:spcPts val="200"/>
               </a:spcBef>
             </a:pPr>
             <a:r>
-              <a:rPr sz="1300" b="0">
+              <a:rPr sz="1200" b="0">
                 <a:solidFill>
                   <a:srgbClr val="555555"/>
                 </a:solidFill>
                 <a:latin typeface="맑은 고딕"/>
               </a:rPr>
-              <a:t>시간대 가중 9~18시</a:t>
+              <a:t>7 피처 가중합</a:t>
+            </a:r>
+          </a:p>
+          <a:p>
+            <a:pPr>
+              <a:spcBef>
+                <a:spcPts val="200"/>
+              </a:spcBef>
+            </a:pPr>
+            <a:r>
+              <a:rPr sz="1200" b="0">
+                <a:solidFill>
+                  <a:srgbClr val="555555"/>
+                </a:solidFill>
+                <a:latin typeface="맑은 고딕"/>
+              </a:rPr>
+              <a:t>MinMax 정규화</a:t>
             </a:r>
           </a:p>
         </p:txBody>
@@ -6982,8 +8467,8 @@
         </p:nvSpPr>
         <p:spPr>
           <a:xfrm>
-            <a:off x="6172200" y="3291840"/>
-            <a:ext cx="228600" cy="320040"/>
+            <a:off x="4828032" y="3154680"/>
+            <a:ext cx="164592" cy="274320"/>
           </a:xfrm>
           <a:prstGeom prst="rightArrow">
             <a:avLst/>
@@ -7025,8 +8510,8 @@
         </p:nvSpPr>
         <p:spPr>
           <a:xfrm>
-            <a:off x="6355080" y="2011680"/>
-            <a:ext cx="2697480" cy="2926080"/>
+            <a:off x="4937760" y="1828800"/>
+            <a:ext cx="2194560" cy="3017520"/>
           </a:xfrm>
           <a:prstGeom prst="roundRect">
             <a:avLst/>
@@ -7055,34 +8540,18 @@
           </a:fontRef>
         </p:style>
         <p:txBody>
-          <a:bodyPr rtlCol="0" anchor="ctr" wrap="square" lIns="182880" tIns="182880"/>
+          <a:bodyPr rtlCol="0" anchor="ctr" wrap="square" lIns="137160" tIns="182880"/>
           <a:lstStyle/>
           <a:p>
             <a:pPr algn="ctr"/>
             <a:r>
-              <a:rPr sz="1200" b="1">
+              <a:rPr sz="1100" b="1">
                 <a:solidFill>
                   <a:srgbClr val="FB8C00"/>
                 </a:solidFill>
                 <a:latin typeface="맑은 고딕"/>
               </a:rPr>
               <a:t>STEP 2</a:t>
-            </a:r>
-          </a:p>
-          <a:p>
-            <a:pPr>
-              <a:spcBef>
-                <a:spcPts val="400"/>
-              </a:spcBef>
-            </a:pPr>
-            <a:r>
-              <a:rPr sz="2200" b="1">
-                <a:solidFill>
-                  <a:srgbClr val="212121"/>
-                </a:solidFill>
-                <a:latin typeface="맑은 고딕"/>
-              </a:rPr>
-              <a:t>필터</a:t>
             </a:r>
           </a:p>
           <a:p>
@@ -7092,45 +8561,61 @@
               </a:spcBef>
             </a:pPr>
             <a:r>
-              <a:rPr sz="1300" b="0">
-                <a:solidFill>
-                  <a:srgbClr val="555555"/>
-                </a:solidFill>
-                <a:latin typeface="맑은 고딕"/>
-              </a:rPr>
-              <a:t>보행로 20m 이내</a:t>
+              <a:rPr sz="2000" b="1">
+                <a:solidFill>
+                  <a:srgbClr val="212121"/>
+                </a:solidFill>
+                <a:latin typeface="맑은 고딕"/>
+              </a:rPr>
+              <a:t>필터</a:t>
             </a:r>
           </a:p>
           <a:p>
             <a:pPr>
               <a:spcBef>
-                <a:spcPts val="300"/>
+                <a:spcPts val="200"/>
               </a:spcBef>
             </a:pPr>
             <a:r>
-              <a:rPr sz="1300" b="0">
+              <a:rPr sz="1200" b="0">
                 <a:solidFill>
                   <a:srgbClr val="555555"/>
                 </a:solidFill>
                 <a:latin typeface="맑은 고딕"/>
               </a:rPr>
-              <a:t>기존그늘막 150m 외</a:t>
+              <a:t>보행로 5m → 그늘막 →</a:t>
             </a:r>
           </a:p>
           <a:p>
             <a:pPr>
               <a:spcBef>
-                <a:spcPts val="300"/>
+                <a:spcPts val="200"/>
               </a:spcBef>
             </a:pPr>
             <a:r>
-              <a:rPr sz="1300" b="0">
+              <a:rPr sz="1200" b="0">
                 <a:solidFill>
                   <a:srgbClr val="555555"/>
                 </a:solidFill>
                 <a:latin typeface="맑은 고딕"/>
               </a:rPr>
-              <a:t>3,672 → 23 → 19</a:t>
+              <a:t>건물컷 → 결집지 50m</a:t>
+            </a:r>
+          </a:p>
+          <a:p>
+            <a:pPr>
+              <a:spcBef>
+                <a:spcPts val="200"/>
+              </a:spcBef>
+            </a:pPr>
+            <a:r>
+              <a:rPr sz="1200" b="0">
+                <a:solidFill>
+                  <a:srgbClr val="555555"/>
+                </a:solidFill>
+                <a:latin typeface="맑은 고딕"/>
+              </a:rPr>
+              <a:t>3,672 → 330</a:t>
             </a:r>
           </a:p>
         </p:txBody>
@@ -7143,8 +8628,8 @@
         </p:nvSpPr>
         <p:spPr>
           <a:xfrm>
-            <a:off x="9006840" y="3291840"/>
-            <a:ext cx="228600" cy="320040"/>
+            <a:off x="7114032" y="3154680"/>
+            <a:ext cx="164592" cy="274320"/>
           </a:xfrm>
           <a:prstGeom prst="rightArrow">
             <a:avLst/>
@@ -7186,8 +8671,8 @@
         </p:nvSpPr>
         <p:spPr>
           <a:xfrm>
-            <a:off x="9189720" y="2011680"/>
-            <a:ext cx="2697480" cy="2926080"/>
+            <a:off x="7223760" y="1828800"/>
+            <a:ext cx="2194560" cy="3017520"/>
           </a:xfrm>
           <a:prstGeom prst="roundRect">
             <a:avLst/>
@@ -7216,34 +8701,18 @@
           </a:fontRef>
         </p:style>
         <p:txBody>
-          <a:bodyPr rtlCol="0" anchor="ctr" wrap="square" lIns="182880" tIns="182880"/>
+          <a:bodyPr rtlCol="0" anchor="ctr" wrap="square" lIns="137160" tIns="182880"/>
           <a:lstStyle/>
           <a:p>
             <a:pPr algn="ctr"/>
             <a:r>
-              <a:rPr sz="1200" b="1">
+              <a:rPr sz="1100" b="1">
                 <a:solidFill>
                   <a:srgbClr val="E53935"/>
                 </a:solidFill>
                 <a:latin typeface="맑은 고딕"/>
               </a:rPr>
               <a:t>STEP 3</a:t>
-            </a:r>
-          </a:p>
-          <a:p>
-            <a:pPr>
-              <a:spcBef>
-                <a:spcPts val="400"/>
-              </a:spcBef>
-            </a:pPr>
-            <a:r>
-              <a:rPr sz="2200" b="1">
-                <a:solidFill>
-                  <a:srgbClr val="212121"/>
-                </a:solidFill>
-                <a:latin typeface="맑은 고딕"/>
-              </a:rPr>
-              <a:t>시나리오+LLM</a:t>
             </a:r>
           </a:p>
           <a:p>
@@ -7253,13 +8722,142 @@
               </a:spcBef>
             </a:pPr>
             <a:r>
-              <a:rPr sz="1300" b="0">
+              <a:rPr sz="2000" b="1">
+                <a:solidFill>
+                  <a:srgbClr val="212121"/>
+                </a:solidFill>
+                <a:latin typeface="맑은 고딕"/>
+              </a:rPr>
+              <a:t>시나리오</a:t>
+            </a:r>
+          </a:p>
+          <a:p>
+            <a:pPr>
+              <a:spcBef>
+                <a:spcPts val="200"/>
+              </a:spcBef>
+            </a:pPr>
+            <a:r>
+              <a:rPr sz="1200" b="0">
                 <a:solidFill>
                   <a:srgbClr val="555555"/>
                 </a:solidFill>
                 <a:latin typeface="맑은 고딕"/>
               </a:rPr>
-              <a:t>4개 프리셋 × TOP10</a:t>
+              <a:t>6 프리셋 × TOP10</a:t>
+            </a:r>
+          </a:p>
+          <a:p>
+            <a:pPr>
+              <a:spcBef>
+                <a:spcPts val="200"/>
+              </a:spcBef>
+            </a:pPr>
+            <a:r>
+              <a:rPr sz="1200" b="0">
+                <a:solidFill>
+                  <a:srgbClr val="555555"/>
+                </a:solidFill>
+                <a:latin typeface="맑은 고딕"/>
+              </a:rPr>
+              <a:t>강건입지 식별</a:t>
+            </a:r>
+          </a:p>
+        </p:txBody>
+      </p:sp>
+      <p:sp>
+        <p:nvSpPr>
+          <p:cNvPr id="12" name="Right Arrow 11"/>
+          <p:cNvSpPr/>
+          <p:nvPr/>
+        </p:nvSpPr>
+        <p:spPr>
+          <a:xfrm>
+            <a:off x="9400032" y="3154680"/>
+            <a:ext cx="164592" cy="274320"/>
+          </a:xfrm>
+          <a:prstGeom prst="rightArrow">
+            <a:avLst/>
+          </a:prstGeom>
+          <a:solidFill>
+            <a:srgbClr val="555555"/>
+          </a:solidFill>
+          <a:ln>
+            <a:noFill/>
+          </a:ln>
+        </p:spPr>
+        <p:style>
+          <a:lnRef idx="1">
+            <a:schemeClr val="accent1"/>
+          </a:lnRef>
+          <a:fillRef idx="3">
+            <a:schemeClr val="accent1"/>
+          </a:fillRef>
+          <a:effectRef idx="2">
+            <a:schemeClr val="accent1"/>
+          </a:effectRef>
+          <a:fontRef idx="minor">
+            <a:schemeClr val="lt1"/>
+          </a:fontRef>
+        </p:style>
+        <p:txBody>
+          <a:bodyPr rtlCol="0" anchor="ctr"/>
+          <a:lstStyle/>
+          <a:p>
+            <a:pPr algn="ctr"/>
+          </a:p>
+        </p:txBody>
+      </p:sp>
+      <p:sp>
+        <p:nvSpPr>
+          <p:cNvPr id="13" name="Rounded Rectangle 12"/>
+          <p:cNvSpPr/>
+          <p:nvPr/>
+        </p:nvSpPr>
+        <p:spPr>
+          <a:xfrm>
+            <a:off x="9509760" y="1828800"/>
+            <a:ext cx="2194560" cy="3017520"/>
+          </a:xfrm>
+          <a:prstGeom prst="roundRect">
+            <a:avLst/>
+          </a:prstGeom>
+          <a:solidFill>
+            <a:srgbClr val="FAFAFA"/>
+          </a:solidFill>
+          <a:ln w="25400">
+            <a:solidFill>
+              <a:srgbClr val="43A047"/>
+            </a:solidFill>
+          </a:ln>
+        </p:spPr>
+        <p:style>
+          <a:lnRef idx="1">
+            <a:schemeClr val="accent1"/>
+          </a:lnRef>
+          <a:fillRef idx="3">
+            <a:schemeClr val="accent1"/>
+          </a:fillRef>
+          <a:effectRef idx="2">
+            <a:schemeClr val="accent1"/>
+          </a:effectRef>
+          <a:fontRef idx="minor">
+            <a:schemeClr val="lt1"/>
+          </a:fontRef>
+        </p:style>
+        <p:txBody>
+          <a:bodyPr rtlCol="0" anchor="ctr" wrap="square" lIns="137160" tIns="182880"/>
+          <a:lstStyle/>
+          <a:p>
+            <a:pPr algn="ctr"/>
+            <a:r>
+              <a:rPr sz="1100" b="1">
+                <a:solidFill>
+                  <a:srgbClr val="43A047"/>
+                </a:solidFill>
+                <a:latin typeface="맑은 고딕"/>
+              </a:rPr>
+              <a:t>STEP 4</a:t>
             </a:r>
           </a:p>
           <a:p>
@@ -7269,26 +8867,58 @@
               </a:spcBef>
             </a:pPr>
             <a:r>
-              <a:rPr sz="1300" b="0">
+              <a:rPr sz="2000" b="1">
+                <a:solidFill>
+                  <a:srgbClr val="212121"/>
+                </a:solidFill>
+                <a:latin typeface="맑은 고딕"/>
+              </a:rPr>
+              <a:t>근거+시각화</a:t>
+            </a:r>
+          </a:p>
+          <a:p>
+            <a:pPr>
+              <a:spcBef>
+                <a:spcPts val="200"/>
+              </a:spcBef>
+            </a:pPr>
+            <a:r>
+              <a:rPr sz="1200" b="0">
                 <a:solidFill>
                   <a:srgbClr val="555555"/>
                 </a:solidFill>
                 <a:latin typeface="맑은 고딕"/>
               </a:rPr>
-              <a:t>LLM 자연어 근거</a:t>
-            </a:r>
-          </a:p>
-        </p:txBody>
-      </p:sp>
-      <p:sp>
-        <p:nvSpPr>
-          <p:cNvPr id="12" name="TextBox 11"/>
+              <a:t>LLM 자연어 근거 +</a:t>
+            </a:r>
+          </a:p>
+          <a:p>
+            <a:pPr>
+              <a:spcBef>
+                <a:spcPts val="200"/>
+              </a:spcBef>
+            </a:pPr>
+            <a:r>
+              <a:rPr sz="1200" b="0">
+                <a:solidFill>
+                  <a:srgbClr val="555555"/>
+                </a:solidFill>
+                <a:latin typeface="맑은 고딕"/>
+              </a:rPr>
+              <a:t>Folium 지도</a:t>
+            </a:r>
+          </a:p>
+        </p:txBody>
+      </p:sp>
+      <p:sp>
+        <p:nvSpPr>
+          <p:cNvPr id="14" name="TextBox 13"/>
           <p:cNvSpPr txBox="1"/>
           <p:nvPr/>
         </p:nvSpPr>
         <p:spPr>
           <a:xfrm>
-            <a:off x="685800" y="5303520"/>
+            <a:off x="685800" y="5212080"/>
             <a:ext cx="10972800" cy="457200"/>
           </a:xfrm>
           <a:prstGeom prst="rect">
@@ -7310,14 +8940,14 @@
                 </a:solidFill>
                 <a:latin typeface="맑은 고딕"/>
               </a:rPr>
-              <a:t>산출물: shade_map.html · scenarios_map.html · rationales.json · scenarios_comparison.csv · focus_areas_validation.json</a:t>
-            </a:r>
-          </a:p>
-        </p:txBody>
-      </p:sp>
-      <p:sp>
-        <p:nvSpPr>
-          <p:cNvPr id="13" name="TextBox 12"/>
+              <a:t>외부 데이터: V-World 위성 · Mapillary 거리뷰 · 흑석동 DSM/DEM/NGII · OSMnx 도로망/교차로/횡단보도 · 흑석동 실측 그늘막 18개</a:t>
+            </a:r>
+          </a:p>
+        </p:txBody>
+      </p:sp>
+      <p:sp>
+        <p:nvSpPr>
+          <p:cNvPr id="15" name="TextBox 14"/>
           <p:cNvSpPr txBox="1"/>
           <p:nvPr/>
         </p:nvSpPr>
@@ -7352,7 +8982,7 @@
       </p:sp>
       <p:sp>
         <p:nvSpPr>
-          <p:cNvPr id="14" name="TextBox 13"/>
+          <p:cNvPr id="16" name="TextBox 15"/>
           <p:cNvSpPr txBox="1"/>
           <p:nvPr/>
         </p:nvSpPr>
@@ -7380,7 +9010,7 @@
                 </a:solidFill>
                 <a:latin typeface="맑은 고딕"/>
               </a:rPr>
-              <a:t>3 / 14</a:t>
+              <a:t>3 / 15</a:t>
             </a:r>
           </a:p>
         </p:txBody>
@@ -7470,13 +9100,13 @@
           <a:p>
             <a:pPr algn="l"/>
             <a:r>
-              <a:rPr sz="3000" b="1">
+              <a:rPr sz="2800" b="1">
                 <a:solidFill>
                   <a:srgbClr val="212121"/>
                 </a:solidFill>
                 <a:latin typeface="맑은 고딕"/>
               </a:rPr>
-              <a:t>입력 데이터 5종 · 시간대 가중</a:t>
+              <a:t>입력 데이터 (9종, 3 계층)</a:t>
             </a:r>
           </a:p>
         </p:txBody>
@@ -7505,13 +9135,13 @@
           <a:p>
             <a:pPr algn="l"/>
             <a:r>
-              <a:rPr sz="1400" b="0">
+              <a:rPr sz="1300" b="0">
                 <a:solidFill>
                   <a:srgbClr val="555555"/>
                 </a:solidFill>
                 <a:latin typeface="맑은 고딕"/>
               </a:rPr>
-              <a:t>실데이터 ↔ 더미 자동 스위칭 / 역세권·시장 프로파일 분리</a:t>
+              <a:t>기본 5종 + 컴퓨터비전 2종 + 흑석동 정밀·OSMnx 2종</a:t>
             </a:r>
           </a:p>
         </p:txBody>
@@ -7525,8 +9155,8 @@
           <p:nvPr/>
         </p:nvGraphicFramePr>
         <p:xfrm>
-          <a:off x="685800" y="1737360"/>
-          <a:ext cx="11247120" cy="3108960"/>
+          <a:off x="365760" y="1645920"/>
+          <a:ext cx="10972800" cy="4114800"/>
         </p:xfrm>
         <a:graphic>
           <a:graphicData uri="http://schemas.openxmlformats.org/drawingml/2006/table">
@@ -7535,24 +9165,26 @@
                 <a:tableStyleId>{5C22544A-7EE6-4342-B048-85BDC9FD1C3A}</a:tableStyleId>
               </a:tblPr>
               <a:tblGrid>
+                <a:gridCol w="1097280"/>
                 <a:gridCol w="3200400"/>
                 <a:gridCol w="3474720"/>
-                <a:gridCol w="4572000"/>
+                <a:gridCol w="3200400"/>
               </a:tblGrid>
-              <a:tr h="518160">
-                <a:tc>
-                  <a:txBody>
-                    <a:bodyPr/>
-                    <a:lstStyle/>
-                    <a:p>
-                      <a:r>
-                        <a:rPr sz="1400" b="1">
+              <a:tr h="411480">
+                <a:tc>
+                  <a:txBody>
+                    <a:bodyPr/>
+                    <a:lstStyle/>
+                    <a:p>
+                      <a:pPr algn="ctr"/>
+                      <a:r>
+                        <a:rPr sz="1200" b="1">
                           <a:solidFill>
                             <a:srgbClr val="FFFFFF"/>
                           </a:solidFill>
                           <a:latin typeface="맑은 고딕"/>
                         </a:rPr>
-                        <a:t>데이터</a:t>
+                        <a:t>구분</a:t>
                       </a:r>
                     </a:p>
                   </a:txBody>
@@ -7567,14 +9199,15 @@
                     <a:bodyPr/>
                     <a:lstStyle/>
                     <a:p>
-                      <a:r>
-                        <a:rPr sz="1400" b="1">
+                      <a:pPr algn="ctr"/>
+                      <a:r>
+                        <a:rPr sz="1200" b="1">
                           <a:solidFill>
                             <a:srgbClr val="FFFFFF"/>
                           </a:solidFill>
                           <a:latin typeface="맑은 고딕"/>
                         </a:rPr>
-                        <a:t>출처</a:t>
+                        <a:t>데이터</a:t>
                       </a:r>
                     </a:p>
                   </a:txBody>
@@ -7589,14 +9222,15 @@
                     <a:bodyPr/>
                     <a:lstStyle/>
                     <a:p>
-                      <a:r>
-                        <a:rPr sz="1400" b="1">
+                      <a:pPr algn="ctr"/>
+                      <a:r>
+                        <a:rPr sz="1200" b="1">
                           <a:solidFill>
                             <a:srgbClr val="FFFFFF"/>
                           </a:solidFill>
                           <a:latin typeface="맑은 고딕"/>
                         </a:rPr>
-                        <a:t>시간 프로파일</a:t>
+                        <a:t>출처</a:t>
                       </a:r>
                     </a:p>
                   </a:txBody>
@@ -7606,21 +9240,45 @@
                     </a:solidFill>
                   </a:tcPr>
                 </a:tc>
+                <a:tc>
+                  <a:txBody>
+                    <a:bodyPr/>
+                    <a:lstStyle/>
+                    <a:p>
+                      <a:pPr algn="ctr"/>
+                      <a:r>
+                        <a:rPr sz="1200" b="1">
+                          <a:solidFill>
+                            <a:srgbClr val="FFFFFF"/>
+                          </a:solidFill>
+                          <a:latin typeface="맑은 고딕"/>
+                        </a:rPr>
+                        <a:t>용도</a:t>
+                      </a:r>
+                    </a:p>
+                  </a:txBody>
+                  <a:tcPr>
+                    <a:solidFill>
+                      <a:srgbClr val="1E88E5"/>
+                    </a:solidFill>
+                  </a:tcPr>
+                </a:tc>
               </a:tr>
-              <a:tr h="518160">
-                <a:tc>
-                  <a:txBody>
-                    <a:bodyPr/>
-                    <a:lstStyle/>
-                    <a:p>
-                      <a:r>
-                        <a:rPr sz="1300" b="0">
+              <a:tr h="411480">
+                <a:tc>
+                  <a:txBody>
+                    <a:bodyPr/>
+                    <a:lstStyle/>
+                    <a:p>
+                      <a:pPr algn="ctr"/>
+                      <a:r>
+                        <a:rPr sz="1100" b="0">
                           <a:solidFill>
                             <a:srgbClr val="212121"/>
                           </a:solidFill>
                           <a:latin typeface="맑은 고딕"/>
                         </a:rPr>
-                        <a:t>생활인구 (SKT)</a:t>
+                        <a:t>기본</a:t>
                       </a:r>
                     </a:p>
                   </a:txBody>
@@ -7631,14 +9289,15 @@
                     <a:bodyPr/>
                     <a:lstStyle/>
                     <a:p>
-                      <a:r>
-                        <a:rPr sz="1300" b="0">
+                      <a:pPr algn="ctr"/>
+                      <a:r>
+                        <a:rPr sz="1100" b="0">
                           <a:solidFill>
                             <a:srgbClr val="212121"/>
                           </a:solidFill>
                           <a:latin typeface="맑은 고딕"/>
                         </a:rPr>
-                        <a:t>서울 열린데이터광장</a:t>
+                        <a:t>생활인구 (시간대별)</a:t>
                       </a:r>
                     </a:p>
                   </a:txBody>
@@ -7649,33 +9308,73 @@
                     <a:bodyPr/>
                     <a:lstStyle/>
                     <a:p>
-                      <a:r>
-                        <a:rPr sz="1300" b="0">
+                      <a:pPr algn="ctr"/>
+                      <a:r>
+                        <a:rPr sz="1100" b="0">
                           <a:solidFill>
                             <a:srgbClr val="212121"/>
                           </a:solidFill>
                           <a:latin typeface="맑은 고딕"/>
                         </a:rPr>
-                        <a:t>역세권=출퇴근 / 시장=오후 피크</a:t>
+                        <a:t>SKT 서울열린데이터</a:t>
                       </a:r>
                     </a:p>
                   </a:txBody>
                   <a:tcPr/>
                 </a:tc>
+                <a:tc>
+                  <a:txBody>
+                    <a:bodyPr/>
+                    <a:lstStyle/>
+                    <a:p>
+                      <a:pPr algn="ctr"/>
+                      <a:r>
+                        <a:rPr sz="1100" b="0">
+                          <a:solidFill>
+                            <a:srgbClr val="212121"/>
+                          </a:solidFill>
+                          <a:latin typeface="맑은 고딕"/>
+                        </a:rPr>
+                        <a:t>popdens 피처</a:t>
+                      </a:r>
+                    </a:p>
+                  </a:txBody>
+                  <a:tcPr/>
+                </a:tc>
               </a:tr>
-              <a:tr h="518160">
-                <a:tc>
-                  <a:txBody>
-                    <a:bodyPr/>
-                    <a:lstStyle/>
-                    <a:p>
-                      <a:r>
-                        <a:rPr sz="1300" b="0">
+              <a:tr h="411480">
+                <a:tc>
+                  <a:txBody>
+                    <a:bodyPr/>
+                    <a:lstStyle/>
+                    <a:p>
+                      <a:pPr algn="ctr"/>
+                      <a:r>
+                        <a:rPr sz="1100" b="0">
                           <a:solidFill>
                             <a:srgbClr val="212121"/>
                           </a:solidFill>
                           <a:latin typeface="맑은 고딕"/>
                         </a:rPr>
+                        <a:t>기본</a:t>
+                      </a:r>
+                    </a:p>
+                  </a:txBody>
+                  <a:tcPr/>
+                </a:tc>
+                <a:tc>
+                  <a:txBody>
+                    <a:bodyPr/>
+                    <a:lstStyle/>
+                    <a:p>
+                      <a:pPr algn="ctr"/>
+                      <a:r>
+                        <a:rPr sz="1100" b="0">
+                          <a:solidFill>
+                            <a:srgbClr val="212121"/>
+                          </a:solidFill>
+                          <a:latin typeface="맑은 고딕"/>
+                        </a:rPr>
                         <a:t>지표면 온도 LST</a:t>
                       </a:r>
                     </a:p>
@@ -7687,8 +9386,9 @@
                     <a:bodyPr/>
                     <a:lstStyle/>
                     <a:p>
-                      <a:r>
-                        <a:rPr sz="1300" b="0">
+                      <a:pPr algn="ctr"/>
+                      <a:r>
+                        <a:rPr sz="1100" b="0">
                           <a:solidFill>
                             <a:srgbClr val="212121"/>
                           </a:solidFill>
@@ -7705,33 +9405,54 @@
                     <a:bodyPr/>
                     <a:lstStyle/>
                     <a:p>
-                      <a:r>
-                        <a:rPr sz="1300" b="0">
+                      <a:pPr algn="ctr"/>
+                      <a:r>
+                        <a:rPr sz="1100" b="0">
                           <a:solidFill>
                             <a:srgbClr val="212121"/>
                           </a:solidFill>
                           <a:latin typeface="맑은 고딕"/>
                         </a:rPr>
-                        <a:t>오후 1~3시 1.0 (피크 가중)</a:t>
+                        <a:t>lst 피처</a:t>
                       </a:r>
                     </a:p>
                   </a:txBody>
                   <a:tcPr/>
                 </a:tc>
               </a:tr>
-              <a:tr h="518160">
-                <a:tc>
-                  <a:txBody>
-                    <a:bodyPr/>
-                    <a:lstStyle/>
-                    <a:p>
-                      <a:r>
-                        <a:rPr sz="1300" b="0">
+              <a:tr h="411480">
+                <a:tc>
+                  <a:txBody>
+                    <a:bodyPr/>
+                    <a:lstStyle/>
+                    <a:p>
+                      <a:pPr algn="ctr"/>
+                      <a:r>
+                        <a:rPr sz="1100" b="0">
                           <a:solidFill>
                             <a:srgbClr val="212121"/>
                           </a:solidFill>
                           <a:latin typeface="맑은 고딕"/>
                         </a:rPr>
+                        <a:t>기본</a:t>
+                      </a:r>
+                    </a:p>
+                  </a:txBody>
+                  <a:tcPr/>
+                </a:tc>
+                <a:tc>
+                  <a:txBody>
+                    <a:bodyPr/>
+                    <a:lstStyle/>
+                    <a:p>
+                      <a:pPr algn="ctr"/>
+                      <a:r>
+                        <a:rPr sz="1100" b="0">
+                          <a:solidFill>
+                            <a:srgbClr val="212121"/>
+                          </a:solidFill>
+                          <a:latin typeface="맑은 고딕"/>
+                        </a:rPr>
                         <a:t>취약계층 비율</a:t>
                       </a:r>
                     </a:p>
@@ -7743,14 +9464,15 @@
                     <a:bodyPr/>
                     <a:lstStyle/>
                     <a:p>
-                      <a:r>
-                        <a:rPr sz="1300" b="0">
+                      <a:pPr algn="ctr"/>
+                      <a:r>
+                        <a:rPr sz="1100" b="0">
                           <a:solidFill>
                             <a:srgbClr val="212121"/>
                           </a:solidFill>
                           <a:latin typeface="맑은 고딕"/>
                         </a:rPr>
-                        <a:t>KOSIS 동별 통계</a:t>
+                        <a:t>KOSIS 동별</a:t>
                       </a:r>
                     </a:p>
                   </a:txBody>
@@ -7761,33 +9483,54 @@
                     <a:bodyPr/>
                     <a:lstStyle/>
                     <a:p>
-                      <a:r>
-                        <a:rPr sz="1300" b="0">
+                      <a:pPr algn="ctr"/>
+                      <a:r>
+                        <a:rPr sz="1100" b="0">
                           <a:solidFill>
                             <a:srgbClr val="212121"/>
                           </a:solidFill>
                           <a:latin typeface="맑은 고딕"/>
                         </a:rPr>
-                        <a:t>상수 (연령 구조)</a:t>
+                        <a:t>vuln 피처</a:t>
                       </a:r>
                     </a:p>
                   </a:txBody>
                   <a:tcPr/>
                 </a:tc>
               </a:tr>
-              <a:tr h="518160">
-                <a:tc>
-                  <a:txBody>
-                    <a:bodyPr/>
-                    <a:lstStyle/>
-                    <a:p>
-                      <a:r>
-                        <a:rPr sz="1300" b="0">
+              <a:tr h="411480">
+                <a:tc>
+                  <a:txBody>
+                    <a:bodyPr/>
+                    <a:lstStyle/>
+                    <a:p>
+                      <a:pPr algn="ctr"/>
+                      <a:r>
+                        <a:rPr sz="1100" b="0">
                           <a:solidFill>
                             <a:srgbClr val="212121"/>
                           </a:solidFill>
                           <a:latin typeface="맑은 고딕"/>
                         </a:rPr>
+                        <a:t>기본</a:t>
+                      </a:r>
+                    </a:p>
+                  </a:txBody>
+                  <a:tcPr/>
+                </a:tc>
+                <a:tc>
+                  <a:txBody>
+                    <a:bodyPr/>
+                    <a:lstStyle/>
+                    <a:p>
+                      <a:pPr algn="ctr"/>
+                      <a:r>
+                        <a:rPr sz="1100" b="0">
+                          <a:solidFill>
+                            <a:srgbClr val="212121"/>
+                          </a:solidFill>
+                          <a:latin typeface="맑은 고딕"/>
+                        </a:rPr>
                         <a:t>기존 그늘막 위치</a:t>
                       </a:r>
                     </a:p>
@@ -7799,14 +9542,15 @@
                     <a:bodyPr/>
                     <a:lstStyle/>
                     <a:p>
-                      <a:r>
-                        <a:rPr sz="1300" b="0">
+                      <a:pPr algn="ctr"/>
+                      <a:r>
+                        <a:rPr sz="1100" b="0">
                           <a:solidFill>
                             <a:srgbClr val="212121"/>
                           </a:solidFill>
                           <a:latin typeface="맑은 고딕"/>
                         </a:rPr>
-                        <a:t>서울 열린데이터광장</a:t>
+                        <a:t>서울열린데이터 / 사용자제공</a:t>
                       </a:r>
                     </a:p>
                   </a:txBody>
@@ -7817,33 +9561,54 @@
                     <a:bodyPr/>
                     <a:lstStyle/>
                     <a:p>
-                      <a:r>
-                        <a:rPr sz="1300" b="0">
+                      <a:pPr algn="ctr"/>
+                      <a:r>
+                        <a:rPr sz="1100" b="0">
                           <a:solidFill>
                             <a:srgbClr val="212121"/>
                           </a:solidFill>
                           <a:latin typeface="맑은 고딕"/>
                         </a:rPr>
-                        <a:t>반경 150m 제외 (커버리지)</a:t>
+                        <a:t>shade 페널티 + 비교</a:t>
                       </a:r>
                     </a:p>
                   </a:txBody>
                   <a:tcPr/>
                 </a:tc>
               </a:tr>
-              <a:tr h="518160">
-                <a:tc>
-                  <a:txBody>
-                    <a:bodyPr/>
-                    <a:lstStyle/>
-                    <a:p>
-                      <a:r>
-                        <a:rPr sz="1300" b="0">
+              <a:tr h="411480">
+                <a:tc>
+                  <a:txBody>
+                    <a:bodyPr/>
+                    <a:lstStyle/>
+                    <a:p>
+                      <a:pPr algn="ctr"/>
+                      <a:r>
+                        <a:rPr sz="1100" b="0">
                           <a:solidFill>
                             <a:srgbClr val="212121"/>
                           </a:solidFill>
                           <a:latin typeface="맑은 고딕"/>
                         </a:rPr>
+                        <a:t>기본</a:t>
+                      </a:r>
+                    </a:p>
+                  </a:txBody>
+                  <a:tcPr/>
+                </a:tc>
+                <a:tc>
+                  <a:txBody>
+                    <a:bodyPr/>
+                    <a:lstStyle/>
+                    <a:p>
+                      <a:pPr algn="ctr"/>
+                      <a:r>
+                        <a:rPr sz="1100" b="0">
+                          <a:solidFill>
+                            <a:srgbClr val="212121"/>
+                          </a:solidFill>
+                          <a:latin typeface="맑은 고딕"/>
+                        </a:rPr>
                         <a:t>인도·횡단보도</a:t>
                       </a:r>
                     </a:p>
@@ -7855,14 +9620,15 @@
                     <a:bodyPr/>
                     <a:lstStyle/>
                     <a:p>
-                      <a:r>
-                        <a:rPr sz="1300" b="0">
+                      <a:pPr algn="ctr"/>
+                      <a:r>
+                        <a:rPr sz="1100" b="0">
                           <a:solidFill>
                             <a:srgbClr val="212121"/>
                           </a:solidFill>
                           <a:latin typeface="맑은 고딕"/>
                         </a:rPr>
-                        <a:t>국가공간정보포털</a:t>
+                        <a:t>국가공간정보포털 (현재 더미)</a:t>
                       </a:r>
                     </a:p>
                   </a:txBody>
@@ -7873,14 +9639,327 @@
                     <a:bodyPr/>
                     <a:lstStyle/>
                     <a:p>
-                      <a:r>
-                        <a:rPr sz="1300" b="0">
+                      <a:pPr algn="ctr"/>
+                      <a:r>
+                        <a:rPr sz="1100" b="0">
                           <a:solidFill>
                             <a:srgbClr val="212121"/>
                           </a:solidFill>
                           <a:latin typeface="맑은 고딕"/>
                         </a:rPr>
-                        <a:t>폭 ≥ 2m / 20m 이내 강제</a:t>
+                        <a:t>보행로 입력</a:t>
+                      </a:r>
+                    </a:p>
+                  </a:txBody>
+                  <a:tcPr/>
+                </a:tc>
+              </a:tr>
+              <a:tr h="411480">
+                <a:tc>
+                  <a:txBody>
+                    <a:bodyPr/>
+                    <a:lstStyle/>
+                    <a:p>
+                      <a:pPr algn="ctr"/>
+                      <a:r>
+                        <a:rPr sz="1100" b="0">
+                          <a:solidFill>
+                            <a:srgbClr val="212121"/>
+                          </a:solidFill>
+                          <a:latin typeface="맑은 고딕"/>
+                        </a:rPr>
+                        <a:t>CV-A</a:t>
+                      </a:r>
+                    </a:p>
+                  </a:txBody>
+                  <a:tcPr/>
+                </a:tc>
+                <a:tc>
+                  <a:txBody>
+                    <a:bodyPr/>
+                    <a:lstStyle/>
+                    <a:p>
+                      <a:pPr algn="ctr"/>
+                      <a:r>
+                        <a:rPr sz="1100" b="0">
+                          <a:solidFill>
+                            <a:srgbClr val="212121"/>
+                          </a:solidFill>
+                          <a:latin typeface="맑은 고딕"/>
+                        </a:rPr>
+                        <a:t>V-World 항공사진 WMTS</a:t>
+                      </a:r>
+                    </a:p>
+                  </a:txBody>
+                  <a:tcPr/>
+                </a:tc>
+                <a:tc>
+                  <a:txBody>
+                    <a:bodyPr/>
+                    <a:lstStyle/>
+                    <a:p>
+                      <a:pPr algn="ctr"/>
+                      <a:r>
+                        <a:rPr sz="1100" b="0">
+                          <a:solidFill>
+                            <a:srgbClr val="212121"/>
+                          </a:solidFill>
+                          <a:latin typeface="맑은 고딕"/>
+                        </a:rPr>
+                        <a:t>V-World API</a:t>
+                      </a:r>
+                    </a:p>
+                  </a:txBody>
+                  <a:tcPr/>
+                </a:tc>
+                <a:tc>
+                  <a:txBody>
+                    <a:bodyPr/>
+                    <a:lstStyle/>
+                    <a:p>
+                      <a:pPr algn="ctr"/>
+                      <a:r>
+                        <a:rPr sz="1100" b="0">
+                          <a:solidFill>
+                            <a:srgbClr val="212121"/>
+                          </a:solidFill>
+                          <a:latin typeface="맑은 고딕"/>
+                        </a:rPr>
+                        <a:t>Mobile-SAM → 건물 30동</a:t>
+                      </a:r>
+                    </a:p>
+                  </a:txBody>
+                  <a:tcPr/>
+                </a:tc>
+              </a:tr>
+              <a:tr h="411480">
+                <a:tc>
+                  <a:txBody>
+                    <a:bodyPr/>
+                    <a:lstStyle/>
+                    <a:p>
+                      <a:pPr algn="ctr"/>
+                      <a:r>
+                        <a:rPr sz="1100" b="0">
+                          <a:solidFill>
+                            <a:srgbClr val="212121"/>
+                          </a:solidFill>
+                          <a:latin typeface="맑은 고딕"/>
+                        </a:rPr>
+                        <a:t>CV-B</a:t>
+                      </a:r>
+                    </a:p>
+                  </a:txBody>
+                  <a:tcPr/>
+                </a:tc>
+                <a:tc>
+                  <a:txBody>
+                    <a:bodyPr/>
+                    <a:lstStyle/>
+                    <a:p>
+                      <a:pPr algn="ctr"/>
+                      <a:r>
+                        <a:rPr sz="1100" b="0">
+                          <a:solidFill>
+                            <a:srgbClr val="212121"/>
+                          </a:solidFill>
+                          <a:latin typeface="맑은 고딕"/>
+                        </a:rPr>
+                        <a:t>Mapillary 거리뷰</a:t>
+                      </a:r>
+                    </a:p>
+                  </a:txBody>
+                  <a:tcPr/>
+                </a:tc>
+                <a:tc>
+                  <a:txBody>
+                    <a:bodyPr/>
+                    <a:lstStyle/>
+                    <a:p>
+                      <a:pPr algn="ctr"/>
+                      <a:r>
+                        <a:rPr sz="1100" b="0">
+                          <a:solidFill>
+                            <a:srgbClr val="212121"/>
+                          </a:solidFill>
+                          <a:latin typeface="맑은 고딕"/>
+                        </a:rPr>
+                        <a:t>Mapillary API</a:t>
+                      </a:r>
+                    </a:p>
+                  </a:txBody>
+                  <a:tcPr/>
+                </a:tc>
+                <a:tc>
+                  <a:txBody>
+                    <a:bodyPr/>
+                    <a:lstStyle/>
+                    <a:p>
+                      <a:pPr algn="ctr"/>
+                      <a:r>
+                        <a:rPr sz="1100" b="0">
+                          <a:solidFill>
+                            <a:srgbClr val="212121"/>
+                          </a:solidFill>
+                          <a:latin typeface="맑은 고딕"/>
+                        </a:rPr>
+                        <a:t>SegFormer → 그늘 결핍</a:t>
+                      </a:r>
+                    </a:p>
+                  </a:txBody>
+                  <a:tcPr/>
+                </a:tc>
+              </a:tr>
+              <a:tr h="411480">
+                <a:tc>
+                  <a:txBody>
+                    <a:bodyPr/>
+                    <a:lstStyle/>
+                    <a:p>
+                      <a:pPr algn="ctr"/>
+                      <a:r>
+                        <a:rPr sz="1100" b="0">
+                          <a:solidFill>
+                            <a:srgbClr val="212121"/>
+                          </a:solidFill>
+                          <a:latin typeface="맑은 고딕"/>
+                        </a:rPr>
+                        <a:t>흑석동</a:t>
+                      </a:r>
+                    </a:p>
+                  </a:txBody>
+                  <a:tcPr/>
+                </a:tc>
+                <a:tc>
+                  <a:txBody>
+                    <a:bodyPr/>
+                    <a:lstStyle/>
+                    <a:p>
+                      <a:pPr algn="ctr"/>
+                      <a:r>
+                        <a:rPr sz="1100" b="0">
+                          <a:solidFill>
+                            <a:srgbClr val="212121"/>
+                          </a:solidFill>
+                          <a:latin typeface="맑은 고딕"/>
+                        </a:rPr>
+                        <a:t>NGII DSM·DEM·건물 3,775동·경계</a:t>
+                      </a:r>
+                    </a:p>
+                  </a:txBody>
+                  <a:tcPr/>
+                </a:tc>
+                <a:tc>
+                  <a:txBody>
+                    <a:bodyPr/>
+                    <a:lstStyle/>
+                    <a:p>
+                      <a:pPr algn="ctr"/>
+                      <a:r>
+                        <a:rPr sz="1100" b="0">
+                          <a:solidFill>
+                            <a:srgbClr val="212121"/>
+                          </a:solidFill>
+                          <a:latin typeface="맑은 고딕"/>
+                        </a:rPr>
+                        <a:t>국토지리정보원</a:t>
+                      </a:r>
+                    </a:p>
+                  </a:txBody>
+                  <a:tcPr/>
+                </a:tc>
+                <a:tc>
+                  <a:txBody>
+                    <a:bodyPr/>
+                    <a:lstStyle/>
+                    <a:p>
+                      <a:pPr algn="ctr"/>
+                      <a:r>
+                        <a:rPr sz="1100" b="0">
+                          <a:solidFill>
+                            <a:srgbClr val="212121"/>
+                          </a:solidFill>
+                          <a:latin typeface="맑은 고딕"/>
+                        </a:rPr>
+                        <a:t>DSM 누적 그림자·실측 건물</a:t>
+                      </a:r>
+                    </a:p>
+                  </a:txBody>
+                  <a:tcPr/>
+                </a:tc>
+              </a:tr>
+              <a:tr h="411480">
+                <a:tc>
+                  <a:txBody>
+                    <a:bodyPr/>
+                    <a:lstStyle/>
+                    <a:p>
+                      <a:pPr algn="ctr"/>
+                      <a:r>
+                        <a:rPr sz="1100" b="0">
+                          <a:solidFill>
+                            <a:srgbClr val="212121"/>
+                          </a:solidFill>
+                          <a:latin typeface="맑은 고딕"/>
+                        </a:rPr>
+                        <a:t>OSMnx</a:t>
+                      </a:r>
+                    </a:p>
+                  </a:txBody>
+                  <a:tcPr/>
+                </a:tc>
+                <a:tc>
+                  <a:txBody>
+                    <a:bodyPr/>
+                    <a:lstStyle/>
+                    <a:p>
+                      <a:pPr algn="ctr"/>
+                      <a:r>
+                        <a:rPr sz="1100" b="0">
+                          <a:solidFill>
+                            <a:srgbClr val="212121"/>
+                          </a:solidFill>
+                          <a:latin typeface="맑은 고딕"/>
+                        </a:rPr>
+                        <a:t>OSM 도로망·교차로·횡단보도</a:t>
+                      </a:r>
+                    </a:p>
+                  </a:txBody>
+                  <a:tcPr/>
+                </a:tc>
+                <a:tc>
+                  <a:txBody>
+                    <a:bodyPr/>
+                    <a:lstStyle/>
+                    <a:p>
+                      <a:pPr algn="ctr"/>
+                      <a:r>
+                        <a:rPr sz="1100" b="0">
+                          <a:solidFill>
+                            <a:srgbClr val="212121"/>
+                          </a:solidFill>
+                          <a:latin typeface="맑은 고딕"/>
+                        </a:rPr>
+                        <a:t>Overpass API (OSMnx)</a:t>
+                      </a:r>
+                    </a:p>
+                  </a:txBody>
+                  <a:tcPr/>
+                </a:tc>
+                <a:tc>
+                  <a:txBody>
+                    <a:bodyPr/>
+                    <a:lstStyle/>
+                    <a:p>
+                      <a:pPr algn="ctr"/>
+                      <a:r>
+                        <a:rPr sz="1100" b="0">
+                          <a:solidFill>
+                            <a:srgbClr val="212121"/>
+                          </a:solidFill>
+                          <a:latin typeface="맑은 고딕"/>
+                        </a:rPr>
+                        <a:t>보행로 필터·결집지 밀도</a:t>
                       </a:r>
                     </a:p>
                   </a:txBody>
@@ -7899,8 +9978,8 @@
         </p:nvSpPr>
         <p:spPr>
           <a:xfrm>
-            <a:off x="685800" y="5120640"/>
-            <a:ext cx="10972800" cy="457200"/>
+            <a:off x="685800" y="5852160"/>
+            <a:ext cx="10972800" cy="365760"/>
           </a:xfrm>
           <a:prstGeom prst="rect">
             <a:avLst/>
@@ -7915,13 +9994,13 @@
           <a:p>
             <a:pPr algn="l"/>
             <a:r>
-              <a:rPr sz="1300" b="0">
+              <a:rPr sz="1100" b="0">
                 <a:solidFill>
                   <a:srgbClr val="555555"/>
                 </a:solidFill>
                 <a:latin typeface="맑은 고딕"/>
               </a:rPr>
-              <a:t>⚙ data/raw/*.csv·geojson 배치 시 data_loader.py가 자동 전환 → 현재는 동작구 실제 거점(역세권·시장·주거축) 기반 더미 데이터로 파이프라인 검증</a:t>
+              <a:t>⚙ 5종 기본 데이터는 더미↔실데이터 자동 스위칭 · 외부 API는 첫 1회 호출 후 디스크 캐시</a:t>
             </a:r>
           </a:p>
         </p:txBody>
@@ -7991,7 +10070,7 @@
                 </a:solidFill>
                 <a:latin typeface="맑은 고딕"/>
               </a:rPr>
-              <a:t>4 / 14</a:t>
+              <a:t>4 / 15</a:t>
             </a:r>
           </a:p>
         </p:txBody>
@@ -8081,13 +10160,13 @@
           <a:p>
             <a:pPr algn="l"/>
             <a:r>
-              <a:rPr sz="3000" b="1">
+              <a:rPr sz="2800" b="1">
                 <a:solidFill>
                   <a:srgbClr val="212121"/>
                 </a:solidFill>
                 <a:latin typeface="맑은 고딕"/>
               </a:rPr>
-              <a:t>알고리즘 · Score 식</a:t>
+              <a:t>알고리즘 · Score 식 (7 피처)</a:t>
             </a:r>
           </a:p>
         </p:txBody>
@@ -8116,13 +10195,13 @@
           <a:p>
             <a:pPr algn="l"/>
             <a:r>
-              <a:rPr sz="1400" b="0">
+              <a:rPr sz="1300" b="0">
                 <a:solidFill>
                   <a:srgbClr val="555555"/>
                 </a:solidFill>
                 <a:latin typeface="맑은 고딕"/>
               </a:rPr>
-              <a:t>MinMax 정규화 후 가중합 (음수 가중치 = 페널티)</a:t>
+              <a:t>각 피처 MinMax [0,1] 정규화 후 가중합</a:t>
             </a:r>
           </a:p>
         </p:txBody>
@@ -8135,7 +10214,7 @@
         </p:nvSpPr>
         <p:spPr>
           <a:xfrm>
-            <a:off x="685800" y="1737360"/>
+            <a:off x="685800" y="1645920"/>
             <a:ext cx="10972800" cy="1463040"/>
           </a:xfrm>
           <a:prstGeom prst="roundRect">
@@ -8174,19 +10253,19 @@
                 </a:solidFill>
                 <a:latin typeface="맑은 고딕"/>
               </a:rPr>
-              <a:t>Score = 0.22·popdens + 0.22·lst + 0.18·vuln</a:t>
+              <a:t>Score = 0.18·popdens + 0.18·lst + 0.18·vuln</a:t>
             </a:r>
           </a:p>
           <a:p>
             <a:pPr algn="ctr"/>
             <a:r>
-              <a:rPr sz="1600" b="1">
+              <a:rPr sz="1500" b="1">
                 <a:solidFill>
                   <a:srgbClr val="FFEE58"/>
                 </a:solidFill>
                 <a:latin typeface="맑은 고딕"/>
               </a:rPr>
-              <a:t>− 0.15·shade − 0.05·natural + 0.13·streetview_deficit + 0.10·intersection_density</a:t>
+              <a:t>− 0.15·shade − 0.05·natural + 0.12·streetview_deficit + 0.20·intersection_density</a:t>
             </a:r>
           </a:p>
         </p:txBody>
@@ -8199,8 +10278,8 @@
         </p:nvSpPr>
         <p:spPr>
           <a:xfrm>
-            <a:off x="685800" y="3383280"/>
-            <a:ext cx="10972800" cy="2103120"/>
+            <a:off x="685800" y="3291840"/>
+            <a:ext cx="10972800" cy="2286000"/>
           </a:xfrm>
           <a:prstGeom prst="rect">
             <a:avLst/>
@@ -8215,7 +10294,7 @@
           <a:p>
             <a:pPr>
               <a:spcAft>
-                <a:spcPts val="600"/>
+                <a:spcPts val="500"/>
               </a:spcAft>
             </a:pPr>
             <a:r>
@@ -8225,13 +10304,13 @@
                 </a:solidFill>
                 <a:latin typeface="맑은 고딕"/>
               </a:rPr>
-              <a:t>• popdens (+0.22) — 시간대 가중 유동인구</a:t>
+              <a:t>• popdens (+0.18) — 시간대 가중 유동인구 (9~18시, 오후 1~3시 1.0 피크)</a:t>
             </a:r>
           </a:p>
           <a:p>
             <a:pPr>
               <a:spcAft>
-                <a:spcPts val="600"/>
+                <a:spcPts val="500"/>
               </a:spcAft>
             </a:pPr>
             <a:r>
@@ -8241,13 +10320,13 @@
                 </a:solidFill>
                 <a:latin typeface="맑은 고딕"/>
               </a:rPr>
-              <a:t>• lst (+0.22) — 지표면 온도, 오후 피크 가중</a:t>
+              <a:t>• lst (+0.18) — 지표면 온도, 오후 피크 가중</a:t>
             </a:r>
           </a:p>
           <a:p>
             <a:pPr>
               <a:spcAft>
-                <a:spcPts val="600"/>
+                <a:spcPts val="500"/>
               </a:spcAft>
             </a:pPr>
             <a:r>
@@ -8263,7 +10342,7 @@
           <a:p>
             <a:pPr>
               <a:spcAft>
-                <a:spcPts val="600"/>
+                <a:spcPts val="500"/>
               </a:spcAft>
             </a:pPr>
             <a:r>
@@ -8273,13 +10352,13 @@
                 </a:solidFill>
                 <a:latin typeface="맑은 고딕"/>
               </a:rPr>
-              <a:t>• shade (−0.15) — 기존 그늘막 커버리지</a:t>
+              <a:t>• shade (−0.15) — 기존 그늘막 반경 150m 내 커버리지 (이미 된 곳 감점)</a:t>
             </a:r>
           </a:p>
           <a:p>
             <a:pPr>
               <a:spcAft>
-                <a:spcPts val="600"/>
+                <a:spcPts val="500"/>
               </a:spcAft>
             </a:pPr>
             <a:r>
@@ -8289,13 +10368,13 @@
                 </a:solidFill>
                 <a:latin typeface="맑은 고딕"/>
               </a:rPr>
-              <a:t>• natural (−0.05) — CV-A SAM 건물 + NGII 3,775동 + 흑석동 DSM 누적 (Deep Umbra)</a:t>
+              <a:t>• natural (−0.05) — CV-A SAM 30동 + NGII 흑석동 3,775동 + 흑석동 DSM 4시점 누적 (Deep Umbra)</a:t>
             </a:r>
           </a:p>
           <a:p>
             <a:pPr>
               <a:spcAft>
-                <a:spcPts val="600"/>
+                <a:spcPts val="500"/>
               </a:spcAft>
             </a:pPr>
             <a:r>
@@ -8305,13 +10384,13 @@
                 </a:solidFill>
                 <a:latin typeface="맑은 고딕"/>
               </a:rPr>
-              <a:t>• streetview_deficit (+0.13) — CV-B SegFormer 거리뷰 그늘 결핍</a:t>
+              <a:t>• streetview_deficit (+0.12) — CV-B SegFormer 거리뷰: (보도+도로) × (1−건물−식생)</a:t>
             </a:r>
           </a:p>
           <a:p>
             <a:pPr>
               <a:spcAft>
-                <a:spcPts val="600"/>
+                <a:spcPts val="500"/>
               </a:spcAft>
             </a:pPr>
             <a:r>
@@ -8321,7 +10400,7 @@
                 </a:solidFill>
                 <a:latin typeface="맑은 고딕"/>
               </a:rPr>
-              <a:t>• intersection_density (+0.10) — OSMnx walkable highway 교차로 밀도 (NEW)</a:t>
+              <a:t>• intersection_density (+0.20) — OSMnx 교차로 + 횡단보도 반경 80m 내 개수</a:t>
             </a:r>
           </a:p>
         </p:txBody>
@@ -8334,8 +10413,8 @@
         </p:nvSpPr>
         <p:spPr>
           <a:xfrm>
-            <a:off x="685800" y="5486400"/>
-            <a:ext cx="10972800" cy="457200"/>
+            <a:off x="685800" y="5852160"/>
+            <a:ext cx="10972800" cy="365760"/>
           </a:xfrm>
           <a:prstGeom prst="rect">
             <a:avLst/>
@@ -8350,13 +10429,13 @@
           <a:p>
             <a:pPr algn="l"/>
             <a:r>
-              <a:rPr sz="1300" b="1">
+              <a:rPr sz="1200" b="1">
                 <a:solidFill>
                   <a:srgbClr val="1E88E5"/>
                 </a:solidFill>
                 <a:latin typeface="맑은 고딕"/>
               </a:rPr>
-              <a:t>🎚 Streamlit 대시보드에서 슬라이더로 실시간 조정 가능 · 시나리오별 프리셋 4종 내장</a:t>
+              <a:t>🎚 Streamlit 대시보드(app.py)에서 슬라이더로 실시간 조정 + 시나리오 6개 프리셋 내장</a:t>
             </a:r>
           </a:p>
         </p:txBody>
@@ -8426,7 +10505,7 @@
                 </a:solidFill>
                 <a:latin typeface="맑은 고딕"/>
               </a:rPr>
-              <a:t>5 / 14</a:t>
+              <a:t>5 / 15</a:t>
             </a:r>
           </a:p>
         </p:txBody>
@@ -8516,13 +10595,13 @@
           <a:p>
             <a:pPr algn="l"/>
             <a:r>
-              <a:rPr sz="3000" b="1">
+              <a:rPr sz="2800" b="1">
                 <a:solidFill>
                   <a:srgbClr val="212121"/>
                 </a:solidFill>
                 <a:latin typeface="맑은 고딕"/>
               </a:rPr>
-              <a:t>공간 필터링 · TOP 10</a:t>
+              <a:t>공간 필터링 — 4단계 다중 컷</a:t>
             </a:r>
           </a:p>
         </p:txBody>
@@ -8551,13 +10630,13 @@
           <a:p>
             <a:pPr algn="l"/>
             <a:r>
-              <a:rPr sz="1400" b="0">
+              <a:rPr sz="1300" b="0">
                 <a:solidFill>
                   <a:srgbClr val="555555"/>
                 </a:solidFill>
                 <a:latin typeface="맑은 고딕"/>
               </a:rPr>
-              <a:t>보행로·횡단보도 강제 제약으로 강변/건물 후보 원천 제외</a:t>
+              <a:t>잘못된 위치(차도·건물·녹지·외진곳)에 그늘막 추천 방지</a:t>
             </a:r>
           </a:p>
         </p:txBody>
@@ -8570,8 +10649,8 @@
         </p:nvSpPr>
         <p:spPr>
           <a:xfrm>
-            <a:off x="685800" y="1828800"/>
-            <a:ext cx="2560320" cy="2011680"/>
+            <a:off x="365760" y="1828800"/>
+            <a:ext cx="2194560" cy="2286000"/>
           </a:xfrm>
           <a:prstGeom prst="roundRect">
             <a:avLst/>
@@ -8603,7 +10682,7 @@
           <a:p>
             <a:pPr algn="ctr"/>
             <a:r>
-              <a:rPr sz="4400" b="1">
+              <a:rPr sz="3800" b="1">
                 <a:solidFill>
                   <a:srgbClr val="FFFFFF"/>
                 </a:solidFill>
@@ -8615,7 +10694,7 @@
           <a:p>
             <a:pPr algn="ctr"/>
             <a:r>
-              <a:rPr sz="1400" b="0">
+              <a:rPr sz="1100" b="0">
                 <a:solidFill>
                   <a:srgbClr val="FFFFFF"/>
                 </a:solidFill>
@@ -8634,8 +10713,8 @@
         </p:nvSpPr>
         <p:spPr>
           <a:xfrm>
-            <a:off x="3474720" y="1828800"/>
-            <a:ext cx="2560320" cy="2011680"/>
+            <a:off x="2651760" y="1828800"/>
+            <a:ext cx="2194560" cy="2286000"/>
           </a:xfrm>
           <a:prstGeom prst="roundRect">
             <a:avLst/>
@@ -8667,25 +10746,26 @@
           <a:p>
             <a:pPr algn="ctr"/>
             <a:r>
-              <a:rPr sz="4400" b="1">
+              <a:rPr sz="3800" b="1">
                 <a:solidFill>
                   <a:srgbClr val="FFFFFF"/>
                 </a:solidFill>
                 <a:latin typeface="맑은 고딕"/>
               </a:rPr>
-              <a:t>23</a:t>
+              <a:t>449</a:t>
             </a:r>
           </a:p>
           <a:p>
             <a:pPr algn="ctr"/>
             <a:r>
-              <a:rPr sz="1400" b="0">
+              <a:rPr sz="1100" b="0">
                 <a:solidFill>
                   <a:srgbClr val="FFFFFF"/>
                 </a:solidFill>
                 <a:latin typeface="맑은 고딕"/>
               </a:rPr>
-              <a:t>보행로 20m 이내</a:t>
+              <a:t>보행로 5m 이내
+(OSMnx)</a:t>
             </a:r>
           </a:p>
         </p:txBody>
@@ -8698,8 +10778,8 @@
         </p:nvSpPr>
         <p:spPr>
           <a:xfrm>
-            <a:off x="6263640" y="1828800"/>
-            <a:ext cx="2560320" cy="2011680"/>
+            <a:off x="4937760" y="1828800"/>
+            <a:ext cx="2194560" cy="2286000"/>
           </a:xfrm>
           <a:prstGeom prst="roundRect">
             <a:avLst/>
@@ -8731,25 +10811,26 @@
           <a:p>
             <a:pPr algn="ctr"/>
             <a:r>
-              <a:rPr sz="4400" b="1">
+              <a:rPr sz="3800" b="1">
                 <a:solidFill>
                   <a:srgbClr val="FFFFFF"/>
                 </a:solidFill>
                 <a:latin typeface="맑은 고딕"/>
               </a:rPr>
-              <a:t>19</a:t>
+              <a:t>434</a:t>
             </a:r>
           </a:p>
           <a:p>
             <a:pPr algn="ctr"/>
             <a:r>
-              <a:rPr sz="1400" b="0">
+              <a:rPr sz="1100" b="0">
                 <a:solidFill>
                   <a:srgbClr val="FFFFFF"/>
                 </a:solidFill>
                 <a:latin typeface="맑은 고딕"/>
               </a:rPr>
-              <a:t>기존그늘막 제외</a:t>
+              <a:t>건물 안 컷
+(NGII 5m inset)</a:t>
             </a:r>
           </a:p>
         </p:txBody>
@@ -8762,14 +10843,14 @@
         </p:nvSpPr>
         <p:spPr>
           <a:xfrm>
-            <a:off x="9052559" y="1828800"/>
-            <a:ext cx="2560320" cy="2011680"/>
+            <a:off x="7223760" y="1828800"/>
+            <a:ext cx="2194560" cy="2286000"/>
           </a:xfrm>
           <a:prstGeom prst="roundRect">
             <a:avLst/>
           </a:prstGeom>
           <a:solidFill>
-            <a:srgbClr val="1E88E5"/>
+            <a:srgbClr val="43A047"/>
           </a:solidFill>
           <a:ln>
             <a:noFill/>
@@ -8795,50 +10876,49 @@
           <a:p>
             <a:pPr algn="ctr"/>
             <a:r>
-              <a:rPr sz="4400" b="1">
+              <a:rPr sz="3800" b="1">
                 <a:solidFill>
                   <a:srgbClr val="FFFFFF"/>
                 </a:solidFill>
                 <a:latin typeface="맑은 고딕"/>
               </a:rPr>
-              <a:t>10</a:t>
+              <a:t>330</a:t>
             </a:r>
           </a:p>
           <a:p>
             <a:pPr algn="ctr"/>
             <a:r>
-              <a:rPr sz="1400" b="0">
+              <a:rPr sz="1100" b="0">
                 <a:solidFill>
                   <a:srgbClr val="FFFFFF"/>
                 </a:solidFill>
                 <a:latin typeface="맑은 고딕"/>
               </a:rPr>
-              <a:t>최종 추천 (TOP 10)</a:t>
-            </a:r>
-          </a:p>
-        </p:txBody>
-      </p:sp>
-      <p:sp>
-        <p:nvSpPr>
-          <p:cNvPr id="9" name="Rectangle 8"/>
+              <a:t>교차로·횡단보도
+50m 근접</a:t>
+            </a:r>
+          </a:p>
+        </p:txBody>
+      </p:sp>
+      <p:sp>
+        <p:nvSpPr>
+          <p:cNvPr id="9" name="Rounded Rectangle 8"/>
           <p:cNvSpPr/>
           <p:nvPr/>
         </p:nvSpPr>
         <p:spPr>
           <a:xfrm>
-            <a:off x="685800" y="4114800"/>
-            <a:ext cx="10972800" cy="2103120"/>
-          </a:xfrm>
-          <a:prstGeom prst="rect">
+            <a:off x="9509760" y="1828800"/>
+            <a:ext cx="2194560" cy="2286000"/>
+          </a:xfrm>
+          <a:prstGeom prst="roundRect">
             <a:avLst/>
           </a:prstGeom>
           <a:solidFill>
-            <a:srgbClr val="EEEEEE"/>
+            <a:srgbClr val="1E88E5"/>
           </a:solidFill>
-          <a:ln w="12700">
-            <a:solidFill>
-              <a:srgbClr val="555555"/>
-            </a:solidFill>
+          <a:ln>
+            <a:noFill/>
           </a:ln>
         </p:spPr>
         <p:style>
@@ -8861,13 +10941,25 @@
           <a:p>
             <a:pPr algn="ctr"/>
             <a:r>
-              <a:rPr sz="1400" b="1">
-                <a:solidFill>
-                  <a:srgbClr val="555555"/>
-                </a:solidFill>
-                <a:latin typeface="맑은 고딕"/>
-              </a:rPr>
-              <a:t>📷 shade_map.html — 기본 시나리오 TOP 10 지도 캡처 배치</a:t>
+              <a:rPr sz="3800" b="1">
+                <a:solidFill>
+                  <a:srgbClr val="FFFFFF"/>
+                </a:solidFill>
+                <a:latin typeface="맑은 고딕"/>
+              </a:rPr>
+              <a:t>10</a:t>
+            </a:r>
+          </a:p>
+          <a:p>
+            <a:pPr algn="ctr"/>
+            <a:r>
+              <a:rPr sz="1100" b="0">
+                <a:solidFill>
+                  <a:srgbClr val="FFFFFF"/>
+                </a:solidFill>
+                <a:latin typeface="맑은 고딕"/>
+              </a:rPr>
+              <a:t>최종 추천</a:t>
             </a:r>
           </a:p>
         </p:txBody>
@@ -8880,8 +10972,8 @@
         </p:nvSpPr>
         <p:spPr>
           <a:xfrm>
-            <a:off x="457200" y="6400800"/>
-            <a:ext cx="9144000" cy="365760"/>
+            <a:off x="685800" y="4389120"/>
+            <a:ext cx="10972800" cy="1645920"/>
           </a:xfrm>
           <a:prstGeom prst="rect">
             <a:avLst/>
@@ -8894,29 +10986,119 @@
           </a:bodyPr>
           <a:lstStyle/>
           <a:p>
-            <a:pPr algn="l"/>
-            <a:r>
-              <a:rPr sz="1000" b="0">
+            <a:pPr>
+              <a:spcAft>
+                <a:spcPts val="500"/>
+              </a:spcAft>
+            </a:pPr>
+            <a:r>
+              <a:rPr sz="1300" b="0">
+                <a:solidFill>
+                  <a:srgbClr val="212121"/>
+                </a:solidFill>
+                <a:latin typeface="맑은 고딕"/>
+              </a:rPr>
+              <a:t>• 이전 버전: 보행로 20m + 더미 14개 라인 → '건물 위'·'녹지에 점' 시각적 오류</a:t>
+            </a:r>
+          </a:p>
+          <a:p>
+            <a:pPr>
+              <a:spcAft>
+                <a:spcPts val="500"/>
+              </a:spcAft>
+            </a:pPr>
+            <a:r>
+              <a:rPr sz="1300" b="0">
+                <a:solidFill>
+                  <a:srgbClr val="212121"/>
+                </a:solidFill>
+                <a:latin typeface="맑은 고딕"/>
+              </a:rPr>
+              <a:t>• 수정: OSMnx walkable edges 통합 + buffer 5m + NGII 건물 안 centroid 컷 + 결집지 50m 근접</a:t>
+            </a:r>
+          </a:p>
+          <a:p>
+            <a:pPr>
+              <a:spcAft>
+                <a:spcPts val="500"/>
+              </a:spcAft>
+            </a:pPr>
+            <a:r>
+              <a:rPr sz="1300" b="0">
+                <a:solidFill>
+                  <a:srgbClr val="212121"/>
+                </a:solidFill>
+                <a:latin typeface="맑은 고딕"/>
+              </a:rPr>
+              <a:t>• 효과: 보행 가능 + 건물 밖 + 교차로/횡단보도 옆에만 추천 (실용성 ↑)</a:t>
+            </a:r>
+          </a:p>
+        </p:txBody>
+      </p:sp>
+      <p:sp>
+        <p:nvSpPr>
+          <p:cNvPr id="11" name="Rectangle 10"/>
+          <p:cNvSpPr/>
+          <p:nvPr/>
+        </p:nvSpPr>
+        <p:spPr>
+          <a:xfrm>
+            <a:off x="685800" y="5852160"/>
+            <a:ext cx="10972800" cy="457200"/>
+          </a:xfrm>
+          <a:prstGeom prst="rect">
+            <a:avLst/>
+          </a:prstGeom>
+          <a:solidFill>
+            <a:srgbClr val="EEEEEE"/>
+          </a:solidFill>
+          <a:ln w="12700">
+            <a:solidFill>
+              <a:srgbClr val="555555"/>
+            </a:solidFill>
+          </a:ln>
+        </p:spPr>
+        <p:style>
+          <a:lnRef idx="1">
+            <a:schemeClr val="accent1"/>
+          </a:lnRef>
+          <a:fillRef idx="3">
+            <a:schemeClr val="accent1"/>
+          </a:fillRef>
+          <a:effectRef idx="2">
+            <a:schemeClr val="accent1"/>
+          </a:effectRef>
+          <a:fontRef idx="minor">
+            <a:schemeClr val="lt1"/>
+          </a:fontRef>
+        </p:style>
+        <p:txBody>
+          <a:bodyPr rtlCol="0" anchor="ctr" wrap="square"/>
+          <a:lstStyle/>
+          <a:p>
+            <a:pPr algn="ctr"/>
+            <a:r>
+              <a:rPr sz="1300" b="1">
                 <a:solidFill>
                   <a:srgbClr val="555555"/>
                 </a:solidFill>
                 <a:latin typeface="맑은 고딕"/>
               </a:rPr>
-              <a:t>동작구 여름 그늘막 최적 입지 추천 시스템 · 한영재 · 2025961227</a:t>
-            </a:r>
-          </a:p>
-        </p:txBody>
-      </p:sp>
-      <p:sp>
-        <p:nvSpPr>
-          <p:cNvPr id="11" name="TextBox 10"/>
+              <a:t>📷 output/shade_map.html 또는 scenarios_map.html 캡처 가능</a:t>
+            </a:r>
+          </a:p>
+        </p:txBody>
+      </p:sp>
+      <p:sp>
+        <p:nvSpPr>
+          <p:cNvPr id="12" name="TextBox 11"/>
           <p:cNvSpPr txBox="1"/>
           <p:nvPr/>
         </p:nvSpPr>
         <p:spPr>
           <a:xfrm>
-            <a:off x="11247120" y="6400800"/>
-            <a:ext cx="914400" cy="365760"/>
+            <a:off x="457200" y="6400800"/>
+            <a:ext cx="9144000" cy="365760"/>
           </a:xfrm>
           <a:prstGeom prst="rect">
             <a:avLst/>
@@ -8929,6 +11111,41 @@
           </a:bodyPr>
           <a:lstStyle/>
           <a:p>
+            <a:pPr algn="l"/>
+            <a:r>
+              <a:rPr sz="1000" b="0">
+                <a:solidFill>
+                  <a:srgbClr val="555555"/>
+                </a:solidFill>
+                <a:latin typeface="맑은 고딕"/>
+              </a:rPr>
+              <a:t>동작구 여름 그늘막 최적 입지 추천 시스템 · 한영재 · 2025961227</a:t>
+            </a:r>
+          </a:p>
+        </p:txBody>
+      </p:sp>
+      <p:sp>
+        <p:nvSpPr>
+          <p:cNvPr id="13" name="TextBox 12"/>
+          <p:cNvSpPr txBox="1"/>
+          <p:nvPr/>
+        </p:nvSpPr>
+        <p:spPr>
+          <a:xfrm>
+            <a:off x="11247120" y="6400800"/>
+            <a:ext cx="914400" cy="365760"/>
+          </a:xfrm>
+          <a:prstGeom prst="rect">
+            <a:avLst/>
+          </a:prstGeom>
+          <a:noFill/>
+        </p:spPr>
+        <p:txBody>
+          <a:bodyPr wrap="square">
+            <a:spAutoFit/>
+          </a:bodyPr>
+          <a:lstStyle/>
+          <a:p>
             <a:pPr algn="r"/>
             <a:r>
               <a:rPr sz="1000" b="0">
@@ -8937,7 +11154,7 @@
                 </a:solidFill>
                 <a:latin typeface="맑은 고딕"/>
               </a:rPr>
-              <a:t>6 / 14</a:t>
+              <a:t>6 / 15</a:t>
             </a:r>
           </a:p>
         </p:txBody>
@@ -9027,13 +11244,13 @@
           <a:p>
             <a:pPr algn="l"/>
             <a:r>
-              <a:rPr sz="3000" b="1">
+              <a:rPr sz="2800" b="1">
                 <a:solidFill>
                   <a:srgbClr val="212121"/>
                 </a:solidFill>
                 <a:latin typeface="맑은 고딕"/>
               </a:rPr>
-              <a:t>자연 그늘 시뮬레이션</a:t>
+              <a:t>CV-A · 항공사진 + Mobile-SAM</a:t>
             </a:r>
           </a:p>
         </p:txBody>
@@ -9062,13 +11279,13 @@
           <a:p>
             <a:pPr algn="l"/>
             <a:r>
-              <a:rPr sz="1400" b="0">
+              <a:rPr sz="1300" b="0">
                 <a:solidFill>
                   <a:srgbClr val="555555"/>
                 </a:solidFill>
                 <a:latin typeface="맑은 고딕"/>
               </a:rPr>
-              <a:t>건물 footprint + 오후 3시 태양위치 → 격자별 그림자 커버 비율</a:t>
+              <a:t>딥러닝 zero-shot segmentation으로 동작구 건물 자동 추출</a:t>
             </a:r>
           </a:p>
         </p:txBody>
@@ -9081,8 +11298,8 @@
         </p:nvSpPr>
         <p:spPr>
           <a:xfrm>
-            <a:off x="685800" y="1737360"/>
-            <a:ext cx="6858000" cy="4114800"/>
+            <a:off x="685800" y="1645920"/>
+            <a:ext cx="5943600" cy="4114800"/>
           </a:xfrm>
           <a:prstGeom prst="rect">
             <a:avLst/>
@@ -9097,105 +11314,121 @@
           <a:p>
             <a:pPr>
               <a:spcAft>
-                <a:spcPts val="600"/>
+                <a:spcPts val="500"/>
               </a:spcAft>
             </a:pPr>
             <a:r>
-              <a:rPr sz="1500" b="0">
+              <a:rPr sz="1300" b="0">
                 <a:solidFill>
                   <a:srgbClr val="212121"/>
                 </a:solidFill>
                 <a:latin typeface="맑은 고딕"/>
               </a:rPr>
-              <a:t>• 태양 위치: 서울 7월 말 오후 3시 · 고도 52° · 방위 252°</a:t>
+              <a:t>• V-World WMTS z=15 → 동작구 BBOX 48 타일 합성 (2048×1536)</a:t>
             </a:r>
           </a:p>
           <a:p>
             <a:pPr>
               <a:spcAft>
-                <a:spcPts val="600"/>
+                <a:spcPts val="500"/>
               </a:spcAft>
             </a:pPr>
             <a:r>
-              <a:rPr sz="1500" b="0">
+              <a:rPr sz="1300" b="0">
                 <a:solidFill>
                   <a:srgbClr val="212121"/>
                 </a:solidFill>
                 <a:latin typeface="맑은 고딕"/>
               </a:rPr>
-              <a:t>• 그림자 = 건물 footprint ∪ 태양반대방향 평행이동의 convex hull</a:t>
+              <a:t>• Mobile-SAM (Meta, 2023) — 40MB 경량 SAM, CPU 추론 가능</a:t>
             </a:r>
           </a:p>
           <a:p>
             <a:pPr>
               <a:spcAft>
-                <a:spcPts val="600"/>
+                <a:spcPts val="500"/>
               </a:spcAft>
             </a:pPr>
             <a:r>
-              <a:rPr sz="1500" b="0">
+              <a:rPr sz="1300" b="0">
                 <a:solidFill>
                   <a:srgbClr val="212121"/>
                 </a:solidFill>
                 <a:latin typeface="맑은 고딕"/>
               </a:rPr>
-              <a:t>• 격자별 자연그늘 면적 / 격자 면적 → [0,1] natural 피처</a:t>
+              <a:t>• 필터: 면적 200~30k px², 종횡비 0.2~5, 평균 밝기 80~220</a:t>
             </a:r>
           </a:p>
           <a:p>
             <a:pPr>
               <a:spcAft>
-                <a:spcPts val="600"/>
+                <a:spcPts val="500"/>
               </a:spcAft>
             </a:pPr>
             <a:r>
-              <a:rPr sz="1500" b="0">
+              <a:rPr sz="1300" b="0">
                 <a:solidFill>
                   <a:srgbClr val="212121"/>
                 </a:solidFill>
                 <a:latin typeface="맑은 고딕"/>
               </a:rPr>
-              <a:t>• 외부 라이브러리 없이 shapely.affinity.translate 로 직접 계산</a:t>
+              <a:t>• 결과: 실측 30동 자동 추출 → buildings.geojson</a:t>
             </a:r>
           </a:p>
           <a:p>
             <a:pPr>
               <a:spcAft>
-                <a:spcPts val="600"/>
+                <a:spcPts val="500"/>
               </a:spcAft>
             </a:pPr>
             <a:r>
-              <a:rPr sz="1500" b="0">
+              <a:rPr sz="1300" b="0">
                 <a:solidFill>
                   <a:srgbClr val="212121"/>
                 </a:solidFill>
                 <a:latin typeface="맑은 고딕"/>
               </a:rPr>
-              <a:t>• 건물 입력은 다음 슬라이드의 CV-A로 자동 교체됨</a:t>
-            </a:r>
-          </a:p>
-        </p:txBody>
-      </p:sp>
-      <p:sp>
-        <p:nvSpPr>
-          <p:cNvPr id="6" name="Rectangle 5"/>
+              <a:t>• 픽셀 → EPSG:3857 → WGS84 polygon 변환 + 면적 기반 추정 높이</a:t>
+            </a:r>
+          </a:p>
+          <a:p>
+            <a:pPr>
+              <a:spcAft>
+                <a:spcPts val="500"/>
+              </a:spcAft>
+            </a:pPr>
+            <a:r>
+              <a:rPr sz="1300" b="0">
+                <a:solidFill>
+                  <a:srgbClr val="212121"/>
+                </a:solidFill>
+                <a:latin typeface="맑은 고딕"/>
+              </a:rPr>
+              <a:t>• 흑석동에서는 NGII 실측 3,775동이 SAM 30동을 union (data_loader 자동)</a:t>
+            </a:r>
+          </a:p>
+        </p:txBody>
+      </p:sp>
+      <p:sp>
+        <p:nvSpPr>
+          <p:cNvPr id="6" name="Rounded Rectangle 5"/>
           <p:cNvSpPr/>
           <p:nvPr/>
         </p:nvSpPr>
         <p:spPr>
           <a:xfrm>
-            <a:off x="7772400" y="1737360"/>
-            <a:ext cx="4114800" cy="4114800"/>
-          </a:xfrm>
-          <a:prstGeom prst="rect">
+            <a:off x="6858000" y="1645920"/>
+            <a:ext cx="4846320" cy="4114800"/>
+          </a:xfrm>
+          <a:prstGeom prst="roundRect">
             <a:avLst/>
           </a:prstGeom>
           <a:solidFill>
-            <a:srgbClr val="EEEEEE"/>
+            <a:srgbClr val="F5F8FD"/>
           </a:solidFill>
-          <a:ln w="12700">
+          <a:ln w="19050">
             <a:solidFill>
-              <a:srgbClr val="555555"/>
+              <a:srgbClr val="1E88E5"/>
             </a:solidFill>
           </a:ln>
         </p:spPr>
@@ -9214,19 +11447,130 @@
           </a:fontRef>
         </p:style>
         <p:txBody>
-          <a:bodyPr rtlCol="0" anchor="ctr" wrap="square"/>
+          <a:bodyPr rtlCol="0" anchor="ctr" wrap="square" lIns="274320" tIns="274320"/>
           <a:lstStyle/>
           <a:p>
             <a:pPr algn="ctr"/>
             <a:r>
-              <a:rPr sz="1400" b="1">
-                <a:solidFill>
-                  <a:srgbClr val="555555"/>
-                </a:solidFill>
-                <a:latin typeface="맑은 고딕"/>
-              </a:rPr>
-              <a:t>📷 건물 + 그림자 시각화
-(선택)</a:t>
+              <a:rPr sz="1300" b="1">
+                <a:solidFill>
+                  <a:srgbClr val="1E88E5"/>
+                </a:solidFill>
+                <a:latin typeface="맑은 고딕"/>
+              </a:rPr>
+              <a:t>📁 output/cv_buildings_overlay.png</a:t>
+            </a:r>
+          </a:p>
+          <a:p>
+            <a:pPr>
+              <a:spcBef>
+                <a:spcPts val="200"/>
+              </a:spcBef>
+            </a:pPr>
+            <a:r>
+              <a:rPr sz="1100" b="0">
+                <a:solidFill>
+                  <a:srgbClr val="212121"/>
+                </a:solidFill>
+                <a:latin typeface="맑은 고딕"/>
+              </a:rPr>
+              <a:t/>
+            </a:r>
+          </a:p>
+          <a:p>
+            <a:pPr>
+              <a:spcBef>
+                <a:spcPts val="200"/>
+              </a:spcBef>
+            </a:pPr>
+            <a:r>
+              <a:rPr sz="1100" b="0">
+                <a:solidFill>
+                  <a:srgbClr val="212121"/>
+                </a:solidFill>
+                <a:latin typeface="맑은 고딕"/>
+              </a:rPr>
+              <a:t>2048×1536 위성 이미지</a:t>
+            </a:r>
+          </a:p>
+          <a:p>
+            <a:pPr>
+              <a:spcBef>
+                <a:spcPts val="200"/>
+              </a:spcBef>
+            </a:pPr>
+            <a:r>
+              <a:rPr sz="1100" b="0">
+                <a:solidFill>
+                  <a:srgbClr val="212121"/>
+                </a:solidFill>
+                <a:latin typeface="맑은 고딕"/>
+              </a:rPr>
+              <a:t>+ SAM 마스크 노란 오버레이</a:t>
+            </a:r>
+          </a:p>
+          <a:p>
+            <a:pPr>
+              <a:spcBef>
+                <a:spcPts val="200"/>
+              </a:spcBef>
+            </a:pPr>
+            <a:r>
+              <a:rPr sz="1100" b="0">
+                <a:solidFill>
+                  <a:srgbClr val="212121"/>
+                </a:solidFill>
+                <a:latin typeface="맑은 고딕"/>
+              </a:rPr>
+              <a:t>+ 추출 polygon 녹색 외곽선</a:t>
+            </a:r>
+          </a:p>
+          <a:p>
+            <a:pPr>
+              <a:spcBef>
+                <a:spcPts val="200"/>
+              </a:spcBef>
+            </a:pPr>
+            <a:r>
+              <a:rPr sz="1100" b="0">
+                <a:solidFill>
+                  <a:srgbClr val="212121"/>
+                </a:solidFill>
+                <a:latin typeface="맑은 고딕"/>
+              </a:rPr>
+              <a:t/>
+            </a:r>
+          </a:p>
+          <a:p>
+            <a:pPr>
+              <a:spcBef>
+                <a:spcPts val="200"/>
+              </a:spcBef>
+            </a:pPr>
+            <a:r>
+              <a:rPr sz="1100" b="0">
+                <a:solidFill>
+                  <a:srgbClr val="212121"/>
+                </a:solidFill>
+                <a:latin typeface="맑은 고딕"/>
+              </a:rPr>
+              <a:t>30동 분포: 노량진·사당·이수·</a:t>
+            </a:r>
+          </a:p>
+          <a:p>
+            <a:pPr>
+              <a:spcBef>
+                <a:spcPts val="200"/>
+              </a:spcBef>
+            </a:pPr>
+            <a:r>
+              <a:rPr sz="1100" b="0">
+                <a:solidFill>
+                  <a:srgbClr val="212121"/>
+                </a:solidFill>
+                <a:latin typeface="맑은 고딕"/>
+              </a:rPr>
+              <a:t>상도로·장승배기·흑석동</a:t>
             </a:r>
           </a:p>
         </p:txBody>
@@ -9296,7 +11640,7 @@
                 </a:solidFill>
                 <a:latin typeface="맑은 고딕"/>
               </a:rPr>
-              <a:t>7 / 14</a:t>
+              <a:t>7 / 15</a:t>
             </a:r>
           </a:p>
         </p:txBody>
@@ -9386,13 +11730,13 @@
           <a:p>
             <a:pPr algn="l"/>
             <a:r>
-              <a:rPr sz="3000" b="1">
+              <a:rPr sz="2800" b="1">
                 <a:solidFill>
                   <a:srgbClr val="212121"/>
                 </a:solidFill>
                 <a:latin typeface="맑은 고딕"/>
               </a:rPr>
-              <a:t>CV-A · 위성 항공사진 + Mobile-SAM</a:t>
+              <a:t>CV-B · 거리뷰 + SegFormer (CityScapes)</a:t>
             </a:r>
           </a:p>
         </p:txBody>
@@ -9421,13 +11765,13 @@
           <a:p>
             <a:pPr algn="l"/>
             <a:r>
-              <a:rPr sz="1400" b="0">
+              <a:rPr sz="1300" b="0">
                 <a:solidFill>
                   <a:srgbClr val="555555"/>
                 </a:solidFill>
                 <a:latin typeface="맑은 고딕"/>
               </a:rPr>
-              <a:t>딥러닝 zero-shot segmentation으로 동작구 건물 자동 추출</a:t>
+              <a:t>지면 시점에서 본 보행 환경을 19-class 의미 분할</a:t>
             </a:r>
           </a:p>
         </p:txBody>
@@ -9440,7 +11784,7 @@
         </p:nvSpPr>
         <p:spPr>
           <a:xfrm>
-            <a:off x="685800" y="1737360"/>
+            <a:off x="685800" y="1645920"/>
             <a:ext cx="5943600" cy="4114800"/>
           </a:xfrm>
           <a:prstGeom prst="rect">
@@ -9456,97 +11800,81 @@
           <a:p>
             <a:pPr>
               <a:spcAft>
-                <a:spcPts val="600"/>
+                <a:spcPts val="500"/>
               </a:spcAft>
             </a:pPr>
             <a:r>
-              <a:rPr sz="1400" b="0">
+              <a:rPr sz="1300" b="0">
                 <a:solidFill>
                   <a:srgbClr val="212121"/>
                 </a:solidFill>
                 <a:latin typeface="맑은 고딕"/>
               </a:rPr>
-              <a:t>• V-World WMTS z=15 항공사진 → 동작구 BBOX 48 타일 합성</a:t>
+              <a:t>• Mapillary — 동작구 BBOX 4×4 분할 검색 → 1,302장 발견</a:t>
             </a:r>
           </a:p>
           <a:p>
             <a:pPr>
               <a:spcAft>
-                <a:spcPts val="600"/>
+                <a:spcPts val="500"/>
               </a:spcAft>
             </a:pPr>
             <a:r>
-              <a:rPr sz="1400" b="0">
+              <a:rPr sz="1300" b="0">
                 <a:solidFill>
                   <a:srgbClr val="212121"/>
                 </a:solidFill>
                 <a:latin typeface="맑은 고딕"/>
               </a:rPr>
-              <a:t>• Mobile-SAM (Meta, 2023) — 40MB 경량 SAM, CPU 추론 가능</a:t>
+              <a:t>• 후보 19개 격자에 nearest 매핑 → 격자당 ≤3장 다운로드</a:t>
             </a:r>
           </a:p>
           <a:p>
             <a:pPr>
               <a:spcAft>
-                <a:spcPts val="600"/>
+                <a:spcPts val="500"/>
               </a:spcAft>
             </a:pPr>
             <a:r>
-              <a:rPr sz="1400" b="0">
+              <a:rPr sz="1300" b="0">
                 <a:solidFill>
                   <a:srgbClr val="212121"/>
                 </a:solidFill>
                 <a:latin typeface="맑은 고딕"/>
               </a:rPr>
-              <a:t>• 필터: 면적 200~30k px², 종횡비 0.2~5, 평균 밝기 80~220</a:t>
+              <a:t>• HuggingFace SegFormer-b0 (CityScapes 19 classes pretrained)</a:t>
             </a:r>
           </a:p>
           <a:p>
             <a:pPr>
               <a:spcAft>
-                <a:spcPts val="600"/>
+                <a:spcPts val="500"/>
               </a:spcAft>
             </a:pPr>
             <a:r>
-              <a:rPr sz="1400" b="0">
+              <a:rPr sz="1300" b="0">
                 <a:solidFill>
                   <a:srgbClr val="212121"/>
                 </a:solidFill>
                 <a:latin typeface="맑은 고딕"/>
               </a:rPr>
-              <a:t>• 결과: 더미 19동 → 실측 30동 자동 추출</a:t>
+              <a:t>• 핵심 클래스: building · vegetation · road · sidewalk · sky</a:t>
             </a:r>
           </a:p>
           <a:p>
             <a:pPr>
               <a:spcAft>
-                <a:spcPts val="600"/>
+                <a:spcPts val="500"/>
               </a:spcAft>
             </a:pPr>
             <a:r>
-              <a:rPr sz="1400" b="0">
+              <a:rPr sz="1300" b="0">
                 <a:solidFill>
                   <a:srgbClr val="212121"/>
                 </a:solidFill>
                 <a:latin typeface="맑은 고딕"/>
               </a:rPr>
-              <a:t>• 픽셀 → EPSG:3857 → WGS84 polygon 변환 → buildings.geojson</a:t>
-            </a:r>
-          </a:p>
-          <a:p>
-            <a:pPr>
-              <a:spcAft>
-                <a:spcPts val="600"/>
-              </a:spcAft>
-            </a:pPr>
-            <a:r>
-              <a:rPr sz="1400" b="0">
-                <a:solidFill>
-                  <a:srgbClr val="212121"/>
-                </a:solidFill>
-                <a:latin typeface="맑은 고딕"/>
-              </a:rPr>
-              <a:t>• 파이프라인 첫 실행 시 자동 1회, 이후 캐시 사용</a:t>
+              <a:t>• 선행연구: MIT Treepedia, Place Pulse 2.0 응용</a:t>
             </a:r>
           </a:p>
         </p:txBody>
@@ -9559,19 +11887,17 @@
         </p:nvSpPr>
         <p:spPr>
           <a:xfrm>
-            <a:off x="6858000" y="1737360"/>
-            <a:ext cx="4846320" cy="4114800"/>
+            <a:off x="6858000" y="1645920"/>
+            <a:ext cx="4846320" cy="1828800"/>
           </a:xfrm>
           <a:prstGeom prst="roundRect">
             <a:avLst/>
           </a:prstGeom>
           <a:solidFill>
-            <a:srgbClr val="F5F8FD"/>
+            <a:srgbClr val="212121"/>
           </a:solidFill>
-          <a:ln w="19050">
-            <a:solidFill>
-              <a:srgbClr val="1E88E5"/>
-            </a:solidFill>
+          <a:ln>
+            <a:noFill/>
           </a:ln>
         </p:spPr>
         <p:style>
@@ -9589,24 +11915,102 @@
           </a:fontRef>
         </p:style>
         <p:txBody>
-          <a:bodyPr rtlCol="0" anchor="ctr" wrap="square" lIns="274320" tIns="274320"/>
+          <a:bodyPr rtlCol="0" anchor="ctr" wrap="square" lIns="182880" tIns="182880"/>
           <a:lstStyle/>
           <a:p>
             <a:pPr algn="ctr"/>
             <a:r>
               <a:rPr sz="1400" b="1">
                 <a:solidFill>
-                  <a:srgbClr val="1E88E5"/>
-                </a:solidFill>
-                <a:latin typeface="맑은 고딕"/>
-              </a:rPr>
-              <a:t>📁 output/cv_buildings_overlay.png</a:t>
+                  <a:srgbClr val="FFEE58"/>
+                </a:solidFill>
+                <a:latin typeface="맑은 고딕"/>
+              </a:rPr>
+              <a:t>그늘 결핍 지수</a:t>
+            </a:r>
+          </a:p>
+          <a:p>
+            <a:pPr algn="ctr"/>
+            <a:r>
+              <a:rPr sz="1300" b="1">
+                <a:solidFill>
+                  <a:srgbClr val="FFFFFF"/>
+                </a:solidFill>
+                <a:latin typeface="맑은 고딕"/>
+              </a:rPr>
+              <a:t>(road + sidewalk)</a:t>
+            </a:r>
+          </a:p>
+          <a:p>
+            <a:pPr algn="ctr"/>
+            <a:r>
+              <a:rPr sz="1300" b="1">
+                <a:solidFill>
+                  <a:srgbClr val="FFFFFF"/>
+                </a:solidFill>
+                <a:latin typeface="맑은 고딕"/>
+              </a:rPr>
+              <a:t>× (1 − building − vegetation)</a:t>
+            </a:r>
+          </a:p>
+        </p:txBody>
+      </p:sp>
+      <p:sp>
+        <p:nvSpPr>
+          <p:cNvPr id="7" name="Rounded Rectangle 6"/>
+          <p:cNvSpPr/>
+          <p:nvPr/>
+        </p:nvSpPr>
+        <p:spPr>
+          <a:xfrm>
+            <a:off x="6858000" y="3657600"/>
+            <a:ext cx="4846320" cy="2103120"/>
+          </a:xfrm>
+          <a:prstGeom prst="roundRect">
+            <a:avLst/>
+          </a:prstGeom>
+          <a:solidFill>
+            <a:srgbClr val="FFF4E5"/>
+          </a:solidFill>
+          <a:ln w="19050">
+            <a:solidFill>
+              <a:srgbClr val="FB8C00"/>
+            </a:solidFill>
+          </a:ln>
+        </p:spPr>
+        <p:style>
+          <a:lnRef idx="1">
+            <a:schemeClr val="accent1"/>
+          </a:lnRef>
+          <a:fillRef idx="3">
+            <a:schemeClr val="accent1"/>
+          </a:fillRef>
+          <a:effectRef idx="2">
+            <a:schemeClr val="accent1"/>
+          </a:effectRef>
+          <a:fontRef idx="minor">
+            <a:schemeClr val="lt1"/>
+          </a:fontRef>
+        </p:style>
+        <p:txBody>
+          <a:bodyPr rtlCol="0" anchor="ctr" wrap="square" lIns="228600" tIns="182880"/>
+          <a:lstStyle/>
+          <a:p>
+            <a:pPr algn="ctr"/>
+            <a:r>
+              <a:rPr sz="1300" b="1">
+                <a:solidFill>
+                  <a:srgbClr val="FB8C00"/>
+                </a:solidFill>
+                <a:latin typeface="맑은 고딕"/>
+              </a:rPr>
+              <a:t>📊 결과</a:t>
             </a:r>
           </a:p>
           <a:p>
             <a:pPr>
               <a:spcBef>
-                <a:spcPts val="200"/>
+                <a:spcPts val="300"/>
               </a:spcBef>
             </a:pPr>
             <a:r>
@@ -9616,13 +12020,13 @@
                 </a:solidFill>
                 <a:latin typeface="맑은 고딕"/>
               </a:rPr>
-              <a:t/>
+              <a:t>• TOP10 평균 deficit: 0.153</a:t>
             </a:r>
           </a:p>
           <a:p>
             <a:pPr>
               <a:spcBef>
-                <a:spcPts val="200"/>
+                <a:spcPts val="300"/>
               </a:spcBef>
             </a:pPr>
             <a:r>
@@ -9632,13 +12036,13 @@
                 </a:solidFill>
                 <a:latin typeface="맑은 고딕"/>
               </a:rPr>
-              <a:t>위성 이미지 (2048×1536)</a:t>
+              <a:t>• Score 6번째 피처 통합</a:t>
             </a:r>
           </a:p>
           <a:p>
             <a:pPr>
               <a:spcBef>
-                <a:spcPts val="200"/>
+                <a:spcPts val="300"/>
               </a:spcBef>
             </a:pPr>
             <a:r>
@@ -9648,78 +12052,14 @@
                 </a:solidFill>
                 <a:latin typeface="맑은 고딕"/>
               </a:rPr>
-              <a:t>+ SAM 마스크 노란색 오버레이</a:t>
-            </a:r>
-          </a:p>
-          <a:p>
-            <a:pPr>
-              <a:spcBef>
-                <a:spcPts val="200"/>
-              </a:spcBef>
-            </a:pPr>
-            <a:r>
-              <a:rPr sz="1200" b="0">
-                <a:solidFill>
-                  <a:srgbClr val="212121"/>
-                </a:solidFill>
-                <a:latin typeface="맑은 고딕"/>
-              </a:rPr>
-              <a:t>+ 추출 polygon 녹색 외곽선</a:t>
-            </a:r>
-          </a:p>
-          <a:p>
-            <a:pPr>
-              <a:spcBef>
-                <a:spcPts val="200"/>
-              </a:spcBef>
-            </a:pPr>
-            <a:r>
-              <a:rPr sz="1200" b="0">
-                <a:solidFill>
-                  <a:srgbClr val="212121"/>
-                </a:solidFill>
-                <a:latin typeface="맑은 고딕"/>
-              </a:rPr>
-              <a:t/>
-            </a:r>
-          </a:p>
-          <a:p>
-            <a:pPr>
-              <a:spcBef>
-                <a:spcPts val="200"/>
-              </a:spcBef>
-            </a:pPr>
-            <a:r>
-              <a:rPr sz="1200" b="0">
-                <a:solidFill>
-                  <a:srgbClr val="212121"/>
-                </a:solidFill>
-                <a:latin typeface="맑은 고딕"/>
-              </a:rPr>
-              <a:t>30동 분포: 노량진·사당·이수·</a:t>
-            </a:r>
-          </a:p>
-          <a:p>
-            <a:pPr>
-              <a:spcBef>
-                <a:spcPts val="200"/>
-              </a:spcBef>
-            </a:pPr>
-            <a:r>
-              <a:rPr sz="1200" b="0">
-                <a:solidFill>
-                  <a:srgbClr val="212121"/>
-                </a:solidFill>
-                <a:latin typeface="맑은 고딕"/>
-              </a:rPr>
-              <a:t>상도로·장승배기·흑석동</a:t>
-            </a:r>
-          </a:p>
-        </p:txBody>
-      </p:sp>
-      <p:sp>
-        <p:nvSpPr>
-          <p:cNvPr id="7" name="TextBox 6"/>
+              <a:t>• 신규 시나리오: 보행환경_중시</a:t>
+            </a:r>
+          </a:p>
+        </p:txBody>
+      </p:sp>
+      <p:sp>
+        <p:nvSpPr>
+          <p:cNvPr id="8" name="TextBox 7"/>
           <p:cNvSpPr txBox="1"/>
           <p:nvPr/>
         </p:nvSpPr>
@@ -9754,7 +12094,7 @@
       </p:sp>
       <p:sp>
         <p:nvSpPr>
-          <p:cNvPr id="8" name="TextBox 7"/>
+          <p:cNvPr id="9" name="TextBox 8"/>
           <p:cNvSpPr txBox="1"/>
           <p:nvPr/>
         </p:nvSpPr>
@@ -9782,7 +12122,7 @@
                 </a:solidFill>
                 <a:latin typeface="맑은 고딕"/>
               </a:rPr>
-              <a:t>8 / 14</a:t>
+              <a:t>8 / 15</a:t>
             </a:r>
           </a:p>
         </p:txBody>
@@ -9872,13 +12212,13 @@
           <a:p>
             <a:pPr algn="l"/>
             <a:r>
-              <a:rPr sz="3000" b="1">
+              <a:rPr sz="2800" b="1">
                 <a:solidFill>
                   <a:srgbClr val="212121"/>
                 </a:solidFill>
                 <a:latin typeface="맑은 고딕"/>
               </a:rPr>
-              <a:t>CV-B · 거리뷰 + SegFormer (CityScapes)</a:t>
+              <a:t>CV-DSM · 흑석동 정밀 그림자 (강의자료 13p 추천)</a:t>
             </a:r>
           </a:p>
         </p:txBody>
@@ -9907,13 +12247,13 @@
           <a:p>
             <a:pPr algn="l"/>
             <a:r>
-              <a:rPr sz="1400" b="0">
+              <a:rPr sz="1300" b="0">
                 <a:solidFill>
                   <a:srgbClr val="555555"/>
                 </a:solidFill>
                 <a:latin typeface="맑은 고딕"/>
               </a:rPr>
-              <a:t>지면 시점에서 본 보행 환경을 19-class 의미 분할</a:t>
+              <a:t>Deep Umbra 영감 — DSM 4시점 ray-cast 누적 그림자</a:t>
             </a:r>
           </a:p>
         </p:txBody>
@@ -9926,8 +12266,8 @@
         </p:nvSpPr>
         <p:spPr>
           <a:xfrm>
-            <a:off x="685800" y="1737360"/>
-            <a:ext cx="5943600" cy="4114800"/>
+            <a:off x="685800" y="1645920"/>
+            <a:ext cx="6400800" cy="4114800"/>
           </a:xfrm>
           <a:prstGeom prst="rect">
             <a:avLst/>
@@ -9942,81 +12282,113 @@
           <a:p>
             <a:pPr>
               <a:spcAft>
-                <a:spcPts val="600"/>
+                <a:spcPts val="500"/>
               </a:spcAft>
             </a:pPr>
             <a:r>
-              <a:rPr sz="1400" b="0">
+              <a:rPr sz="1300" b="0">
                 <a:solidFill>
                   <a:srgbClr val="212121"/>
                 </a:solidFill>
                 <a:latin typeface="맑은 고딕"/>
               </a:rPr>
-              <a:t>• Mapillary 거리뷰 — 동작구 BBOX 4×4 분할 검색 → 1,302장 발견</a:t>
+              <a:t>• 강의자료 13p 추천 논문: Deep Umbra (evl.uic.edu/shadows)</a:t>
             </a:r>
           </a:p>
           <a:p>
             <a:pPr>
               <a:spcAft>
-                <a:spcPts val="600"/>
+                <a:spcPts val="500"/>
               </a:spcAft>
             </a:pPr>
             <a:r>
-              <a:rPr sz="1400" b="0">
+              <a:rPr sz="1300" b="0">
                 <a:solidFill>
                   <a:srgbClr val="212121"/>
                 </a:solidFill>
                 <a:latin typeface="맑은 고딕"/>
               </a:rPr>
-              <a:t>• 후보 19개 격자에 nearest 매핑 → 격자당 ≤3장 다운로드</a:t>
+              <a:t>•   → GAN 기반 일조/그림자 접근성 컴퓨테이션</a:t>
             </a:r>
           </a:p>
           <a:p>
             <a:pPr>
               <a:spcAft>
-                <a:spcPts val="600"/>
+                <a:spcPts val="500"/>
               </a:spcAft>
             </a:pPr>
             <a:r>
-              <a:rPr sz="1400" b="0">
+              <a:rPr sz="1300" b="0">
                 <a:solidFill>
                   <a:srgbClr val="212121"/>
                 </a:solidFill>
                 <a:latin typeface="맑은 고딕"/>
               </a:rPr>
-              <a:t>• HuggingFace SegFormer-b0 (CityScapes 19 classes pretrained)</a:t>
+              <a:t>• 본 프로젝트: 풀 GAN 대신 DSM 실측 + 4시점 ray-cast 단순화</a:t>
             </a:r>
           </a:p>
           <a:p>
             <a:pPr>
               <a:spcAft>
-                <a:spcPts val="600"/>
+                <a:spcPts val="500"/>
               </a:spcAft>
             </a:pPr>
             <a:r>
-              <a:rPr sz="1400" b="0">
+              <a:rPr sz="1300" b="0">
                 <a:solidFill>
                   <a:srgbClr val="212121"/>
                 </a:solidFill>
                 <a:latin typeface="맑은 고딕"/>
               </a:rPr>
-              <a:t>• 주요 클래스: building · vegetation · road · sidewalk · sky</a:t>
+              <a:t>• DSM(표면) − DEM(지표) = nDSM(객체 높이 모델)</a:t>
             </a:r>
           </a:p>
           <a:p>
             <a:pPr>
               <a:spcAft>
-                <a:spcPts val="600"/>
+                <a:spcPts val="500"/>
               </a:spcAft>
             </a:pPr>
             <a:r>
-              <a:rPr sz="1400" b="0">
+              <a:rPr sz="1300" b="0">
                 <a:solidFill>
                   <a:srgbClr val="212121"/>
                 </a:solidFill>
                 <a:latin typeface="맑은 고딕"/>
               </a:rPr>
-              <a:t>• Treepedia(MIT)·Place Pulse 류 선행연구의 그늘막 응용</a:t>
+              <a:t>• 4시점 (오전 10·정오·오후 2·오후 4) shadow union → 누적 비율</a:t>
+            </a:r>
+          </a:p>
+          <a:p>
+            <a:pPr>
+              <a:spcAft>
+                <a:spcPts val="500"/>
+              </a:spcAft>
+            </a:pPr>
+            <a:r>
+              <a:rPr sz="1300" b="0">
+                <a:solidFill>
+                  <a:srgbClr val="212121"/>
+                </a:solidFill>
+                <a:latin typeface="맑은 고딕"/>
+              </a:rPr>
+              <a:t>• 흑석동 309격자에 적용 → 평균 누적 그림자 0.157</a:t>
+            </a:r>
+          </a:p>
+          <a:p>
+            <a:pPr>
+              <a:spcAft>
+                <a:spcPts val="500"/>
+              </a:spcAft>
+            </a:pPr>
+            <a:r>
+              <a:rPr sz="1300" b="0">
+                <a:solidFill>
+                  <a:srgbClr val="212121"/>
+                </a:solidFill>
+                <a:latin typeface="맑은 고딕"/>
+              </a:rPr>
+              <a:t>• NGII 흑석동 실측 건물 3,775동 (층수·HEGT) 통합 (데이터 품질 ↑)</a:t>
             </a:r>
           </a:p>
         </p:txBody>
@@ -10029,17 +12401,19 @@
         </p:nvSpPr>
         <p:spPr>
           <a:xfrm>
-            <a:off x="6858000" y="1737360"/>
-            <a:ext cx="4846320" cy="1828800"/>
+            <a:off x="7315200" y="1645920"/>
+            <a:ext cx="4389120" cy="4114800"/>
           </a:xfrm>
           <a:prstGeom prst="roundRect">
             <a:avLst/>
           </a:prstGeom>
           <a:solidFill>
-            <a:srgbClr val="212121"/>
+            <a:srgbClr val="F5F8FD"/>
           </a:solidFill>
-          <a:ln>
-            <a:noFill/>
+          <a:ln w="19050">
+            <a:solidFill>
+              <a:srgbClr val="1E88E5"/>
+            </a:solidFill>
           </a:ln>
         </p:spPr>
         <p:style>
@@ -10057,163 +12431,185 @@
           </a:fontRef>
         </p:style>
         <p:txBody>
-          <a:bodyPr rtlCol="0" anchor="ctr" wrap="square" lIns="182880" tIns="182880"/>
+          <a:bodyPr rtlCol="0" anchor="ctr" wrap="square" lIns="228600" tIns="228600"/>
           <a:lstStyle/>
           <a:p>
             <a:pPr algn="ctr"/>
             <a:r>
-              <a:rPr sz="1400" b="1">
-                <a:solidFill>
-                  <a:srgbClr val="FFEE58"/>
-                </a:solidFill>
-                <a:latin typeface="맑은 고딕"/>
-              </a:rPr>
-              <a:t>그늘 결핍 지수</a:t>
-            </a:r>
-          </a:p>
-          <a:p>
-            <a:pPr algn="ctr"/>
-            <a:r>
-              <a:rPr sz="1200" b="0">
-                <a:solidFill>
-                  <a:srgbClr val="CCCCCC"/>
-                </a:solidFill>
-                <a:latin typeface="맑은 고딕"/>
-              </a:rPr>
-              <a:t>deficit =</a:t>
-            </a:r>
-          </a:p>
-          <a:p>
-            <a:pPr algn="ctr"/>
-            <a:r>
-              <a:rPr sz="1400" b="1">
-                <a:solidFill>
-                  <a:srgbClr val="FFFFFF"/>
-                </a:solidFill>
-                <a:latin typeface="맑은 고딕"/>
-              </a:rPr>
-              <a:t>(road + sidewalk)</a:t>
-            </a:r>
-          </a:p>
-          <a:p>
-            <a:pPr algn="ctr"/>
-            <a:r>
-              <a:rPr sz="1400" b="1">
-                <a:solidFill>
-                  <a:srgbClr val="FFFFFF"/>
-                </a:solidFill>
-                <a:latin typeface="맑은 고딕"/>
-              </a:rPr>
-              <a:t>× (1 − building − vegetation)</a:t>
-            </a:r>
-          </a:p>
-        </p:txBody>
-      </p:sp>
-      <p:sp>
-        <p:nvSpPr>
-          <p:cNvPr id="7" name="Rounded Rectangle 6"/>
-          <p:cNvSpPr/>
-          <p:nvPr/>
-        </p:nvSpPr>
-        <p:spPr>
-          <a:xfrm>
-            <a:off x="6858000" y="3749039"/>
-            <a:ext cx="4846320" cy="2103120"/>
-          </a:xfrm>
-          <a:prstGeom prst="roundRect">
-            <a:avLst/>
-          </a:prstGeom>
-          <a:solidFill>
-            <a:srgbClr val="FFF4E5"/>
-          </a:solidFill>
-          <a:ln w="19050">
-            <a:solidFill>
-              <a:srgbClr val="FB8C00"/>
-            </a:solidFill>
-          </a:ln>
-        </p:spPr>
-        <p:style>
-          <a:lnRef idx="1">
-            <a:schemeClr val="accent1"/>
-          </a:lnRef>
-          <a:fillRef idx="3">
-            <a:schemeClr val="accent1"/>
-          </a:fillRef>
-          <a:effectRef idx="2">
-            <a:schemeClr val="accent1"/>
-          </a:effectRef>
-          <a:fontRef idx="minor">
-            <a:schemeClr val="lt1"/>
-          </a:fontRef>
-        </p:style>
-        <p:txBody>
-          <a:bodyPr rtlCol="0" anchor="ctr" wrap="square" lIns="228600" tIns="182880"/>
-          <a:lstStyle/>
-          <a:p>
-            <a:pPr algn="ctr"/>
-            <a:r>
-              <a:rPr sz="1400" b="1">
-                <a:solidFill>
-                  <a:srgbClr val="FB8C00"/>
-                </a:solidFill>
-                <a:latin typeface="맑은 고딕"/>
-              </a:rPr>
-              <a:t>📊 결과</a:t>
+              <a:rPr sz="1300" b="1">
+                <a:solidFill>
+                  <a:srgbClr val="1E88E5"/>
+                </a:solidFill>
+                <a:latin typeface="맑은 고딕"/>
+              </a:rPr>
+              <a:t>📐 처리 흐름</a:t>
             </a:r>
           </a:p>
           <a:p>
             <a:pPr>
               <a:spcBef>
-                <a:spcPts val="400"/>
+                <a:spcPts val="100"/>
               </a:spcBef>
             </a:pPr>
             <a:r>
-              <a:rPr sz="1300" b="0">
+              <a:rPr sz="1100" b="0">
                 <a:solidFill>
                   <a:srgbClr val="212121"/>
                 </a:solidFill>
                 <a:latin typeface="맑은 고딕"/>
               </a:rPr>
-              <a:t>• TOP10 평균 deficit: 0.190</a:t>
+              <a:t/>
             </a:r>
           </a:p>
           <a:p>
             <a:pPr>
               <a:spcBef>
-                <a:spcPts val="400"/>
+                <a:spcPts val="100"/>
               </a:spcBef>
             </a:pPr>
             <a:r>
-              <a:rPr sz="1300" b="0">
+              <a:rPr sz="1100" b="0">
                 <a:solidFill>
                   <a:srgbClr val="212121"/>
                 </a:solidFill>
                 <a:latin typeface="맑은 고딕"/>
               </a:rPr>
-              <a:t>• Score 식 6번째 피처 통합</a:t>
+              <a:t>1. rasterio 로 .tif 로딩</a:t>
             </a:r>
           </a:p>
           <a:p>
             <a:pPr>
               <a:spcBef>
-                <a:spcPts val="400"/>
+                <a:spcPts val="100"/>
               </a:spcBef>
             </a:pPr>
             <a:r>
-              <a:rPr sz="1300" b="0">
+              <a:rPr sz="1100" b="0">
                 <a:solidFill>
                   <a:srgbClr val="212121"/>
                 </a:solidFill>
                 <a:latin typeface="맑은 고딕"/>
               </a:rPr>
-              <a:t>• 강건 입지 +1: 흑석동 (CV-B 부각)</a:t>
-            </a:r>
-          </a:p>
-        </p:txBody>
-      </p:sp>
-      <p:sp>
-        <p:nvSpPr>
-          <p:cNvPr id="8" name="TextBox 7"/>
+              <a:t>2. nDSM = DSM − DEM (&gt;0)</a:t>
+            </a:r>
+          </a:p>
+          <a:p>
+            <a:pPr>
+              <a:spcBef>
+                <a:spcPts val="100"/>
+              </a:spcBef>
+            </a:pPr>
+            <a:r>
+              <a:rPr sz="1100" b="0">
+                <a:solidFill>
+                  <a:srgbClr val="212121"/>
+                </a:solidFill>
+                <a:latin typeface="맑은 고딕"/>
+              </a:rPr>
+              <a:t>3. 4시점 태양위치 × ray-cast</a:t>
+            </a:r>
+          </a:p>
+          <a:p>
+            <a:pPr>
+              <a:spcBef>
+                <a:spcPts val="100"/>
+              </a:spcBef>
+            </a:pPr>
+            <a:r>
+              <a:rPr sz="1100" b="0">
+                <a:solidFill>
+                  <a:srgbClr val="212121"/>
+                </a:solidFill>
+                <a:latin typeface="맑은 고딕"/>
+              </a:rPr>
+              <a:t>4. shadow union / 4 → [0,1]</a:t>
+            </a:r>
+          </a:p>
+          <a:p>
+            <a:pPr>
+              <a:spcBef>
+                <a:spcPts val="100"/>
+              </a:spcBef>
+            </a:pPr>
+            <a:r>
+              <a:rPr sz="1100" b="0">
+                <a:solidFill>
+                  <a:srgbClr val="212121"/>
+                </a:solidFill>
+                <a:latin typeface="맑은 고딕"/>
+              </a:rPr>
+              <a:t>5. 격자 centroid 픽셀 매칭</a:t>
+            </a:r>
+          </a:p>
+          <a:p>
+            <a:pPr>
+              <a:spcBef>
+                <a:spcPts val="100"/>
+              </a:spcBef>
+            </a:pPr>
+            <a:r>
+              <a:rPr sz="1100" b="0">
+                <a:solidFill>
+                  <a:srgbClr val="212121"/>
+                </a:solidFill>
+                <a:latin typeface="맑은 고딕"/>
+              </a:rPr>
+              <a:t/>
+            </a:r>
+          </a:p>
+          <a:p>
+            <a:pPr>
+              <a:spcBef>
+                <a:spcPts val="100"/>
+              </a:spcBef>
+            </a:pPr>
+            <a:r>
+              <a:rPr sz="1100" b="0">
+                <a:solidFill>
+                  <a:srgbClr val="212121"/>
+                </a:solidFill>
+                <a:latin typeface="맑은 고딕"/>
+              </a:rPr>
+              <a:t>산출:</a:t>
+            </a:r>
+          </a:p>
+          <a:p>
+            <a:pPr>
+              <a:spcBef>
+                <a:spcPts val="100"/>
+              </a:spcBef>
+            </a:pPr>
+            <a:r>
+              <a:rPr sz="1100" b="0">
+                <a:solidFill>
+                  <a:srgbClr val="212121"/>
+                </a:solidFill>
+                <a:latin typeface="맑은 고딕"/>
+              </a:rPr>
+              <a:t>heukseok_shadow_accum.tif</a:t>
+            </a:r>
+          </a:p>
+          <a:p>
+            <a:pPr>
+              <a:spcBef>
+                <a:spcPts val="100"/>
+              </a:spcBef>
+            </a:pPr>
+            <a:r>
+              <a:rPr sz="1100" b="0">
+                <a:solidFill>
+                  <a:srgbClr val="212121"/>
+                </a:solidFill>
+                <a:latin typeface="맑은 고딕"/>
+              </a:rPr>
+              <a:t>grid_heukseok_natural.csv</a:t>
+            </a:r>
+          </a:p>
+        </p:txBody>
+      </p:sp>
+      <p:sp>
+        <p:nvSpPr>
+          <p:cNvPr id="7" name="TextBox 6"/>
           <p:cNvSpPr txBox="1"/>
           <p:nvPr/>
         </p:nvSpPr>
@@ -10248,7 +12644,7 @@
       </p:sp>
       <p:sp>
         <p:nvSpPr>
-          <p:cNvPr id="9" name="TextBox 8"/>
+          <p:cNvPr id="8" name="TextBox 7"/>
           <p:cNvSpPr txBox="1"/>
           <p:nvPr/>
         </p:nvSpPr>
@@ -10276,7 +12672,7 @@
                 </a:solidFill>
                 <a:latin typeface="맑은 고딕"/>
               </a:rPr>
-              <a:t>9 / 14</a:t>
+              <a:t>9 / 15</a:t>
             </a:r>
           </a:p>
         </p:txBody>

--- a/presentation/동작구_그늘막_최종발표.pptx
+++ b/presentation/동작구_그늘막_최종발표.pptx
@@ -119,6 +119,1841 @@
     </a:lvl9pPr>
   </p:defaultTextStyle>
 </p:presentation>
+</file>
+
+<file path=ppt/notesMasters/notesMaster1.xml><?xml version="1.0" encoding="utf-8"?>
+<p:notesMaster xmlns:a="http://schemas.openxmlformats.org/drawingml/2006/main" xmlns:p="http://schemas.openxmlformats.org/presentationml/2006/main" xmlns:r="http://schemas.openxmlformats.org/officeDocument/2006/relationships">
+  <p:cSld>
+    <p:bg>
+      <p:bgRef idx="1001">
+        <a:schemeClr val="bg1"/>
+      </p:bgRef>
+    </p:bg>
+    <p:spTree>
+      <p:nvGrpSpPr>
+        <p:cNvPr id="1" name=""/>
+        <p:cNvGrpSpPr/>
+        <p:nvPr/>
+      </p:nvGrpSpPr>
+      <p:grpSpPr>
+        <a:xfrm>
+          <a:off x="0" y="0"/>
+          <a:ext cx="0" cy="0"/>
+          <a:chOff x="0" y="0"/>
+          <a:chExt cx="0" cy="0"/>
+        </a:xfrm>
+      </p:grpSpPr>
+      <p:sp>
+        <p:nvSpPr>
+          <p:cNvPr id="2" name="Header Placeholder 1"/>
+          <p:cNvSpPr>
+            <a:spLocks noGrp="1"/>
+          </p:cNvSpPr>
+          <p:nvPr>
+            <p:ph type="hdr" sz="quarter"/>
+          </p:nvPr>
+        </p:nvSpPr>
+        <p:spPr>
+          <a:xfrm>
+            <a:off x="0" y="0"/>
+            <a:ext cx="2971800" cy="457200"/>
+          </a:xfrm>
+          <a:prstGeom prst="rect">
+            <a:avLst/>
+          </a:prstGeom>
+        </p:spPr>
+        <p:txBody>
+          <a:bodyPr vert="horz" lIns="91440" tIns="45720" rIns="91440" bIns="45720" rtlCol="0"/>
+          <a:lstStyle>
+            <a:lvl1pPr algn="l">
+              <a:defRPr sz="1200"/>
+            </a:lvl1pPr>
+          </a:lstStyle>
+          <a:p>
+            <a:endParaRPr lang="en-US"/>
+          </a:p>
+        </p:txBody>
+      </p:sp>
+      <p:sp>
+        <p:nvSpPr>
+          <p:cNvPr id="3" name="Date Placeholder 2"/>
+          <p:cNvSpPr>
+            <a:spLocks noGrp="1"/>
+          </p:cNvSpPr>
+          <p:nvPr>
+            <p:ph type="dt" idx="1"/>
+          </p:nvPr>
+        </p:nvSpPr>
+        <p:spPr>
+          <a:xfrm>
+            <a:off x="3884613" y="0"/>
+            <a:ext cx="2971800" cy="457200"/>
+          </a:xfrm>
+          <a:prstGeom prst="rect">
+            <a:avLst/>
+          </a:prstGeom>
+        </p:spPr>
+        <p:txBody>
+          <a:bodyPr vert="horz" lIns="91440" tIns="45720" rIns="91440" bIns="45720" rtlCol="0"/>
+          <a:lstStyle>
+            <a:lvl1pPr algn="r">
+              <a:defRPr sz="1200"/>
+            </a:lvl1pPr>
+          </a:lstStyle>
+          <a:p>
+            <a:fld id="{0F89C1C7-3DCD-1040-A9CF-14679D8B5DDD}" type="datetimeFigureOut">
+              <a:rPr lang="en-US" smtClean="0"/>
+              <a:t>10/17/16</a:t>
+            </a:fld>
+            <a:endParaRPr lang="en-US"/>
+          </a:p>
+        </p:txBody>
+      </p:sp>
+      <p:sp>
+        <p:nvSpPr>
+          <p:cNvPr id="4" name="Slide Image Placeholder 3"/>
+          <p:cNvSpPr>
+            <a:spLocks noGrp="1" noRot="1" noChangeAspect="1"/>
+          </p:cNvSpPr>
+          <p:nvPr>
+            <p:ph type="sldImg" idx="2"/>
+          </p:nvPr>
+        </p:nvSpPr>
+        <p:spPr>
+          <a:xfrm>
+            <a:off x="1143000" y="685800"/>
+            <a:ext cx="4572000" cy="3429000"/>
+          </a:xfrm>
+          <a:prstGeom prst="rect">
+            <a:avLst/>
+          </a:prstGeom>
+          <a:noFill/>
+          <a:ln w="12700">
+            <a:solidFill>
+              <a:prstClr val="black"/>
+            </a:solidFill>
+          </a:ln>
+        </p:spPr>
+        <p:txBody>
+          <a:bodyPr vert="horz" lIns="91440" tIns="45720" rIns="91440" bIns="45720" rtlCol="0" anchor="ctr"/>
+          <a:lstStyle/>
+          <a:p>
+            <a:endParaRPr lang="en-US"/>
+          </a:p>
+        </p:txBody>
+      </p:sp>
+      <p:sp>
+        <p:nvSpPr>
+          <p:cNvPr id="5" name="Notes Placeholder 4"/>
+          <p:cNvSpPr>
+            <a:spLocks noGrp="1"/>
+          </p:cNvSpPr>
+          <p:nvPr>
+            <p:ph type="body" sz="quarter" idx="3"/>
+          </p:nvPr>
+        </p:nvSpPr>
+        <p:spPr>
+          <a:xfrm>
+            <a:off x="685800" y="4343400"/>
+            <a:ext cx="5486400" cy="4114800"/>
+          </a:xfrm>
+          <a:prstGeom prst="rect">
+            <a:avLst/>
+          </a:prstGeom>
+        </p:spPr>
+        <p:txBody>
+          <a:bodyPr vert="horz" lIns="91440" tIns="45720" rIns="91440" bIns="45720" rtlCol="0"/>
+          <a:lstStyle/>
+          <a:p>
+            <a:pPr lvl="0"/>
+            <a:r>
+              <a:rPr lang="en-US" smtClean="0"/>
+              <a:t>Click to edit Master text styles</a:t>
+            </a:r>
+          </a:p>
+          <a:p>
+            <a:pPr lvl="1"/>
+            <a:r>
+              <a:rPr lang="en-US" smtClean="0"/>
+              <a:t>Second level</a:t>
+            </a:r>
+          </a:p>
+          <a:p>
+            <a:pPr lvl="2"/>
+            <a:r>
+              <a:rPr lang="en-US" smtClean="0"/>
+              <a:t>Third level</a:t>
+            </a:r>
+          </a:p>
+          <a:p>
+            <a:pPr lvl="3"/>
+            <a:r>
+              <a:rPr lang="en-US" smtClean="0"/>
+              <a:t>Fourth level</a:t>
+            </a:r>
+          </a:p>
+          <a:p>
+            <a:pPr lvl="4"/>
+            <a:r>
+              <a:rPr lang="en-US" smtClean="0"/>
+              <a:t>Fifth level</a:t>
+            </a:r>
+            <a:endParaRPr lang="en-US"/>
+          </a:p>
+        </p:txBody>
+      </p:sp>
+      <p:sp>
+        <p:nvSpPr>
+          <p:cNvPr id="6" name="Footer Placeholder 5"/>
+          <p:cNvSpPr>
+            <a:spLocks noGrp="1"/>
+          </p:cNvSpPr>
+          <p:nvPr>
+            <p:ph type="ftr" sz="quarter" idx="4"/>
+          </p:nvPr>
+        </p:nvSpPr>
+        <p:spPr>
+          <a:xfrm>
+            <a:off x="0" y="8685213"/>
+            <a:ext cx="2971800" cy="457200"/>
+          </a:xfrm>
+          <a:prstGeom prst="rect">
+            <a:avLst/>
+          </a:prstGeom>
+        </p:spPr>
+        <p:txBody>
+          <a:bodyPr vert="horz" lIns="91440" tIns="45720" rIns="91440" bIns="45720" rtlCol="0" anchor="b"/>
+          <a:lstStyle>
+            <a:lvl1pPr algn="l">
+              <a:defRPr sz="1200"/>
+            </a:lvl1pPr>
+          </a:lstStyle>
+          <a:p>
+            <a:endParaRPr lang="en-US"/>
+          </a:p>
+        </p:txBody>
+      </p:sp>
+      <p:sp>
+        <p:nvSpPr>
+          <p:cNvPr id="7" name="Slide Number Placeholder 6"/>
+          <p:cNvSpPr>
+            <a:spLocks noGrp="1"/>
+          </p:cNvSpPr>
+          <p:nvPr>
+            <p:ph type="sldNum" sz="quarter" idx="5"/>
+          </p:nvPr>
+        </p:nvSpPr>
+        <p:spPr>
+          <a:xfrm>
+            <a:off x="3884613" y="8685213"/>
+            <a:ext cx="2971800" cy="457200"/>
+          </a:xfrm>
+          <a:prstGeom prst="rect">
+            <a:avLst/>
+          </a:prstGeom>
+        </p:spPr>
+        <p:txBody>
+          <a:bodyPr vert="horz" lIns="91440" tIns="45720" rIns="91440" bIns="45720" rtlCol="0" anchor="b"/>
+          <a:lstStyle>
+            <a:lvl1pPr algn="r">
+              <a:defRPr sz="1200"/>
+            </a:lvl1pPr>
+          </a:lstStyle>
+          <a:p>
+            <a:fld id="{BB5E49A5-4136-284D-997B-48E1D791AD67}" type="slidenum">
+              <a:rPr lang="en-US" smtClean="0"/>
+              <a:t>‹#›</a:t>
+            </a:fld>
+            <a:endParaRPr lang="en-US"/>
+          </a:p>
+        </p:txBody>
+      </p:sp>
+    </p:spTree>
+    <p:extLst>
+      <p:ext uri="{BB962C8B-B14F-4D97-AF65-F5344CB8AC3E}">
+        <p14:creationId xmlns:p14="http://schemas.microsoft.com/office/powerpoint/2010/main" val="2623252185"/>
+      </p:ext>
+    </p:extLst>
+  </p:cSld>
+  <p:clrMap bg1="lt1" tx1="dk1" bg2="lt2" tx2="dk2" accent1="accent1" accent2="accent2" accent3="accent3" accent4="accent4" accent5="accent5" accent6="accent6" hlink="hlink" folHlink="folHlink"/>
+  <p:notesStyle>
+    <a:lvl1pPr marL="0" algn="l" defTabSz="457200" rtl="0" eaLnBrk="1" latinLnBrk="0" hangingPunct="1">
+      <a:defRPr sz="1200" kern="1200">
+        <a:solidFill>
+          <a:schemeClr val="tx1"/>
+        </a:solidFill>
+        <a:latin typeface="+mn-lt"/>
+        <a:ea typeface="+mn-ea"/>
+        <a:cs typeface="+mn-cs"/>
+      </a:defRPr>
+    </a:lvl1pPr>
+    <a:lvl2pPr marL="457200" algn="l" defTabSz="457200" rtl="0" eaLnBrk="1" latinLnBrk="0" hangingPunct="1">
+      <a:defRPr sz="1200" kern="1200">
+        <a:solidFill>
+          <a:schemeClr val="tx1"/>
+        </a:solidFill>
+        <a:latin typeface="+mn-lt"/>
+        <a:ea typeface="+mn-ea"/>
+        <a:cs typeface="+mn-cs"/>
+      </a:defRPr>
+    </a:lvl2pPr>
+    <a:lvl3pPr marL="914400" algn="l" defTabSz="457200" rtl="0" eaLnBrk="1" latinLnBrk="0" hangingPunct="1">
+      <a:defRPr sz="1200" kern="1200">
+        <a:solidFill>
+          <a:schemeClr val="tx1"/>
+        </a:solidFill>
+        <a:latin typeface="+mn-lt"/>
+        <a:ea typeface="+mn-ea"/>
+        <a:cs typeface="+mn-cs"/>
+      </a:defRPr>
+    </a:lvl3pPr>
+    <a:lvl4pPr marL="1371600" algn="l" defTabSz="457200" rtl="0" eaLnBrk="1" latinLnBrk="0" hangingPunct="1">
+      <a:defRPr sz="1200" kern="1200">
+        <a:solidFill>
+          <a:schemeClr val="tx1"/>
+        </a:solidFill>
+        <a:latin typeface="+mn-lt"/>
+        <a:ea typeface="+mn-ea"/>
+        <a:cs typeface="+mn-cs"/>
+      </a:defRPr>
+    </a:lvl4pPr>
+    <a:lvl5pPr marL="1828800" algn="l" defTabSz="457200" rtl="0" eaLnBrk="1" latinLnBrk="0" hangingPunct="1">
+      <a:defRPr sz="1200" kern="1200">
+        <a:solidFill>
+          <a:schemeClr val="tx1"/>
+        </a:solidFill>
+        <a:latin typeface="+mn-lt"/>
+        <a:ea typeface="+mn-ea"/>
+        <a:cs typeface="+mn-cs"/>
+      </a:defRPr>
+    </a:lvl5pPr>
+    <a:lvl6pPr marL="2286000" algn="l" defTabSz="457200" rtl="0" eaLnBrk="1" latinLnBrk="0" hangingPunct="1">
+      <a:defRPr sz="1200" kern="1200">
+        <a:solidFill>
+          <a:schemeClr val="tx1"/>
+        </a:solidFill>
+        <a:latin typeface="+mn-lt"/>
+        <a:ea typeface="+mn-ea"/>
+        <a:cs typeface="+mn-cs"/>
+      </a:defRPr>
+    </a:lvl6pPr>
+    <a:lvl7pPr marL="2743200" algn="l" defTabSz="457200" rtl="0" eaLnBrk="1" latinLnBrk="0" hangingPunct="1">
+      <a:defRPr sz="1200" kern="1200">
+        <a:solidFill>
+          <a:schemeClr val="tx1"/>
+        </a:solidFill>
+        <a:latin typeface="+mn-lt"/>
+        <a:ea typeface="+mn-ea"/>
+        <a:cs typeface="+mn-cs"/>
+      </a:defRPr>
+    </a:lvl7pPr>
+    <a:lvl8pPr marL="3200400" algn="l" defTabSz="457200" rtl="0" eaLnBrk="1" latinLnBrk="0" hangingPunct="1">
+      <a:defRPr sz="1200" kern="1200">
+        <a:solidFill>
+          <a:schemeClr val="tx1"/>
+        </a:solidFill>
+        <a:latin typeface="+mn-lt"/>
+        <a:ea typeface="+mn-ea"/>
+        <a:cs typeface="+mn-cs"/>
+      </a:defRPr>
+    </a:lvl8pPr>
+    <a:lvl9pPr marL="3657600" algn="l" defTabSz="457200" rtl="0" eaLnBrk="1" latinLnBrk="0" hangingPunct="1">
+      <a:defRPr sz="1200" kern="1200">
+        <a:solidFill>
+          <a:schemeClr val="tx1"/>
+        </a:solidFill>
+        <a:latin typeface="+mn-lt"/>
+        <a:ea typeface="+mn-ea"/>
+        <a:cs typeface="+mn-cs"/>
+      </a:defRPr>
+    </a:lvl9pPr>
+  </p:notesStyle>
+</p:notesMaster>
+</file>
+
+<file path=ppt/notesSlides/notesSlide1.xml><?xml version="1.0" encoding="utf-8"?>
+<p:notes xmlns:a="http://schemas.openxmlformats.org/drawingml/2006/main" xmlns:p="http://schemas.openxmlformats.org/presentationml/2006/main" xmlns:r="http://schemas.openxmlformats.org/officeDocument/2006/relationships">
+  <p:cSld>
+    <p:spTree>
+      <p:nvGrpSpPr>
+        <p:cNvPr id="1" name=""/>
+        <p:cNvGrpSpPr/>
+        <p:nvPr/>
+      </p:nvGrpSpPr>
+      <p:grpSpPr>
+        <a:xfrm>
+          <a:off x="0" y="0"/>
+          <a:ext cx="0" cy="0"/>
+          <a:chOff x="0" y="0"/>
+          <a:chExt cx="0" cy="0"/>
+        </a:xfrm>
+      </p:grpSpPr>
+      <p:sp>
+        <p:nvSpPr>
+          <p:cNvPr id="2" name="Slide Image Placeholder 1"/>
+          <p:cNvSpPr>
+            <a:spLocks noGrp="1"/>
+          </p:cNvSpPr>
+          <p:nvPr>
+            <p:ph type="sldImg" idx="2"/>
+          </p:nvPr>
+        </p:nvSpPr>
+        <p:spPr/>
+      </p:sp>
+      <p:sp>
+        <p:nvSpPr>
+          <p:cNvPr id="3" name="Notes Placeholder 2"/>
+          <p:cNvSpPr>
+            <a:spLocks noGrp="1"/>
+          </p:cNvSpPr>
+          <p:nvPr>
+            <p:ph type="body" idx="3" sz="quarter"/>
+          </p:nvPr>
+        </p:nvSpPr>
+        <p:spPr/>
+        <p:txBody>
+          <a:bodyPr/>
+          <a:lstStyle/>
+          <a:p>
+            <a:r>
+              <a:t>[표지 · 30초]</a:t>
+            </a:r>
+          </a:p>
+          <a:p>
+            <a:r>
+              <a:t>- 인공지능융합대학원 한영재 / 2025961227</a:t>
+            </a:r>
+          </a:p>
+          <a:p>
+            <a:r>
+              <a:t>- 후크: 그늘막 입지를 민원·직관이 아닌 데이터의 논리로 결정</a:t>
+            </a:r>
+          </a:p>
+          <a:p>
+            <a:r>
+              <a:t>- MCDA 코어 + CV 3종 + GIS 2종 = 9개 외부 데이터 통합</a:t>
+            </a:r>
+          </a:p>
+          <a:p>
+            <a:r>
+              <a:t>- 코드: github.com/thgtot92/project_1</a:t>
+            </a:r>
+          </a:p>
+        </p:txBody>
+      </p:sp>
+      <p:sp>
+        <p:nvSpPr>
+          <p:cNvPr id="4" name="Slide Number Placeholder 3"/>
+          <p:cNvSpPr>
+            <a:spLocks noGrp="1"/>
+          </p:cNvSpPr>
+          <p:nvPr>
+            <p:ph type="sldNum" idx="5" sz="quarter"/>
+          </p:nvPr>
+        </p:nvSpPr>
+        <p:spPr/>
+      </p:sp>
+    </p:spTree>
+  </p:cSld>
+  <p:clrMapOvr>
+    <a:masterClrMapping/>
+  </p:clrMapOvr>
+</p:notes>
+</file>
+
+<file path=ppt/notesSlides/notesSlide10.xml><?xml version="1.0" encoding="utf-8"?>
+<p:notes xmlns:a="http://schemas.openxmlformats.org/drawingml/2006/main" xmlns:p="http://schemas.openxmlformats.org/presentationml/2006/main" xmlns:r="http://schemas.openxmlformats.org/officeDocument/2006/relationships">
+  <p:cSld>
+    <p:spTree>
+      <p:nvGrpSpPr>
+        <p:cNvPr id="1" name=""/>
+        <p:cNvGrpSpPr/>
+        <p:nvPr/>
+      </p:nvGrpSpPr>
+      <p:grpSpPr>
+        <a:xfrm>
+          <a:off x="0" y="0"/>
+          <a:ext cx="0" cy="0"/>
+          <a:chOff x="0" y="0"/>
+          <a:chExt cx="0" cy="0"/>
+        </a:xfrm>
+      </p:grpSpPr>
+      <p:sp>
+        <p:nvSpPr>
+          <p:cNvPr id="2" name="Slide Image Placeholder 1"/>
+          <p:cNvSpPr>
+            <a:spLocks noGrp="1"/>
+          </p:cNvSpPr>
+          <p:nvPr>
+            <p:ph type="sldImg" idx="2"/>
+          </p:nvPr>
+        </p:nvSpPr>
+        <p:spPr/>
+      </p:sp>
+      <p:sp>
+        <p:nvSpPr>
+          <p:cNvPr id="3" name="Notes Placeholder 2"/>
+          <p:cNvSpPr>
+            <a:spLocks noGrp="1"/>
+          </p:cNvSpPr>
+          <p:nvPr>
+            <p:ph type="body" idx="3" sz="quarter"/>
+          </p:nvPr>
+        </p:nvSpPr>
+        <p:spPr/>
+        <p:txBody>
+          <a:bodyPr/>
+          <a:lstStyle/>
+          <a:p>
+            <a:r>
+              <a:t>[OSMnx · 교차로 + 횡단보도 · 60초]</a:t>
+            </a:r>
+          </a:p>
+          <a:p>
+            <a:r>
+              <a:t>- OSMnx: OpenStreetMap Overpass API Python 래퍼</a:t>
+            </a:r>
+          </a:p>
+          <a:p>
+            <a:r>
+              <a:t>- walkable highway 그래프 → street_count ≥ 3 노드 = 교차로</a:t>
+            </a:r>
+          </a:p>
+          <a:p>
+            <a:r>
+              <a:t>- 한국 OSM 의 함정: 횡단보도가 highway=crossing 보다 footway=crossing 우세</a:t>
+            </a:r>
+          </a:p>
+          <a:p>
+            <a:r>
+              <a:t>- 처음에 흑석동 횡단보도 0개로 떴다가, 다중 태그 검색으로 해결</a:t>
+            </a:r>
+          </a:p>
+          <a:p>
+            <a:r>
+              <a:t>- highway · footway · crossing 3종 통합 → 306개 횡단보도 발견</a:t>
+            </a:r>
+          </a:p>
+          <a:p>
+            <a:r>
+              <a:t>- 결집지점 union → 격자별 80m 내 개수(피처) + 50m 근접(필터)</a:t>
+            </a:r>
+          </a:p>
+          <a:p>
+            <a:r>
+              <a:t>- 효과: 노량진역-수산시장이 처음으로 TOP10 진입</a:t>
+            </a:r>
+          </a:p>
+          <a:p/>
+          <a:p>
+            <a:r>
+              <a:t>예상 질문: OSM 신뢰성? → 인구 밀집 지역은 충실. NGII 도로대장 비교는 향후 과제</a:t>
+            </a:r>
+          </a:p>
+        </p:txBody>
+      </p:sp>
+      <p:sp>
+        <p:nvSpPr>
+          <p:cNvPr id="4" name="Slide Number Placeholder 3"/>
+          <p:cNvSpPr>
+            <a:spLocks noGrp="1"/>
+          </p:cNvSpPr>
+          <p:nvPr>
+            <p:ph type="sldNum" idx="5" sz="quarter"/>
+          </p:nvPr>
+        </p:nvSpPr>
+        <p:spPr/>
+      </p:sp>
+    </p:spTree>
+  </p:cSld>
+  <p:clrMapOvr>
+    <a:masterClrMapping/>
+  </p:clrMapOvr>
+</p:notes>
+</file>
+
+<file path=ppt/notesSlides/notesSlide11.xml><?xml version="1.0" encoding="utf-8"?>
+<p:notes xmlns:a="http://schemas.openxmlformats.org/drawingml/2006/main" xmlns:p="http://schemas.openxmlformats.org/presentationml/2006/main" xmlns:r="http://schemas.openxmlformats.org/officeDocument/2006/relationships">
+  <p:cSld>
+    <p:spTree>
+      <p:nvGrpSpPr>
+        <p:cNvPr id="1" name=""/>
+        <p:cNvGrpSpPr/>
+        <p:nvPr/>
+      </p:nvGrpSpPr>
+      <p:grpSpPr>
+        <a:xfrm>
+          <a:off x="0" y="0"/>
+          <a:ext cx="0" cy="0"/>
+          <a:chOff x="0" y="0"/>
+          <a:chExt cx="0" cy="0"/>
+        </a:xfrm>
+      </p:grpSpPr>
+      <p:sp>
+        <p:nvSpPr>
+          <p:cNvPr id="2" name="Slide Image Placeholder 1"/>
+          <p:cNvSpPr>
+            <a:spLocks noGrp="1"/>
+          </p:cNvSpPr>
+          <p:nvPr>
+            <p:ph type="sldImg" idx="2"/>
+          </p:nvPr>
+        </p:nvSpPr>
+        <p:spPr/>
+      </p:sp>
+      <p:sp>
+        <p:nvSpPr>
+          <p:cNvPr id="3" name="Notes Placeholder 2"/>
+          <p:cNvSpPr>
+            <a:spLocks noGrp="1"/>
+          </p:cNvSpPr>
+          <p:nvPr>
+            <p:ph type="body" idx="3" sz="quarter"/>
+          </p:nvPr>
+        </p:nvSpPr>
+        <p:spPr/>
+        <p:txBody>
+          <a:bodyPr/>
+          <a:lstStyle/>
+          <a:p>
+            <a:r>
+              <a:t>[시나리오 6 + 강건 입지 · 75초]</a:t>
+            </a:r>
+          </a:p>
+          <a:p>
+            <a:r>
+              <a:t>- 6 시나리오: 기본/고령자/폭염/유동인구/보행환경/교차로</a:t>
+            </a:r>
+          </a:p>
+          <a:p>
+            <a:r>
+              <a:t>- 동일 피처 위에 가중치만 바꿔 재스코어 = 정책 스트레스 테스트</a:t>
+            </a:r>
+          </a:p>
+          <a:p>
+            <a:r>
+              <a:t>- 유동인구 시나리오 최고 0.648 score</a:t>
+            </a:r>
+          </a:p>
+          <a:p>
+            <a:r>
+              <a:t>- 강건 입지 2곳: 동작대로 사당-이수 축 (37.4907, 126.9647) + 사당역 인근 (37.4898, 126.9670)</a:t>
+            </a:r>
+          </a:p>
+          <a:p>
+            <a:r>
+              <a:t>- "정책 관점이 바뀌어도 정답이 안 바뀌는 곳" = 예산 제약 최우선</a:t>
+            </a:r>
+          </a:p>
+          <a:p>
+            <a:r>
+              <a:t>- 흑석동 한강변은 이전 강건 입지였으나 교차로 시나리오 추가로 탈락 → 더 엄격한 검증 통과한 사당-이수의 강건성 ↑</a:t>
+            </a:r>
+          </a:p>
+          <a:p/>
+          <a:p>
+            <a:r>
+              <a:t>예상 질문: 2곳만이면 너무 적지 않나? → 6 시나리오 합의 자체가 어려운 일. 2곳 살아남았다는 게 의미</a:t>
+            </a:r>
+          </a:p>
+        </p:txBody>
+      </p:sp>
+      <p:sp>
+        <p:nvSpPr>
+          <p:cNvPr id="4" name="Slide Number Placeholder 3"/>
+          <p:cNvSpPr>
+            <a:spLocks noGrp="1"/>
+          </p:cNvSpPr>
+          <p:nvPr>
+            <p:ph type="sldNum" idx="5" sz="quarter"/>
+          </p:nvPr>
+        </p:nvSpPr>
+        <p:spPr/>
+      </p:sp>
+    </p:spTree>
+  </p:cSld>
+  <p:clrMapOvr>
+    <a:masterClrMapping/>
+  </p:clrMapOvr>
+</p:notes>
+</file>
+
+<file path=ppt/notesSlides/notesSlide12.xml><?xml version="1.0" encoding="utf-8"?>
+<p:notes xmlns:a="http://schemas.openxmlformats.org/drawingml/2006/main" xmlns:p="http://schemas.openxmlformats.org/presentationml/2006/main" xmlns:r="http://schemas.openxmlformats.org/officeDocument/2006/relationships">
+  <p:cSld>
+    <p:spTree>
+      <p:nvGrpSpPr>
+        <p:cNvPr id="1" name=""/>
+        <p:cNvGrpSpPr/>
+        <p:nvPr/>
+      </p:nvGrpSpPr>
+      <p:grpSpPr>
+        <a:xfrm>
+          <a:off x="0" y="0"/>
+          <a:ext cx="0" cy="0"/>
+          <a:chOff x="0" y="0"/>
+          <a:chExt cx="0" cy="0"/>
+        </a:xfrm>
+      </p:grpSpPr>
+      <p:sp>
+        <p:nvSpPr>
+          <p:cNvPr id="2" name="Slide Image Placeholder 1"/>
+          <p:cNvSpPr>
+            <a:spLocks noGrp="1"/>
+          </p:cNvSpPr>
+          <p:nvPr>
+            <p:ph type="sldImg" idx="2"/>
+          </p:nvPr>
+        </p:nvSpPr>
+        <p:spPr/>
+      </p:sp>
+      <p:sp>
+        <p:nvSpPr>
+          <p:cNvPr id="3" name="Notes Placeholder 2"/>
+          <p:cNvSpPr>
+            <a:spLocks noGrp="1"/>
+          </p:cNvSpPr>
+          <p:nvPr>
+            <p:ph type="body" idx="3" sz="quarter"/>
+          </p:nvPr>
+        </p:nvSpPr>
+        <p:spPr/>
+        <p:txBody>
+          <a:bodyPr/>
+          <a:lstStyle/>
+          <a:p>
+            <a:r>
+              <a:t>[1차 발표 3대 구역 검증 · 45초]</a:t>
+            </a:r>
+          </a:p>
+          <a:p>
+            <a:r>
+              <a:t>- 1차 발표 때 노량진·사당-이수·상도로 3대 후보 제시</a:t>
+            </a:r>
+          </a:p>
+          <a:p>
+            <a:r>
+              <a:t>- 알고리즘이 얼마나 재현했는지 자기 검증</a:t>
+            </a:r>
+          </a:p>
+          <a:p>
+            <a:r>
+              <a:t>- 노량진: △ → ✓ (횡단보도 통합 후 신규 진입)</a:t>
+            </a:r>
+          </a:p>
+          <a:p>
+            <a:r>
+              <a:t>- 사당-이수: ✓ TOP1·2·4·5 차지</a:t>
+            </a:r>
+          </a:p>
+          <a:p>
+            <a:r>
+              <a:t>- 상도로: ✓ → △ (보행로 5m 강화로 컷, 정책적 재검토 필요)</a:t>
+            </a:r>
+          </a:p>
+        </p:txBody>
+      </p:sp>
+      <p:sp>
+        <p:nvSpPr>
+          <p:cNvPr id="4" name="Slide Number Placeholder 3"/>
+          <p:cNvSpPr>
+            <a:spLocks noGrp="1"/>
+          </p:cNvSpPr>
+          <p:nvPr>
+            <p:ph type="sldNum" idx="5" sz="quarter"/>
+          </p:nvPr>
+        </p:nvSpPr>
+        <p:spPr/>
+      </p:sp>
+    </p:spTree>
+  </p:cSld>
+  <p:clrMapOvr>
+    <a:masterClrMapping/>
+  </p:clrMapOvr>
+</p:notes>
+</file>
+
+<file path=ppt/notesSlides/notesSlide13.xml><?xml version="1.0" encoding="utf-8"?>
+<p:notes xmlns:a="http://schemas.openxmlformats.org/drawingml/2006/main" xmlns:p="http://schemas.openxmlformats.org/presentationml/2006/main" xmlns:r="http://schemas.openxmlformats.org/officeDocument/2006/relationships">
+  <p:cSld>
+    <p:spTree>
+      <p:nvGrpSpPr>
+        <p:cNvPr id="1" name=""/>
+        <p:cNvGrpSpPr/>
+        <p:nvPr/>
+      </p:nvGrpSpPr>
+      <p:grpSpPr>
+        <a:xfrm>
+          <a:off x="0" y="0"/>
+          <a:ext cx="0" cy="0"/>
+          <a:chOff x="0" y="0"/>
+          <a:chExt cx="0" cy="0"/>
+        </a:xfrm>
+      </p:grpSpPr>
+      <p:sp>
+        <p:nvSpPr>
+          <p:cNvPr id="2" name="Slide Image Placeholder 1"/>
+          <p:cNvSpPr>
+            <a:spLocks noGrp="1"/>
+          </p:cNvSpPr>
+          <p:nvPr>
+            <p:ph type="sldImg" idx="2"/>
+          </p:nvPr>
+        </p:nvSpPr>
+        <p:spPr/>
+      </p:sp>
+      <p:sp>
+        <p:nvSpPr>
+          <p:cNvPr id="3" name="Notes Placeholder 2"/>
+          <p:cNvSpPr>
+            <a:spLocks noGrp="1"/>
+          </p:cNvSpPr>
+          <p:nvPr>
+            <p:ph type="body" idx="3" sz="quarter"/>
+          </p:nvPr>
+        </p:nvSpPr>
+        <p:spPr/>
+        <p:txBody>
+          <a:bodyPr/>
+          <a:lstStyle/>
+          <a:p>
+            <a:r>
+              <a:t>[흑석동 실측 vs 신규 추천 · 75초 — 핵심 임팩트]</a:t>
+            </a:r>
+          </a:p>
+          <a:p>
+            <a:r>
+              <a:t>- 이 슬라이드가 이번 프로젝트 최대 임팩트 포인트</a:t>
+            </a:r>
+          </a:p>
+          <a:p>
+            <a:r>
+              <a:t>- 사용자 제공 실측 그늘막 18개 (고정 13 + 스마트 5, 2019~2023)와 알고리즘 TOP10 비교</a:t>
+            </a:r>
+          </a:p>
+          <a:p>
+            <a:r>
+              <a:t>- 3 카테고리 분류: 사각지대(&gt;150m) / 중간 / 보강(&lt;60m)</a:t>
+            </a:r>
+          </a:p>
+          <a:p>
+            <a:r>
+              <a:t>- 사각지대 4곳: TOP3·4·5·8</a:t>
+            </a:r>
+          </a:p>
+          <a:p>
+            <a:r>
+              <a:t>- TOP4 (37.49786, 126.96129) 최대 사각지대 359.6m — 정책 어필 1순위</a:t>
+            </a:r>
+          </a:p>
+          <a:p>
+            <a:r>
+              <a:t>- 정책: 흑석동은 그늘막 75% 영역 커버, 다른 동 우선. 흑석동 내부 추가는 사각지대 4곳</a:t>
+            </a:r>
+          </a:p>
+          <a:p/>
+          <a:p>
+            <a:r>
+              <a:t>예상 질문: 사각지대인데 score 낮으면 추천 가치? → 그늘막 0이라 shade 페널티 0. 거리뷰·DSM 보강 시 score 같이 상승 가능</a:t>
+            </a:r>
+          </a:p>
+        </p:txBody>
+      </p:sp>
+      <p:sp>
+        <p:nvSpPr>
+          <p:cNvPr id="4" name="Slide Number Placeholder 3"/>
+          <p:cNvSpPr>
+            <a:spLocks noGrp="1"/>
+          </p:cNvSpPr>
+          <p:nvPr>
+            <p:ph type="sldNum" idx="5" sz="quarter"/>
+          </p:nvPr>
+        </p:nvSpPr>
+        <p:spPr/>
+      </p:sp>
+    </p:spTree>
+  </p:cSld>
+  <p:clrMapOvr>
+    <a:masterClrMapping/>
+  </p:clrMapOvr>
+</p:notes>
+</file>
+
+<file path=ppt/notesSlides/notesSlide14.xml><?xml version="1.0" encoding="utf-8"?>
+<p:notes xmlns:a="http://schemas.openxmlformats.org/drawingml/2006/main" xmlns:p="http://schemas.openxmlformats.org/presentationml/2006/main" xmlns:r="http://schemas.openxmlformats.org/officeDocument/2006/relationships">
+  <p:cSld>
+    <p:spTree>
+      <p:nvGrpSpPr>
+        <p:cNvPr id="1" name=""/>
+        <p:cNvGrpSpPr/>
+        <p:nvPr/>
+      </p:nvGrpSpPr>
+      <p:grpSpPr>
+        <a:xfrm>
+          <a:off x="0" y="0"/>
+          <a:ext cx="0" cy="0"/>
+          <a:chOff x="0" y="0"/>
+          <a:chExt cx="0" cy="0"/>
+        </a:xfrm>
+      </p:grpSpPr>
+      <p:sp>
+        <p:nvSpPr>
+          <p:cNvPr id="2" name="Slide Image Placeholder 1"/>
+          <p:cNvSpPr>
+            <a:spLocks noGrp="1"/>
+          </p:cNvSpPr>
+          <p:nvPr>
+            <p:ph type="sldImg" idx="2"/>
+          </p:nvPr>
+        </p:nvSpPr>
+        <p:spPr/>
+      </p:sp>
+      <p:sp>
+        <p:nvSpPr>
+          <p:cNvPr id="3" name="Notes Placeholder 2"/>
+          <p:cNvSpPr>
+            <a:spLocks noGrp="1"/>
+          </p:cNvSpPr>
+          <p:nvPr>
+            <p:ph type="body" idx="3" sz="quarter"/>
+          </p:nvPr>
+        </p:nvSpPr>
+        <p:spPr/>
+        <p:txBody>
+          <a:bodyPr/>
+          <a:lstStyle/>
+          <a:p>
+            <a:r>
+              <a:t>[Streamlit 대시보드 · 45초 — 시연용]</a:t>
+            </a:r>
+          </a:p>
+          <a:p>
+            <a:r>
+              <a:t>- streamlit run app.py → http://localhost:8501</a:t>
+            </a:r>
+          </a:p>
+          <a:p>
+            <a:r>
+              <a:t>- 사이드바: 시나리오 프리셋 + 7개 가중치 슬라이더</a:t>
+            </a:r>
+          </a:p>
+          <a:p>
+            <a:r>
+              <a:t>- 본문: Folium 지도 + TOP10 표 + 통계</a:t>
+            </a:r>
+          </a:p>
+          <a:p>
+            <a:r>
+              <a:t>- 캐싱: 격자·피처 1회, 슬라이더는 가중합만 (밀리초)</a:t>
+            </a:r>
+          </a:p>
+          <a:p>
+            <a:r>
+              <a:t>- 발표 중 "vuln 더 올리면?" 질문에 즉답</a:t>
+            </a:r>
+          </a:p>
+          <a:p>
+            <a:r>
+              <a:t>- 시간 여유 있으면 별도 창에서 슬라이더 1~2개 움직여 시연</a:t>
+            </a:r>
+          </a:p>
+        </p:txBody>
+      </p:sp>
+      <p:sp>
+        <p:nvSpPr>
+          <p:cNvPr id="4" name="Slide Number Placeholder 3"/>
+          <p:cNvSpPr>
+            <a:spLocks noGrp="1"/>
+          </p:cNvSpPr>
+          <p:nvPr>
+            <p:ph type="sldNum" idx="5" sz="quarter"/>
+          </p:nvPr>
+        </p:nvSpPr>
+        <p:spPr/>
+      </p:sp>
+    </p:spTree>
+  </p:cSld>
+  <p:clrMapOvr>
+    <a:masterClrMapping/>
+  </p:clrMapOvr>
+</p:notes>
+</file>
+
+<file path=ppt/notesSlides/notesSlide15.xml><?xml version="1.0" encoding="utf-8"?>
+<p:notes xmlns:a="http://schemas.openxmlformats.org/drawingml/2006/main" xmlns:p="http://schemas.openxmlformats.org/presentationml/2006/main" xmlns:r="http://schemas.openxmlformats.org/officeDocument/2006/relationships">
+  <p:cSld>
+    <p:spTree>
+      <p:nvGrpSpPr>
+        <p:cNvPr id="1" name=""/>
+        <p:cNvGrpSpPr/>
+        <p:nvPr/>
+      </p:nvGrpSpPr>
+      <p:grpSpPr>
+        <a:xfrm>
+          <a:off x="0" y="0"/>
+          <a:ext cx="0" cy="0"/>
+          <a:chOff x="0" y="0"/>
+          <a:chExt cx="0" cy="0"/>
+        </a:xfrm>
+      </p:grpSpPr>
+      <p:sp>
+        <p:nvSpPr>
+          <p:cNvPr id="2" name="Slide Image Placeholder 1"/>
+          <p:cNvSpPr>
+            <a:spLocks noGrp="1"/>
+          </p:cNvSpPr>
+          <p:nvPr>
+            <p:ph type="sldImg" idx="2"/>
+          </p:nvPr>
+        </p:nvSpPr>
+        <p:spPr/>
+      </p:sp>
+      <p:sp>
+        <p:nvSpPr>
+          <p:cNvPr id="3" name="Notes Placeholder 2"/>
+          <p:cNvSpPr>
+            <a:spLocks noGrp="1"/>
+          </p:cNvSpPr>
+          <p:nvPr>
+            <p:ph type="body" idx="3" sz="quarter"/>
+          </p:nvPr>
+        </p:nvSpPr>
+        <p:spPr/>
+        <p:txBody>
+          <a:bodyPr/>
+          <a:lstStyle/>
+          <a:p>
+            <a:r>
+              <a:t>[한계 + 한 줄 요약 · 45초]</a:t>
+            </a:r>
+          </a:p>
+          <a:p>
+            <a:r>
+              <a:t>- 한계: 4종 기본 데이터 더미 / LST 래스터 미연결 / SAM 추정 높이 / 예산 제약 미반영</a:t>
+            </a:r>
+          </a:p>
+          <a:p>
+            <a:r>
+              <a:t>- 다음 단계: API 연결 / 전 동 실측 / Streamlit 시각화 / 타 자치구 확장 (BBOX 교체)</a:t>
+            </a:r>
+          </a:p>
+          <a:p>
+            <a:r>
+              <a:t>- 한 줄 요약: 항공·거리뷰·DSM·도로망·실측 통합 → 강건 입지 2 + 사각지대 4</a:t>
+            </a:r>
+          </a:p>
+          <a:p>
+            <a:r>
+              <a:t>- "감사합니다. 질문 받겠습니다."</a:t>
+            </a:r>
+          </a:p>
+          <a:p/>
+          <a:p>
+            <a:r>
+              <a:t>예상 질문:</a:t>
+            </a:r>
+          </a:p>
+          <a:p>
+            <a:r>
+              <a:t>- 타 자치구 적용? → BBOX·NGII 교체. 가중치 재튜닝 필요</a:t>
+            </a:r>
+          </a:p>
+          <a:p>
+            <a:r>
+              <a:t>- 코드? → github.com/thgtot92/project_1 (MIT)</a:t>
+            </a:r>
+          </a:p>
+        </p:txBody>
+      </p:sp>
+      <p:sp>
+        <p:nvSpPr>
+          <p:cNvPr id="4" name="Slide Number Placeholder 3"/>
+          <p:cNvSpPr>
+            <a:spLocks noGrp="1"/>
+          </p:cNvSpPr>
+          <p:nvPr>
+            <p:ph type="sldNum" idx="5" sz="quarter"/>
+          </p:nvPr>
+        </p:nvSpPr>
+        <p:spPr/>
+      </p:sp>
+    </p:spTree>
+  </p:cSld>
+  <p:clrMapOvr>
+    <a:masterClrMapping/>
+  </p:clrMapOvr>
+</p:notes>
+</file>
+
+<file path=ppt/notesSlides/notesSlide2.xml><?xml version="1.0" encoding="utf-8"?>
+<p:notes xmlns:a="http://schemas.openxmlformats.org/drawingml/2006/main" xmlns:p="http://schemas.openxmlformats.org/presentationml/2006/main" xmlns:r="http://schemas.openxmlformats.org/officeDocument/2006/relationships">
+  <p:cSld>
+    <p:spTree>
+      <p:nvGrpSpPr>
+        <p:cNvPr id="1" name=""/>
+        <p:cNvGrpSpPr/>
+        <p:nvPr/>
+      </p:nvGrpSpPr>
+      <p:grpSpPr>
+        <a:xfrm>
+          <a:off x="0" y="0"/>
+          <a:ext cx="0" cy="0"/>
+          <a:chOff x="0" y="0"/>
+          <a:chExt cx="0" cy="0"/>
+        </a:xfrm>
+      </p:grpSpPr>
+      <p:sp>
+        <p:nvSpPr>
+          <p:cNvPr id="2" name="Slide Image Placeholder 1"/>
+          <p:cNvSpPr>
+            <a:spLocks noGrp="1"/>
+          </p:cNvSpPr>
+          <p:nvPr>
+            <p:ph type="sldImg" idx="2"/>
+          </p:nvPr>
+        </p:nvSpPr>
+        <p:spPr/>
+      </p:sp>
+      <p:sp>
+        <p:nvSpPr>
+          <p:cNvPr id="3" name="Notes Placeholder 2"/>
+          <p:cNvSpPr>
+            <a:spLocks noGrp="1"/>
+          </p:cNvSpPr>
+          <p:nvPr>
+            <p:ph type="body" idx="3" sz="quarter"/>
+          </p:nvPr>
+        </p:nvSpPr>
+        <p:spPr/>
+        <p:txBody>
+          <a:bodyPr/>
+          <a:lstStyle/>
+          <a:p>
+            <a:r>
+              <a:t>[문제 정의 · 접근 · 45초]</a:t>
+            </a:r>
+          </a:p>
+          <a:p>
+            <a:r>
+              <a:t>- 핵심 메시지: 채권 트레이더 프레임이 도시 공간 최적화에 자연스럽게 이식됨</a:t>
+            </a:r>
+          </a:p>
+          <a:p>
+            <a:r>
+              <a:t>- 기존 방식 한계: 민원 기반 → 이미 커버된 곳 중복, 사각지대 누락</a:t>
+            </a:r>
+          </a:p>
+          <a:p>
+            <a:r>
+              <a:t>- 트레이더 동형 매핑: 피처=수익률 곡선 요인, 격자=포트폴리오, 시나리오=금리 스트레스 테스트</a:t>
+            </a:r>
+          </a:p>
+          <a:p>
+            <a:r>
+              <a:t>- 중요: CV·GIS는 Score를 대체하지 않음. 입력 데이터 품질만 끌어올림. 설명가능성 유지</a:t>
+            </a:r>
+          </a:p>
+          <a:p/>
+          <a:p>
+            <a:r>
+              <a:t>예상 질문: 왜 딥러닝으로 Score 학습 안 했나? → 정답 라벨 없음 + 설명가능성 의도적 선택</a:t>
+            </a:r>
+          </a:p>
+        </p:txBody>
+      </p:sp>
+      <p:sp>
+        <p:nvSpPr>
+          <p:cNvPr id="4" name="Slide Number Placeholder 3"/>
+          <p:cNvSpPr>
+            <a:spLocks noGrp="1"/>
+          </p:cNvSpPr>
+          <p:nvPr>
+            <p:ph type="sldNum" idx="5" sz="quarter"/>
+          </p:nvPr>
+        </p:nvSpPr>
+        <p:spPr/>
+      </p:sp>
+    </p:spTree>
+  </p:cSld>
+  <p:clrMapOvr>
+    <a:masterClrMapping/>
+  </p:clrMapOvr>
+</p:notes>
+</file>
+
+<file path=ppt/notesSlides/notesSlide3.xml><?xml version="1.0" encoding="utf-8"?>
+<p:notes xmlns:a="http://schemas.openxmlformats.org/drawingml/2006/main" xmlns:p="http://schemas.openxmlformats.org/presentationml/2006/main" xmlns:r="http://schemas.openxmlformats.org/officeDocument/2006/relationships">
+  <p:cSld>
+    <p:spTree>
+      <p:nvGrpSpPr>
+        <p:cNvPr id="1" name=""/>
+        <p:cNvGrpSpPr/>
+        <p:nvPr/>
+      </p:nvGrpSpPr>
+      <p:grpSpPr>
+        <a:xfrm>
+          <a:off x="0" y="0"/>
+          <a:ext cx="0" cy="0"/>
+          <a:chOff x="0" y="0"/>
+          <a:chExt cx="0" cy="0"/>
+        </a:xfrm>
+      </p:grpSpPr>
+      <p:sp>
+        <p:nvSpPr>
+          <p:cNvPr id="2" name="Slide Image Placeholder 1"/>
+          <p:cNvSpPr>
+            <a:spLocks noGrp="1"/>
+          </p:cNvSpPr>
+          <p:nvPr>
+            <p:ph type="sldImg" idx="2"/>
+          </p:nvPr>
+        </p:nvSpPr>
+        <p:spPr/>
+      </p:sp>
+      <p:sp>
+        <p:nvSpPr>
+          <p:cNvPr id="3" name="Notes Placeholder 2"/>
+          <p:cNvSpPr>
+            <a:spLocks noGrp="1"/>
+          </p:cNvSpPr>
+          <p:nvPr>
+            <p:ph type="body" idx="3" sz="quarter"/>
+          </p:nvPr>
+        </p:nvSpPr>
+        <p:spPr/>
+        <p:txBody>
+          <a:bodyPr/>
+          <a:lstStyle/>
+          <a:p>
+            <a:r>
+              <a:t>[파이프라인 개요 · 60초]</a:t>
+            </a:r>
+          </a:p>
+          <a:p>
+            <a:r>
+              <a:t>- 5단계: 격자(3672) → Score(7피처 가중합) → 필터(330) → 시나리오(6) → 근거+시각화</a:t>
+            </a:r>
+          </a:p>
+          <a:p>
+            <a:r>
+              <a:t>- 첫 실행 ~10분, 캐시 이후 ~30초</a:t>
+            </a:r>
+          </a:p>
+          <a:p>
+            <a:r>
+              <a:t>- 9종 데이터, 7 피처, 4단계 필터, 6 시나리오 — 핵심 수치 강조</a:t>
+            </a:r>
+          </a:p>
+        </p:txBody>
+      </p:sp>
+      <p:sp>
+        <p:nvSpPr>
+          <p:cNvPr id="4" name="Slide Number Placeholder 3"/>
+          <p:cNvSpPr>
+            <a:spLocks noGrp="1"/>
+          </p:cNvSpPr>
+          <p:nvPr>
+            <p:ph type="sldNum" idx="5" sz="quarter"/>
+          </p:nvPr>
+        </p:nvSpPr>
+        <p:spPr/>
+      </p:sp>
+    </p:spTree>
+  </p:cSld>
+  <p:clrMapOvr>
+    <a:masterClrMapping/>
+  </p:clrMapOvr>
+</p:notes>
+</file>
+
+<file path=ppt/notesSlides/notesSlide4.xml><?xml version="1.0" encoding="utf-8"?>
+<p:notes xmlns:a="http://schemas.openxmlformats.org/drawingml/2006/main" xmlns:p="http://schemas.openxmlformats.org/presentationml/2006/main" xmlns:r="http://schemas.openxmlformats.org/officeDocument/2006/relationships">
+  <p:cSld>
+    <p:spTree>
+      <p:nvGrpSpPr>
+        <p:cNvPr id="1" name=""/>
+        <p:cNvGrpSpPr/>
+        <p:nvPr/>
+      </p:nvGrpSpPr>
+      <p:grpSpPr>
+        <a:xfrm>
+          <a:off x="0" y="0"/>
+          <a:ext cx="0" cy="0"/>
+          <a:chOff x="0" y="0"/>
+          <a:chExt cx="0" cy="0"/>
+        </a:xfrm>
+      </p:grpSpPr>
+      <p:sp>
+        <p:nvSpPr>
+          <p:cNvPr id="2" name="Slide Image Placeholder 1"/>
+          <p:cNvSpPr>
+            <a:spLocks noGrp="1"/>
+          </p:cNvSpPr>
+          <p:nvPr>
+            <p:ph type="sldImg" idx="2"/>
+          </p:nvPr>
+        </p:nvSpPr>
+        <p:spPr/>
+      </p:sp>
+      <p:sp>
+        <p:nvSpPr>
+          <p:cNvPr id="3" name="Notes Placeholder 2"/>
+          <p:cNvSpPr>
+            <a:spLocks noGrp="1"/>
+          </p:cNvSpPr>
+          <p:nvPr>
+            <p:ph type="body" idx="3" sz="quarter"/>
+          </p:nvPr>
+        </p:nvSpPr>
+        <p:spPr/>
+        <p:txBody>
+          <a:bodyPr/>
+          <a:lstStyle/>
+          <a:p>
+            <a:r>
+              <a:t>[입력 데이터 9종 · 60초]</a:t>
+            </a:r>
+          </a:p>
+          <a:p>
+            <a:r>
+              <a:t>- 3 계층 구조 강조: 기본 5종 (CSV·shp), CV 2종 (외부 API), 외부 정밀 2종 (NGII·OSM)</a:t>
+            </a:r>
+          </a:p>
+          <a:p>
+            <a:r>
+              <a:t>- 5종 기본 데이터 중 4종 더미. data_loader.py 가 실데이터 자동 전환</a:t>
+            </a:r>
+          </a:p>
+          <a:p>
+            <a:r>
+              <a:t>- 외부 API: 첫 1회 호출 후 디스크 캐시. 발표 도중 호출 X</a:t>
+            </a:r>
+          </a:p>
+          <a:p/>
+          <a:p>
+            <a:r>
+              <a:t>예상 질문: 더미로 발표 신뢰성? → 동작구 실제 거점 기반 가우시안. 실데이터 자동 전환 구조라 인프라 검증용 충분</a:t>
+            </a:r>
+          </a:p>
+        </p:txBody>
+      </p:sp>
+      <p:sp>
+        <p:nvSpPr>
+          <p:cNvPr id="4" name="Slide Number Placeholder 3"/>
+          <p:cNvSpPr>
+            <a:spLocks noGrp="1"/>
+          </p:cNvSpPr>
+          <p:nvPr>
+            <p:ph type="sldNum" idx="5" sz="quarter"/>
+          </p:nvPr>
+        </p:nvSpPr>
+        <p:spPr/>
+      </p:sp>
+    </p:spTree>
+  </p:cSld>
+  <p:clrMapOvr>
+    <a:masterClrMapping/>
+  </p:clrMapOvr>
+</p:notes>
+</file>
+
+<file path=ppt/notesSlides/notesSlide5.xml><?xml version="1.0" encoding="utf-8"?>
+<p:notes xmlns:a="http://schemas.openxmlformats.org/drawingml/2006/main" xmlns:p="http://schemas.openxmlformats.org/presentationml/2006/main" xmlns:r="http://schemas.openxmlformats.org/officeDocument/2006/relationships">
+  <p:cSld>
+    <p:spTree>
+      <p:nvGrpSpPr>
+        <p:cNvPr id="1" name=""/>
+        <p:cNvGrpSpPr/>
+        <p:nvPr/>
+      </p:nvGrpSpPr>
+      <p:grpSpPr>
+        <a:xfrm>
+          <a:off x="0" y="0"/>
+          <a:ext cx="0" cy="0"/>
+          <a:chOff x="0" y="0"/>
+          <a:chExt cx="0" cy="0"/>
+        </a:xfrm>
+      </p:grpSpPr>
+      <p:sp>
+        <p:nvSpPr>
+          <p:cNvPr id="2" name="Slide Image Placeholder 1"/>
+          <p:cNvSpPr>
+            <a:spLocks noGrp="1"/>
+          </p:cNvSpPr>
+          <p:nvPr>
+            <p:ph type="sldImg" idx="2"/>
+          </p:nvPr>
+        </p:nvSpPr>
+        <p:spPr/>
+      </p:sp>
+      <p:sp>
+        <p:nvSpPr>
+          <p:cNvPr id="3" name="Notes Placeholder 2"/>
+          <p:cNvSpPr>
+            <a:spLocks noGrp="1"/>
+          </p:cNvSpPr>
+          <p:nvPr>
+            <p:ph type="body" idx="3" sz="quarter"/>
+          </p:nvPr>
+        </p:nvSpPr>
+        <p:spPr/>
+        <p:txBody>
+          <a:bodyPr/>
+          <a:lstStyle/>
+          <a:p>
+            <a:r>
+              <a:t>[Score 식 7 피처 · 60초]</a:t>
+            </a:r>
+          </a:p>
+          <a:p>
+            <a:r>
+              <a:t>- 한 줄 공식: Score = 0.18 pop + 0.18 lst + 0.18 vuln − 0.15 shade − 0.05 natural + 0.12 sv + 0.20 inter</a:t>
+            </a:r>
+          </a:p>
+          <a:p>
+            <a:r>
+              <a:t>- 양수 합 0.86, 음수 -0.20. MinMax [0,1] 정규화 후 가중합</a:t>
+            </a:r>
+          </a:p>
+          <a:p>
+            <a:r>
+              <a:t>- 시나리오마다 가중치 재배분. 가중치 절대정답은 없음</a:t>
+            </a:r>
+          </a:p>
+          <a:p>
+            <a:r>
+              <a:t>- Streamlit 슬라이더로 즉시 조정 가능 (다음 다음 슬라이드에서 시연)</a:t>
+            </a:r>
+          </a:p>
+          <a:p/>
+          <a:p>
+            <a:r>
+              <a:t>예상 질문: 가중치 어떻게 정함? → 도메인 직관 + 시나리오 민감도. 6개 시나리오 모두에서 살아남는 입지가 강건 입지</a:t>
+            </a:r>
+          </a:p>
+        </p:txBody>
+      </p:sp>
+      <p:sp>
+        <p:nvSpPr>
+          <p:cNvPr id="4" name="Slide Number Placeholder 3"/>
+          <p:cNvSpPr>
+            <a:spLocks noGrp="1"/>
+          </p:cNvSpPr>
+          <p:nvPr>
+            <p:ph type="sldNum" idx="5" sz="quarter"/>
+          </p:nvPr>
+        </p:nvSpPr>
+        <p:spPr/>
+      </p:sp>
+    </p:spTree>
+  </p:cSld>
+  <p:clrMapOvr>
+    <a:masterClrMapping/>
+  </p:clrMapOvr>
+</p:notes>
+</file>
+
+<file path=ppt/notesSlides/notesSlide6.xml><?xml version="1.0" encoding="utf-8"?>
+<p:notes xmlns:a="http://schemas.openxmlformats.org/drawingml/2006/main" xmlns:p="http://schemas.openxmlformats.org/presentationml/2006/main" xmlns:r="http://schemas.openxmlformats.org/officeDocument/2006/relationships">
+  <p:cSld>
+    <p:spTree>
+      <p:nvGrpSpPr>
+        <p:cNvPr id="1" name=""/>
+        <p:cNvGrpSpPr/>
+        <p:nvPr/>
+      </p:nvGrpSpPr>
+      <p:grpSpPr>
+        <a:xfrm>
+          <a:off x="0" y="0"/>
+          <a:ext cx="0" cy="0"/>
+          <a:chOff x="0" y="0"/>
+          <a:chExt cx="0" cy="0"/>
+        </a:xfrm>
+      </p:grpSpPr>
+      <p:sp>
+        <p:nvSpPr>
+          <p:cNvPr id="2" name="Slide Image Placeholder 1"/>
+          <p:cNvSpPr>
+            <a:spLocks noGrp="1"/>
+          </p:cNvSpPr>
+          <p:nvPr>
+            <p:ph type="sldImg" idx="2"/>
+          </p:nvPr>
+        </p:nvSpPr>
+        <p:spPr/>
+      </p:sp>
+      <p:sp>
+        <p:nvSpPr>
+          <p:cNvPr id="3" name="Notes Placeholder 2"/>
+          <p:cNvSpPr>
+            <a:spLocks noGrp="1"/>
+          </p:cNvSpPr>
+          <p:nvPr>
+            <p:ph type="body" idx="3" sz="quarter"/>
+          </p:nvPr>
+        </p:nvSpPr>
+        <p:spPr/>
+        <p:txBody>
+          <a:bodyPr/>
+          <a:lstStyle/>
+          <a:p>
+            <a:r>
+              <a:t>[공간 필터링 4단계 · 60초]</a:t>
+            </a:r>
+          </a:p>
+          <a:p>
+            <a:r>
+              <a:t>- 단순 Score만으론 건물 위·녹지에 점 같은 시각적 오류 발생</a:t>
+            </a:r>
+          </a:p>
+          <a:p>
+            <a:r>
+              <a:t>- 4단계 컷: 보행로 5m → 그늘막 150m 외 → 건물 안 컷 → 결집지 50m 근접</a:t>
+            </a:r>
+          </a:p>
+          <a:p>
+            <a:r>
+              <a:t>- 3,672 → 449 → 446 → 434 → 330 (약 9%만 살아남음)</a:t>
+            </a:r>
+          </a:p>
+          <a:p>
+            <a:r>
+              <a:t>- 슬라이드 6 의 지도(shade_map.html)는 실시간 임베드. 필요시 직접 클릭/줌 시연</a:t>
+            </a:r>
+          </a:p>
+        </p:txBody>
+      </p:sp>
+      <p:sp>
+        <p:nvSpPr>
+          <p:cNvPr id="4" name="Slide Number Placeholder 3"/>
+          <p:cNvSpPr>
+            <a:spLocks noGrp="1"/>
+          </p:cNvSpPr>
+          <p:nvPr>
+            <p:ph type="sldNum" idx="5" sz="quarter"/>
+          </p:nvPr>
+        </p:nvSpPr>
+        <p:spPr/>
+      </p:sp>
+    </p:spTree>
+  </p:cSld>
+  <p:clrMapOvr>
+    <a:masterClrMapping/>
+  </p:clrMapOvr>
+</p:notes>
+</file>
+
+<file path=ppt/notesSlides/notesSlide7.xml><?xml version="1.0" encoding="utf-8"?>
+<p:notes xmlns:a="http://schemas.openxmlformats.org/drawingml/2006/main" xmlns:p="http://schemas.openxmlformats.org/presentationml/2006/main" xmlns:r="http://schemas.openxmlformats.org/officeDocument/2006/relationships">
+  <p:cSld>
+    <p:spTree>
+      <p:nvGrpSpPr>
+        <p:cNvPr id="1" name=""/>
+        <p:cNvGrpSpPr/>
+        <p:nvPr/>
+      </p:nvGrpSpPr>
+      <p:grpSpPr>
+        <a:xfrm>
+          <a:off x="0" y="0"/>
+          <a:ext cx="0" cy="0"/>
+          <a:chOff x="0" y="0"/>
+          <a:chExt cx="0" cy="0"/>
+        </a:xfrm>
+      </p:grpSpPr>
+      <p:sp>
+        <p:nvSpPr>
+          <p:cNvPr id="2" name="Slide Image Placeholder 1"/>
+          <p:cNvSpPr>
+            <a:spLocks noGrp="1"/>
+          </p:cNvSpPr>
+          <p:nvPr>
+            <p:ph type="sldImg" idx="2"/>
+          </p:nvPr>
+        </p:nvSpPr>
+        <p:spPr/>
+      </p:sp>
+      <p:sp>
+        <p:nvSpPr>
+          <p:cNvPr id="3" name="Notes Placeholder 2"/>
+          <p:cNvSpPr>
+            <a:spLocks noGrp="1"/>
+          </p:cNvSpPr>
+          <p:nvPr>
+            <p:ph type="body" idx="3" sz="quarter"/>
+          </p:nvPr>
+        </p:nvSpPr>
+        <p:spPr/>
+        <p:txBody>
+          <a:bodyPr/>
+          <a:lstStyle/>
+          <a:p>
+            <a:r>
+              <a:t>[CV-A · SAM · 60초]</a:t>
+            </a:r>
+          </a:p>
+          <a:p>
+            <a:r>
+              <a:t>- V-World WMTS z=15 → 48 타일 합성 (2048×1536)</a:t>
+            </a:r>
+          </a:p>
+          <a:p>
+            <a:r>
+              <a:t>- Mobile-SAM (Meta 2023): 40MB CPU 추론, zero-shot</a:t>
+            </a:r>
+          </a:p>
+          <a:p>
+            <a:r>
+              <a:t>- 필터: 면적·종횡비·밝기 3중 → 30동 추출</a:t>
+            </a:r>
+          </a:p>
+          <a:p>
+            <a:r>
+              <a:t>- 흑석동에서는 NGII 3,775동이 자동 union → SAM 30동의 125배 정밀</a:t>
+            </a:r>
+          </a:p>
+          <a:p/>
+          <a:p>
+            <a:r>
+              <a:t>예상 질문: YOLO 대신 SAM 이유? → zero-shot, 라벨 불필요. YOLO 는 학습 데이터 비용 큼</a:t>
+            </a:r>
+          </a:p>
+        </p:txBody>
+      </p:sp>
+      <p:sp>
+        <p:nvSpPr>
+          <p:cNvPr id="4" name="Slide Number Placeholder 3"/>
+          <p:cNvSpPr>
+            <a:spLocks noGrp="1"/>
+          </p:cNvSpPr>
+          <p:nvPr>
+            <p:ph type="sldNum" idx="5" sz="quarter"/>
+          </p:nvPr>
+        </p:nvSpPr>
+        <p:spPr/>
+      </p:sp>
+    </p:spTree>
+  </p:cSld>
+  <p:clrMapOvr>
+    <a:masterClrMapping/>
+  </p:clrMapOvr>
+</p:notes>
+</file>
+
+<file path=ppt/notesSlides/notesSlide8.xml><?xml version="1.0" encoding="utf-8"?>
+<p:notes xmlns:a="http://schemas.openxmlformats.org/drawingml/2006/main" xmlns:p="http://schemas.openxmlformats.org/presentationml/2006/main" xmlns:r="http://schemas.openxmlformats.org/officeDocument/2006/relationships">
+  <p:cSld>
+    <p:spTree>
+      <p:nvGrpSpPr>
+        <p:cNvPr id="1" name=""/>
+        <p:cNvGrpSpPr/>
+        <p:nvPr/>
+      </p:nvGrpSpPr>
+      <p:grpSpPr>
+        <a:xfrm>
+          <a:off x="0" y="0"/>
+          <a:ext cx="0" cy="0"/>
+          <a:chOff x="0" y="0"/>
+          <a:chExt cx="0" cy="0"/>
+        </a:xfrm>
+      </p:grpSpPr>
+      <p:sp>
+        <p:nvSpPr>
+          <p:cNvPr id="2" name="Slide Image Placeholder 1"/>
+          <p:cNvSpPr>
+            <a:spLocks noGrp="1"/>
+          </p:cNvSpPr>
+          <p:nvPr>
+            <p:ph type="sldImg" idx="2"/>
+          </p:nvPr>
+        </p:nvSpPr>
+        <p:spPr/>
+      </p:sp>
+      <p:sp>
+        <p:nvSpPr>
+          <p:cNvPr id="3" name="Notes Placeholder 2"/>
+          <p:cNvSpPr>
+            <a:spLocks noGrp="1"/>
+          </p:cNvSpPr>
+          <p:nvPr>
+            <p:ph type="body" idx="3" sz="quarter"/>
+          </p:nvPr>
+        </p:nvSpPr>
+        <p:spPr/>
+        <p:txBody>
+          <a:bodyPr/>
+          <a:lstStyle/>
+          <a:p>
+            <a:r>
+              <a:t>[CV-B · SegFormer · 60초]</a:t>
+            </a:r>
+          </a:p>
+          <a:p>
+            <a:r>
+              <a:t>- Mapillary BBOX 4×4 검색 → 1,302장 발견. Meta 소유 오픈 거리뷰</a:t>
+            </a:r>
+          </a:p>
+          <a:p>
+            <a:r>
+              <a:t>- 후보 19격자에 nearest 매핑, 격자당 ≤3장</a:t>
+            </a:r>
+          </a:p>
+          <a:p>
+            <a:r>
+              <a:t>- SegFormer-b0 (HuggingFace) CityScapes 19 classes pretrained</a:t>
+            </a:r>
+          </a:p>
+          <a:p>
+            <a:r>
+              <a:t>- 그늘 결핍 = (보도+도로) × (1 − 건물 − 식생)</a:t>
+            </a:r>
+          </a:p>
+          <a:p>
+            <a:r>
+              <a:t>- TOP10 평균 deficit 0.153 → Score 6번째 피처</a:t>
+            </a:r>
+          </a:p>
+          <a:p>
+            <a:r>
+              <a:t>- 선행연구: MIT Treepedia, Place Pulse 2.0</a:t>
+            </a:r>
+          </a:p>
+          <a:p/>
+          <a:p>
+            <a:r>
+              <a:t>예상 질문: 거리뷰 시기 다른데? → 정적 요소 비율은 안정적</a:t>
+            </a:r>
+          </a:p>
+        </p:txBody>
+      </p:sp>
+      <p:sp>
+        <p:nvSpPr>
+          <p:cNvPr id="4" name="Slide Number Placeholder 3"/>
+          <p:cNvSpPr>
+            <a:spLocks noGrp="1"/>
+          </p:cNvSpPr>
+          <p:nvPr>
+            <p:ph type="sldNum" idx="5" sz="quarter"/>
+          </p:nvPr>
+        </p:nvSpPr>
+        <p:spPr/>
+      </p:sp>
+    </p:spTree>
+  </p:cSld>
+  <p:clrMapOvr>
+    <a:masterClrMapping/>
+  </p:clrMapOvr>
+</p:notes>
+</file>
+
+<file path=ppt/notesSlides/notesSlide9.xml><?xml version="1.0" encoding="utf-8"?>
+<p:notes xmlns:a="http://schemas.openxmlformats.org/drawingml/2006/main" xmlns:p="http://schemas.openxmlformats.org/presentationml/2006/main" xmlns:r="http://schemas.openxmlformats.org/officeDocument/2006/relationships">
+  <p:cSld>
+    <p:spTree>
+      <p:nvGrpSpPr>
+        <p:cNvPr id="1" name=""/>
+        <p:cNvGrpSpPr/>
+        <p:nvPr/>
+      </p:nvGrpSpPr>
+      <p:grpSpPr>
+        <a:xfrm>
+          <a:off x="0" y="0"/>
+          <a:ext cx="0" cy="0"/>
+          <a:chOff x="0" y="0"/>
+          <a:chExt cx="0" cy="0"/>
+        </a:xfrm>
+      </p:grpSpPr>
+      <p:sp>
+        <p:nvSpPr>
+          <p:cNvPr id="2" name="Slide Image Placeholder 1"/>
+          <p:cNvSpPr>
+            <a:spLocks noGrp="1"/>
+          </p:cNvSpPr>
+          <p:nvPr>
+            <p:ph type="sldImg" idx="2"/>
+          </p:nvPr>
+        </p:nvSpPr>
+        <p:spPr/>
+      </p:sp>
+      <p:sp>
+        <p:nvSpPr>
+          <p:cNvPr id="3" name="Notes Placeholder 2"/>
+          <p:cNvSpPr>
+            <a:spLocks noGrp="1"/>
+          </p:cNvSpPr>
+          <p:nvPr>
+            <p:ph type="body" idx="3" sz="quarter"/>
+          </p:nvPr>
+        </p:nvSpPr>
+        <p:spPr/>
+        <p:txBody>
+          <a:bodyPr/>
+          <a:lstStyle/>
+          <a:p>
+            <a:r>
+              <a:t>[CV-DSM · Deep Umbra 영감 · 75초 — 강의 13p 핵심]</a:t>
+            </a:r>
+          </a:p>
+          <a:p>
+            <a:r>
+              <a:t>- 강의자료 13p 에 우리 프로젝트 옆에 Deep Umbra 논문 박혀 있었음 (evl.uic.edu/shadows)</a:t>
+            </a:r>
+          </a:p>
+          <a:p>
+            <a:r>
+              <a:t>- Deep Umbra: GAN 으로 일조/그림자 누적 맵 생성. RMSE 0.063, SSIM 0.90</a:t>
+            </a:r>
+          </a:p>
+          <a:p>
+            <a:r>
+              <a:t>- 우리는 풀 GAN 학습 대신 DSM 실측 + 4시점 ray-cast 로 단순화</a:t>
+            </a:r>
+          </a:p>
+          <a:p>
+            <a:r>
+              <a:t>- DSM(표면) − DEM(지표) = nDSM(객체 높이)</a:t>
+            </a:r>
+          </a:p>
+          <a:p>
+            <a:r>
+              <a:t>- 4시점 (10·12·14·16시) shadow union → 누적 비율 [0,1]</a:t>
+            </a:r>
+          </a:p>
+          <a:p>
+            <a:r>
+              <a:t>- 흑석동 309격자에 평균 누적 0.157 → 단일 시점보다 훨씬 정밀</a:t>
+            </a:r>
+          </a:p>
+          <a:p>
+            <a:r>
+              <a:t>- NGII 흑석동 실측 건물 3,775동도 동시 통합</a:t>
+            </a:r>
+          </a:p>
+          <a:p/>
+          <a:p>
+            <a:r>
+              <a:t>예상 질문: 왜 풀 GAN 안 썼나? → 학습 시간/데이터 부담. 4시점 ray-cast 로 같은 메시지. GAN 으로 확장 여지</a:t>
+            </a:r>
+          </a:p>
+        </p:txBody>
+      </p:sp>
+      <p:sp>
+        <p:nvSpPr>
+          <p:cNvPr id="4" name="Slide Number Placeholder 3"/>
+          <p:cNvSpPr>
+            <a:spLocks noGrp="1"/>
+          </p:cNvSpPr>
+          <p:nvPr>
+            <p:ph type="sldNum" idx="5" sz="quarter"/>
+          </p:nvPr>
+        </p:nvSpPr>
+        <p:spPr/>
+      </p:sp>
+    </p:spTree>
+  </p:cSld>
+  <p:clrMapOvr>
+    <a:masterClrMapping/>
+  </p:clrMapOvr>
+</p:notes>
 </file>
 
 <file path=ppt/slideLayouts/slideLayout1.xml><?xml version="1.0" encoding="utf-8"?>
@@ -13003,4 +14838,324 @@
   </a:objectDefaults>
   <a:extraClrSchemeLst/>
 </a:theme>
+</file>
+
+<file path=ppt/theme/theme2.xml><?xml version="1.0" encoding="utf-8"?>
+<a:theme xmlns:a="http://schemas.openxmlformats.org/drawingml/2006/main" name="Office Theme">
+  <a:themeElements>
+    <a:clrScheme name="Office">
+      <a:dk1>
+        <a:sysClr val="windowText" lastClr="000000"/>
+      </a:dk1>
+      <a:lt1>
+        <a:sysClr val="window" lastClr="FFFFFF"/>
+      </a:lt1>
+      <a:dk2>
+        <a:srgbClr val="1F497D"/>
+      </a:dk2>
+      <a:lt2>
+        <a:srgbClr val="EEECE1"/>
+      </a:lt2>
+      <a:accent1>
+        <a:srgbClr val="4F81BD"/>
+      </a:accent1>
+      <a:accent2>
+        <a:srgbClr val="C0504D"/>
+      </a:accent2>
+      <a:accent3>
+        <a:srgbClr val="9BBB59"/>
+      </a:accent3>
+      <a:accent4>
+        <a:srgbClr val="8064A2"/>
+      </a:accent4>
+      <a:accent5>
+        <a:srgbClr val="4BACC6"/>
+      </a:accent5>
+      <a:accent6>
+        <a:srgbClr val="F79646"/>
+      </a:accent6>
+      <a:hlink>
+        <a:srgbClr val="0000FF"/>
+      </a:hlink>
+      <a:folHlink>
+        <a:srgbClr val="800080"/>
+      </a:folHlink>
+    </a:clrScheme>
+    <a:fontScheme name="Office">
+      <a:majorFont>
+        <a:latin typeface="Calibri"/>
+        <a:ea typeface=""/>
+        <a:cs typeface=""/>
+        <a:font script="Jpan" typeface="ＭＳ Ｐゴシック"/>
+        <a:font script="Hang" typeface="맑은 고딕"/>
+        <a:font script="Hans" typeface="宋体"/>
+        <a:font script="Hant" typeface="新細明體"/>
+        <a:font script="Arab" typeface="Times New Roman"/>
+        <a:font script="Hebr" typeface="Times New Roman"/>
+        <a:font script="Thai" typeface="Angsana New"/>
+        <a:font script="Ethi" typeface="Nyala"/>
+        <a:font script="Beng" typeface="Vrinda"/>
+        <a:font script="Gujr" typeface="Shruti"/>
+        <a:font script="Khmr" typeface="MoolBoran"/>
+        <a:font script="Knda" typeface="Tunga"/>
+        <a:font script="Guru" typeface="Raavi"/>
+        <a:font script="Cans" typeface="Euphemia"/>
+        <a:font script="Cher" typeface="Plantagenet Cherokee"/>
+        <a:font script="Yiii" typeface="Microsoft Yi Baiti"/>
+        <a:font script="Tibt" typeface="Microsoft Himalaya"/>
+        <a:font script="Thaa" typeface="MV Boli"/>
+        <a:font script="Deva" typeface="Mangal"/>
+        <a:font script="Telu" typeface="Gautami"/>
+        <a:font script="Taml" typeface="Latha"/>
+        <a:font script="Syrc" typeface="Estrangelo Edessa"/>
+        <a:font script="Orya" typeface="Kalinga"/>
+        <a:font script="Mlym" typeface="Kartika"/>
+        <a:font script="Laoo" typeface="DokChampa"/>
+        <a:font script="Sinh" typeface="Iskoola Pota"/>
+        <a:font script="Mong" typeface="Mongolian Baiti"/>
+        <a:font script="Viet" typeface="Times New Roman"/>
+        <a:font script="Uigh" typeface="Microsoft Uighur"/>
+        <a:font script="Geor" typeface="Sylfaen"/>
+      </a:majorFont>
+      <a:minorFont>
+        <a:latin typeface="Calibri"/>
+        <a:ea typeface=""/>
+        <a:cs typeface=""/>
+        <a:font script="Jpan" typeface="ＭＳ Ｐゴシック"/>
+        <a:font script="Hang" typeface="맑은 고딕"/>
+        <a:font script="Hans" typeface="宋体"/>
+        <a:font script="Hant" typeface="新細明體"/>
+        <a:font script="Arab" typeface="Arial"/>
+        <a:font script="Hebr" typeface="Arial"/>
+        <a:font script="Thai" typeface="Cordia New"/>
+        <a:font script="Ethi" typeface="Nyala"/>
+        <a:font script="Beng" typeface="Vrinda"/>
+        <a:font script="Gujr" typeface="Shruti"/>
+        <a:font script="Khmr" typeface="DaunPenh"/>
+        <a:font script="Knda" typeface="Tunga"/>
+        <a:font script="Guru" typeface="Raavi"/>
+        <a:font script="Cans" typeface="Euphemia"/>
+        <a:font script="Cher" typeface="Plantagenet Cherokee"/>
+        <a:font script="Yiii" typeface="Microsoft Yi Baiti"/>
+        <a:font script="Tibt" typeface="Microsoft Himalaya"/>
+        <a:font script="Thaa" typeface="MV Boli"/>
+        <a:font script="Deva" typeface="Mangal"/>
+        <a:font script="Telu" typeface="Gautami"/>
+        <a:font script="Taml" typeface="Latha"/>
+        <a:font script="Syrc" typeface="Estrangelo Edessa"/>
+        <a:font script="Orya" typeface="Kalinga"/>
+        <a:font script="Mlym" typeface="Kartika"/>
+        <a:font script="Laoo" typeface="DokChampa"/>
+        <a:font script="Sinh" typeface="Iskoola Pota"/>
+        <a:font script="Mong" typeface="Mongolian Baiti"/>
+        <a:font script="Viet" typeface="Arial"/>
+        <a:font script="Uigh" typeface="Microsoft Uighur"/>
+        <a:font script="Geor" typeface="Sylfaen"/>
+      </a:minorFont>
+    </a:fontScheme>
+    <a:fmtScheme name="Office">
+      <a:fillStyleLst>
+        <a:solidFill>
+          <a:schemeClr val="phClr"/>
+        </a:solidFill>
+        <a:gradFill rotWithShape="1">
+          <a:gsLst>
+            <a:gs pos="0">
+              <a:schemeClr val="phClr">
+                <a:tint val="50000"/>
+                <a:satMod val="300000"/>
+              </a:schemeClr>
+            </a:gs>
+            <a:gs pos="35000">
+              <a:schemeClr val="phClr">
+                <a:tint val="37000"/>
+                <a:satMod val="300000"/>
+              </a:schemeClr>
+            </a:gs>
+            <a:gs pos="100000">
+              <a:schemeClr val="phClr">
+                <a:tint val="15000"/>
+                <a:satMod val="350000"/>
+              </a:schemeClr>
+            </a:gs>
+          </a:gsLst>
+          <a:lin ang="16200000" scaled="1"/>
+        </a:gradFill>
+        <a:gradFill rotWithShape="1">
+          <a:gsLst>
+            <a:gs pos="0">
+              <a:schemeClr val="phClr">
+                <a:tint val="100000"/>
+                <a:shade val="100000"/>
+                <a:satMod val="130000"/>
+              </a:schemeClr>
+            </a:gs>
+            <a:gs pos="100000">
+              <a:schemeClr val="phClr">
+                <a:tint val="50000"/>
+                <a:shade val="100000"/>
+                <a:satMod val="350000"/>
+              </a:schemeClr>
+            </a:gs>
+          </a:gsLst>
+          <a:lin ang="16200000" scaled="0"/>
+        </a:gradFill>
+      </a:fillStyleLst>
+      <a:lnStyleLst>
+        <a:ln w="9525" cap="flat" cmpd="sng" algn="ctr">
+          <a:solidFill>
+            <a:schemeClr val="phClr">
+              <a:shade val="95000"/>
+              <a:satMod val="105000"/>
+            </a:schemeClr>
+          </a:solidFill>
+          <a:prstDash val="solid"/>
+        </a:ln>
+        <a:ln w="25400" cap="flat" cmpd="sng" algn="ctr">
+          <a:solidFill>
+            <a:schemeClr val="phClr"/>
+          </a:solidFill>
+          <a:prstDash val="solid"/>
+        </a:ln>
+        <a:ln w="38100" cap="flat" cmpd="sng" algn="ctr">
+          <a:solidFill>
+            <a:schemeClr val="phClr"/>
+          </a:solidFill>
+          <a:prstDash val="solid"/>
+        </a:ln>
+      </a:lnStyleLst>
+      <a:effectStyleLst>
+        <a:effectStyle>
+          <a:effectLst>
+            <a:outerShdw blurRad="40000" dist="20000" dir="5400000" rotWithShape="0">
+              <a:srgbClr val="000000">
+                <a:alpha val="38000"/>
+              </a:srgbClr>
+            </a:outerShdw>
+          </a:effectLst>
+        </a:effectStyle>
+        <a:effectStyle>
+          <a:effectLst>
+            <a:outerShdw blurRad="40000" dist="23000" dir="5400000" rotWithShape="0">
+              <a:srgbClr val="000000">
+                <a:alpha val="35000"/>
+              </a:srgbClr>
+            </a:outerShdw>
+          </a:effectLst>
+        </a:effectStyle>
+        <a:effectStyle>
+          <a:effectLst>
+            <a:outerShdw blurRad="40000" dist="23000" dir="5400000" rotWithShape="0">
+              <a:srgbClr val="000000">
+                <a:alpha val="35000"/>
+              </a:srgbClr>
+            </a:outerShdw>
+          </a:effectLst>
+          <a:scene3d>
+            <a:camera prst="orthographicFront">
+              <a:rot lat="0" lon="0" rev="0"/>
+            </a:camera>
+            <a:lightRig rig="threePt" dir="t">
+              <a:rot lat="0" lon="0" rev="1200000"/>
+            </a:lightRig>
+          </a:scene3d>
+          <a:sp3d>
+            <a:bevelT w="63500" h="25400"/>
+          </a:sp3d>
+        </a:effectStyle>
+      </a:effectStyleLst>
+      <a:bgFillStyleLst>
+        <a:solidFill>
+          <a:schemeClr val="phClr"/>
+        </a:solidFill>
+        <a:gradFill rotWithShape="1">
+          <a:gsLst>
+            <a:gs pos="0">
+              <a:schemeClr val="phClr">
+                <a:tint val="40000"/>
+                <a:satMod val="350000"/>
+              </a:schemeClr>
+            </a:gs>
+            <a:gs pos="40000">
+              <a:schemeClr val="phClr">
+                <a:tint val="45000"/>
+                <a:shade val="99000"/>
+                <a:satMod val="350000"/>
+              </a:schemeClr>
+            </a:gs>
+            <a:gs pos="100000">
+              <a:schemeClr val="phClr">
+                <a:shade val="20000"/>
+                <a:satMod val="255000"/>
+              </a:schemeClr>
+            </a:gs>
+          </a:gsLst>
+          <a:path path="circle">
+            <a:fillToRect l="50000" t="-80000" r="50000" b="180000"/>
+          </a:path>
+        </a:gradFill>
+        <a:gradFill rotWithShape="1">
+          <a:gsLst>
+            <a:gs pos="0">
+              <a:schemeClr val="phClr">
+                <a:tint val="80000"/>
+                <a:satMod val="300000"/>
+              </a:schemeClr>
+            </a:gs>
+            <a:gs pos="100000">
+              <a:schemeClr val="phClr">
+                <a:shade val="30000"/>
+                <a:satMod val="200000"/>
+              </a:schemeClr>
+            </a:gs>
+          </a:gsLst>
+          <a:path path="circle">
+            <a:fillToRect l="50000" t="50000" r="50000" b="50000"/>
+          </a:path>
+        </a:gradFill>
+      </a:bgFillStyleLst>
+    </a:fmtScheme>
+  </a:themeElements>
+  <a:objectDefaults>
+    <a:spDef>
+      <a:spPr/>
+      <a:bodyPr/>
+      <a:lstStyle/>
+      <a:style>
+        <a:lnRef idx="1">
+          <a:schemeClr val="accent1"/>
+        </a:lnRef>
+        <a:fillRef idx="3">
+          <a:schemeClr val="accent1"/>
+        </a:fillRef>
+        <a:effectRef idx="2">
+          <a:schemeClr val="accent1"/>
+        </a:effectRef>
+        <a:fontRef idx="minor">
+          <a:schemeClr val="lt1"/>
+        </a:fontRef>
+      </a:style>
+    </a:spDef>
+    <a:lnDef>
+      <a:spPr/>
+      <a:bodyPr/>
+      <a:lstStyle/>
+      <a:style>
+        <a:lnRef idx="2">
+          <a:schemeClr val="accent1"/>
+        </a:lnRef>
+        <a:fillRef idx="0">
+          <a:schemeClr val="accent1"/>
+        </a:fillRef>
+        <a:effectRef idx="1">
+          <a:schemeClr val="accent1"/>
+        </a:effectRef>
+        <a:fontRef idx="minor">
+          <a:schemeClr val="tx1"/>
+        </a:fontRef>
+      </a:style>
+    </a:lnDef>
+  </a:objectDefaults>
+  <a:extraClrSchemeLst/>
+</a:theme>
 </file>
--- a/presentation/동작구_그늘막_최종발표.pptx
+++ b/presentation/동작구_그늘막_최종발표.pptx
@@ -20,6 +20,7 @@
     <p:sldId id="268" r:id="rId19"/>
     <p:sldId id="269" r:id="rId20"/>
     <p:sldId id="270" r:id="rId21"/>
+    <p:sldId id="271" r:id="rId22"/>
   </p:sldIdLst>
   <p:sldSz cx="12191695" cy="6858000" type="screen4x3"/>
   <p:notesSz cx="6858000" cy="9144000"/>
@@ -727,7 +728,7 @@
           </a:p>
           <a:p>
             <a:r>
-              <a:t>- 동일 피처 위에 가중치만 바꿔 재스코어 = 정책 스트레스 테스트</a:t>
+              <a:t>- 동일 피처 위에 가중치만 바꿔 재스코어 = 정책 민감도 분석</a:t>
             </a:r>
           </a:p>
           <a:p>
@@ -1024,37 +1025,53 @@
           <a:lstStyle/>
           <a:p>
             <a:r>
-              <a:t>[Streamlit 대시보드 · 45초 — 시연용]</a:t>
-            </a:r>
-          </a:p>
-          <a:p>
-            <a:r>
-              <a:t>- streamlit run app.py → http://localhost:8501</a:t>
-            </a:r>
-          </a:p>
-          <a:p>
-            <a:r>
-              <a:t>- 사이드바: 시나리오 프리셋 + 7개 가중치 슬라이더</a:t>
-            </a:r>
-          </a:p>
-          <a:p>
-            <a:r>
-              <a:t>- 본문: Folium 지도 + TOP10 표 + 통계</a:t>
-            </a:r>
-          </a:p>
-          <a:p>
-            <a:r>
-              <a:t>- 캐싱: 격자·피처 1회, 슬라이더는 가중합만 (밀리초)</a:t>
-            </a:r>
-          </a:p>
-          <a:p>
-            <a:r>
-              <a:t>- 발표 중 "vuln 더 올리면?" 질문에 즉답</a:t>
-            </a:r>
-          </a:p>
-          <a:p>
-            <a:r>
-              <a:t>- 시간 여유 있으면 별도 창에서 슬라이더 1~2개 움직여 시연</a:t>
+              <a:t>[예산 제약 최적화 · 60초 — NEW]</a:t>
+            </a:r>
+          </a:p>
+          <a:p>
+            <a:r>
+              <a:t>- 정책 직답: "예산 N원 = 그늘막 K개 = 어디?"</a:t>
+            </a:r>
+          </a:p>
+          <a:p>
+            <a:r>
+              <a:t>- PuLP 정수 선형계획법 (CBC 솔버, 무료)</a:t>
+            </a:r>
+          </a:p>
+          <a:p>
+            <a:r>
+              <a:t>- 목표: max Σ score_i · x_i</a:t>
+            </a:r>
+          </a:p>
+          <a:p>
+            <a:r>
+              <a:t>- 제약: 예산(Σ cost·x ≤ B) + 공간 분산(가까운 격자 동시선택 X)</a:t>
+            </a:r>
+          </a:p>
+          <a:p>
+            <a:r>
+              <a:t>- 후보 풀 50개 → 200m 이격 제약 29쌍 active</a:t>
+            </a:r>
+          </a:p>
+          <a:p>
+            <a:r>
+              <a:t>- 결과: status=Optimal, 5개 선정, 총 score 1.852, 예산 100% 사용</a:t>
+            </a:r>
+          </a:p>
+          <a:p>
+            <a:r>
+              <a:t>- 선정 분포: 사당-이수 4 + 노량진 1 (자동 분산)</a:t>
+            </a:r>
+          </a:p>
+          <a:p>
+            <a:r>
+              <a:t>- TOP10 단순 정렬과 다른 점: 200m 이격으로 같은 곳 몰림 방지</a:t>
+            </a:r>
+          </a:p>
+          <a:p/>
+          <a:p>
+            <a:r>
+              <a:t>예상 질문: 단가 800만원 근거? → 더미. 실 단가 확보 시 즉시 교체. 단가가 달라도 비례적으로 K개 결정</a:t>
             </a:r>
           </a:p>
         </p:txBody>
@@ -1124,12 +1141,112 @@
           <a:lstStyle/>
           <a:p>
             <a:r>
+              <a:t>[Streamlit 대시보드 · 45초 — 시연용]</a:t>
+            </a:r>
+          </a:p>
+          <a:p>
+            <a:r>
+              <a:t>- streamlit run app.py → http://localhost:8501</a:t>
+            </a:r>
+          </a:p>
+          <a:p>
+            <a:r>
+              <a:t>- 사이드바: 시나리오 프리셋 + 7개 가중치 슬라이더</a:t>
+            </a:r>
+          </a:p>
+          <a:p>
+            <a:r>
+              <a:t>- 본문: Folium 지도 + TOP10 표 + 통계</a:t>
+            </a:r>
+          </a:p>
+          <a:p>
+            <a:r>
+              <a:t>- 캐싱: 격자·피처 1회, 슬라이더는 가중합만 (밀리초)</a:t>
+            </a:r>
+          </a:p>
+          <a:p>
+            <a:r>
+              <a:t>- 발표 중 "vuln 더 올리면?" 질문에 즉답</a:t>
+            </a:r>
+          </a:p>
+          <a:p>
+            <a:r>
+              <a:t>- 시간 여유 있으면 별도 창에서 슬라이더 1~2개 움직여 시연</a:t>
+            </a:r>
+          </a:p>
+        </p:txBody>
+      </p:sp>
+      <p:sp>
+        <p:nvSpPr>
+          <p:cNvPr id="4" name="Slide Number Placeholder 3"/>
+          <p:cNvSpPr>
+            <a:spLocks noGrp="1"/>
+          </p:cNvSpPr>
+          <p:nvPr>
+            <p:ph type="sldNum" idx="5" sz="quarter"/>
+          </p:nvPr>
+        </p:nvSpPr>
+        <p:spPr/>
+      </p:sp>
+    </p:spTree>
+  </p:cSld>
+  <p:clrMapOvr>
+    <a:masterClrMapping/>
+  </p:clrMapOvr>
+</p:notes>
+</file>
+
+<file path=ppt/notesSlides/notesSlide16.xml><?xml version="1.0" encoding="utf-8"?>
+<p:notes xmlns:a="http://schemas.openxmlformats.org/drawingml/2006/main" xmlns:p="http://schemas.openxmlformats.org/presentationml/2006/main" xmlns:r="http://schemas.openxmlformats.org/officeDocument/2006/relationships">
+  <p:cSld>
+    <p:spTree>
+      <p:nvGrpSpPr>
+        <p:cNvPr id="1" name=""/>
+        <p:cNvGrpSpPr/>
+        <p:nvPr/>
+      </p:nvGrpSpPr>
+      <p:grpSpPr>
+        <a:xfrm>
+          <a:off x="0" y="0"/>
+          <a:ext cx="0" cy="0"/>
+          <a:chOff x="0" y="0"/>
+          <a:chExt cx="0" cy="0"/>
+        </a:xfrm>
+      </p:grpSpPr>
+      <p:sp>
+        <p:nvSpPr>
+          <p:cNvPr id="2" name="Slide Image Placeholder 1"/>
+          <p:cNvSpPr>
+            <a:spLocks noGrp="1"/>
+          </p:cNvSpPr>
+          <p:nvPr>
+            <p:ph type="sldImg" idx="2"/>
+          </p:nvPr>
+        </p:nvSpPr>
+        <p:spPr/>
+      </p:sp>
+      <p:sp>
+        <p:nvSpPr>
+          <p:cNvPr id="3" name="Notes Placeholder 2"/>
+          <p:cNvSpPr>
+            <a:spLocks noGrp="1"/>
+          </p:cNvSpPr>
+          <p:nvPr>
+            <p:ph type="body" idx="3" sz="quarter"/>
+          </p:nvPr>
+        </p:nvSpPr>
+        <p:spPr/>
+        <p:txBody>
+          <a:bodyPr/>
+          <a:lstStyle/>
+          <a:p>
+            <a:r>
               <a:t>[한계 + 한 줄 요약 · 45초]</a:t>
             </a:r>
           </a:p>
           <a:p>
             <a:r>
-              <a:t>- 한계: 4종 기본 데이터 더미 / LST 래스터 미연결 / SAM 추정 높이 / 예산 제약 미반영</a:t>
+              <a:t>- 한계: 4종 기본 데이터 더미 / LST 래스터 미연결 / SAM 추정 높이 / 단가 800만원 가정</a:t>
             </a:r>
           </a:p>
           <a:p>
@@ -1139,7 +1256,7 @@
           </a:p>
           <a:p>
             <a:r>
-              <a:t>- 한 줄 요약: 항공·거리뷰·DSM·도로망·실측 통합 → 강건 입지 2 + 사각지대 4</a:t>
+              <a:t>- 한 줄 요약: 항공·거리뷰·DSM·도로망·실측 + MCDA + 배낭 최적화로 강건 2 + 사각지대 4 + 예산 5곳</a:t>
             </a:r>
           </a:p>
           <a:p>
@@ -1235,7 +1352,7 @@
           </a:p>
           <a:p>
             <a:r>
-              <a:t>- 핵심 메시지: 채권 트레이더 프레임이 도시 공간 최적화에 자연스럽게 이식됨</a:t>
+              <a:t>- 핵심 메시지: 데이터 통합 + 다기준 의사결정으로 객관적 최적 입지 도출</a:t>
             </a:r>
           </a:p>
           <a:p>
@@ -1245,7 +1362,7 @@
           </a:p>
           <a:p>
             <a:r>
-              <a:t>- 트레이더 동형 매핑: 피처=수익률 곡선 요인, 격자=포트폴리오, 시나리오=금리 스트레스 테스트</a:t>
+              <a:t>- 우리 방식: 9종 데이터 → 7 피처 가중합 → 다단계 필터 → 6 시나리오 비교 → 강건 입지</a:t>
             </a:r>
           </a:p>
           <a:p>
@@ -5778,7 +5895,7 @@
                 </a:solidFill>
                 <a:latin typeface="맑은 고딕"/>
               </a:rPr>
-              <a:t>10 / 15</a:t>
+              <a:t>10 / 16</a:t>
             </a:r>
           </a:p>
         </p:txBody>
@@ -6655,7 +6772,7 @@
                 </a:solidFill>
                 <a:latin typeface="맑은 고딕"/>
               </a:rPr>
-              <a:t>11 / 15</a:t>
+              <a:t>11 / 16</a:t>
             </a:r>
           </a:p>
         </p:txBody>
@@ -7330,7 +7447,7 @@
                 </a:solidFill>
                 <a:latin typeface="맑은 고딕"/>
               </a:rPr>
-              <a:t>12 / 15</a:t>
+              <a:t>12 / 16</a:t>
             </a:r>
           </a:p>
         </p:txBody>
@@ -8653,7 +8770,7 @@
                 </a:solidFill>
                 <a:latin typeface="맑은 고딕"/>
               </a:rPr>
-              <a:t>13 / 15</a:t>
+              <a:t>13 / 16</a:t>
             </a:r>
           </a:p>
         </p:txBody>
@@ -8667,6 +8784,656 @@
 </file>
 
 <file path=ppt/slides/slide14.xml><?xml version="1.0" encoding="utf-8"?>
+<p:sld xmlns:a="http://schemas.openxmlformats.org/drawingml/2006/main" xmlns:p="http://schemas.openxmlformats.org/presentationml/2006/main" xmlns:r="http://schemas.openxmlformats.org/officeDocument/2006/relationships">
+  <p:cSld>
+    <p:spTree>
+      <p:nvGrpSpPr>
+        <p:cNvPr id="1" name=""/>
+        <p:cNvGrpSpPr/>
+        <p:nvPr/>
+      </p:nvGrpSpPr>
+      <p:grpSpPr/>
+      <p:sp>
+        <p:nvSpPr>
+          <p:cNvPr id="2" name="Rectangle 1"/>
+          <p:cNvSpPr/>
+          <p:nvPr/>
+        </p:nvSpPr>
+        <p:spPr>
+          <a:xfrm>
+            <a:off x="457200" y="457200"/>
+            <a:ext cx="109728" cy="731520"/>
+          </a:xfrm>
+          <a:prstGeom prst="rect">
+            <a:avLst/>
+          </a:prstGeom>
+          <a:solidFill>
+            <a:srgbClr val="1E88E5"/>
+          </a:solidFill>
+          <a:ln>
+            <a:noFill/>
+          </a:ln>
+        </p:spPr>
+        <p:style>
+          <a:lnRef idx="1">
+            <a:schemeClr val="accent1"/>
+          </a:lnRef>
+          <a:fillRef idx="3">
+            <a:schemeClr val="accent1"/>
+          </a:fillRef>
+          <a:effectRef idx="2">
+            <a:schemeClr val="accent1"/>
+          </a:effectRef>
+          <a:fontRef idx="minor">
+            <a:schemeClr val="lt1"/>
+          </a:fontRef>
+        </p:style>
+        <p:txBody>
+          <a:bodyPr rtlCol="0" anchor="ctr"/>
+          <a:lstStyle/>
+          <a:p>
+            <a:pPr algn="ctr"/>
+          </a:p>
+        </p:txBody>
+      </p:sp>
+      <p:sp>
+        <p:nvSpPr>
+          <p:cNvPr id="3" name="TextBox 2"/>
+          <p:cNvSpPr txBox="1"/>
+          <p:nvPr/>
+        </p:nvSpPr>
+        <p:spPr>
+          <a:xfrm>
+            <a:off x="685800" y="411480"/>
+            <a:ext cx="10972800" cy="548640"/>
+          </a:xfrm>
+          <a:prstGeom prst="rect">
+            <a:avLst/>
+          </a:prstGeom>
+          <a:noFill/>
+        </p:spPr>
+        <p:txBody>
+          <a:bodyPr wrap="square">
+            <a:spAutoFit/>
+          </a:bodyPr>
+          <a:lstStyle/>
+          <a:p>
+            <a:pPr algn="l"/>
+            <a:r>
+              <a:rPr sz="2800" b="1">
+                <a:solidFill>
+                  <a:srgbClr val="212121"/>
+                </a:solidFill>
+                <a:latin typeface="맑은 고딕"/>
+              </a:rPr>
+              <a:t>예산 제약 최적화 (Budget-Constrained Knapsack)</a:t>
+            </a:r>
+          </a:p>
+        </p:txBody>
+      </p:sp>
+      <p:sp>
+        <p:nvSpPr>
+          <p:cNvPr id="4" name="TextBox 3"/>
+          <p:cNvSpPr txBox="1"/>
+          <p:nvPr/>
+        </p:nvSpPr>
+        <p:spPr>
+          <a:xfrm>
+            <a:off x="685800" y="914400"/>
+            <a:ext cx="10972800" cy="365760"/>
+          </a:xfrm>
+          <a:prstGeom prst="rect">
+            <a:avLst/>
+          </a:prstGeom>
+          <a:noFill/>
+        </p:spPr>
+        <p:txBody>
+          <a:bodyPr wrap="square">
+            <a:spAutoFit/>
+          </a:bodyPr>
+          <a:lstStyle/>
+          <a:p>
+            <a:pPr algn="l"/>
+            <a:r>
+              <a:rPr sz="1300" b="0">
+                <a:solidFill>
+                  <a:srgbClr val="555555"/>
+                </a:solidFill>
+                <a:latin typeface="맑은 고딕"/>
+              </a:rPr>
+              <a:t>예산 N원 = 그늘막 K개 = 어디? 정책 결정에 직접 답</a:t>
+            </a:r>
+          </a:p>
+        </p:txBody>
+      </p:sp>
+      <p:sp>
+        <p:nvSpPr>
+          <p:cNvPr id="5" name="Rounded Rectangle 4"/>
+          <p:cNvSpPr/>
+          <p:nvPr/>
+        </p:nvSpPr>
+        <p:spPr>
+          <a:xfrm>
+            <a:off x="685800" y="1645920"/>
+            <a:ext cx="6858000" cy="1828800"/>
+          </a:xfrm>
+          <a:prstGeom prst="roundRect">
+            <a:avLst/>
+          </a:prstGeom>
+          <a:solidFill>
+            <a:srgbClr val="212121"/>
+          </a:solidFill>
+          <a:ln>
+            <a:noFill/>
+          </a:ln>
+        </p:spPr>
+        <p:style>
+          <a:lnRef idx="1">
+            <a:schemeClr val="accent1"/>
+          </a:lnRef>
+          <a:fillRef idx="3">
+            <a:schemeClr val="accent1"/>
+          </a:fillRef>
+          <a:effectRef idx="2">
+            <a:schemeClr val="accent1"/>
+          </a:effectRef>
+          <a:fontRef idx="minor">
+            <a:schemeClr val="lt1"/>
+          </a:fontRef>
+        </p:style>
+        <p:txBody>
+          <a:bodyPr rtlCol="0" anchor="ctr" wrap="square" lIns="274320" tIns="182880"/>
+          <a:lstStyle/>
+          <a:p>
+            <a:pPr algn="ctr"/>
+            <a:r>
+              <a:rPr sz="1800" b="1">
+                <a:solidFill>
+                  <a:srgbClr val="FFEE58"/>
+                </a:solidFill>
+                <a:latin typeface="맑은 고딕"/>
+              </a:rPr>
+              <a:t>max Σ score_i × x_i</a:t>
+            </a:r>
+          </a:p>
+          <a:p>
+            <a:pPr algn="ctr">
+              <a:spcBef>
+                <a:spcPts val="200"/>
+              </a:spcBef>
+            </a:pPr>
+            <a:r>
+              <a:rPr sz="1200" b="0">
+                <a:solidFill>
+                  <a:srgbClr val="FFFFFF"/>
+                </a:solidFill>
+                <a:latin typeface="맑은 고딕"/>
+              </a:rPr>
+              <a:t>subject to:</a:t>
+            </a:r>
+          </a:p>
+          <a:p>
+            <a:pPr algn="ctr">
+              <a:spcBef>
+                <a:spcPts val="200"/>
+              </a:spcBef>
+            </a:pPr>
+            <a:r>
+              <a:rPr sz="1200" b="0">
+                <a:solidFill>
+                  <a:srgbClr val="FFFFFF"/>
+                </a:solidFill>
+                <a:latin typeface="맑은 고딕"/>
+              </a:rPr>
+              <a:t>  Σ cost_i × x_i ≤ 예산</a:t>
+            </a:r>
+          </a:p>
+          <a:p>
+            <a:pPr algn="ctr">
+              <a:spcBef>
+                <a:spcPts val="200"/>
+              </a:spcBef>
+            </a:pPr>
+            <a:r>
+              <a:rPr sz="1200" b="0">
+                <a:solidFill>
+                  <a:srgbClr val="FFFFFF"/>
+                </a:solidFill>
+                <a:latin typeface="맑은 고딕"/>
+              </a:rPr>
+              <a:t>  x_i + x_j ≤ 1   if dist(i,j) &lt; 200m</a:t>
+            </a:r>
+          </a:p>
+          <a:p>
+            <a:pPr algn="ctr">
+              <a:spcBef>
+                <a:spcPts val="200"/>
+              </a:spcBef>
+            </a:pPr>
+            <a:r>
+              <a:rPr sz="1200" b="0">
+                <a:solidFill>
+                  <a:srgbClr val="FFFFFF"/>
+                </a:solidFill>
+                <a:latin typeface="맑은 고딕"/>
+              </a:rPr>
+              <a:t>  x_i ∈ {0, 1}</a:t>
+            </a:r>
+          </a:p>
+        </p:txBody>
+      </p:sp>
+      <p:sp>
+        <p:nvSpPr>
+          <p:cNvPr id="6" name="TextBox 5"/>
+          <p:cNvSpPr txBox="1"/>
+          <p:nvPr/>
+        </p:nvSpPr>
+        <p:spPr>
+          <a:xfrm>
+            <a:off x="685800" y="3657600"/>
+            <a:ext cx="6858000" cy="2286000"/>
+          </a:xfrm>
+          <a:prstGeom prst="rect">
+            <a:avLst/>
+          </a:prstGeom>
+          <a:noFill/>
+        </p:spPr>
+        <p:txBody>
+          <a:bodyPr wrap="square">
+            <a:spAutoFit/>
+          </a:bodyPr>
+          <a:lstStyle/>
+          <a:p>
+            <a:pPr>
+              <a:spcAft>
+                <a:spcPts val="500"/>
+              </a:spcAft>
+            </a:pPr>
+            <a:r>
+              <a:rPr sz="1300" b="0">
+                <a:solidFill>
+                  <a:srgbClr val="212121"/>
+                </a:solidFill>
+                <a:latin typeface="맑은 고딕"/>
+              </a:rPr>
+              <a:t>• PuLP 정수 선형계획법 (CBC 솔버)</a:t>
+            </a:r>
+          </a:p>
+          <a:p>
+            <a:pPr>
+              <a:spcAft>
+                <a:spcPts val="500"/>
+              </a:spcAft>
+            </a:pPr>
+            <a:r>
+              <a:rPr sz="1300" b="0">
+                <a:solidFill>
+                  <a:srgbClr val="212121"/>
+                </a:solidFill>
+                <a:latin typeface="맑은 고딕"/>
+              </a:rPr>
+              <a:t>• 후보 풀: 필터 통과 격자 score 상위 50개</a:t>
+            </a:r>
+          </a:p>
+          <a:p>
+            <a:pPr>
+              <a:spcAft>
+                <a:spcPts val="500"/>
+              </a:spcAft>
+            </a:pPr>
+            <a:r>
+              <a:rPr sz="1300" b="0">
+                <a:solidFill>
+                  <a:srgbClr val="212121"/>
+                </a:solidFill>
+                <a:latin typeface="맑은 고딕"/>
+              </a:rPr>
+              <a:t>• 예산: 4,000만원 / 그늘막 단가: 800만원 → 최대 5개</a:t>
+            </a:r>
+          </a:p>
+          <a:p>
+            <a:pPr>
+              <a:spcAft>
+                <a:spcPts val="500"/>
+              </a:spcAft>
+            </a:pPr>
+            <a:r>
+              <a:rPr sz="1300" b="0">
+                <a:solidFill>
+                  <a:srgbClr val="212121"/>
+                </a:solidFill>
+                <a:latin typeface="맑은 고딕"/>
+              </a:rPr>
+              <a:t>• 공간 분산 제약: 선정 격자 간 ≥ 200m 이격 (29쌍 제약)</a:t>
+            </a:r>
+          </a:p>
+          <a:p>
+            <a:pPr>
+              <a:spcAft>
+                <a:spcPts val="500"/>
+              </a:spcAft>
+            </a:pPr>
+            <a:r>
+              <a:rPr sz="1300" b="0">
+                <a:solidFill>
+                  <a:srgbClr val="212121"/>
+                </a:solidFill>
+                <a:latin typeface="맑은 고딕"/>
+              </a:rPr>
+              <a:t>• 결과: status=Optimal, 5개 선정, 총 score 1.852, 예산 100% 사용</a:t>
+            </a:r>
+          </a:p>
+        </p:txBody>
+      </p:sp>
+      <p:sp>
+        <p:nvSpPr>
+          <p:cNvPr id="7" name="Rounded Rectangle 6"/>
+          <p:cNvSpPr/>
+          <p:nvPr/>
+        </p:nvSpPr>
+        <p:spPr>
+          <a:xfrm>
+            <a:off x="7772400" y="1645920"/>
+            <a:ext cx="4023360" cy="4114800"/>
+          </a:xfrm>
+          <a:prstGeom prst="roundRect">
+            <a:avLst/>
+          </a:prstGeom>
+          <a:solidFill>
+            <a:srgbClr val="FFF4E5"/>
+          </a:solidFill>
+          <a:ln w="25400">
+            <a:solidFill>
+              <a:srgbClr val="E53935"/>
+            </a:solidFill>
+          </a:ln>
+        </p:spPr>
+        <p:style>
+          <a:lnRef idx="1">
+            <a:schemeClr val="accent1"/>
+          </a:lnRef>
+          <a:fillRef idx="3">
+            <a:schemeClr val="accent1"/>
+          </a:fillRef>
+          <a:effectRef idx="2">
+            <a:schemeClr val="accent1"/>
+          </a:effectRef>
+          <a:fontRef idx="minor">
+            <a:schemeClr val="lt1"/>
+          </a:fontRef>
+        </p:style>
+        <p:txBody>
+          <a:bodyPr rtlCol="0" anchor="ctr" wrap="square" lIns="182880" tIns="182880"/>
+          <a:lstStyle/>
+          <a:p>
+            <a:pPr algn="ctr"/>
+            <a:r>
+              <a:rPr sz="1300" b="1">
+                <a:solidFill>
+                  <a:srgbClr val="E53935"/>
+                </a:solidFill>
+                <a:latin typeface="맑은 고딕"/>
+              </a:rPr>
+              <a:t>🎯 선정 5곳 (분산 균형)</a:t>
+            </a:r>
+          </a:p>
+          <a:p>
+            <a:pPr>
+              <a:spcBef>
+                <a:spcPts val="100"/>
+              </a:spcBef>
+            </a:pPr>
+            <a:r>
+              <a:rPr sz="1100" b="0">
+                <a:solidFill>
+                  <a:srgbClr val="212121"/>
+                </a:solidFill>
+                <a:latin typeface="맑은 고딕"/>
+              </a:rPr>
+              <a:t/>
+            </a:r>
+          </a:p>
+          <a:p>
+            <a:pPr>
+              <a:spcBef>
+                <a:spcPts val="100"/>
+              </a:spcBef>
+            </a:pPr>
+            <a:r>
+              <a:rPr sz="1100" b="0">
+                <a:solidFill>
+                  <a:srgbClr val="212121"/>
+                </a:solidFill>
+                <a:latin typeface="맑은 고딕"/>
+              </a:rPr>
+              <a:t>#1 (37.490, 126.964) s=0.466</a:t>
+            </a:r>
+          </a:p>
+          <a:p>
+            <a:pPr>
+              <a:spcBef>
+                <a:spcPts val="100"/>
+              </a:spcBef>
+            </a:pPr>
+            <a:r>
+              <a:rPr sz="1100" b="0">
+                <a:solidFill>
+                  <a:srgbClr val="212121"/>
+                </a:solidFill>
+                <a:latin typeface="맑은 고딕"/>
+              </a:rPr>
+              <a:t>    이수역 인근</a:t>
+            </a:r>
+          </a:p>
+          <a:p>
+            <a:pPr>
+              <a:spcBef>
+                <a:spcPts val="100"/>
+              </a:spcBef>
+            </a:pPr>
+            <a:r>
+              <a:rPr sz="1100" b="0">
+                <a:solidFill>
+                  <a:srgbClr val="212121"/>
+                </a:solidFill>
+                <a:latin typeface="맑은 고딕"/>
+              </a:rPr>
+              <a:t>#2 (37.493, 126.962) s=0.363</a:t>
+            </a:r>
+          </a:p>
+          <a:p>
+            <a:pPr>
+              <a:spcBef>
+                <a:spcPts val="100"/>
+              </a:spcBef>
+            </a:pPr>
+            <a:r>
+              <a:rPr sz="1100" b="0">
+                <a:solidFill>
+                  <a:srgbClr val="212121"/>
+                </a:solidFill>
+                <a:latin typeface="맑은 고딕"/>
+              </a:rPr>
+              <a:t>    이수 북쪽</a:t>
+            </a:r>
+          </a:p>
+          <a:p>
+            <a:pPr>
+              <a:spcBef>
+                <a:spcPts val="100"/>
+              </a:spcBef>
+            </a:pPr>
+            <a:r>
+              <a:rPr sz="1100" b="0">
+                <a:solidFill>
+                  <a:srgbClr val="212121"/>
+                </a:solidFill>
+                <a:latin typeface="맑은 고딕"/>
+              </a:rPr>
+              <a:t>#3 (37.491, 126.968) s=0.359</a:t>
+            </a:r>
+          </a:p>
+          <a:p>
+            <a:pPr>
+              <a:spcBef>
+                <a:spcPts val="100"/>
+              </a:spcBef>
+            </a:pPr>
+            <a:r>
+              <a:rPr sz="1100" b="0">
+                <a:solidFill>
+                  <a:srgbClr val="212121"/>
+                </a:solidFill>
+                <a:latin typeface="맑은 고딕"/>
+              </a:rPr>
+              <a:t>    사당역 동쪽</a:t>
+            </a:r>
+          </a:p>
+          <a:p>
+            <a:pPr>
+              <a:spcBef>
+                <a:spcPts val="100"/>
+              </a:spcBef>
+            </a:pPr>
+            <a:r>
+              <a:rPr sz="1100" b="0">
+                <a:solidFill>
+                  <a:srgbClr val="212121"/>
+                </a:solidFill>
+                <a:latin typeface="맑은 고딕"/>
+              </a:rPr>
+              <a:t>#4 (37.486, 126.967) s=0.333</a:t>
+            </a:r>
+          </a:p>
+          <a:p>
+            <a:pPr>
+              <a:spcBef>
+                <a:spcPts val="100"/>
+              </a:spcBef>
+            </a:pPr>
+            <a:r>
+              <a:rPr sz="1100" b="0">
+                <a:solidFill>
+                  <a:srgbClr val="212121"/>
+                </a:solidFill>
+                <a:latin typeface="맑은 고딕"/>
+              </a:rPr>
+              <a:t>    사당역 남쪽</a:t>
+            </a:r>
+          </a:p>
+          <a:p>
+            <a:pPr>
+              <a:spcBef>
+                <a:spcPts val="100"/>
+              </a:spcBef>
+            </a:pPr>
+            <a:r>
+              <a:rPr sz="1100" b="0">
+                <a:solidFill>
+                  <a:srgbClr val="212121"/>
+                </a:solidFill>
+                <a:latin typeface="맑은 고딕"/>
+              </a:rPr>
+              <a:t>#5 (37.513, 126.944) s=0.331</a:t>
+            </a:r>
+          </a:p>
+          <a:p>
+            <a:pPr>
+              <a:spcBef>
+                <a:spcPts val="100"/>
+              </a:spcBef>
+            </a:pPr>
+            <a:r>
+              <a:rPr sz="1100" b="0">
+                <a:solidFill>
+                  <a:srgbClr val="212121"/>
+                </a:solidFill>
+                <a:latin typeface="맑은 고딕"/>
+              </a:rPr>
+              <a:t>    노량진역 인근</a:t>
+            </a:r>
+          </a:p>
+        </p:txBody>
+      </p:sp>
+      <p:sp>
+        <p:nvSpPr>
+          <p:cNvPr id="8" name="TextBox 7"/>
+          <p:cNvSpPr txBox="1"/>
+          <p:nvPr/>
+        </p:nvSpPr>
+        <p:spPr>
+          <a:xfrm>
+            <a:off x="457200" y="6400800"/>
+            <a:ext cx="9144000" cy="365760"/>
+          </a:xfrm>
+          <a:prstGeom prst="rect">
+            <a:avLst/>
+          </a:prstGeom>
+          <a:noFill/>
+        </p:spPr>
+        <p:txBody>
+          <a:bodyPr wrap="square">
+            <a:spAutoFit/>
+          </a:bodyPr>
+          <a:lstStyle/>
+          <a:p>
+            <a:pPr algn="l"/>
+            <a:r>
+              <a:rPr sz="1000" b="0">
+                <a:solidFill>
+                  <a:srgbClr val="555555"/>
+                </a:solidFill>
+                <a:latin typeface="맑은 고딕"/>
+              </a:rPr>
+              <a:t>동작구 여름 그늘막 최적 입지 추천 시스템 · 한영재 · 2025961227</a:t>
+            </a:r>
+          </a:p>
+        </p:txBody>
+      </p:sp>
+      <p:sp>
+        <p:nvSpPr>
+          <p:cNvPr id="9" name="TextBox 8"/>
+          <p:cNvSpPr txBox="1"/>
+          <p:nvPr/>
+        </p:nvSpPr>
+        <p:spPr>
+          <a:xfrm>
+            <a:off x="11247120" y="6400800"/>
+            <a:ext cx="914400" cy="365760"/>
+          </a:xfrm>
+          <a:prstGeom prst="rect">
+            <a:avLst/>
+          </a:prstGeom>
+          <a:noFill/>
+        </p:spPr>
+        <p:txBody>
+          <a:bodyPr wrap="square">
+            <a:spAutoFit/>
+          </a:bodyPr>
+          <a:lstStyle/>
+          <a:p>
+            <a:pPr algn="r"/>
+            <a:r>
+              <a:rPr sz="1000" b="0">
+                <a:solidFill>
+                  <a:srgbClr val="555555"/>
+                </a:solidFill>
+                <a:latin typeface="맑은 고딕"/>
+              </a:rPr>
+              <a:t>14 / 16</a:t>
+            </a:r>
+          </a:p>
+        </p:txBody>
+      </p:sp>
+    </p:spTree>
+  </p:cSld>
+  <p:clrMapOvr>
+    <a:masterClrMapping/>
+  </p:clrMapOvr>
+</p:sld>
+</file>
+
+<file path=ppt/slides/slide15.xml><?xml version="1.0" encoding="utf-8"?>
 <p:sld xmlns:a="http://schemas.openxmlformats.org/drawingml/2006/main" xmlns:p="http://schemas.openxmlformats.org/presentationml/2006/main" xmlns:r="http://schemas.openxmlformats.org/officeDocument/2006/relationships">
   <p:cSld>
     <p:spTree>
@@ -9027,7 +9794,7 @@
                 </a:solidFill>
                 <a:latin typeface="맑은 고딕"/>
               </a:rPr>
-              <a:t>14 / 15</a:t>
+              <a:t>15 / 16</a:t>
             </a:r>
           </a:p>
         </p:txBody>
@@ -9040,7 +9807,7 @@
 </p:sld>
 </file>
 
-<file path=ppt/slides/slide15.xml><?xml version="1.0" encoding="utf-8"?>
+<file path=ppt/slides/slide16.xml><?xml version="1.0" encoding="utf-8"?>
 <p:sld xmlns:a="http://schemas.openxmlformats.org/drawingml/2006/main" xmlns:p="http://schemas.openxmlformats.org/presentationml/2006/main" xmlns:r="http://schemas.openxmlformats.org/officeDocument/2006/relationships">
   <p:cSld>
     <p:spTree>
@@ -9245,7 +10012,7 @@
                 </a:solidFill>
                 <a:latin typeface="맑은 고딕"/>
               </a:rPr>
-              <a:t>• 예산 제약 미반영 (K개 최적 조합 = 배낭 문제)</a:t>
+              <a:t>• 예산·단가는 더미 800만원/개 (실 단가 확보 시 교체)</a:t>
             </a:r>
           </a:p>
         </p:txBody>
@@ -9451,7 +10218,7 @@
                 </a:solidFill>
                 <a:latin typeface="맑은 고딕"/>
               </a:rPr>
-              <a:t>SAM + SegFormer + Deep Umbra(DSM) + OSMnx + NGII + 실측 그늘막 + MCDA</a:t>
+              <a:t>SAM + SegFormer + Deep Umbra(DSM) + OSMnx + NGII + 실측 그늘막 + MCDA + Knapsack</a:t>
             </a:r>
           </a:p>
         </p:txBody>
@@ -9521,7 +10288,7 @@
                 </a:solidFill>
                 <a:latin typeface="맑은 고딕"/>
               </a:rPr>
-              <a:t>15 / 15</a:t>
+              <a:t>16 / 16</a:t>
             </a:r>
           </a:p>
         </p:txBody>
@@ -9777,7 +10544,7 @@
                 </a:solidFill>
                 <a:latin typeface="맑은 고딕"/>
               </a:rPr>
-              <a:t>채권 트레이더 관점의 다변수 최적화</a:t>
+              <a:t>다기준 의사결정 (MCDA) 기반 입지 추천</a:t>
             </a:r>
           </a:p>
           <a:p>
@@ -9793,7 +10560,7 @@
                 </a:solidFill>
                 <a:latin typeface="맑은 고딕"/>
               </a:rPr>
-              <a:t>• 피처 = 채권의 수익률 곡선 요인 · 격자 = 포트폴리오 후보</a:t>
+              <a:t>• 다변수 가중합 + Min-Max 정규화로 객관적 점수 산출</a:t>
             </a:r>
           </a:p>
           <a:p>
@@ -9809,7 +10576,7 @@
                 </a:solidFill>
                 <a:latin typeface="맑은 고딕"/>
               </a:rPr>
-              <a:t>• 가중합 + 공간 제약(보행로·건물·교차로·기존그늘막) = 리스크 예산 내 최적 포지션</a:t>
+              <a:t>• 공간 제약 4단계 (보행로·건물·교차로·기존그늘막)로 실제 설치 가능 위치만</a:t>
             </a:r>
           </a:p>
           <a:p>
@@ -9825,7 +10592,7 @@
                 </a:solidFill>
                 <a:latin typeface="맑은 고딕"/>
               </a:rPr>
-              <a:t>• 시나리오 민감도 6종 = 금리 스트레스 테스트와 동형(同形)</a:t>
+              <a:t>• 6 시나리오 민감도 분석 → 정책 관점 불변 강건 입지 식별</a:t>
             </a:r>
           </a:p>
           <a:p>
@@ -9911,7 +10678,7 @@
                 </a:solidFill>
                 <a:latin typeface="맑은 고딕"/>
               </a:rPr>
-              <a:t>2 / 15</a:t>
+              <a:t>2 / 16</a:t>
             </a:r>
           </a:p>
         </p:txBody>
@@ -10845,7 +11612,7 @@
                 </a:solidFill>
                 <a:latin typeface="맑은 고딕"/>
               </a:rPr>
-              <a:t>3 / 15</a:t>
+              <a:t>3 / 16</a:t>
             </a:r>
           </a:p>
         </p:txBody>
@@ -11905,7 +12672,7 @@
                 </a:solidFill>
                 <a:latin typeface="맑은 고딕"/>
               </a:rPr>
-              <a:t>4 / 15</a:t>
+              <a:t>4 / 16</a:t>
             </a:r>
           </a:p>
         </p:txBody>
@@ -12340,7 +13107,7 @@
                 </a:solidFill>
                 <a:latin typeface="맑은 고딕"/>
               </a:rPr>
-              <a:t>5 / 15</a:t>
+              <a:t>5 / 16</a:t>
             </a:r>
           </a:p>
         </p:txBody>
@@ -12989,7 +13756,7 @@
                 </a:solidFill>
                 <a:latin typeface="맑은 고딕"/>
               </a:rPr>
-              <a:t>6 / 15</a:t>
+              <a:t>6 / 16</a:t>
             </a:r>
           </a:p>
         </p:txBody>
@@ -13475,7 +14242,7 @@
                 </a:solidFill>
                 <a:latin typeface="맑은 고딕"/>
               </a:rPr>
-              <a:t>7 / 15</a:t>
+              <a:t>7 / 16</a:t>
             </a:r>
           </a:p>
         </p:txBody>
@@ -13957,7 +14724,7 @@
                 </a:solidFill>
                 <a:latin typeface="맑은 고딕"/>
               </a:rPr>
-              <a:t>8 / 15</a:t>
+              <a:t>8 / 16</a:t>
             </a:r>
           </a:p>
         </p:txBody>
@@ -14507,7 +15274,7 @@
                 </a:solidFill>
                 <a:latin typeface="맑은 고딕"/>
               </a:rPr>
-              <a:t>9 / 15</a:t>
+              <a:t>9 / 16</a:t>
             </a:r>
           </a:p>
         </p:txBody>
